--- a/powerpoint-to-submit/ecse-428-assignment-a.pptx
+++ b/powerpoint-to-submit/ecse-428-assignment-a.pptx
@@ -16,7 +16,16 @@
     <p:sldId id="264" r:id="rId13"/>
     <p:sldId id="265" r:id="rId14"/>
     <p:sldId id="266" r:id="rId15"/>
-    <p:sldId id="267" r:id="rId16"/>
+    <p:sldId id="269" r:id="rId16"/>
+    <p:sldId id="268" r:id="rId17"/>
+    <p:sldId id="270" r:id="rId18"/>
+    <p:sldId id="271" r:id="rId19"/>
+    <p:sldId id="272" r:id="rId20"/>
+    <p:sldId id="273" r:id="rId21"/>
+    <p:sldId id="274" r:id="rId22"/>
+    <p:sldId id="275" r:id="rId23"/>
+    <p:sldId id="276" r:id="rId24"/>
+    <p:sldId id="277" r:id="rId25"/>
   </p:sldIdLst>
   <p:sldSz cx="12192000" cy="6858000"/>
   <p:notesSz cx="6858000" cy="9144000"/>
@@ -123,6 +132,14 @@
 </p:presentation>
 </file>
 
+<file path=ppt/revisionInfo.xml><?xml version="1.0" encoding="utf-8"?>
+<p1510:revInfo xmlns:a="http://schemas.openxmlformats.org/drawingml/2006/main" xmlns:r="http://schemas.openxmlformats.org/officeDocument/2006/relationships" xmlns:p1510="http://schemas.microsoft.com/office/powerpoint/2015/10/main">
+  <p1510:revLst>
+    <p1510:client id="{D4533EB4-A806-1456-03DE-771060C51E2F}" v="347" dt="2026-10-27T14:57:55.812"/>
+  </p1510:revLst>
+</p1510:revInfo>
+</file>
+
 <file path=ppt/slideLayouts/slideLayout1.xml><?xml version="1.0" encoding="utf-8"?>
 <p:sldLayout xmlns:a="http://schemas.openxmlformats.org/drawingml/2006/main" xmlns:r="http://schemas.openxmlformats.org/officeDocument/2006/relationships" xmlns:p="http://schemas.openxmlformats.org/presentationml/2006/main" type="title" preserve="1">
   <p:cSld name="Title Slide">
@@ -270,7 +287,7 @@
           <a:p>
             <a:fld id="{3205666C-A325-40C2-881D-0CE85FDC5A77}" type="datetimeFigureOut">
               <a:rPr lang="en-US" smtClean="0"/>
-              <a:t>10/11/2026</a:t>
+              <a:t>10/27/2026</a:t>
             </a:fld>
             <a:endParaRPr lang="en-US"/>
           </a:p>
@@ -468,7 +485,7 @@
           <a:p>
             <a:fld id="{3205666C-A325-40C2-881D-0CE85FDC5A77}" type="datetimeFigureOut">
               <a:rPr lang="en-US" smtClean="0"/>
-              <a:t>10/11/2026</a:t>
+              <a:t>10/27/2026</a:t>
             </a:fld>
             <a:endParaRPr lang="en-US"/>
           </a:p>
@@ -676,7 +693,7 @@
           <a:p>
             <a:fld id="{3205666C-A325-40C2-881D-0CE85FDC5A77}" type="datetimeFigureOut">
               <a:rPr lang="en-US" smtClean="0"/>
-              <a:t>10/11/2026</a:t>
+              <a:t>10/27/2026</a:t>
             </a:fld>
             <a:endParaRPr lang="en-US"/>
           </a:p>
@@ -874,7 +891,7 @@
           <a:p>
             <a:fld id="{3205666C-A325-40C2-881D-0CE85FDC5A77}" type="datetimeFigureOut">
               <a:rPr lang="en-US" smtClean="0"/>
-              <a:t>10/11/2026</a:t>
+              <a:t>10/27/2026</a:t>
             </a:fld>
             <a:endParaRPr lang="en-US"/>
           </a:p>
@@ -1149,7 +1166,7 @@
           <a:p>
             <a:fld id="{3205666C-A325-40C2-881D-0CE85FDC5A77}" type="datetimeFigureOut">
               <a:rPr lang="en-US" smtClean="0"/>
-              <a:t>10/11/2026</a:t>
+              <a:t>10/27/2026</a:t>
             </a:fld>
             <a:endParaRPr lang="en-US"/>
           </a:p>
@@ -1414,7 +1431,7 @@
           <a:p>
             <a:fld id="{3205666C-A325-40C2-881D-0CE85FDC5A77}" type="datetimeFigureOut">
               <a:rPr lang="en-US" smtClean="0"/>
-              <a:t>10/11/2026</a:t>
+              <a:t>10/27/2026</a:t>
             </a:fld>
             <a:endParaRPr lang="en-US"/>
           </a:p>
@@ -1826,7 +1843,7 @@
           <a:p>
             <a:fld id="{3205666C-A325-40C2-881D-0CE85FDC5A77}" type="datetimeFigureOut">
               <a:rPr lang="en-US" smtClean="0"/>
-              <a:t>10/11/2026</a:t>
+              <a:t>10/27/2026</a:t>
             </a:fld>
             <a:endParaRPr lang="en-US"/>
           </a:p>
@@ -1967,7 +1984,7 @@
           <a:p>
             <a:fld id="{3205666C-A325-40C2-881D-0CE85FDC5A77}" type="datetimeFigureOut">
               <a:rPr lang="en-US" smtClean="0"/>
-              <a:t>10/11/2026</a:t>
+              <a:t>10/27/2026</a:t>
             </a:fld>
             <a:endParaRPr lang="en-US"/>
           </a:p>
@@ -2080,7 +2097,7 @@
           <a:p>
             <a:fld id="{3205666C-A325-40C2-881D-0CE85FDC5A77}" type="datetimeFigureOut">
               <a:rPr lang="en-US" smtClean="0"/>
-              <a:t>10/11/2026</a:t>
+              <a:t>10/27/2026</a:t>
             </a:fld>
             <a:endParaRPr lang="en-US"/>
           </a:p>
@@ -2391,7 +2408,7 @@
           <a:p>
             <a:fld id="{3205666C-A325-40C2-881D-0CE85FDC5A77}" type="datetimeFigureOut">
               <a:rPr lang="en-US" smtClean="0"/>
-              <a:t>10/11/2026</a:t>
+              <a:t>10/27/2026</a:t>
             </a:fld>
             <a:endParaRPr lang="en-US"/>
           </a:p>
@@ -2679,7 +2696,7 @@
           <a:p>
             <a:fld id="{3205666C-A325-40C2-881D-0CE85FDC5A77}" type="datetimeFigureOut">
               <a:rPr lang="en-US" smtClean="0"/>
-              <a:t>10/11/2026</a:t>
+              <a:t>10/27/2026</a:t>
             </a:fld>
             <a:endParaRPr lang="en-US"/>
           </a:p>
@@ -2920,7 +2937,7 @@
           <a:p>
             <a:fld id="{3205666C-A325-40C2-881D-0CE85FDC5A77}" type="datetimeFigureOut">
               <a:rPr lang="en-US" smtClean="0"/>
-              <a:t>10/11/2026</a:t>
+              <a:t>10/27/2026</a:t>
             </a:fld>
             <a:endParaRPr lang="en-US"/>
           </a:p>
@@ -5551,7 +5568,13 @@
   <p:cSld>
     <p:spTree>
       <p:nvGrpSpPr>
-        <p:cNvPr id="1" name=""/>
+        <p:cNvPr id="1" name="">
+          <a:extLst>
+            <a:ext uri="{FF2B5EF4-FFF2-40B4-BE49-F238E27FC236}">
+              <a16:creationId xmlns:a16="http://schemas.microsoft.com/office/drawing/2014/main" id="{1122B46A-528A-94CC-30A6-5CB958B6C0FB}"/>
+            </a:ext>
+          </a:extLst>
+        </p:cNvPr>
         <p:cNvGrpSpPr/>
         <p:nvPr/>
       </p:nvGrpSpPr>
@@ -5568,7 +5591,7 @@
           <p:cNvPr id="2" name="Title 1">
             <a:extLst>
               <a:ext uri="{FF2B5EF4-FFF2-40B4-BE49-F238E27FC236}">
-                <a16:creationId xmlns:a16="http://schemas.microsoft.com/office/drawing/2014/main" id="{AD818765-7B02-E3E9-FE46-6E48DE614ECB}"/>
+                <a16:creationId xmlns:a16="http://schemas.microsoft.com/office/drawing/2014/main" id="{2E7383C1-577F-FB20-75A7-7299E3992B1A}"/>
               </a:ext>
             </a:extLst>
           </p:cNvPr>
@@ -5581,12 +5604,1129 @@
         </p:nvSpPr>
         <p:spPr/>
         <p:txBody>
-          <a:bodyPr/>
+          <a:bodyPr>
+            <a:normAutofit/>
+          </a:bodyPr>
           <a:lstStyle/>
           <a:p>
             <a:r>
-              <a:rPr lang="en-US" dirty="0"/>
-              <a:t>TODO: Mahad rest of tests in doc </a:t>
+              <a:rPr lang="en-US" sz="1600"/>
+              <a:t>Test ID: T-PUSH-CPLX1</a:t>
+            </a:r>
+            <a:br>
+              <a:rPr lang="en-US" sz="1600" dirty="0"/>
+            </a:br>
+            <a:r>
+              <a:rPr lang="en-US" sz="1600"/>
+              <a:t>Statement of unit test: Verify that pushing a compact complex number onto the stack and popping it returns the formatted complex number.</a:t>
+            </a:r>
+            <a:br>
+              <a:rPr lang="en-US" sz="1600" dirty="0"/>
+            </a:br>
+            <a:r>
+              <a:rPr lang="en-US" sz="1600"/>
+              <a:t>Expected results: -2.5 - j0.25</a:t>
+            </a:r>
+            <a:endParaRPr lang="en-US" sz="1600" dirty="0"/>
+          </a:p>
+        </p:txBody>
+      </p:sp>
+      <p:sp>
+        <p:nvSpPr>
+          <p:cNvPr id="3" name="Content Placeholder 2">
+            <a:extLst>
+              <a:ext uri="{FF2B5EF4-FFF2-40B4-BE49-F238E27FC236}">
+                <a16:creationId xmlns:a16="http://schemas.microsoft.com/office/drawing/2014/main" id="{8A22B762-376F-F12A-FB73-00EDFB0AD598}"/>
+              </a:ext>
+            </a:extLst>
+          </p:cNvPr>
+          <p:cNvSpPr>
+            <a:spLocks noGrp="1"/>
+          </p:cNvSpPr>
+          <p:nvPr>
+            <p:ph idx="1"/>
+          </p:nvPr>
+        </p:nvSpPr>
+        <p:spPr>
+          <a:xfrm>
+            <a:off x="838200" y="1825625"/>
+            <a:ext cx="2841346" cy="4351338"/>
+          </a:xfrm>
+        </p:spPr>
+        <p:txBody>
+          <a:bodyPr>
+            <a:normAutofit/>
+          </a:bodyPr>
+          <a:lstStyle/>
+          <a:p>
+            <a:r>
+              <a:rPr lang="en-US" sz="1100" dirty="0"/>
+              <a:t>Screen capture of unit test code:</a:t>
+            </a:r>
+          </a:p>
+        </p:txBody>
+      </p:sp>
+      <p:sp>
+        <p:nvSpPr>
+          <p:cNvPr id="4" name="Content Placeholder 2">
+            <a:extLst>
+              <a:ext uri="{FF2B5EF4-FFF2-40B4-BE49-F238E27FC236}">
+                <a16:creationId xmlns:a16="http://schemas.microsoft.com/office/drawing/2014/main" id="{A1F53BB1-D709-A213-F313-2F8140460691}"/>
+              </a:ext>
+            </a:extLst>
+          </p:cNvPr>
+          <p:cNvSpPr txBox="1">
+            <a:spLocks/>
+          </p:cNvSpPr>
+          <p:nvPr/>
+        </p:nvSpPr>
+        <p:spPr>
+          <a:xfrm>
+            <a:off x="4993579" y="1825625"/>
+            <a:ext cx="2841346" cy="4351338"/>
+          </a:xfrm>
+          <a:prstGeom prst="rect">
+            <a:avLst/>
+          </a:prstGeom>
+        </p:spPr>
+        <p:txBody>
+          <a:bodyPr vert="horz" lIns="91440" tIns="45720" rIns="91440" bIns="45720" rtlCol="0">
+            <a:normAutofit/>
+          </a:bodyPr>
+          <a:lstStyle>
+            <a:lvl1pPr marL="228600" indent="-228600" algn="l" defTabSz="914400" rtl="0" eaLnBrk="1" latinLnBrk="0" hangingPunct="1">
+              <a:lnSpc>
+                <a:spcPct val="90000"/>
+              </a:lnSpc>
+              <a:spcBef>
+                <a:spcPts val="1000"/>
+              </a:spcBef>
+              <a:buFont typeface="Arial" panose="020B0604020202020204" pitchFamily="34" charset="0"/>
+              <a:buChar char="•"/>
+              <a:defRPr sz="2800" kern="1200">
+                <a:solidFill>
+                  <a:schemeClr val="tx1"/>
+                </a:solidFill>
+                <a:latin typeface="+mn-lt"/>
+                <a:ea typeface="+mn-ea"/>
+                <a:cs typeface="+mn-cs"/>
+              </a:defRPr>
+            </a:lvl1pPr>
+            <a:lvl2pPr marL="685800" indent="-228600" algn="l" defTabSz="914400" rtl="0" eaLnBrk="1" latinLnBrk="0" hangingPunct="1">
+              <a:lnSpc>
+                <a:spcPct val="90000"/>
+              </a:lnSpc>
+              <a:spcBef>
+                <a:spcPts val="500"/>
+              </a:spcBef>
+              <a:buFont typeface="Arial" panose="020B0604020202020204" pitchFamily="34" charset="0"/>
+              <a:buChar char="•"/>
+              <a:defRPr sz="2400" kern="1200">
+                <a:solidFill>
+                  <a:schemeClr val="tx1"/>
+                </a:solidFill>
+                <a:latin typeface="+mn-lt"/>
+                <a:ea typeface="+mn-ea"/>
+                <a:cs typeface="+mn-cs"/>
+              </a:defRPr>
+            </a:lvl2pPr>
+            <a:lvl3pPr marL="1143000" indent="-228600" algn="l" defTabSz="914400" rtl="0" eaLnBrk="1" latinLnBrk="0" hangingPunct="1">
+              <a:lnSpc>
+                <a:spcPct val="90000"/>
+              </a:lnSpc>
+              <a:spcBef>
+                <a:spcPts val="500"/>
+              </a:spcBef>
+              <a:buFont typeface="Arial" panose="020B0604020202020204" pitchFamily="34" charset="0"/>
+              <a:buChar char="•"/>
+              <a:defRPr sz="2000" kern="1200">
+                <a:solidFill>
+                  <a:schemeClr val="tx1"/>
+                </a:solidFill>
+                <a:latin typeface="+mn-lt"/>
+                <a:ea typeface="+mn-ea"/>
+                <a:cs typeface="+mn-cs"/>
+              </a:defRPr>
+            </a:lvl3pPr>
+            <a:lvl4pPr marL="1600200" indent="-228600" algn="l" defTabSz="914400" rtl="0" eaLnBrk="1" latinLnBrk="0" hangingPunct="1">
+              <a:lnSpc>
+                <a:spcPct val="90000"/>
+              </a:lnSpc>
+              <a:spcBef>
+                <a:spcPts val="500"/>
+              </a:spcBef>
+              <a:buFont typeface="Arial" panose="020B0604020202020204" pitchFamily="34" charset="0"/>
+              <a:buChar char="•"/>
+              <a:defRPr sz="1800" kern="1200">
+                <a:solidFill>
+                  <a:schemeClr val="tx1"/>
+                </a:solidFill>
+                <a:latin typeface="+mn-lt"/>
+                <a:ea typeface="+mn-ea"/>
+                <a:cs typeface="+mn-cs"/>
+              </a:defRPr>
+            </a:lvl4pPr>
+            <a:lvl5pPr marL="2057400" indent="-228600" algn="l" defTabSz="914400" rtl="0" eaLnBrk="1" latinLnBrk="0" hangingPunct="1">
+              <a:lnSpc>
+                <a:spcPct val="90000"/>
+              </a:lnSpc>
+              <a:spcBef>
+                <a:spcPts val="500"/>
+              </a:spcBef>
+              <a:buFont typeface="Arial" panose="020B0604020202020204" pitchFamily="34" charset="0"/>
+              <a:buChar char="•"/>
+              <a:defRPr sz="1800" kern="1200">
+                <a:solidFill>
+                  <a:schemeClr val="tx1"/>
+                </a:solidFill>
+                <a:latin typeface="+mn-lt"/>
+                <a:ea typeface="+mn-ea"/>
+                <a:cs typeface="+mn-cs"/>
+              </a:defRPr>
+            </a:lvl5pPr>
+            <a:lvl6pPr marL="2514600" indent="-228600" algn="l" defTabSz="914400" rtl="0" eaLnBrk="1" latinLnBrk="0" hangingPunct="1">
+              <a:lnSpc>
+                <a:spcPct val="90000"/>
+              </a:lnSpc>
+              <a:spcBef>
+                <a:spcPts val="500"/>
+              </a:spcBef>
+              <a:buFont typeface="Arial" panose="020B0604020202020204" pitchFamily="34" charset="0"/>
+              <a:buChar char="•"/>
+              <a:defRPr sz="1800" kern="1200">
+                <a:solidFill>
+                  <a:schemeClr val="tx1"/>
+                </a:solidFill>
+                <a:latin typeface="+mn-lt"/>
+                <a:ea typeface="+mn-ea"/>
+                <a:cs typeface="+mn-cs"/>
+              </a:defRPr>
+            </a:lvl6pPr>
+            <a:lvl7pPr marL="2971800" indent="-228600" algn="l" defTabSz="914400" rtl="0" eaLnBrk="1" latinLnBrk="0" hangingPunct="1">
+              <a:lnSpc>
+                <a:spcPct val="90000"/>
+              </a:lnSpc>
+              <a:spcBef>
+                <a:spcPts val="500"/>
+              </a:spcBef>
+              <a:buFont typeface="Arial" panose="020B0604020202020204" pitchFamily="34" charset="0"/>
+              <a:buChar char="•"/>
+              <a:defRPr sz="1800" kern="1200">
+                <a:solidFill>
+                  <a:schemeClr val="tx1"/>
+                </a:solidFill>
+                <a:latin typeface="+mn-lt"/>
+                <a:ea typeface="+mn-ea"/>
+                <a:cs typeface="+mn-cs"/>
+              </a:defRPr>
+            </a:lvl7pPr>
+            <a:lvl8pPr marL="3429000" indent="-228600" algn="l" defTabSz="914400" rtl="0" eaLnBrk="1" latinLnBrk="0" hangingPunct="1">
+              <a:lnSpc>
+                <a:spcPct val="90000"/>
+              </a:lnSpc>
+              <a:spcBef>
+                <a:spcPts val="500"/>
+              </a:spcBef>
+              <a:buFont typeface="Arial" panose="020B0604020202020204" pitchFamily="34" charset="0"/>
+              <a:buChar char="•"/>
+              <a:defRPr sz="1800" kern="1200">
+                <a:solidFill>
+                  <a:schemeClr val="tx1"/>
+                </a:solidFill>
+                <a:latin typeface="+mn-lt"/>
+                <a:ea typeface="+mn-ea"/>
+                <a:cs typeface="+mn-cs"/>
+              </a:defRPr>
+            </a:lvl8pPr>
+            <a:lvl9pPr marL="3886200" indent="-228600" algn="l" defTabSz="914400" rtl="0" eaLnBrk="1" latinLnBrk="0" hangingPunct="1">
+              <a:lnSpc>
+                <a:spcPct val="90000"/>
+              </a:lnSpc>
+              <a:spcBef>
+                <a:spcPts val="500"/>
+              </a:spcBef>
+              <a:buFont typeface="Arial" panose="020B0604020202020204" pitchFamily="34" charset="0"/>
+              <a:buChar char="•"/>
+              <a:defRPr sz="1800" kern="1200">
+                <a:solidFill>
+                  <a:schemeClr val="tx1"/>
+                </a:solidFill>
+                <a:latin typeface="+mn-lt"/>
+                <a:ea typeface="+mn-ea"/>
+                <a:cs typeface="+mn-cs"/>
+              </a:defRPr>
+            </a:lvl9pPr>
+          </a:lstStyle>
+          <a:p>
+            <a:r>
+              <a:rPr lang="en-US" sz="1100" dirty="0"/>
+              <a:t>Screen capture demonstrating unit test failing:</a:t>
+            </a:r>
+          </a:p>
+        </p:txBody>
+      </p:sp>
+      <p:sp>
+        <p:nvSpPr>
+          <p:cNvPr id="7" name="Content Placeholder 2">
+            <a:extLst>
+              <a:ext uri="{FF2B5EF4-FFF2-40B4-BE49-F238E27FC236}">
+                <a16:creationId xmlns:a16="http://schemas.microsoft.com/office/drawing/2014/main" id="{B66B2926-BD97-115E-5947-86E8F7046364}"/>
+              </a:ext>
+            </a:extLst>
+          </p:cNvPr>
+          <p:cNvSpPr txBox="1">
+            <a:spLocks/>
+          </p:cNvSpPr>
+          <p:nvPr/>
+        </p:nvSpPr>
+        <p:spPr>
+          <a:xfrm>
+            <a:off x="8874296" y="1825625"/>
+            <a:ext cx="2841346" cy="4351338"/>
+          </a:xfrm>
+          <a:prstGeom prst="rect">
+            <a:avLst/>
+          </a:prstGeom>
+        </p:spPr>
+        <p:txBody>
+          <a:bodyPr vert="horz" lIns="91440" tIns="45720" rIns="91440" bIns="45720" rtlCol="0">
+            <a:normAutofit/>
+          </a:bodyPr>
+          <a:lstStyle>
+            <a:lvl1pPr marL="228600" indent="-228600" algn="l" defTabSz="914400" rtl="0" eaLnBrk="1" latinLnBrk="0" hangingPunct="1">
+              <a:lnSpc>
+                <a:spcPct val="90000"/>
+              </a:lnSpc>
+              <a:spcBef>
+                <a:spcPts val="1000"/>
+              </a:spcBef>
+              <a:buFont typeface="Arial" panose="020B0604020202020204" pitchFamily="34" charset="0"/>
+              <a:buChar char="•"/>
+              <a:defRPr sz="2800" kern="1200">
+                <a:solidFill>
+                  <a:schemeClr val="tx1"/>
+                </a:solidFill>
+                <a:latin typeface="+mn-lt"/>
+                <a:ea typeface="+mn-ea"/>
+                <a:cs typeface="+mn-cs"/>
+              </a:defRPr>
+            </a:lvl1pPr>
+            <a:lvl2pPr marL="685800" indent="-228600" algn="l" defTabSz="914400" rtl="0" eaLnBrk="1" latinLnBrk="0" hangingPunct="1">
+              <a:lnSpc>
+                <a:spcPct val="90000"/>
+              </a:lnSpc>
+              <a:spcBef>
+                <a:spcPts val="500"/>
+              </a:spcBef>
+              <a:buFont typeface="Arial" panose="020B0604020202020204" pitchFamily="34" charset="0"/>
+              <a:buChar char="•"/>
+              <a:defRPr sz="2400" kern="1200">
+                <a:solidFill>
+                  <a:schemeClr val="tx1"/>
+                </a:solidFill>
+                <a:latin typeface="+mn-lt"/>
+                <a:ea typeface="+mn-ea"/>
+                <a:cs typeface="+mn-cs"/>
+              </a:defRPr>
+            </a:lvl2pPr>
+            <a:lvl3pPr marL="1143000" indent="-228600" algn="l" defTabSz="914400" rtl="0" eaLnBrk="1" latinLnBrk="0" hangingPunct="1">
+              <a:lnSpc>
+                <a:spcPct val="90000"/>
+              </a:lnSpc>
+              <a:spcBef>
+                <a:spcPts val="500"/>
+              </a:spcBef>
+              <a:buFont typeface="Arial" panose="020B0604020202020204" pitchFamily="34" charset="0"/>
+              <a:buChar char="•"/>
+              <a:defRPr sz="2000" kern="1200">
+                <a:solidFill>
+                  <a:schemeClr val="tx1"/>
+                </a:solidFill>
+                <a:latin typeface="+mn-lt"/>
+                <a:ea typeface="+mn-ea"/>
+                <a:cs typeface="+mn-cs"/>
+              </a:defRPr>
+            </a:lvl3pPr>
+            <a:lvl4pPr marL="1600200" indent="-228600" algn="l" defTabSz="914400" rtl="0" eaLnBrk="1" latinLnBrk="0" hangingPunct="1">
+              <a:lnSpc>
+                <a:spcPct val="90000"/>
+              </a:lnSpc>
+              <a:spcBef>
+                <a:spcPts val="500"/>
+              </a:spcBef>
+              <a:buFont typeface="Arial" panose="020B0604020202020204" pitchFamily="34" charset="0"/>
+              <a:buChar char="•"/>
+              <a:defRPr sz="1800" kern="1200">
+                <a:solidFill>
+                  <a:schemeClr val="tx1"/>
+                </a:solidFill>
+                <a:latin typeface="+mn-lt"/>
+                <a:ea typeface="+mn-ea"/>
+                <a:cs typeface="+mn-cs"/>
+              </a:defRPr>
+            </a:lvl4pPr>
+            <a:lvl5pPr marL="2057400" indent="-228600" algn="l" defTabSz="914400" rtl="0" eaLnBrk="1" latinLnBrk="0" hangingPunct="1">
+              <a:lnSpc>
+                <a:spcPct val="90000"/>
+              </a:lnSpc>
+              <a:spcBef>
+                <a:spcPts val="500"/>
+              </a:spcBef>
+              <a:buFont typeface="Arial" panose="020B0604020202020204" pitchFamily="34" charset="0"/>
+              <a:buChar char="•"/>
+              <a:defRPr sz="1800" kern="1200">
+                <a:solidFill>
+                  <a:schemeClr val="tx1"/>
+                </a:solidFill>
+                <a:latin typeface="+mn-lt"/>
+                <a:ea typeface="+mn-ea"/>
+                <a:cs typeface="+mn-cs"/>
+              </a:defRPr>
+            </a:lvl5pPr>
+            <a:lvl6pPr marL="2514600" indent="-228600" algn="l" defTabSz="914400" rtl="0" eaLnBrk="1" latinLnBrk="0" hangingPunct="1">
+              <a:lnSpc>
+                <a:spcPct val="90000"/>
+              </a:lnSpc>
+              <a:spcBef>
+                <a:spcPts val="500"/>
+              </a:spcBef>
+              <a:buFont typeface="Arial" panose="020B0604020202020204" pitchFamily="34" charset="0"/>
+              <a:buChar char="•"/>
+              <a:defRPr sz="1800" kern="1200">
+                <a:solidFill>
+                  <a:schemeClr val="tx1"/>
+                </a:solidFill>
+                <a:latin typeface="+mn-lt"/>
+                <a:ea typeface="+mn-ea"/>
+                <a:cs typeface="+mn-cs"/>
+              </a:defRPr>
+            </a:lvl6pPr>
+            <a:lvl7pPr marL="2971800" indent="-228600" algn="l" defTabSz="914400" rtl="0" eaLnBrk="1" latinLnBrk="0" hangingPunct="1">
+              <a:lnSpc>
+                <a:spcPct val="90000"/>
+              </a:lnSpc>
+              <a:spcBef>
+                <a:spcPts val="500"/>
+              </a:spcBef>
+              <a:buFont typeface="Arial" panose="020B0604020202020204" pitchFamily="34" charset="0"/>
+              <a:buChar char="•"/>
+              <a:defRPr sz="1800" kern="1200">
+                <a:solidFill>
+                  <a:schemeClr val="tx1"/>
+                </a:solidFill>
+                <a:latin typeface="+mn-lt"/>
+                <a:ea typeface="+mn-ea"/>
+                <a:cs typeface="+mn-cs"/>
+              </a:defRPr>
+            </a:lvl7pPr>
+            <a:lvl8pPr marL="3429000" indent="-228600" algn="l" defTabSz="914400" rtl="0" eaLnBrk="1" latinLnBrk="0" hangingPunct="1">
+              <a:lnSpc>
+                <a:spcPct val="90000"/>
+              </a:lnSpc>
+              <a:spcBef>
+                <a:spcPts val="500"/>
+              </a:spcBef>
+              <a:buFont typeface="Arial" panose="020B0604020202020204" pitchFamily="34" charset="0"/>
+              <a:buChar char="•"/>
+              <a:defRPr sz="1800" kern="1200">
+                <a:solidFill>
+                  <a:schemeClr val="tx1"/>
+                </a:solidFill>
+                <a:latin typeface="+mn-lt"/>
+                <a:ea typeface="+mn-ea"/>
+                <a:cs typeface="+mn-cs"/>
+              </a:defRPr>
+            </a:lvl8pPr>
+            <a:lvl9pPr marL="3886200" indent="-228600" algn="l" defTabSz="914400" rtl="0" eaLnBrk="1" latinLnBrk="0" hangingPunct="1">
+              <a:lnSpc>
+                <a:spcPct val="90000"/>
+              </a:lnSpc>
+              <a:spcBef>
+                <a:spcPts val="500"/>
+              </a:spcBef>
+              <a:buFont typeface="Arial" panose="020B0604020202020204" pitchFamily="34" charset="0"/>
+              <a:buChar char="•"/>
+              <a:defRPr sz="1800" kern="1200">
+                <a:solidFill>
+                  <a:schemeClr val="tx1"/>
+                </a:solidFill>
+                <a:latin typeface="+mn-lt"/>
+                <a:ea typeface="+mn-ea"/>
+                <a:cs typeface="+mn-cs"/>
+              </a:defRPr>
+            </a:lvl9pPr>
+          </a:lstStyle>
+          <a:p>
+            <a:r>
+              <a:rPr lang="en-US" sz="1100" dirty="0"/>
+              <a:t>Screen capture of code changes highlighted</a:t>
+            </a:r>
+          </a:p>
+        </p:txBody>
+      </p:sp>
+      <p:sp>
+        <p:nvSpPr>
+          <p:cNvPr id="10" name="Content Placeholder 2">
+            <a:extLst>
+              <a:ext uri="{FF2B5EF4-FFF2-40B4-BE49-F238E27FC236}">
+                <a16:creationId xmlns:a16="http://schemas.microsoft.com/office/drawing/2014/main" id="{78E2CDE7-0839-476C-281C-450D1AB5780A}"/>
+              </a:ext>
+            </a:extLst>
+          </p:cNvPr>
+          <p:cNvSpPr txBox="1">
+            <a:spLocks/>
+          </p:cNvSpPr>
+          <p:nvPr/>
+        </p:nvSpPr>
+        <p:spPr>
+          <a:xfrm>
+            <a:off x="879958" y="4067250"/>
+            <a:ext cx="2841346" cy="1947559"/>
+          </a:xfrm>
+          <a:prstGeom prst="rect">
+            <a:avLst/>
+          </a:prstGeom>
+        </p:spPr>
+        <p:txBody>
+          <a:bodyPr vert="horz" lIns="91440" tIns="45720" rIns="91440" bIns="45720" rtlCol="0">
+            <a:normAutofit/>
+          </a:bodyPr>
+          <a:lstStyle>
+            <a:lvl1pPr marL="228600" indent="-228600" algn="l" defTabSz="914400" rtl="0" eaLnBrk="1" latinLnBrk="0" hangingPunct="1">
+              <a:lnSpc>
+                <a:spcPct val="90000"/>
+              </a:lnSpc>
+              <a:spcBef>
+                <a:spcPts val="1000"/>
+              </a:spcBef>
+              <a:buFont typeface="Arial" panose="020B0604020202020204" pitchFamily="34" charset="0"/>
+              <a:buChar char="•"/>
+              <a:defRPr sz="2800" kern="1200">
+                <a:solidFill>
+                  <a:schemeClr val="tx1"/>
+                </a:solidFill>
+                <a:latin typeface="+mn-lt"/>
+                <a:ea typeface="+mn-ea"/>
+                <a:cs typeface="+mn-cs"/>
+              </a:defRPr>
+            </a:lvl1pPr>
+            <a:lvl2pPr marL="685800" indent="-228600" algn="l" defTabSz="914400" rtl="0" eaLnBrk="1" latinLnBrk="0" hangingPunct="1">
+              <a:lnSpc>
+                <a:spcPct val="90000"/>
+              </a:lnSpc>
+              <a:spcBef>
+                <a:spcPts val="500"/>
+              </a:spcBef>
+              <a:buFont typeface="Arial" panose="020B0604020202020204" pitchFamily="34" charset="0"/>
+              <a:buChar char="•"/>
+              <a:defRPr sz="2400" kern="1200">
+                <a:solidFill>
+                  <a:schemeClr val="tx1"/>
+                </a:solidFill>
+                <a:latin typeface="+mn-lt"/>
+                <a:ea typeface="+mn-ea"/>
+                <a:cs typeface="+mn-cs"/>
+              </a:defRPr>
+            </a:lvl2pPr>
+            <a:lvl3pPr marL="1143000" indent="-228600" algn="l" defTabSz="914400" rtl="0" eaLnBrk="1" latinLnBrk="0" hangingPunct="1">
+              <a:lnSpc>
+                <a:spcPct val="90000"/>
+              </a:lnSpc>
+              <a:spcBef>
+                <a:spcPts val="500"/>
+              </a:spcBef>
+              <a:buFont typeface="Arial" panose="020B0604020202020204" pitchFamily="34" charset="0"/>
+              <a:buChar char="•"/>
+              <a:defRPr sz="2000" kern="1200">
+                <a:solidFill>
+                  <a:schemeClr val="tx1"/>
+                </a:solidFill>
+                <a:latin typeface="+mn-lt"/>
+                <a:ea typeface="+mn-ea"/>
+                <a:cs typeface="+mn-cs"/>
+              </a:defRPr>
+            </a:lvl3pPr>
+            <a:lvl4pPr marL="1600200" indent="-228600" algn="l" defTabSz="914400" rtl="0" eaLnBrk="1" latinLnBrk="0" hangingPunct="1">
+              <a:lnSpc>
+                <a:spcPct val="90000"/>
+              </a:lnSpc>
+              <a:spcBef>
+                <a:spcPts val="500"/>
+              </a:spcBef>
+              <a:buFont typeface="Arial" panose="020B0604020202020204" pitchFamily="34" charset="0"/>
+              <a:buChar char="•"/>
+              <a:defRPr sz="1800" kern="1200">
+                <a:solidFill>
+                  <a:schemeClr val="tx1"/>
+                </a:solidFill>
+                <a:latin typeface="+mn-lt"/>
+                <a:ea typeface="+mn-ea"/>
+                <a:cs typeface="+mn-cs"/>
+              </a:defRPr>
+            </a:lvl4pPr>
+            <a:lvl5pPr marL="2057400" indent="-228600" algn="l" defTabSz="914400" rtl="0" eaLnBrk="1" latinLnBrk="0" hangingPunct="1">
+              <a:lnSpc>
+                <a:spcPct val="90000"/>
+              </a:lnSpc>
+              <a:spcBef>
+                <a:spcPts val="500"/>
+              </a:spcBef>
+              <a:buFont typeface="Arial" panose="020B0604020202020204" pitchFamily="34" charset="0"/>
+              <a:buChar char="•"/>
+              <a:defRPr sz="1800" kern="1200">
+                <a:solidFill>
+                  <a:schemeClr val="tx1"/>
+                </a:solidFill>
+                <a:latin typeface="+mn-lt"/>
+                <a:ea typeface="+mn-ea"/>
+                <a:cs typeface="+mn-cs"/>
+              </a:defRPr>
+            </a:lvl5pPr>
+            <a:lvl6pPr marL="2514600" indent="-228600" algn="l" defTabSz="914400" rtl="0" eaLnBrk="1" latinLnBrk="0" hangingPunct="1">
+              <a:lnSpc>
+                <a:spcPct val="90000"/>
+              </a:lnSpc>
+              <a:spcBef>
+                <a:spcPts val="500"/>
+              </a:spcBef>
+              <a:buFont typeface="Arial" panose="020B0604020202020204" pitchFamily="34" charset="0"/>
+              <a:buChar char="•"/>
+              <a:defRPr sz="1800" kern="1200">
+                <a:solidFill>
+                  <a:schemeClr val="tx1"/>
+                </a:solidFill>
+                <a:latin typeface="+mn-lt"/>
+                <a:ea typeface="+mn-ea"/>
+                <a:cs typeface="+mn-cs"/>
+              </a:defRPr>
+            </a:lvl6pPr>
+            <a:lvl7pPr marL="2971800" indent="-228600" algn="l" defTabSz="914400" rtl="0" eaLnBrk="1" latinLnBrk="0" hangingPunct="1">
+              <a:lnSpc>
+                <a:spcPct val="90000"/>
+              </a:lnSpc>
+              <a:spcBef>
+                <a:spcPts val="500"/>
+              </a:spcBef>
+              <a:buFont typeface="Arial" panose="020B0604020202020204" pitchFamily="34" charset="0"/>
+              <a:buChar char="•"/>
+              <a:defRPr sz="1800" kern="1200">
+                <a:solidFill>
+                  <a:schemeClr val="tx1"/>
+                </a:solidFill>
+                <a:latin typeface="+mn-lt"/>
+                <a:ea typeface="+mn-ea"/>
+                <a:cs typeface="+mn-cs"/>
+              </a:defRPr>
+            </a:lvl7pPr>
+            <a:lvl8pPr marL="3429000" indent="-228600" algn="l" defTabSz="914400" rtl="0" eaLnBrk="1" latinLnBrk="0" hangingPunct="1">
+              <a:lnSpc>
+                <a:spcPct val="90000"/>
+              </a:lnSpc>
+              <a:spcBef>
+                <a:spcPts val="500"/>
+              </a:spcBef>
+              <a:buFont typeface="Arial" panose="020B0604020202020204" pitchFamily="34" charset="0"/>
+              <a:buChar char="•"/>
+              <a:defRPr sz="1800" kern="1200">
+                <a:solidFill>
+                  <a:schemeClr val="tx1"/>
+                </a:solidFill>
+                <a:latin typeface="+mn-lt"/>
+                <a:ea typeface="+mn-ea"/>
+                <a:cs typeface="+mn-cs"/>
+              </a:defRPr>
+            </a:lvl8pPr>
+            <a:lvl9pPr marL="3886200" indent="-228600" algn="l" defTabSz="914400" rtl="0" eaLnBrk="1" latinLnBrk="0" hangingPunct="1">
+              <a:lnSpc>
+                <a:spcPct val="90000"/>
+              </a:lnSpc>
+              <a:spcBef>
+                <a:spcPts val="500"/>
+              </a:spcBef>
+              <a:buFont typeface="Arial" panose="020B0604020202020204" pitchFamily="34" charset="0"/>
+              <a:buChar char="•"/>
+              <a:defRPr sz="1800" kern="1200">
+                <a:solidFill>
+                  <a:schemeClr val="tx1"/>
+                </a:solidFill>
+                <a:latin typeface="+mn-lt"/>
+                <a:ea typeface="+mn-ea"/>
+                <a:cs typeface="+mn-cs"/>
+              </a:defRPr>
+            </a:lvl9pPr>
+          </a:lstStyle>
+          <a:p>
+            <a:r>
+              <a:rPr lang="en-US" sz="1100" dirty="0"/>
+              <a:t>Screen capture demonstrating unit test passing</a:t>
+            </a:r>
+          </a:p>
+        </p:txBody>
+      </p:sp>
+      <p:sp>
+        <p:nvSpPr>
+          <p:cNvPr id="12" name="Content Placeholder 2">
+            <a:extLst>
+              <a:ext uri="{FF2B5EF4-FFF2-40B4-BE49-F238E27FC236}">
+                <a16:creationId xmlns:a16="http://schemas.microsoft.com/office/drawing/2014/main" id="{802CCFAE-8FFB-3336-46E4-191CF264A2CC}"/>
+              </a:ext>
+            </a:extLst>
+          </p:cNvPr>
+          <p:cNvSpPr txBox="1">
+            <a:spLocks/>
+          </p:cNvSpPr>
+          <p:nvPr/>
+        </p:nvSpPr>
+        <p:spPr>
+          <a:xfrm>
+            <a:off x="6417390" y="4067250"/>
+            <a:ext cx="2841346" cy="1947560"/>
+          </a:xfrm>
+          <a:prstGeom prst="rect">
+            <a:avLst/>
+          </a:prstGeom>
+        </p:spPr>
+        <p:txBody>
+          <a:bodyPr vert="horz" lIns="91440" tIns="45720" rIns="91440" bIns="45720" rtlCol="0">
+            <a:normAutofit/>
+          </a:bodyPr>
+          <a:lstStyle>
+            <a:lvl1pPr marL="228600" indent="-228600" algn="l" defTabSz="914400" rtl="0" eaLnBrk="1" latinLnBrk="0" hangingPunct="1">
+              <a:lnSpc>
+                <a:spcPct val="90000"/>
+              </a:lnSpc>
+              <a:spcBef>
+                <a:spcPts val="1000"/>
+              </a:spcBef>
+              <a:buFont typeface="Arial" panose="020B0604020202020204" pitchFamily="34" charset="0"/>
+              <a:buChar char="•"/>
+              <a:defRPr sz="2800" kern="1200">
+                <a:solidFill>
+                  <a:schemeClr val="tx1"/>
+                </a:solidFill>
+                <a:latin typeface="+mn-lt"/>
+                <a:ea typeface="+mn-ea"/>
+                <a:cs typeface="+mn-cs"/>
+              </a:defRPr>
+            </a:lvl1pPr>
+            <a:lvl2pPr marL="685800" indent="-228600" algn="l" defTabSz="914400" rtl="0" eaLnBrk="1" latinLnBrk="0" hangingPunct="1">
+              <a:lnSpc>
+                <a:spcPct val="90000"/>
+              </a:lnSpc>
+              <a:spcBef>
+                <a:spcPts val="500"/>
+              </a:spcBef>
+              <a:buFont typeface="Arial" panose="020B0604020202020204" pitchFamily="34" charset="0"/>
+              <a:buChar char="•"/>
+              <a:defRPr sz="2400" kern="1200">
+                <a:solidFill>
+                  <a:schemeClr val="tx1"/>
+                </a:solidFill>
+                <a:latin typeface="+mn-lt"/>
+                <a:ea typeface="+mn-ea"/>
+                <a:cs typeface="+mn-cs"/>
+              </a:defRPr>
+            </a:lvl2pPr>
+            <a:lvl3pPr marL="1143000" indent="-228600" algn="l" defTabSz="914400" rtl="0" eaLnBrk="1" latinLnBrk="0" hangingPunct="1">
+              <a:lnSpc>
+                <a:spcPct val="90000"/>
+              </a:lnSpc>
+              <a:spcBef>
+                <a:spcPts val="500"/>
+              </a:spcBef>
+              <a:buFont typeface="Arial" panose="020B0604020202020204" pitchFamily="34" charset="0"/>
+              <a:buChar char="•"/>
+              <a:defRPr sz="2000" kern="1200">
+                <a:solidFill>
+                  <a:schemeClr val="tx1"/>
+                </a:solidFill>
+                <a:latin typeface="+mn-lt"/>
+                <a:ea typeface="+mn-ea"/>
+                <a:cs typeface="+mn-cs"/>
+              </a:defRPr>
+            </a:lvl3pPr>
+            <a:lvl4pPr marL="1600200" indent="-228600" algn="l" defTabSz="914400" rtl="0" eaLnBrk="1" latinLnBrk="0" hangingPunct="1">
+              <a:lnSpc>
+                <a:spcPct val="90000"/>
+              </a:lnSpc>
+              <a:spcBef>
+                <a:spcPts val="500"/>
+              </a:spcBef>
+              <a:buFont typeface="Arial" panose="020B0604020202020204" pitchFamily="34" charset="0"/>
+              <a:buChar char="•"/>
+              <a:defRPr sz="1800" kern="1200">
+                <a:solidFill>
+                  <a:schemeClr val="tx1"/>
+                </a:solidFill>
+                <a:latin typeface="+mn-lt"/>
+                <a:ea typeface="+mn-ea"/>
+                <a:cs typeface="+mn-cs"/>
+              </a:defRPr>
+            </a:lvl4pPr>
+            <a:lvl5pPr marL="2057400" indent="-228600" algn="l" defTabSz="914400" rtl="0" eaLnBrk="1" latinLnBrk="0" hangingPunct="1">
+              <a:lnSpc>
+                <a:spcPct val="90000"/>
+              </a:lnSpc>
+              <a:spcBef>
+                <a:spcPts val="500"/>
+              </a:spcBef>
+              <a:buFont typeface="Arial" panose="020B0604020202020204" pitchFamily="34" charset="0"/>
+              <a:buChar char="•"/>
+              <a:defRPr sz="1800" kern="1200">
+                <a:solidFill>
+                  <a:schemeClr val="tx1"/>
+                </a:solidFill>
+                <a:latin typeface="+mn-lt"/>
+                <a:ea typeface="+mn-ea"/>
+                <a:cs typeface="+mn-cs"/>
+              </a:defRPr>
+            </a:lvl5pPr>
+            <a:lvl6pPr marL="2514600" indent="-228600" algn="l" defTabSz="914400" rtl="0" eaLnBrk="1" latinLnBrk="0" hangingPunct="1">
+              <a:lnSpc>
+                <a:spcPct val="90000"/>
+              </a:lnSpc>
+              <a:spcBef>
+                <a:spcPts val="500"/>
+              </a:spcBef>
+              <a:buFont typeface="Arial" panose="020B0604020202020204" pitchFamily="34" charset="0"/>
+              <a:buChar char="•"/>
+              <a:defRPr sz="1800" kern="1200">
+                <a:solidFill>
+                  <a:schemeClr val="tx1"/>
+                </a:solidFill>
+                <a:latin typeface="+mn-lt"/>
+                <a:ea typeface="+mn-ea"/>
+                <a:cs typeface="+mn-cs"/>
+              </a:defRPr>
+            </a:lvl6pPr>
+            <a:lvl7pPr marL="2971800" indent="-228600" algn="l" defTabSz="914400" rtl="0" eaLnBrk="1" latinLnBrk="0" hangingPunct="1">
+              <a:lnSpc>
+                <a:spcPct val="90000"/>
+              </a:lnSpc>
+              <a:spcBef>
+                <a:spcPts val="500"/>
+              </a:spcBef>
+              <a:buFont typeface="Arial" panose="020B0604020202020204" pitchFamily="34" charset="0"/>
+              <a:buChar char="•"/>
+              <a:defRPr sz="1800" kern="1200">
+                <a:solidFill>
+                  <a:schemeClr val="tx1"/>
+                </a:solidFill>
+                <a:latin typeface="+mn-lt"/>
+                <a:ea typeface="+mn-ea"/>
+                <a:cs typeface="+mn-cs"/>
+              </a:defRPr>
+            </a:lvl7pPr>
+            <a:lvl8pPr marL="3429000" indent="-228600" algn="l" defTabSz="914400" rtl="0" eaLnBrk="1" latinLnBrk="0" hangingPunct="1">
+              <a:lnSpc>
+                <a:spcPct val="90000"/>
+              </a:lnSpc>
+              <a:spcBef>
+                <a:spcPts val="500"/>
+              </a:spcBef>
+              <a:buFont typeface="Arial" panose="020B0604020202020204" pitchFamily="34" charset="0"/>
+              <a:buChar char="•"/>
+              <a:defRPr sz="1800" kern="1200">
+                <a:solidFill>
+                  <a:schemeClr val="tx1"/>
+                </a:solidFill>
+                <a:latin typeface="+mn-lt"/>
+                <a:ea typeface="+mn-ea"/>
+                <a:cs typeface="+mn-cs"/>
+              </a:defRPr>
+            </a:lvl8pPr>
+            <a:lvl9pPr marL="3886200" indent="-228600" algn="l" defTabSz="914400" rtl="0" eaLnBrk="1" latinLnBrk="0" hangingPunct="1">
+              <a:lnSpc>
+                <a:spcPct val="90000"/>
+              </a:lnSpc>
+              <a:spcBef>
+                <a:spcPts val="500"/>
+              </a:spcBef>
+              <a:buFont typeface="Arial" panose="020B0604020202020204" pitchFamily="34" charset="0"/>
+              <a:buChar char="•"/>
+              <a:defRPr sz="1800" kern="1200">
+                <a:solidFill>
+                  <a:schemeClr val="tx1"/>
+                </a:solidFill>
+                <a:latin typeface="+mn-lt"/>
+                <a:ea typeface="+mn-ea"/>
+                <a:cs typeface="+mn-cs"/>
+              </a:defRPr>
+            </a:lvl9pPr>
+          </a:lstStyle>
+          <a:p>
+            <a:r>
+              <a:rPr lang="en-US" sz="1100" dirty="0"/>
+              <a:t>Screen capture illustrating all previous unit tests still pass after code changes</a:t>
+            </a:r>
+          </a:p>
+        </p:txBody>
+      </p:sp>
+      <p:pic>
+        <p:nvPicPr>
+          <p:cNvPr id="5" name="Picture 4">
+            <a:extLst>
+              <a:ext uri="{FF2B5EF4-FFF2-40B4-BE49-F238E27FC236}">
+                <a16:creationId xmlns:a16="http://schemas.microsoft.com/office/drawing/2014/main" id="{412EDD9B-8EFC-DBF1-3C99-A88804FF2F65}"/>
+              </a:ext>
+            </a:extLst>
+          </p:cNvPr>
+          <p:cNvPicPr>
+            <a:picLocks noChangeAspect="1"/>
+          </p:cNvPicPr>
+          <p:nvPr/>
+        </p:nvPicPr>
+        <p:blipFill>
+          <a:blip r:embed="rId2"/>
+          <a:srcRect l="7324" t="2427" r="25919" b="-9400"/>
+          <a:stretch>
+            <a:fillRect/>
+          </a:stretch>
+        </p:blipFill>
+        <p:spPr>
+          <a:xfrm>
+            <a:off x="473210" y="2532533"/>
+            <a:ext cx="4020706" cy="572156"/>
+          </a:xfrm>
+          <a:prstGeom prst="rect">
+            <a:avLst/>
+          </a:prstGeom>
+        </p:spPr>
+      </p:pic>
+      <p:pic>
+        <p:nvPicPr>
+          <p:cNvPr id="8" name="Picture 7">
+            <a:extLst>
+              <a:ext uri="{FF2B5EF4-FFF2-40B4-BE49-F238E27FC236}">
+                <a16:creationId xmlns:a16="http://schemas.microsoft.com/office/drawing/2014/main" id="{5EF0FD68-8B67-F3A6-6542-E5198EC07CAA}"/>
+              </a:ext>
+            </a:extLst>
+          </p:cNvPr>
+          <p:cNvPicPr>
+            <a:picLocks noChangeAspect="1"/>
+          </p:cNvPicPr>
+          <p:nvPr/>
+        </p:nvPicPr>
+        <p:blipFill>
+          <a:blip r:embed="rId3"/>
+          <a:stretch>
+            <a:fillRect/>
+          </a:stretch>
+        </p:blipFill>
+        <p:spPr>
+          <a:xfrm>
+            <a:off x="4616930" y="2405311"/>
+            <a:ext cx="3601234" cy="1421076"/>
+          </a:xfrm>
+          <a:prstGeom prst="rect">
+            <a:avLst/>
+          </a:prstGeom>
+        </p:spPr>
+      </p:pic>
+      <p:pic>
+        <p:nvPicPr>
+          <p:cNvPr id="6" name="Picture 5" descr="A screen shot of a computer program&#10;&#10;AI-generated content may be incorrect.">
+            <a:extLst>
+              <a:ext uri="{FF2B5EF4-FFF2-40B4-BE49-F238E27FC236}">
+                <a16:creationId xmlns:a16="http://schemas.microsoft.com/office/drawing/2014/main" id="{C2EA4B61-7358-9C97-E7D8-4C8A916F95AF}"/>
+              </a:ext>
+            </a:extLst>
+          </p:cNvPr>
+          <p:cNvPicPr>
+            <a:picLocks noChangeAspect="1"/>
+          </p:cNvPicPr>
+          <p:nvPr/>
+        </p:nvPicPr>
+        <p:blipFill>
+          <a:blip r:embed="rId4"/>
+          <a:stretch>
+            <a:fillRect/>
+          </a:stretch>
+        </p:blipFill>
+        <p:spPr>
+          <a:xfrm>
+            <a:off x="8362625" y="2408181"/>
+            <a:ext cx="3859192" cy="830372"/>
+          </a:xfrm>
+          <a:prstGeom prst="rect">
+            <a:avLst/>
+          </a:prstGeom>
+        </p:spPr>
+      </p:pic>
+      <p:pic>
+        <p:nvPicPr>
+          <p:cNvPr id="11" name="Picture 10" descr="A screenshot of a computer program&#10;&#10;AI-generated content may be incorrect.">
+            <a:extLst>
+              <a:ext uri="{FF2B5EF4-FFF2-40B4-BE49-F238E27FC236}">
+                <a16:creationId xmlns:a16="http://schemas.microsoft.com/office/drawing/2014/main" id="{B36B055B-844B-D046-6586-F9512E72033B}"/>
+              </a:ext>
+            </a:extLst>
+          </p:cNvPr>
+          <p:cNvPicPr>
+            <a:picLocks noChangeAspect="1"/>
+          </p:cNvPicPr>
+          <p:nvPr/>
+        </p:nvPicPr>
+        <p:blipFill>
+          <a:blip r:embed="rId5"/>
+          <a:stretch>
+            <a:fillRect/>
+          </a:stretch>
+        </p:blipFill>
+        <p:spPr>
+          <a:xfrm>
+            <a:off x="8293653" y="3255792"/>
+            <a:ext cx="3887305" cy="832331"/>
+          </a:xfrm>
+          <a:prstGeom prst="rect">
+            <a:avLst/>
+          </a:prstGeom>
+        </p:spPr>
+      </p:pic>
+      <p:pic>
+        <p:nvPicPr>
+          <p:cNvPr id="13" name="Picture 12">
+            <a:extLst>
+              <a:ext uri="{FF2B5EF4-FFF2-40B4-BE49-F238E27FC236}">
+                <a16:creationId xmlns:a16="http://schemas.microsoft.com/office/drawing/2014/main" id="{B3F3307B-B239-A1E0-BE6A-A7F20C423F30}"/>
+              </a:ext>
+            </a:extLst>
+          </p:cNvPr>
+          <p:cNvPicPr>
+            <a:picLocks noChangeAspect="1"/>
+          </p:cNvPicPr>
+          <p:nvPr/>
+        </p:nvPicPr>
+        <p:blipFill>
+          <a:blip r:embed="rId6"/>
+          <a:stretch>
+            <a:fillRect/>
+          </a:stretch>
+        </p:blipFill>
+        <p:spPr>
+          <a:xfrm>
+            <a:off x="25330" y="5221977"/>
+            <a:ext cx="6067425" cy="257175"/>
+          </a:xfrm>
+          <a:prstGeom prst="rect">
+            <a:avLst/>
+          </a:prstGeom>
+        </p:spPr>
+      </p:pic>
+      <p:pic>
+        <p:nvPicPr>
+          <p:cNvPr id="14" name="Picture 13" descr="A screen shot of a computer program&#10;&#10;AI-generated content may be incorrect.">
+            <a:extLst>
+              <a:ext uri="{FF2B5EF4-FFF2-40B4-BE49-F238E27FC236}">
+                <a16:creationId xmlns:a16="http://schemas.microsoft.com/office/drawing/2014/main" id="{C1E9E4DE-014B-9ECC-AAB8-4515A62385E0}"/>
+              </a:ext>
+            </a:extLst>
+          </p:cNvPr>
+          <p:cNvPicPr>
+            <a:picLocks noChangeAspect="1"/>
+          </p:cNvPicPr>
+          <p:nvPr/>
+        </p:nvPicPr>
+        <p:blipFill>
+          <a:blip r:embed="rId7"/>
+          <a:stretch>
+            <a:fillRect/>
+          </a:stretch>
+        </p:blipFill>
+        <p:spPr>
+          <a:xfrm>
+            <a:off x="6726858" y="4647855"/>
+            <a:ext cx="3884544" cy="2134291"/>
+          </a:xfrm>
+          <a:prstGeom prst="rect">
+            <a:avLst/>
+          </a:prstGeom>
+        </p:spPr>
+      </p:pic>
+    </p:spTree>
+    <p:extLst>
+      <p:ext uri="{BB962C8B-B14F-4D97-AF65-F5344CB8AC3E}">
+        <p14:creationId xmlns:p14="http://schemas.microsoft.com/office/powerpoint/2010/main" val="1864013591"/>
+      </p:ext>
+    </p:extLst>
+  </p:cSld>
+  <p:clrMapOvr>
+    <a:masterClrMapping/>
+  </p:clrMapOvr>
+</p:sld>
+</file>
+
+<file path=ppt/slides/slide13.xml><?xml version="1.0" encoding="utf-8"?>
+<p:sld xmlns:a="http://schemas.openxmlformats.org/drawingml/2006/main" xmlns:r="http://schemas.openxmlformats.org/officeDocument/2006/relationships" xmlns:p="http://schemas.openxmlformats.org/presentationml/2006/main">
+  <p:cSld>
+    <p:spTree>
+      <p:nvGrpSpPr>
+        <p:cNvPr id="1" name="">
+          <a:extLst>
+            <a:ext uri="{FF2B5EF4-FFF2-40B4-BE49-F238E27FC236}">
+              <a16:creationId xmlns:a16="http://schemas.microsoft.com/office/drawing/2014/main" id="{91965C68-9CDB-67B1-6972-A8F7980797C8}"/>
+            </a:ext>
+          </a:extLst>
+        </p:cNvPr>
+        <p:cNvGrpSpPr/>
+        <p:nvPr/>
+      </p:nvGrpSpPr>
+      <p:grpSpPr>
+        <a:xfrm>
+          <a:off x="0" y="0"/>
+          <a:ext cx="0" cy="0"/>
+          <a:chOff x="0" y="0"/>
+          <a:chExt cx="0" cy="0"/>
+        </a:xfrm>
+      </p:grpSpPr>
+      <p:sp>
+        <p:nvSpPr>
+          <p:cNvPr id="2" name="Title 1">
+            <a:extLst>
+              <a:ext uri="{FF2B5EF4-FFF2-40B4-BE49-F238E27FC236}">
+                <a16:creationId xmlns:a16="http://schemas.microsoft.com/office/drawing/2014/main" id="{B8E5A94E-A4BC-381A-3661-98B2A79FFCF0}"/>
+              </a:ext>
+            </a:extLst>
+          </p:cNvPr>
+          <p:cNvSpPr>
+            <a:spLocks noGrp="1"/>
+          </p:cNvSpPr>
+          <p:nvPr>
+            <p:ph type="title"/>
+          </p:nvPr>
+        </p:nvSpPr>
+        <p:spPr/>
+        <p:txBody>
+          <a:bodyPr>
+            <a:normAutofit/>
+          </a:bodyPr>
+          <a:lstStyle/>
+          <a:p>
+            <a:r>
+              <a:rPr lang="en-US" sz="1600" dirty="0"/>
+              <a:t>Test ID: T-PUSH-CPLX2</a:t>
+            </a:r>
+            <a:br>
+              <a:rPr lang="en-US" sz="1600" dirty="0"/>
+            </a:br>
+            <a:r>
+              <a:rPr lang="en-US" sz="1600" dirty="0"/>
+              <a:t>Statement of unit test: Verify that pushing a spaced complex number parses correctly and ignores the </a:t>
+            </a:r>
+            <a:r>
+              <a:rPr lang="en-US" sz="1600"/>
+              <a:t>spaces.</a:t>
+            </a:r>
+            <a:br>
+              <a:rPr lang="en-US" sz="1600" dirty="0"/>
+            </a:br>
+            <a:r>
+              <a:rPr lang="en-US" sz="1600"/>
+              <a:t>Expected</a:t>
+            </a:r>
+            <a:r>
+              <a:rPr lang="en-US" sz="1600" dirty="0"/>
+              <a:t> results: 3 + j4</a:t>
             </a:r>
           </a:p>
         </p:txBody>
@@ -5596,7 +6736,7 @@
           <p:cNvPr id="3" name="Content Placeholder 2">
             <a:extLst>
               <a:ext uri="{FF2B5EF4-FFF2-40B4-BE49-F238E27FC236}">
-                <a16:creationId xmlns:a16="http://schemas.microsoft.com/office/drawing/2014/main" id="{E8DBA011-EA76-E9B3-4254-68C14D92BE59}"/>
+                <a16:creationId xmlns:a16="http://schemas.microsoft.com/office/drawing/2014/main" id="{0EC1E6A1-6F59-725B-1586-C65B7E5950E8}"/>
               </a:ext>
             </a:extLst>
           </p:cNvPr>
@@ -5607,19 +6747,6194 @@
             <p:ph idx="1"/>
           </p:nvPr>
         </p:nvSpPr>
+        <p:spPr>
+          <a:xfrm>
+            <a:off x="838200" y="1825625"/>
+            <a:ext cx="2841346" cy="4351338"/>
+          </a:xfrm>
+        </p:spPr>
+        <p:txBody>
+          <a:bodyPr>
+            <a:normAutofit/>
+          </a:bodyPr>
+          <a:lstStyle/>
+          <a:p>
+            <a:r>
+              <a:rPr lang="en-US" sz="1100" dirty="0"/>
+              <a:t>Screen capture of unit test code:</a:t>
+            </a:r>
+          </a:p>
+        </p:txBody>
+      </p:sp>
+      <p:sp>
+        <p:nvSpPr>
+          <p:cNvPr id="4" name="Content Placeholder 2">
+            <a:extLst>
+              <a:ext uri="{FF2B5EF4-FFF2-40B4-BE49-F238E27FC236}">
+                <a16:creationId xmlns:a16="http://schemas.microsoft.com/office/drawing/2014/main" id="{8A4DBB04-8144-5227-DD56-40EA99E6E6A2}"/>
+              </a:ext>
+            </a:extLst>
+          </p:cNvPr>
+          <p:cNvSpPr txBox="1">
+            <a:spLocks/>
+          </p:cNvSpPr>
+          <p:nvPr/>
+        </p:nvSpPr>
+        <p:spPr>
+          <a:xfrm>
+            <a:off x="4993579" y="1825625"/>
+            <a:ext cx="2841346" cy="4351338"/>
+          </a:xfrm>
+          <a:prstGeom prst="rect">
+            <a:avLst/>
+          </a:prstGeom>
+        </p:spPr>
+        <p:txBody>
+          <a:bodyPr vert="horz" lIns="91440" tIns="45720" rIns="91440" bIns="45720" rtlCol="0">
+            <a:normAutofit/>
+          </a:bodyPr>
+          <a:lstStyle>
+            <a:lvl1pPr marL="228600" indent="-228600" algn="l" defTabSz="914400" rtl="0" eaLnBrk="1" latinLnBrk="0" hangingPunct="1">
+              <a:lnSpc>
+                <a:spcPct val="90000"/>
+              </a:lnSpc>
+              <a:spcBef>
+                <a:spcPts val="1000"/>
+              </a:spcBef>
+              <a:buFont typeface="Arial" panose="020B0604020202020204" pitchFamily="34" charset="0"/>
+              <a:buChar char="•"/>
+              <a:defRPr sz="2800" kern="1200">
+                <a:solidFill>
+                  <a:schemeClr val="tx1"/>
+                </a:solidFill>
+                <a:latin typeface="+mn-lt"/>
+                <a:ea typeface="+mn-ea"/>
+                <a:cs typeface="+mn-cs"/>
+              </a:defRPr>
+            </a:lvl1pPr>
+            <a:lvl2pPr marL="685800" indent="-228600" algn="l" defTabSz="914400" rtl="0" eaLnBrk="1" latinLnBrk="0" hangingPunct="1">
+              <a:lnSpc>
+                <a:spcPct val="90000"/>
+              </a:lnSpc>
+              <a:spcBef>
+                <a:spcPts val="500"/>
+              </a:spcBef>
+              <a:buFont typeface="Arial" panose="020B0604020202020204" pitchFamily="34" charset="0"/>
+              <a:buChar char="•"/>
+              <a:defRPr sz="2400" kern="1200">
+                <a:solidFill>
+                  <a:schemeClr val="tx1"/>
+                </a:solidFill>
+                <a:latin typeface="+mn-lt"/>
+                <a:ea typeface="+mn-ea"/>
+                <a:cs typeface="+mn-cs"/>
+              </a:defRPr>
+            </a:lvl2pPr>
+            <a:lvl3pPr marL="1143000" indent="-228600" algn="l" defTabSz="914400" rtl="0" eaLnBrk="1" latinLnBrk="0" hangingPunct="1">
+              <a:lnSpc>
+                <a:spcPct val="90000"/>
+              </a:lnSpc>
+              <a:spcBef>
+                <a:spcPts val="500"/>
+              </a:spcBef>
+              <a:buFont typeface="Arial" panose="020B0604020202020204" pitchFamily="34" charset="0"/>
+              <a:buChar char="•"/>
+              <a:defRPr sz="2000" kern="1200">
+                <a:solidFill>
+                  <a:schemeClr val="tx1"/>
+                </a:solidFill>
+                <a:latin typeface="+mn-lt"/>
+                <a:ea typeface="+mn-ea"/>
+                <a:cs typeface="+mn-cs"/>
+              </a:defRPr>
+            </a:lvl3pPr>
+            <a:lvl4pPr marL="1600200" indent="-228600" algn="l" defTabSz="914400" rtl="0" eaLnBrk="1" latinLnBrk="0" hangingPunct="1">
+              <a:lnSpc>
+                <a:spcPct val="90000"/>
+              </a:lnSpc>
+              <a:spcBef>
+                <a:spcPts val="500"/>
+              </a:spcBef>
+              <a:buFont typeface="Arial" panose="020B0604020202020204" pitchFamily="34" charset="0"/>
+              <a:buChar char="•"/>
+              <a:defRPr sz="1800" kern="1200">
+                <a:solidFill>
+                  <a:schemeClr val="tx1"/>
+                </a:solidFill>
+                <a:latin typeface="+mn-lt"/>
+                <a:ea typeface="+mn-ea"/>
+                <a:cs typeface="+mn-cs"/>
+              </a:defRPr>
+            </a:lvl4pPr>
+            <a:lvl5pPr marL="2057400" indent="-228600" algn="l" defTabSz="914400" rtl="0" eaLnBrk="1" latinLnBrk="0" hangingPunct="1">
+              <a:lnSpc>
+                <a:spcPct val="90000"/>
+              </a:lnSpc>
+              <a:spcBef>
+                <a:spcPts val="500"/>
+              </a:spcBef>
+              <a:buFont typeface="Arial" panose="020B0604020202020204" pitchFamily="34" charset="0"/>
+              <a:buChar char="•"/>
+              <a:defRPr sz="1800" kern="1200">
+                <a:solidFill>
+                  <a:schemeClr val="tx1"/>
+                </a:solidFill>
+                <a:latin typeface="+mn-lt"/>
+                <a:ea typeface="+mn-ea"/>
+                <a:cs typeface="+mn-cs"/>
+              </a:defRPr>
+            </a:lvl5pPr>
+            <a:lvl6pPr marL="2514600" indent="-228600" algn="l" defTabSz="914400" rtl="0" eaLnBrk="1" latinLnBrk="0" hangingPunct="1">
+              <a:lnSpc>
+                <a:spcPct val="90000"/>
+              </a:lnSpc>
+              <a:spcBef>
+                <a:spcPts val="500"/>
+              </a:spcBef>
+              <a:buFont typeface="Arial" panose="020B0604020202020204" pitchFamily="34" charset="0"/>
+              <a:buChar char="•"/>
+              <a:defRPr sz="1800" kern="1200">
+                <a:solidFill>
+                  <a:schemeClr val="tx1"/>
+                </a:solidFill>
+                <a:latin typeface="+mn-lt"/>
+                <a:ea typeface="+mn-ea"/>
+                <a:cs typeface="+mn-cs"/>
+              </a:defRPr>
+            </a:lvl6pPr>
+            <a:lvl7pPr marL="2971800" indent="-228600" algn="l" defTabSz="914400" rtl="0" eaLnBrk="1" latinLnBrk="0" hangingPunct="1">
+              <a:lnSpc>
+                <a:spcPct val="90000"/>
+              </a:lnSpc>
+              <a:spcBef>
+                <a:spcPts val="500"/>
+              </a:spcBef>
+              <a:buFont typeface="Arial" panose="020B0604020202020204" pitchFamily="34" charset="0"/>
+              <a:buChar char="•"/>
+              <a:defRPr sz="1800" kern="1200">
+                <a:solidFill>
+                  <a:schemeClr val="tx1"/>
+                </a:solidFill>
+                <a:latin typeface="+mn-lt"/>
+                <a:ea typeface="+mn-ea"/>
+                <a:cs typeface="+mn-cs"/>
+              </a:defRPr>
+            </a:lvl7pPr>
+            <a:lvl8pPr marL="3429000" indent="-228600" algn="l" defTabSz="914400" rtl="0" eaLnBrk="1" latinLnBrk="0" hangingPunct="1">
+              <a:lnSpc>
+                <a:spcPct val="90000"/>
+              </a:lnSpc>
+              <a:spcBef>
+                <a:spcPts val="500"/>
+              </a:spcBef>
+              <a:buFont typeface="Arial" panose="020B0604020202020204" pitchFamily="34" charset="0"/>
+              <a:buChar char="•"/>
+              <a:defRPr sz="1800" kern="1200">
+                <a:solidFill>
+                  <a:schemeClr val="tx1"/>
+                </a:solidFill>
+                <a:latin typeface="+mn-lt"/>
+                <a:ea typeface="+mn-ea"/>
+                <a:cs typeface="+mn-cs"/>
+              </a:defRPr>
+            </a:lvl8pPr>
+            <a:lvl9pPr marL="3886200" indent="-228600" algn="l" defTabSz="914400" rtl="0" eaLnBrk="1" latinLnBrk="0" hangingPunct="1">
+              <a:lnSpc>
+                <a:spcPct val="90000"/>
+              </a:lnSpc>
+              <a:spcBef>
+                <a:spcPts val="500"/>
+              </a:spcBef>
+              <a:buFont typeface="Arial" panose="020B0604020202020204" pitchFamily="34" charset="0"/>
+              <a:buChar char="•"/>
+              <a:defRPr sz="1800" kern="1200">
+                <a:solidFill>
+                  <a:schemeClr val="tx1"/>
+                </a:solidFill>
+                <a:latin typeface="+mn-lt"/>
+                <a:ea typeface="+mn-ea"/>
+                <a:cs typeface="+mn-cs"/>
+              </a:defRPr>
+            </a:lvl9pPr>
+          </a:lstStyle>
+          <a:p>
+            <a:r>
+              <a:rPr lang="en-US" sz="1100" dirty="0"/>
+              <a:t>Screen capture demonstrating unit test failing:</a:t>
+            </a:r>
+          </a:p>
+        </p:txBody>
+      </p:sp>
+      <p:sp>
+        <p:nvSpPr>
+          <p:cNvPr id="7" name="Content Placeholder 2">
+            <a:extLst>
+              <a:ext uri="{FF2B5EF4-FFF2-40B4-BE49-F238E27FC236}">
+                <a16:creationId xmlns:a16="http://schemas.microsoft.com/office/drawing/2014/main" id="{8110D075-3585-94E3-FBCC-FFBA849E898D}"/>
+              </a:ext>
+            </a:extLst>
+          </p:cNvPr>
+          <p:cNvSpPr txBox="1">
+            <a:spLocks/>
+          </p:cNvSpPr>
+          <p:nvPr/>
+        </p:nvSpPr>
+        <p:spPr>
+          <a:xfrm>
+            <a:off x="8874296" y="1825625"/>
+            <a:ext cx="2841346" cy="4351338"/>
+          </a:xfrm>
+          <a:prstGeom prst="rect">
+            <a:avLst/>
+          </a:prstGeom>
+        </p:spPr>
+        <p:txBody>
+          <a:bodyPr vert="horz" lIns="91440" tIns="45720" rIns="91440" bIns="45720" rtlCol="0">
+            <a:normAutofit/>
+          </a:bodyPr>
+          <a:lstStyle>
+            <a:lvl1pPr marL="228600" indent="-228600" algn="l" defTabSz="914400" rtl="0" eaLnBrk="1" latinLnBrk="0" hangingPunct="1">
+              <a:lnSpc>
+                <a:spcPct val="90000"/>
+              </a:lnSpc>
+              <a:spcBef>
+                <a:spcPts val="1000"/>
+              </a:spcBef>
+              <a:buFont typeface="Arial" panose="020B0604020202020204" pitchFamily="34" charset="0"/>
+              <a:buChar char="•"/>
+              <a:defRPr sz="2800" kern="1200">
+                <a:solidFill>
+                  <a:schemeClr val="tx1"/>
+                </a:solidFill>
+                <a:latin typeface="+mn-lt"/>
+                <a:ea typeface="+mn-ea"/>
+                <a:cs typeface="+mn-cs"/>
+              </a:defRPr>
+            </a:lvl1pPr>
+            <a:lvl2pPr marL="685800" indent="-228600" algn="l" defTabSz="914400" rtl="0" eaLnBrk="1" latinLnBrk="0" hangingPunct="1">
+              <a:lnSpc>
+                <a:spcPct val="90000"/>
+              </a:lnSpc>
+              <a:spcBef>
+                <a:spcPts val="500"/>
+              </a:spcBef>
+              <a:buFont typeface="Arial" panose="020B0604020202020204" pitchFamily="34" charset="0"/>
+              <a:buChar char="•"/>
+              <a:defRPr sz="2400" kern="1200">
+                <a:solidFill>
+                  <a:schemeClr val="tx1"/>
+                </a:solidFill>
+                <a:latin typeface="+mn-lt"/>
+                <a:ea typeface="+mn-ea"/>
+                <a:cs typeface="+mn-cs"/>
+              </a:defRPr>
+            </a:lvl2pPr>
+            <a:lvl3pPr marL="1143000" indent="-228600" algn="l" defTabSz="914400" rtl="0" eaLnBrk="1" latinLnBrk="0" hangingPunct="1">
+              <a:lnSpc>
+                <a:spcPct val="90000"/>
+              </a:lnSpc>
+              <a:spcBef>
+                <a:spcPts val="500"/>
+              </a:spcBef>
+              <a:buFont typeface="Arial" panose="020B0604020202020204" pitchFamily="34" charset="0"/>
+              <a:buChar char="•"/>
+              <a:defRPr sz="2000" kern="1200">
+                <a:solidFill>
+                  <a:schemeClr val="tx1"/>
+                </a:solidFill>
+                <a:latin typeface="+mn-lt"/>
+                <a:ea typeface="+mn-ea"/>
+                <a:cs typeface="+mn-cs"/>
+              </a:defRPr>
+            </a:lvl3pPr>
+            <a:lvl4pPr marL="1600200" indent="-228600" algn="l" defTabSz="914400" rtl="0" eaLnBrk="1" latinLnBrk="0" hangingPunct="1">
+              <a:lnSpc>
+                <a:spcPct val="90000"/>
+              </a:lnSpc>
+              <a:spcBef>
+                <a:spcPts val="500"/>
+              </a:spcBef>
+              <a:buFont typeface="Arial" panose="020B0604020202020204" pitchFamily="34" charset="0"/>
+              <a:buChar char="•"/>
+              <a:defRPr sz="1800" kern="1200">
+                <a:solidFill>
+                  <a:schemeClr val="tx1"/>
+                </a:solidFill>
+                <a:latin typeface="+mn-lt"/>
+                <a:ea typeface="+mn-ea"/>
+                <a:cs typeface="+mn-cs"/>
+              </a:defRPr>
+            </a:lvl4pPr>
+            <a:lvl5pPr marL="2057400" indent="-228600" algn="l" defTabSz="914400" rtl="0" eaLnBrk="1" latinLnBrk="0" hangingPunct="1">
+              <a:lnSpc>
+                <a:spcPct val="90000"/>
+              </a:lnSpc>
+              <a:spcBef>
+                <a:spcPts val="500"/>
+              </a:spcBef>
+              <a:buFont typeface="Arial" panose="020B0604020202020204" pitchFamily="34" charset="0"/>
+              <a:buChar char="•"/>
+              <a:defRPr sz="1800" kern="1200">
+                <a:solidFill>
+                  <a:schemeClr val="tx1"/>
+                </a:solidFill>
+                <a:latin typeface="+mn-lt"/>
+                <a:ea typeface="+mn-ea"/>
+                <a:cs typeface="+mn-cs"/>
+              </a:defRPr>
+            </a:lvl5pPr>
+            <a:lvl6pPr marL="2514600" indent="-228600" algn="l" defTabSz="914400" rtl="0" eaLnBrk="1" latinLnBrk="0" hangingPunct="1">
+              <a:lnSpc>
+                <a:spcPct val="90000"/>
+              </a:lnSpc>
+              <a:spcBef>
+                <a:spcPts val="500"/>
+              </a:spcBef>
+              <a:buFont typeface="Arial" panose="020B0604020202020204" pitchFamily="34" charset="0"/>
+              <a:buChar char="•"/>
+              <a:defRPr sz="1800" kern="1200">
+                <a:solidFill>
+                  <a:schemeClr val="tx1"/>
+                </a:solidFill>
+                <a:latin typeface="+mn-lt"/>
+                <a:ea typeface="+mn-ea"/>
+                <a:cs typeface="+mn-cs"/>
+              </a:defRPr>
+            </a:lvl6pPr>
+            <a:lvl7pPr marL="2971800" indent="-228600" algn="l" defTabSz="914400" rtl="0" eaLnBrk="1" latinLnBrk="0" hangingPunct="1">
+              <a:lnSpc>
+                <a:spcPct val="90000"/>
+              </a:lnSpc>
+              <a:spcBef>
+                <a:spcPts val="500"/>
+              </a:spcBef>
+              <a:buFont typeface="Arial" panose="020B0604020202020204" pitchFamily="34" charset="0"/>
+              <a:buChar char="•"/>
+              <a:defRPr sz="1800" kern="1200">
+                <a:solidFill>
+                  <a:schemeClr val="tx1"/>
+                </a:solidFill>
+                <a:latin typeface="+mn-lt"/>
+                <a:ea typeface="+mn-ea"/>
+                <a:cs typeface="+mn-cs"/>
+              </a:defRPr>
+            </a:lvl7pPr>
+            <a:lvl8pPr marL="3429000" indent="-228600" algn="l" defTabSz="914400" rtl="0" eaLnBrk="1" latinLnBrk="0" hangingPunct="1">
+              <a:lnSpc>
+                <a:spcPct val="90000"/>
+              </a:lnSpc>
+              <a:spcBef>
+                <a:spcPts val="500"/>
+              </a:spcBef>
+              <a:buFont typeface="Arial" panose="020B0604020202020204" pitchFamily="34" charset="0"/>
+              <a:buChar char="•"/>
+              <a:defRPr sz="1800" kern="1200">
+                <a:solidFill>
+                  <a:schemeClr val="tx1"/>
+                </a:solidFill>
+                <a:latin typeface="+mn-lt"/>
+                <a:ea typeface="+mn-ea"/>
+                <a:cs typeface="+mn-cs"/>
+              </a:defRPr>
+            </a:lvl8pPr>
+            <a:lvl9pPr marL="3886200" indent="-228600" algn="l" defTabSz="914400" rtl="0" eaLnBrk="1" latinLnBrk="0" hangingPunct="1">
+              <a:lnSpc>
+                <a:spcPct val="90000"/>
+              </a:lnSpc>
+              <a:spcBef>
+                <a:spcPts val="500"/>
+              </a:spcBef>
+              <a:buFont typeface="Arial" panose="020B0604020202020204" pitchFamily="34" charset="0"/>
+              <a:buChar char="•"/>
+              <a:defRPr sz="1800" kern="1200">
+                <a:solidFill>
+                  <a:schemeClr val="tx1"/>
+                </a:solidFill>
+                <a:latin typeface="+mn-lt"/>
+                <a:ea typeface="+mn-ea"/>
+                <a:cs typeface="+mn-cs"/>
+              </a:defRPr>
+            </a:lvl9pPr>
+          </a:lstStyle>
+          <a:p>
+            <a:r>
+              <a:rPr lang="en-US" sz="1100" dirty="0"/>
+              <a:t>Screen capture of code changes highlighted</a:t>
+            </a:r>
+          </a:p>
+        </p:txBody>
+      </p:sp>
+      <p:sp>
+        <p:nvSpPr>
+          <p:cNvPr id="10" name="Content Placeholder 2">
+            <a:extLst>
+              <a:ext uri="{FF2B5EF4-FFF2-40B4-BE49-F238E27FC236}">
+                <a16:creationId xmlns:a16="http://schemas.microsoft.com/office/drawing/2014/main" id="{7410294E-24CA-493F-4F16-1CEC7DD005A3}"/>
+              </a:ext>
+            </a:extLst>
+          </p:cNvPr>
+          <p:cNvSpPr txBox="1">
+            <a:spLocks/>
+          </p:cNvSpPr>
+          <p:nvPr/>
+        </p:nvSpPr>
+        <p:spPr>
+          <a:xfrm>
+            <a:off x="879958" y="4067250"/>
+            <a:ext cx="2841346" cy="1947559"/>
+          </a:xfrm>
+          <a:prstGeom prst="rect">
+            <a:avLst/>
+          </a:prstGeom>
+        </p:spPr>
+        <p:txBody>
+          <a:bodyPr vert="horz" lIns="91440" tIns="45720" rIns="91440" bIns="45720" rtlCol="0">
+            <a:normAutofit/>
+          </a:bodyPr>
+          <a:lstStyle>
+            <a:lvl1pPr marL="228600" indent="-228600" algn="l" defTabSz="914400" rtl="0" eaLnBrk="1" latinLnBrk="0" hangingPunct="1">
+              <a:lnSpc>
+                <a:spcPct val="90000"/>
+              </a:lnSpc>
+              <a:spcBef>
+                <a:spcPts val="1000"/>
+              </a:spcBef>
+              <a:buFont typeface="Arial" panose="020B0604020202020204" pitchFamily="34" charset="0"/>
+              <a:buChar char="•"/>
+              <a:defRPr sz="2800" kern="1200">
+                <a:solidFill>
+                  <a:schemeClr val="tx1"/>
+                </a:solidFill>
+                <a:latin typeface="+mn-lt"/>
+                <a:ea typeface="+mn-ea"/>
+                <a:cs typeface="+mn-cs"/>
+              </a:defRPr>
+            </a:lvl1pPr>
+            <a:lvl2pPr marL="685800" indent="-228600" algn="l" defTabSz="914400" rtl="0" eaLnBrk="1" latinLnBrk="0" hangingPunct="1">
+              <a:lnSpc>
+                <a:spcPct val="90000"/>
+              </a:lnSpc>
+              <a:spcBef>
+                <a:spcPts val="500"/>
+              </a:spcBef>
+              <a:buFont typeface="Arial" panose="020B0604020202020204" pitchFamily="34" charset="0"/>
+              <a:buChar char="•"/>
+              <a:defRPr sz="2400" kern="1200">
+                <a:solidFill>
+                  <a:schemeClr val="tx1"/>
+                </a:solidFill>
+                <a:latin typeface="+mn-lt"/>
+                <a:ea typeface="+mn-ea"/>
+                <a:cs typeface="+mn-cs"/>
+              </a:defRPr>
+            </a:lvl2pPr>
+            <a:lvl3pPr marL="1143000" indent="-228600" algn="l" defTabSz="914400" rtl="0" eaLnBrk="1" latinLnBrk="0" hangingPunct="1">
+              <a:lnSpc>
+                <a:spcPct val="90000"/>
+              </a:lnSpc>
+              <a:spcBef>
+                <a:spcPts val="500"/>
+              </a:spcBef>
+              <a:buFont typeface="Arial" panose="020B0604020202020204" pitchFamily="34" charset="0"/>
+              <a:buChar char="•"/>
+              <a:defRPr sz="2000" kern="1200">
+                <a:solidFill>
+                  <a:schemeClr val="tx1"/>
+                </a:solidFill>
+                <a:latin typeface="+mn-lt"/>
+                <a:ea typeface="+mn-ea"/>
+                <a:cs typeface="+mn-cs"/>
+              </a:defRPr>
+            </a:lvl3pPr>
+            <a:lvl4pPr marL="1600200" indent="-228600" algn="l" defTabSz="914400" rtl="0" eaLnBrk="1" latinLnBrk="0" hangingPunct="1">
+              <a:lnSpc>
+                <a:spcPct val="90000"/>
+              </a:lnSpc>
+              <a:spcBef>
+                <a:spcPts val="500"/>
+              </a:spcBef>
+              <a:buFont typeface="Arial" panose="020B0604020202020204" pitchFamily="34" charset="0"/>
+              <a:buChar char="•"/>
+              <a:defRPr sz="1800" kern="1200">
+                <a:solidFill>
+                  <a:schemeClr val="tx1"/>
+                </a:solidFill>
+                <a:latin typeface="+mn-lt"/>
+                <a:ea typeface="+mn-ea"/>
+                <a:cs typeface="+mn-cs"/>
+              </a:defRPr>
+            </a:lvl4pPr>
+            <a:lvl5pPr marL="2057400" indent="-228600" algn="l" defTabSz="914400" rtl="0" eaLnBrk="1" latinLnBrk="0" hangingPunct="1">
+              <a:lnSpc>
+                <a:spcPct val="90000"/>
+              </a:lnSpc>
+              <a:spcBef>
+                <a:spcPts val="500"/>
+              </a:spcBef>
+              <a:buFont typeface="Arial" panose="020B0604020202020204" pitchFamily="34" charset="0"/>
+              <a:buChar char="•"/>
+              <a:defRPr sz="1800" kern="1200">
+                <a:solidFill>
+                  <a:schemeClr val="tx1"/>
+                </a:solidFill>
+                <a:latin typeface="+mn-lt"/>
+                <a:ea typeface="+mn-ea"/>
+                <a:cs typeface="+mn-cs"/>
+              </a:defRPr>
+            </a:lvl5pPr>
+            <a:lvl6pPr marL="2514600" indent="-228600" algn="l" defTabSz="914400" rtl="0" eaLnBrk="1" latinLnBrk="0" hangingPunct="1">
+              <a:lnSpc>
+                <a:spcPct val="90000"/>
+              </a:lnSpc>
+              <a:spcBef>
+                <a:spcPts val="500"/>
+              </a:spcBef>
+              <a:buFont typeface="Arial" panose="020B0604020202020204" pitchFamily="34" charset="0"/>
+              <a:buChar char="•"/>
+              <a:defRPr sz="1800" kern="1200">
+                <a:solidFill>
+                  <a:schemeClr val="tx1"/>
+                </a:solidFill>
+                <a:latin typeface="+mn-lt"/>
+                <a:ea typeface="+mn-ea"/>
+                <a:cs typeface="+mn-cs"/>
+              </a:defRPr>
+            </a:lvl6pPr>
+            <a:lvl7pPr marL="2971800" indent="-228600" algn="l" defTabSz="914400" rtl="0" eaLnBrk="1" latinLnBrk="0" hangingPunct="1">
+              <a:lnSpc>
+                <a:spcPct val="90000"/>
+              </a:lnSpc>
+              <a:spcBef>
+                <a:spcPts val="500"/>
+              </a:spcBef>
+              <a:buFont typeface="Arial" panose="020B0604020202020204" pitchFamily="34" charset="0"/>
+              <a:buChar char="•"/>
+              <a:defRPr sz="1800" kern="1200">
+                <a:solidFill>
+                  <a:schemeClr val="tx1"/>
+                </a:solidFill>
+                <a:latin typeface="+mn-lt"/>
+                <a:ea typeface="+mn-ea"/>
+                <a:cs typeface="+mn-cs"/>
+              </a:defRPr>
+            </a:lvl7pPr>
+            <a:lvl8pPr marL="3429000" indent="-228600" algn="l" defTabSz="914400" rtl="0" eaLnBrk="1" latinLnBrk="0" hangingPunct="1">
+              <a:lnSpc>
+                <a:spcPct val="90000"/>
+              </a:lnSpc>
+              <a:spcBef>
+                <a:spcPts val="500"/>
+              </a:spcBef>
+              <a:buFont typeface="Arial" panose="020B0604020202020204" pitchFamily="34" charset="0"/>
+              <a:buChar char="•"/>
+              <a:defRPr sz="1800" kern="1200">
+                <a:solidFill>
+                  <a:schemeClr val="tx1"/>
+                </a:solidFill>
+                <a:latin typeface="+mn-lt"/>
+                <a:ea typeface="+mn-ea"/>
+                <a:cs typeface="+mn-cs"/>
+              </a:defRPr>
+            </a:lvl8pPr>
+            <a:lvl9pPr marL="3886200" indent="-228600" algn="l" defTabSz="914400" rtl="0" eaLnBrk="1" latinLnBrk="0" hangingPunct="1">
+              <a:lnSpc>
+                <a:spcPct val="90000"/>
+              </a:lnSpc>
+              <a:spcBef>
+                <a:spcPts val="500"/>
+              </a:spcBef>
+              <a:buFont typeface="Arial" panose="020B0604020202020204" pitchFamily="34" charset="0"/>
+              <a:buChar char="•"/>
+              <a:defRPr sz="1800" kern="1200">
+                <a:solidFill>
+                  <a:schemeClr val="tx1"/>
+                </a:solidFill>
+                <a:latin typeface="+mn-lt"/>
+                <a:ea typeface="+mn-ea"/>
+                <a:cs typeface="+mn-cs"/>
+              </a:defRPr>
+            </a:lvl9pPr>
+          </a:lstStyle>
+          <a:p>
+            <a:r>
+              <a:rPr lang="en-US" sz="1100" dirty="0"/>
+              <a:t>Screen capture demonstrating unit test passing</a:t>
+            </a:r>
+          </a:p>
+        </p:txBody>
+      </p:sp>
+      <p:sp>
+        <p:nvSpPr>
+          <p:cNvPr id="12" name="Content Placeholder 2">
+            <a:extLst>
+              <a:ext uri="{FF2B5EF4-FFF2-40B4-BE49-F238E27FC236}">
+                <a16:creationId xmlns:a16="http://schemas.microsoft.com/office/drawing/2014/main" id="{BD720192-8BB4-F975-EC4A-2E4694911511}"/>
+              </a:ext>
+            </a:extLst>
+          </p:cNvPr>
+          <p:cNvSpPr txBox="1">
+            <a:spLocks/>
+          </p:cNvSpPr>
+          <p:nvPr/>
+        </p:nvSpPr>
+        <p:spPr>
+          <a:xfrm>
+            <a:off x="6417390" y="4067250"/>
+            <a:ext cx="2841346" cy="1947560"/>
+          </a:xfrm>
+          <a:prstGeom prst="rect">
+            <a:avLst/>
+          </a:prstGeom>
+        </p:spPr>
+        <p:txBody>
+          <a:bodyPr vert="horz" lIns="91440" tIns="45720" rIns="91440" bIns="45720" rtlCol="0">
+            <a:normAutofit/>
+          </a:bodyPr>
+          <a:lstStyle>
+            <a:lvl1pPr marL="228600" indent="-228600" algn="l" defTabSz="914400" rtl="0" eaLnBrk="1" latinLnBrk="0" hangingPunct="1">
+              <a:lnSpc>
+                <a:spcPct val="90000"/>
+              </a:lnSpc>
+              <a:spcBef>
+                <a:spcPts val="1000"/>
+              </a:spcBef>
+              <a:buFont typeface="Arial" panose="020B0604020202020204" pitchFamily="34" charset="0"/>
+              <a:buChar char="•"/>
+              <a:defRPr sz="2800" kern="1200">
+                <a:solidFill>
+                  <a:schemeClr val="tx1"/>
+                </a:solidFill>
+                <a:latin typeface="+mn-lt"/>
+                <a:ea typeface="+mn-ea"/>
+                <a:cs typeface="+mn-cs"/>
+              </a:defRPr>
+            </a:lvl1pPr>
+            <a:lvl2pPr marL="685800" indent="-228600" algn="l" defTabSz="914400" rtl="0" eaLnBrk="1" latinLnBrk="0" hangingPunct="1">
+              <a:lnSpc>
+                <a:spcPct val="90000"/>
+              </a:lnSpc>
+              <a:spcBef>
+                <a:spcPts val="500"/>
+              </a:spcBef>
+              <a:buFont typeface="Arial" panose="020B0604020202020204" pitchFamily="34" charset="0"/>
+              <a:buChar char="•"/>
+              <a:defRPr sz="2400" kern="1200">
+                <a:solidFill>
+                  <a:schemeClr val="tx1"/>
+                </a:solidFill>
+                <a:latin typeface="+mn-lt"/>
+                <a:ea typeface="+mn-ea"/>
+                <a:cs typeface="+mn-cs"/>
+              </a:defRPr>
+            </a:lvl2pPr>
+            <a:lvl3pPr marL="1143000" indent="-228600" algn="l" defTabSz="914400" rtl="0" eaLnBrk="1" latinLnBrk="0" hangingPunct="1">
+              <a:lnSpc>
+                <a:spcPct val="90000"/>
+              </a:lnSpc>
+              <a:spcBef>
+                <a:spcPts val="500"/>
+              </a:spcBef>
+              <a:buFont typeface="Arial" panose="020B0604020202020204" pitchFamily="34" charset="0"/>
+              <a:buChar char="•"/>
+              <a:defRPr sz="2000" kern="1200">
+                <a:solidFill>
+                  <a:schemeClr val="tx1"/>
+                </a:solidFill>
+                <a:latin typeface="+mn-lt"/>
+                <a:ea typeface="+mn-ea"/>
+                <a:cs typeface="+mn-cs"/>
+              </a:defRPr>
+            </a:lvl3pPr>
+            <a:lvl4pPr marL="1600200" indent="-228600" algn="l" defTabSz="914400" rtl="0" eaLnBrk="1" latinLnBrk="0" hangingPunct="1">
+              <a:lnSpc>
+                <a:spcPct val="90000"/>
+              </a:lnSpc>
+              <a:spcBef>
+                <a:spcPts val="500"/>
+              </a:spcBef>
+              <a:buFont typeface="Arial" panose="020B0604020202020204" pitchFamily="34" charset="0"/>
+              <a:buChar char="•"/>
+              <a:defRPr sz="1800" kern="1200">
+                <a:solidFill>
+                  <a:schemeClr val="tx1"/>
+                </a:solidFill>
+                <a:latin typeface="+mn-lt"/>
+                <a:ea typeface="+mn-ea"/>
+                <a:cs typeface="+mn-cs"/>
+              </a:defRPr>
+            </a:lvl4pPr>
+            <a:lvl5pPr marL="2057400" indent="-228600" algn="l" defTabSz="914400" rtl="0" eaLnBrk="1" latinLnBrk="0" hangingPunct="1">
+              <a:lnSpc>
+                <a:spcPct val="90000"/>
+              </a:lnSpc>
+              <a:spcBef>
+                <a:spcPts val="500"/>
+              </a:spcBef>
+              <a:buFont typeface="Arial" panose="020B0604020202020204" pitchFamily="34" charset="0"/>
+              <a:buChar char="•"/>
+              <a:defRPr sz="1800" kern="1200">
+                <a:solidFill>
+                  <a:schemeClr val="tx1"/>
+                </a:solidFill>
+                <a:latin typeface="+mn-lt"/>
+                <a:ea typeface="+mn-ea"/>
+                <a:cs typeface="+mn-cs"/>
+              </a:defRPr>
+            </a:lvl5pPr>
+            <a:lvl6pPr marL="2514600" indent="-228600" algn="l" defTabSz="914400" rtl="0" eaLnBrk="1" latinLnBrk="0" hangingPunct="1">
+              <a:lnSpc>
+                <a:spcPct val="90000"/>
+              </a:lnSpc>
+              <a:spcBef>
+                <a:spcPts val="500"/>
+              </a:spcBef>
+              <a:buFont typeface="Arial" panose="020B0604020202020204" pitchFamily="34" charset="0"/>
+              <a:buChar char="•"/>
+              <a:defRPr sz="1800" kern="1200">
+                <a:solidFill>
+                  <a:schemeClr val="tx1"/>
+                </a:solidFill>
+                <a:latin typeface="+mn-lt"/>
+                <a:ea typeface="+mn-ea"/>
+                <a:cs typeface="+mn-cs"/>
+              </a:defRPr>
+            </a:lvl6pPr>
+            <a:lvl7pPr marL="2971800" indent="-228600" algn="l" defTabSz="914400" rtl="0" eaLnBrk="1" latinLnBrk="0" hangingPunct="1">
+              <a:lnSpc>
+                <a:spcPct val="90000"/>
+              </a:lnSpc>
+              <a:spcBef>
+                <a:spcPts val="500"/>
+              </a:spcBef>
+              <a:buFont typeface="Arial" panose="020B0604020202020204" pitchFamily="34" charset="0"/>
+              <a:buChar char="•"/>
+              <a:defRPr sz="1800" kern="1200">
+                <a:solidFill>
+                  <a:schemeClr val="tx1"/>
+                </a:solidFill>
+                <a:latin typeface="+mn-lt"/>
+                <a:ea typeface="+mn-ea"/>
+                <a:cs typeface="+mn-cs"/>
+              </a:defRPr>
+            </a:lvl7pPr>
+            <a:lvl8pPr marL="3429000" indent="-228600" algn="l" defTabSz="914400" rtl="0" eaLnBrk="1" latinLnBrk="0" hangingPunct="1">
+              <a:lnSpc>
+                <a:spcPct val="90000"/>
+              </a:lnSpc>
+              <a:spcBef>
+                <a:spcPts val="500"/>
+              </a:spcBef>
+              <a:buFont typeface="Arial" panose="020B0604020202020204" pitchFamily="34" charset="0"/>
+              <a:buChar char="•"/>
+              <a:defRPr sz="1800" kern="1200">
+                <a:solidFill>
+                  <a:schemeClr val="tx1"/>
+                </a:solidFill>
+                <a:latin typeface="+mn-lt"/>
+                <a:ea typeface="+mn-ea"/>
+                <a:cs typeface="+mn-cs"/>
+              </a:defRPr>
+            </a:lvl8pPr>
+            <a:lvl9pPr marL="3886200" indent="-228600" algn="l" defTabSz="914400" rtl="0" eaLnBrk="1" latinLnBrk="0" hangingPunct="1">
+              <a:lnSpc>
+                <a:spcPct val="90000"/>
+              </a:lnSpc>
+              <a:spcBef>
+                <a:spcPts val="500"/>
+              </a:spcBef>
+              <a:buFont typeface="Arial" panose="020B0604020202020204" pitchFamily="34" charset="0"/>
+              <a:buChar char="•"/>
+              <a:defRPr sz="1800" kern="1200">
+                <a:solidFill>
+                  <a:schemeClr val="tx1"/>
+                </a:solidFill>
+                <a:latin typeface="+mn-lt"/>
+                <a:ea typeface="+mn-ea"/>
+                <a:cs typeface="+mn-cs"/>
+              </a:defRPr>
+            </a:lvl9pPr>
+          </a:lstStyle>
+          <a:p>
+            <a:r>
+              <a:rPr lang="en-US" sz="1100" dirty="0"/>
+              <a:t>Screen capture illustrating all previous unit tests still pass after code changes</a:t>
+            </a:r>
+          </a:p>
+        </p:txBody>
+      </p:sp>
+      <p:pic>
+        <p:nvPicPr>
+          <p:cNvPr id="16" name="Picture 15" descr="A black background with different colored symbols&#10;&#10;AI-generated content may be incorrect.">
+            <a:extLst>
+              <a:ext uri="{FF2B5EF4-FFF2-40B4-BE49-F238E27FC236}">
+                <a16:creationId xmlns:a16="http://schemas.microsoft.com/office/drawing/2014/main" id="{1D3D1FCB-48E2-E057-417E-152D2159C659}"/>
+              </a:ext>
+            </a:extLst>
+          </p:cNvPr>
+          <p:cNvPicPr>
+            <a:picLocks noChangeAspect="1"/>
+          </p:cNvPicPr>
+          <p:nvPr/>
+        </p:nvPicPr>
+        <p:blipFill>
+          <a:blip r:embed="rId2"/>
+          <a:stretch>
+            <a:fillRect/>
+          </a:stretch>
+        </p:blipFill>
+        <p:spPr>
+          <a:xfrm>
+            <a:off x="300267" y="2723289"/>
+            <a:ext cx="3934744" cy="401542"/>
+          </a:xfrm>
+          <a:prstGeom prst="rect">
+            <a:avLst/>
+          </a:prstGeom>
+        </p:spPr>
+      </p:pic>
+      <p:pic>
+        <p:nvPicPr>
+          <p:cNvPr id="18" name="Picture 17" descr="A computer screen shot of a computer program&#10;&#10;AI-generated content may be incorrect.">
+            <a:extLst>
+              <a:ext uri="{FF2B5EF4-FFF2-40B4-BE49-F238E27FC236}">
+                <a16:creationId xmlns:a16="http://schemas.microsoft.com/office/drawing/2014/main" id="{C0B98F38-8BEA-7844-6FB8-ACC546698CA0}"/>
+              </a:ext>
+            </a:extLst>
+          </p:cNvPr>
+          <p:cNvPicPr>
+            <a:picLocks noChangeAspect="1"/>
+          </p:cNvPicPr>
+          <p:nvPr/>
+        </p:nvPicPr>
+        <p:blipFill>
+          <a:blip r:embed="rId3"/>
+          <a:stretch>
+            <a:fillRect/>
+          </a:stretch>
+        </p:blipFill>
+        <p:spPr>
+          <a:xfrm>
+            <a:off x="4388385" y="2289112"/>
+            <a:ext cx="3901808" cy="1370884"/>
+          </a:xfrm>
+          <a:prstGeom prst="rect">
+            <a:avLst/>
+          </a:prstGeom>
+        </p:spPr>
+      </p:pic>
+      <p:pic>
+        <p:nvPicPr>
+          <p:cNvPr id="19" name="Picture 18" descr="A screen shot of a computer program&#10;&#10;AI-generated content may be incorrect.">
+            <a:extLst>
+              <a:ext uri="{FF2B5EF4-FFF2-40B4-BE49-F238E27FC236}">
+                <a16:creationId xmlns:a16="http://schemas.microsoft.com/office/drawing/2014/main" id="{799C5071-D25A-E324-3B32-9DB4DCF73B81}"/>
+              </a:ext>
+            </a:extLst>
+          </p:cNvPr>
+          <p:cNvPicPr>
+            <a:picLocks noChangeAspect="1"/>
+          </p:cNvPicPr>
+          <p:nvPr/>
+        </p:nvPicPr>
+        <p:blipFill>
+          <a:blip r:embed="rId4"/>
+          <a:stretch>
+            <a:fillRect/>
+          </a:stretch>
+        </p:blipFill>
+        <p:spPr>
+          <a:xfrm>
+            <a:off x="8301841" y="2286918"/>
+            <a:ext cx="3896873" cy="1375274"/>
+          </a:xfrm>
+          <a:prstGeom prst="rect">
+            <a:avLst/>
+          </a:prstGeom>
+        </p:spPr>
+      </p:pic>
+      <p:pic>
+        <p:nvPicPr>
+          <p:cNvPr id="20" name="Picture 19">
+            <a:extLst>
+              <a:ext uri="{FF2B5EF4-FFF2-40B4-BE49-F238E27FC236}">
+                <a16:creationId xmlns:a16="http://schemas.microsoft.com/office/drawing/2014/main" id="{3529170C-3C99-6EDB-A221-BAE5AA5F9838}"/>
+              </a:ext>
+            </a:extLst>
+          </p:cNvPr>
+          <p:cNvPicPr>
+            <a:picLocks noChangeAspect="1"/>
+          </p:cNvPicPr>
+          <p:nvPr/>
+        </p:nvPicPr>
+        <p:blipFill>
+          <a:blip r:embed="rId5"/>
+          <a:stretch>
+            <a:fillRect/>
+          </a:stretch>
+        </p:blipFill>
+        <p:spPr>
+          <a:xfrm>
+            <a:off x="301643" y="5043717"/>
+            <a:ext cx="4859242" cy="259241"/>
+          </a:xfrm>
+          <a:prstGeom prst="rect">
+            <a:avLst/>
+          </a:prstGeom>
+        </p:spPr>
+      </p:pic>
+      <p:pic>
+        <p:nvPicPr>
+          <p:cNvPr id="21" name="Picture 20" descr="A screen shot of a computer code&#10;&#10;AI-generated content may be incorrect.">
+            <a:extLst>
+              <a:ext uri="{FF2B5EF4-FFF2-40B4-BE49-F238E27FC236}">
+                <a16:creationId xmlns:a16="http://schemas.microsoft.com/office/drawing/2014/main" id="{B255A5FA-8270-05C2-8C26-4BD7895BF09C}"/>
+              </a:ext>
+            </a:extLst>
+          </p:cNvPr>
+          <p:cNvPicPr>
+            <a:picLocks noChangeAspect="1"/>
+          </p:cNvPicPr>
+          <p:nvPr/>
+        </p:nvPicPr>
+        <p:blipFill>
+          <a:blip r:embed="rId6"/>
+          <a:stretch>
+            <a:fillRect/>
+          </a:stretch>
+        </p:blipFill>
+        <p:spPr>
+          <a:xfrm>
+            <a:off x="6684599" y="4512669"/>
+            <a:ext cx="3945645" cy="2101697"/>
+          </a:xfrm>
+          <a:prstGeom prst="rect">
+            <a:avLst/>
+          </a:prstGeom>
+        </p:spPr>
+      </p:pic>
+    </p:spTree>
+    <p:extLst>
+      <p:ext uri="{BB962C8B-B14F-4D97-AF65-F5344CB8AC3E}">
+        <p14:creationId xmlns:p14="http://schemas.microsoft.com/office/powerpoint/2010/main" val="487680904"/>
+      </p:ext>
+    </p:extLst>
+  </p:cSld>
+  <p:clrMapOvr>
+    <a:masterClrMapping/>
+  </p:clrMapOvr>
+</p:sld>
+</file>
+
+<file path=ppt/slides/slide14.xml><?xml version="1.0" encoding="utf-8"?>
+<p:sld xmlns:a="http://schemas.openxmlformats.org/drawingml/2006/main" xmlns:r="http://schemas.openxmlformats.org/officeDocument/2006/relationships" xmlns:p="http://schemas.openxmlformats.org/presentationml/2006/main">
+  <p:cSld>
+    <p:spTree>
+      <p:nvGrpSpPr>
+        <p:cNvPr id="1" name="">
+          <a:extLst>
+            <a:ext uri="{FF2B5EF4-FFF2-40B4-BE49-F238E27FC236}">
+              <a16:creationId xmlns:a16="http://schemas.microsoft.com/office/drawing/2014/main" id="{91965C68-9CDB-67B1-6972-A8F7980797C8}"/>
+            </a:ext>
+          </a:extLst>
+        </p:cNvPr>
+        <p:cNvGrpSpPr/>
+        <p:nvPr/>
+      </p:nvGrpSpPr>
+      <p:grpSpPr>
+        <a:xfrm>
+          <a:off x="0" y="0"/>
+          <a:ext cx="0" cy="0"/>
+          <a:chOff x="0" y="0"/>
+          <a:chExt cx="0" cy="0"/>
+        </a:xfrm>
+      </p:grpSpPr>
+      <p:sp>
+        <p:nvSpPr>
+          <p:cNvPr id="2" name="Title 1">
+            <a:extLst>
+              <a:ext uri="{FF2B5EF4-FFF2-40B4-BE49-F238E27FC236}">
+                <a16:creationId xmlns:a16="http://schemas.microsoft.com/office/drawing/2014/main" id="{B8E5A94E-A4BC-381A-3661-98B2A79FFCF0}"/>
+              </a:ext>
+            </a:extLst>
+          </p:cNvPr>
+          <p:cNvSpPr>
+            <a:spLocks noGrp="1"/>
+          </p:cNvSpPr>
+          <p:nvPr>
+            <p:ph type="title"/>
+          </p:nvPr>
+        </p:nvSpPr>
         <p:spPr/>
         <p:txBody>
-          <a:bodyPr/>
+          <a:bodyPr>
+            <a:normAutofit/>
+          </a:bodyPr>
           <a:lstStyle/>
           <a:p>
+            <a:r>
+              <a:rPr lang="en-US" sz="1600"/>
+              <a:t>Test ID: T-ADD-CPLX1</a:t>
+            </a:r>
+            <a:endParaRPr lang="en-US"/>
+          </a:p>
+          <a:p>
+            <a:r>
+              <a:rPr lang="en-US" sz="1600">
+                <a:ea typeface="+mj-lt"/>
+                <a:cs typeface="+mj-lt"/>
+              </a:rPr>
+              <a:t>Statement of unit test: Verify that adding two complex numbers returns the correct complex sum.</a:t>
+            </a:r>
+            <a:endParaRPr lang="en-US"/>
+          </a:p>
+          <a:p>
+            <a:r>
+              <a:rPr lang="en-US" sz="1600">
+                <a:ea typeface="+mj-lt"/>
+                <a:cs typeface="+mj-lt"/>
+              </a:rPr>
+              <a:t>Expected results: </a:t>
+            </a:r>
+            <a:r>
+              <a:rPr lang="en-US" sz="1600">
+                <a:latin typeface="Aptos Display"/>
+              </a:rPr>
+              <a:t>4 + j2</a:t>
+            </a:r>
             <a:endParaRPr lang="en-US"/>
           </a:p>
         </p:txBody>
       </p:sp>
+      <p:sp>
+        <p:nvSpPr>
+          <p:cNvPr id="3" name="Content Placeholder 2">
+            <a:extLst>
+              <a:ext uri="{FF2B5EF4-FFF2-40B4-BE49-F238E27FC236}">
+                <a16:creationId xmlns:a16="http://schemas.microsoft.com/office/drawing/2014/main" id="{0EC1E6A1-6F59-725B-1586-C65B7E5950E8}"/>
+              </a:ext>
+            </a:extLst>
+          </p:cNvPr>
+          <p:cNvSpPr>
+            <a:spLocks noGrp="1"/>
+          </p:cNvSpPr>
+          <p:nvPr>
+            <p:ph idx="1"/>
+          </p:nvPr>
+        </p:nvSpPr>
+        <p:spPr>
+          <a:xfrm>
+            <a:off x="838200" y="1825625"/>
+            <a:ext cx="2841346" cy="4351338"/>
+          </a:xfrm>
+        </p:spPr>
+        <p:txBody>
+          <a:bodyPr>
+            <a:normAutofit/>
+          </a:bodyPr>
+          <a:lstStyle/>
+          <a:p>
+            <a:r>
+              <a:rPr lang="en-US" sz="1100" dirty="0"/>
+              <a:t>Screen capture of unit test code:</a:t>
+            </a:r>
+          </a:p>
+        </p:txBody>
+      </p:sp>
+      <p:sp>
+        <p:nvSpPr>
+          <p:cNvPr id="7" name="Content Placeholder 2">
+            <a:extLst>
+              <a:ext uri="{FF2B5EF4-FFF2-40B4-BE49-F238E27FC236}">
+                <a16:creationId xmlns:a16="http://schemas.microsoft.com/office/drawing/2014/main" id="{8110D075-3585-94E3-FBCC-FFBA849E898D}"/>
+              </a:ext>
+            </a:extLst>
+          </p:cNvPr>
+          <p:cNvSpPr txBox="1">
+            <a:spLocks/>
+          </p:cNvSpPr>
+          <p:nvPr/>
+        </p:nvSpPr>
+        <p:spPr>
+          <a:xfrm>
+            <a:off x="7788707" y="1825625"/>
+            <a:ext cx="2841346" cy="4351338"/>
+          </a:xfrm>
+          <a:prstGeom prst="rect">
+            <a:avLst/>
+          </a:prstGeom>
+        </p:spPr>
+        <p:txBody>
+          <a:bodyPr vert="horz" lIns="91440" tIns="45720" rIns="91440" bIns="45720" rtlCol="0" anchor="t">
+            <a:normAutofit/>
+          </a:bodyPr>
+          <a:lstStyle>
+            <a:lvl1pPr marL="228600" indent="-228600" algn="l" defTabSz="914400" rtl="0" eaLnBrk="1" latinLnBrk="0" hangingPunct="1">
+              <a:lnSpc>
+                <a:spcPct val="90000"/>
+              </a:lnSpc>
+              <a:spcBef>
+                <a:spcPts val="1000"/>
+              </a:spcBef>
+              <a:buFont typeface="Arial" panose="020B0604020202020204" pitchFamily="34" charset="0"/>
+              <a:buChar char="•"/>
+              <a:defRPr sz="2800" kern="1200">
+                <a:solidFill>
+                  <a:schemeClr val="tx1"/>
+                </a:solidFill>
+                <a:latin typeface="+mn-lt"/>
+                <a:ea typeface="+mn-ea"/>
+                <a:cs typeface="+mn-cs"/>
+              </a:defRPr>
+            </a:lvl1pPr>
+            <a:lvl2pPr marL="685800" indent="-228600" algn="l" defTabSz="914400" rtl="0" eaLnBrk="1" latinLnBrk="0" hangingPunct="1">
+              <a:lnSpc>
+                <a:spcPct val="90000"/>
+              </a:lnSpc>
+              <a:spcBef>
+                <a:spcPts val="500"/>
+              </a:spcBef>
+              <a:buFont typeface="Arial" panose="020B0604020202020204" pitchFamily="34" charset="0"/>
+              <a:buChar char="•"/>
+              <a:defRPr sz="2400" kern="1200">
+                <a:solidFill>
+                  <a:schemeClr val="tx1"/>
+                </a:solidFill>
+                <a:latin typeface="+mn-lt"/>
+                <a:ea typeface="+mn-ea"/>
+                <a:cs typeface="+mn-cs"/>
+              </a:defRPr>
+            </a:lvl2pPr>
+            <a:lvl3pPr marL="1143000" indent="-228600" algn="l" defTabSz="914400" rtl="0" eaLnBrk="1" latinLnBrk="0" hangingPunct="1">
+              <a:lnSpc>
+                <a:spcPct val="90000"/>
+              </a:lnSpc>
+              <a:spcBef>
+                <a:spcPts val="500"/>
+              </a:spcBef>
+              <a:buFont typeface="Arial" panose="020B0604020202020204" pitchFamily="34" charset="0"/>
+              <a:buChar char="•"/>
+              <a:defRPr sz="2000" kern="1200">
+                <a:solidFill>
+                  <a:schemeClr val="tx1"/>
+                </a:solidFill>
+                <a:latin typeface="+mn-lt"/>
+                <a:ea typeface="+mn-ea"/>
+                <a:cs typeface="+mn-cs"/>
+              </a:defRPr>
+            </a:lvl3pPr>
+            <a:lvl4pPr marL="1600200" indent="-228600" algn="l" defTabSz="914400" rtl="0" eaLnBrk="1" latinLnBrk="0" hangingPunct="1">
+              <a:lnSpc>
+                <a:spcPct val="90000"/>
+              </a:lnSpc>
+              <a:spcBef>
+                <a:spcPts val="500"/>
+              </a:spcBef>
+              <a:buFont typeface="Arial" panose="020B0604020202020204" pitchFamily="34" charset="0"/>
+              <a:buChar char="•"/>
+              <a:defRPr sz="1800" kern="1200">
+                <a:solidFill>
+                  <a:schemeClr val="tx1"/>
+                </a:solidFill>
+                <a:latin typeface="+mn-lt"/>
+                <a:ea typeface="+mn-ea"/>
+                <a:cs typeface="+mn-cs"/>
+              </a:defRPr>
+            </a:lvl4pPr>
+            <a:lvl5pPr marL="2057400" indent="-228600" algn="l" defTabSz="914400" rtl="0" eaLnBrk="1" latinLnBrk="0" hangingPunct="1">
+              <a:lnSpc>
+                <a:spcPct val="90000"/>
+              </a:lnSpc>
+              <a:spcBef>
+                <a:spcPts val="500"/>
+              </a:spcBef>
+              <a:buFont typeface="Arial" panose="020B0604020202020204" pitchFamily="34" charset="0"/>
+              <a:buChar char="•"/>
+              <a:defRPr sz="1800" kern="1200">
+                <a:solidFill>
+                  <a:schemeClr val="tx1"/>
+                </a:solidFill>
+                <a:latin typeface="+mn-lt"/>
+                <a:ea typeface="+mn-ea"/>
+                <a:cs typeface="+mn-cs"/>
+              </a:defRPr>
+            </a:lvl5pPr>
+            <a:lvl6pPr marL="2514600" indent="-228600" algn="l" defTabSz="914400" rtl="0" eaLnBrk="1" latinLnBrk="0" hangingPunct="1">
+              <a:lnSpc>
+                <a:spcPct val="90000"/>
+              </a:lnSpc>
+              <a:spcBef>
+                <a:spcPts val="500"/>
+              </a:spcBef>
+              <a:buFont typeface="Arial" panose="020B0604020202020204" pitchFamily="34" charset="0"/>
+              <a:buChar char="•"/>
+              <a:defRPr sz="1800" kern="1200">
+                <a:solidFill>
+                  <a:schemeClr val="tx1"/>
+                </a:solidFill>
+                <a:latin typeface="+mn-lt"/>
+                <a:ea typeface="+mn-ea"/>
+                <a:cs typeface="+mn-cs"/>
+              </a:defRPr>
+            </a:lvl6pPr>
+            <a:lvl7pPr marL="2971800" indent="-228600" algn="l" defTabSz="914400" rtl="0" eaLnBrk="1" latinLnBrk="0" hangingPunct="1">
+              <a:lnSpc>
+                <a:spcPct val="90000"/>
+              </a:lnSpc>
+              <a:spcBef>
+                <a:spcPts val="500"/>
+              </a:spcBef>
+              <a:buFont typeface="Arial" panose="020B0604020202020204" pitchFamily="34" charset="0"/>
+              <a:buChar char="•"/>
+              <a:defRPr sz="1800" kern="1200">
+                <a:solidFill>
+                  <a:schemeClr val="tx1"/>
+                </a:solidFill>
+                <a:latin typeface="+mn-lt"/>
+                <a:ea typeface="+mn-ea"/>
+                <a:cs typeface="+mn-cs"/>
+              </a:defRPr>
+            </a:lvl7pPr>
+            <a:lvl8pPr marL="3429000" indent="-228600" algn="l" defTabSz="914400" rtl="0" eaLnBrk="1" latinLnBrk="0" hangingPunct="1">
+              <a:lnSpc>
+                <a:spcPct val="90000"/>
+              </a:lnSpc>
+              <a:spcBef>
+                <a:spcPts val="500"/>
+              </a:spcBef>
+              <a:buFont typeface="Arial" panose="020B0604020202020204" pitchFamily="34" charset="0"/>
+              <a:buChar char="•"/>
+              <a:defRPr sz="1800" kern="1200">
+                <a:solidFill>
+                  <a:schemeClr val="tx1"/>
+                </a:solidFill>
+                <a:latin typeface="+mn-lt"/>
+                <a:ea typeface="+mn-ea"/>
+                <a:cs typeface="+mn-cs"/>
+              </a:defRPr>
+            </a:lvl8pPr>
+            <a:lvl9pPr marL="3886200" indent="-228600" algn="l" defTabSz="914400" rtl="0" eaLnBrk="1" latinLnBrk="0" hangingPunct="1">
+              <a:lnSpc>
+                <a:spcPct val="90000"/>
+              </a:lnSpc>
+              <a:spcBef>
+                <a:spcPts val="500"/>
+              </a:spcBef>
+              <a:buFont typeface="Arial" panose="020B0604020202020204" pitchFamily="34" charset="0"/>
+              <a:buChar char="•"/>
+              <a:defRPr sz="1800" kern="1200">
+                <a:solidFill>
+                  <a:schemeClr val="tx1"/>
+                </a:solidFill>
+                <a:latin typeface="+mn-lt"/>
+                <a:ea typeface="+mn-ea"/>
+                <a:cs typeface="+mn-cs"/>
+              </a:defRPr>
+            </a:lvl9pPr>
+          </a:lstStyle>
+          <a:p>
+            <a:r>
+              <a:rPr lang="en-US" sz="1100"/>
+              <a:t>Code changes</a:t>
+            </a:r>
+            <a:br>
+              <a:rPr lang="en-US" sz="1100" dirty="0"/>
+            </a:br>
+            <a:endParaRPr lang="en-US" sz="1100" dirty="0"/>
+          </a:p>
+          <a:p>
+            <a:pPr marL="0" indent="0">
+              <a:buNone/>
+            </a:pPr>
+            <a:r>
+              <a:rPr lang="en-US" sz="1100" dirty="0"/>
+              <a:t>None required. Python natively handles addition for complex types, so the existing </a:t>
+            </a:r>
+            <a:r>
+              <a:rPr lang="en-US" sz="1100" dirty="0" err="1"/>
+              <a:t>stack.append</a:t>
+            </a:r>
+            <a:r>
+              <a:rPr lang="en-US" sz="1100" dirty="0"/>
+              <a:t>(a + b) works instantly.</a:t>
+            </a:r>
+            <a:endParaRPr lang="en-US" dirty="0"/>
+          </a:p>
+        </p:txBody>
+      </p:sp>
+      <p:sp>
+        <p:nvSpPr>
+          <p:cNvPr id="10" name="Content Placeholder 2">
+            <a:extLst>
+              <a:ext uri="{FF2B5EF4-FFF2-40B4-BE49-F238E27FC236}">
+                <a16:creationId xmlns:a16="http://schemas.microsoft.com/office/drawing/2014/main" id="{7410294E-24CA-493F-4F16-1CEC7DD005A3}"/>
+              </a:ext>
+            </a:extLst>
+          </p:cNvPr>
+          <p:cNvSpPr txBox="1">
+            <a:spLocks/>
+          </p:cNvSpPr>
+          <p:nvPr/>
+        </p:nvSpPr>
+        <p:spPr>
+          <a:xfrm>
+            <a:off x="879958" y="4067250"/>
+            <a:ext cx="2841346" cy="1947559"/>
+          </a:xfrm>
+          <a:prstGeom prst="rect">
+            <a:avLst/>
+          </a:prstGeom>
+        </p:spPr>
+        <p:txBody>
+          <a:bodyPr vert="horz" lIns="91440" tIns="45720" rIns="91440" bIns="45720" rtlCol="0">
+            <a:normAutofit/>
+          </a:bodyPr>
+          <a:lstStyle>
+            <a:lvl1pPr marL="228600" indent="-228600" algn="l" defTabSz="914400" rtl="0" eaLnBrk="1" latinLnBrk="0" hangingPunct="1">
+              <a:lnSpc>
+                <a:spcPct val="90000"/>
+              </a:lnSpc>
+              <a:spcBef>
+                <a:spcPts val="1000"/>
+              </a:spcBef>
+              <a:buFont typeface="Arial" panose="020B0604020202020204" pitchFamily="34" charset="0"/>
+              <a:buChar char="•"/>
+              <a:defRPr sz="2800" kern="1200">
+                <a:solidFill>
+                  <a:schemeClr val="tx1"/>
+                </a:solidFill>
+                <a:latin typeface="+mn-lt"/>
+                <a:ea typeface="+mn-ea"/>
+                <a:cs typeface="+mn-cs"/>
+              </a:defRPr>
+            </a:lvl1pPr>
+            <a:lvl2pPr marL="685800" indent="-228600" algn="l" defTabSz="914400" rtl="0" eaLnBrk="1" latinLnBrk="0" hangingPunct="1">
+              <a:lnSpc>
+                <a:spcPct val="90000"/>
+              </a:lnSpc>
+              <a:spcBef>
+                <a:spcPts val="500"/>
+              </a:spcBef>
+              <a:buFont typeface="Arial" panose="020B0604020202020204" pitchFamily="34" charset="0"/>
+              <a:buChar char="•"/>
+              <a:defRPr sz="2400" kern="1200">
+                <a:solidFill>
+                  <a:schemeClr val="tx1"/>
+                </a:solidFill>
+                <a:latin typeface="+mn-lt"/>
+                <a:ea typeface="+mn-ea"/>
+                <a:cs typeface="+mn-cs"/>
+              </a:defRPr>
+            </a:lvl2pPr>
+            <a:lvl3pPr marL="1143000" indent="-228600" algn="l" defTabSz="914400" rtl="0" eaLnBrk="1" latinLnBrk="0" hangingPunct="1">
+              <a:lnSpc>
+                <a:spcPct val="90000"/>
+              </a:lnSpc>
+              <a:spcBef>
+                <a:spcPts val="500"/>
+              </a:spcBef>
+              <a:buFont typeface="Arial" panose="020B0604020202020204" pitchFamily="34" charset="0"/>
+              <a:buChar char="•"/>
+              <a:defRPr sz="2000" kern="1200">
+                <a:solidFill>
+                  <a:schemeClr val="tx1"/>
+                </a:solidFill>
+                <a:latin typeface="+mn-lt"/>
+                <a:ea typeface="+mn-ea"/>
+                <a:cs typeface="+mn-cs"/>
+              </a:defRPr>
+            </a:lvl3pPr>
+            <a:lvl4pPr marL="1600200" indent="-228600" algn="l" defTabSz="914400" rtl="0" eaLnBrk="1" latinLnBrk="0" hangingPunct="1">
+              <a:lnSpc>
+                <a:spcPct val="90000"/>
+              </a:lnSpc>
+              <a:spcBef>
+                <a:spcPts val="500"/>
+              </a:spcBef>
+              <a:buFont typeface="Arial" panose="020B0604020202020204" pitchFamily="34" charset="0"/>
+              <a:buChar char="•"/>
+              <a:defRPr sz="1800" kern="1200">
+                <a:solidFill>
+                  <a:schemeClr val="tx1"/>
+                </a:solidFill>
+                <a:latin typeface="+mn-lt"/>
+                <a:ea typeface="+mn-ea"/>
+                <a:cs typeface="+mn-cs"/>
+              </a:defRPr>
+            </a:lvl4pPr>
+            <a:lvl5pPr marL="2057400" indent="-228600" algn="l" defTabSz="914400" rtl="0" eaLnBrk="1" latinLnBrk="0" hangingPunct="1">
+              <a:lnSpc>
+                <a:spcPct val="90000"/>
+              </a:lnSpc>
+              <a:spcBef>
+                <a:spcPts val="500"/>
+              </a:spcBef>
+              <a:buFont typeface="Arial" panose="020B0604020202020204" pitchFamily="34" charset="0"/>
+              <a:buChar char="•"/>
+              <a:defRPr sz="1800" kern="1200">
+                <a:solidFill>
+                  <a:schemeClr val="tx1"/>
+                </a:solidFill>
+                <a:latin typeface="+mn-lt"/>
+                <a:ea typeface="+mn-ea"/>
+                <a:cs typeface="+mn-cs"/>
+              </a:defRPr>
+            </a:lvl5pPr>
+            <a:lvl6pPr marL="2514600" indent="-228600" algn="l" defTabSz="914400" rtl="0" eaLnBrk="1" latinLnBrk="0" hangingPunct="1">
+              <a:lnSpc>
+                <a:spcPct val="90000"/>
+              </a:lnSpc>
+              <a:spcBef>
+                <a:spcPts val="500"/>
+              </a:spcBef>
+              <a:buFont typeface="Arial" panose="020B0604020202020204" pitchFamily="34" charset="0"/>
+              <a:buChar char="•"/>
+              <a:defRPr sz="1800" kern="1200">
+                <a:solidFill>
+                  <a:schemeClr val="tx1"/>
+                </a:solidFill>
+                <a:latin typeface="+mn-lt"/>
+                <a:ea typeface="+mn-ea"/>
+                <a:cs typeface="+mn-cs"/>
+              </a:defRPr>
+            </a:lvl6pPr>
+            <a:lvl7pPr marL="2971800" indent="-228600" algn="l" defTabSz="914400" rtl="0" eaLnBrk="1" latinLnBrk="0" hangingPunct="1">
+              <a:lnSpc>
+                <a:spcPct val="90000"/>
+              </a:lnSpc>
+              <a:spcBef>
+                <a:spcPts val="500"/>
+              </a:spcBef>
+              <a:buFont typeface="Arial" panose="020B0604020202020204" pitchFamily="34" charset="0"/>
+              <a:buChar char="•"/>
+              <a:defRPr sz="1800" kern="1200">
+                <a:solidFill>
+                  <a:schemeClr val="tx1"/>
+                </a:solidFill>
+                <a:latin typeface="+mn-lt"/>
+                <a:ea typeface="+mn-ea"/>
+                <a:cs typeface="+mn-cs"/>
+              </a:defRPr>
+            </a:lvl7pPr>
+            <a:lvl8pPr marL="3429000" indent="-228600" algn="l" defTabSz="914400" rtl="0" eaLnBrk="1" latinLnBrk="0" hangingPunct="1">
+              <a:lnSpc>
+                <a:spcPct val="90000"/>
+              </a:lnSpc>
+              <a:spcBef>
+                <a:spcPts val="500"/>
+              </a:spcBef>
+              <a:buFont typeface="Arial" panose="020B0604020202020204" pitchFamily="34" charset="0"/>
+              <a:buChar char="•"/>
+              <a:defRPr sz="1800" kern="1200">
+                <a:solidFill>
+                  <a:schemeClr val="tx1"/>
+                </a:solidFill>
+                <a:latin typeface="+mn-lt"/>
+                <a:ea typeface="+mn-ea"/>
+                <a:cs typeface="+mn-cs"/>
+              </a:defRPr>
+            </a:lvl8pPr>
+            <a:lvl9pPr marL="3886200" indent="-228600" algn="l" defTabSz="914400" rtl="0" eaLnBrk="1" latinLnBrk="0" hangingPunct="1">
+              <a:lnSpc>
+                <a:spcPct val="90000"/>
+              </a:lnSpc>
+              <a:spcBef>
+                <a:spcPts val="500"/>
+              </a:spcBef>
+              <a:buFont typeface="Arial" panose="020B0604020202020204" pitchFamily="34" charset="0"/>
+              <a:buChar char="•"/>
+              <a:defRPr sz="1800" kern="1200">
+                <a:solidFill>
+                  <a:schemeClr val="tx1"/>
+                </a:solidFill>
+                <a:latin typeface="+mn-lt"/>
+                <a:ea typeface="+mn-ea"/>
+                <a:cs typeface="+mn-cs"/>
+              </a:defRPr>
+            </a:lvl9pPr>
+          </a:lstStyle>
+          <a:p>
+            <a:r>
+              <a:rPr lang="en-US" sz="1100" dirty="0"/>
+              <a:t>Screen capture demonstrating unit test passing</a:t>
+            </a:r>
+          </a:p>
+        </p:txBody>
+      </p:sp>
+      <p:sp>
+        <p:nvSpPr>
+          <p:cNvPr id="12" name="Content Placeholder 2">
+            <a:extLst>
+              <a:ext uri="{FF2B5EF4-FFF2-40B4-BE49-F238E27FC236}">
+                <a16:creationId xmlns:a16="http://schemas.microsoft.com/office/drawing/2014/main" id="{BD720192-8BB4-F975-EC4A-2E4694911511}"/>
+              </a:ext>
+            </a:extLst>
+          </p:cNvPr>
+          <p:cNvSpPr txBox="1">
+            <a:spLocks/>
+          </p:cNvSpPr>
+          <p:nvPr/>
+        </p:nvSpPr>
+        <p:spPr>
+          <a:xfrm>
+            <a:off x="6417390" y="4067250"/>
+            <a:ext cx="2841346" cy="1947560"/>
+          </a:xfrm>
+          <a:prstGeom prst="rect">
+            <a:avLst/>
+          </a:prstGeom>
+        </p:spPr>
+        <p:txBody>
+          <a:bodyPr vert="horz" lIns="91440" tIns="45720" rIns="91440" bIns="45720" rtlCol="0">
+            <a:normAutofit/>
+          </a:bodyPr>
+          <a:lstStyle>
+            <a:lvl1pPr marL="228600" indent="-228600" algn="l" defTabSz="914400" rtl="0" eaLnBrk="1" latinLnBrk="0" hangingPunct="1">
+              <a:lnSpc>
+                <a:spcPct val="90000"/>
+              </a:lnSpc>
+              <a:spcBef>
+                <a:spcPts val="1000"/>
+              </a:spcBef>
+              <a:buFont typeface="Arial" panose="020B0604020202020204" pitchFamily="34" charset="0"/>
+              <a:buChar char="•"/>
+              <a:defRPr sz="2800" kern="1200">
+                <a:solidFill>
+                  <a:schemeClr val="tx1"/>
+                </a:solidFill>
+                <a:latin typeface="+mn-lt"/>
+                <a:ea typeface="+mn-ea"/>
+                <a:cs typeface="+mn-cs"/>
+              </a:defRPr>
+            </a:lvl1pPr>
+            <a:lvl2pPr marL="685800" indent="-228600" algn="l" defTabSz="914400" rtl="0" eaLnBrk="1" latinLnBrk="0" hangingPunct="1">
+              <a:lnSpc>
+                <a:spcPct val="90000"/>
+              </a:lnSpc>
+              <a:spcBef>
+                <a:spcPts val="500"/>
+              </a:spcBef>
+              <a:buFont typeface="Arial" panose="020B0604020202020204" pitchFamily="34" charset="0"/>
+              <a:buChar char="•"/>
+              <a:defRPr sz="2400" kern="1200">
+                <a:solidFill>
+                  <a:schemeClr val="tx1"/>
+                </a:solidFill>
+                <a:latin typeface="+mn-lt"/>
+                <a:ea typeface="+mn-ea"/>
+                <a:cs typeface="+mn-cs"/>
+              </a:defRPr>
+            </a:lvl2pPr>
+            <a:lvl3pPr marL="1143000" indent="-228600" algn="l" defTabSz="914400" rtl="0" eaLnBrk="1" latinLnBrk="0" hangingPunct="1">
+              <a:lnSpc>
+                <a:spcPct val="90000"/>
+              </a:lnSpc>
+              <a:spcBef>
+                <a:spcPts val="500"/>
+              </a:spcBef>
+              <a:buFont typeface="Arial" panose="020B0604020202020204" pitchFamily="34" charset="0"/>
+              <a:buChar char="•"/>
+              <a:defRPr sz="2000" kern="1200">
+                <a:solidFill>
+                  <a:schemeClr val="tx1"/>
+                </a:solidFill>
+                <a:latin typeface="+mn-lt"/>
+                <a:ea typeface="+mn-ea"/>
+                <a:cs typeface="+mn-cs"/>
+              </a:defRPr>
+            </a:lvl3pPr>
+            <a:lvl4pPr marL="1600200" indent="-228600" algn="l" defTabSz="914400" rtl="0" eaLnBrk="1" latinLnBrk="0" hangingPunct="1">
+              <a:lnSpc>
+                <a:spcPct val="90000"/>
+              </a:lnSpc>
+              <a:spcBef>
+                <a:spcPts val="500"/>
+              </a:spcBef>
+              <a:buFont typeface="Arial" panose="020B0604020202020204" pitchFamily="34" charset="0"/>
+              <a:buChar char="•"/>
+              <a:defRPr sz="1800" kern="1200">
+                <a:solidFill>
+                  <a:schemeClr val="tx1"/>
+                </a:solidFill>
+                <a:latin typeface="+mn-lt"/>
+                <a:ea typeface="+mn-ea"/>
+                <a:cs typeface="+mn-cs"/>
+              </a:defRPr>
+            </a:lvl4pPr>
+            <a:lvl5pPr marL="2057400" indent="-228600" algn="l" defTabSz="914400" rtl="0" eaLnBrk="1" latinLnBrk="0" hangingPunct="1">
+              <a:lnSpc>
+                <a:spcPct val="90000"/>
+              </a:lnSpc>
+              <a:spcBef>
+                <a:spcPts val="500"/>
+              </a:spcBef>
+              <a:buFont typeface="Arial" panose="020B0604020202020204" pitchFamily="34" charset="0"/>
+              <a:buChar char="•"/>
+              <a:defRPr sz="1800" kern="1200">
+                <a:solidFill>
+                  <a:schemeClr val="tx1"/>
+                </a:solidFill>
+                <a:latin typeface="+mn-lt"/>
+                <a:ea typeface="+mn-ea"/>
+                <a:cs typeface="+mn-cs"/>
+              </a:defRPr>
+            </a:lvl5pPr>
+            <a:lvl6pPr marL="2514600" indent="-228600" algn="l" defTabSz="914400" rtl="0" eaLnBrk="1" latinLnBrk="0" hangingPunct="1">
+              <a:lnSpc>
+                <a:spcPct val="90000"/>
+              </a:lnSpc>
+              <a:spcBef>
+                <a:spcPts val="500"/>
+              </a:spcBef>
+              <a:buFont typeface="Arial" panose="020B0604020202020204" pitchFamily="34" charset="0"/>
+              <a:buChar char="•"/>
+              <a:defRPr sz="1800" kern="1200">
+                <a:solidFill>
+                  <a:schemeClr val="tx1"/>
+                </a:solidFill>
+                <a:latin typeface="+mn-lt"/>
+                <a:ea typeface="+mn-ea"/>
+                <a:cs typeface="+mn-cs"/>
+              </a:defRPr>
+            </a:lvl6pPr>
+            <a:lvl7pPr marL="2971800" indent="-228600" algn="l" defTabSz="914400" rtl="0" eaLnBrk="1" latinLnBrk="0" hangingPunct="1">
+              <a:lnSpc>
+                <a:spcPct val="90000"/>
+              </a:lnSpc>
+              <a:spcBef>
+                <a:spcPts val="500"/>
+              </a:spcBef>
+              <a:buFont typeface="Arial" panose="020B0604020202020204" pitchFamily="34" charset="0"/>
+              <a:buChar char="•"/>
+              <a:defRPr sz="1800" kern="1200">
+                <a:solidFill>
+                  <a:schemeClr val="tx1"/>
+                </a:solidFill>
+                <a:latin typeface="+mn-lt"/>
+                <a:ea typeface="+mn-ea"/>
+                <a:cs typeface="+mn-cs"/>
+              </a:defRPr>
+            </a:lvl7pPr>
+            <a:lvl8pPr marL="3429000" indent="-228600" algn="l" defTabSz="914400" rtl="0" eaLnBrk="1" latinLnBrk="0" hangingPunct="1">
+              <a:lnSpc>
+                <a:spcPct val="90000"/>
+              </a:lnSpc>
+              <a:spcBef>
+                <a:spcPts val="500"/>
+              </a:spcBef>
+              <a:buFont typeface="Arial" panose="020B0604020202020204" pitchFamily="34" charset="0"/>
+              <a:buChar char="•"/>
+              <a:defRPr sz="1800" kern="1200">
+                <a:solidFill>
+                  <a:schemeClr val="tx1"/>
+                </a:solidFill>
+                <a:latin typeface="+mn-lt"/>
+                <a:ea typeface="+mn-ea"/>
+                <a:cs typeface="+mn-cs"/>
+              </a:defRPr>
+            </a:lvl8pPr>
+            <a:lvl9pPr marL="3886200" indent="-228600" algn="l" defTabSz="914400" rtl="0" eaLnBrk="1" latinLnBrk="0" hangingPunct="1">
+              <a:lnSpc>
+                <a:spcPct val="90000"/>
+              </a:lnSpc>
+              <a:spcBef>
+                <a:spcPts val="500"/>
+              </a:spcBef>
+              <a:buFont typeface="Arial" panose="020B0604020202020204" pitchFamily="34" charset="0"/>
+              <a:buChar char="•"/>
+              <a:defRPr sz="1800" kern="1200">
+                <a:solidFill>
+                  <a:schemeClr val="tx1"/>
+                </a:solidFill>
+                <a:latin typeface="+mn-lt"/>
+                <a:ea typeface="+mn-ea"/>
+                <a:cs typeface="+mn-cs"/>
+              </a:defRPr>
+            </a:lvl9pPr>
+          </a:lstStyle>
+          <a:p>
+            <a:r>
+              <a:rPr lang="en-US" sz="1100" dirty="0"/>
+              <a:t>Screen capture illustrating all previous unit tests still pass after code changes</a:t>
+            </a:r>
+          </a:p>
+        </p:txBody>
+      </p:sp>
+      <p:pic>
+        <p:nvPicPr>
+          <p:cNvPr id="5" name="Picture 4" descr="A black background with white text&#10;&#10;AI-generated content may be incorrect.">
+            <a:extLst>
+              <a:ext uri="{FF2B5EF4-FFF2-40B4-BE49-F238E27FC236}">
+                <a16:creationId xmlns:a16="http://schemas.microsoft.com/office/drawing/2014/main" id="{0D9E9D50-0839-D138-FF40-7BF64CFD29E1}"/>
+              </a:ext>
+            </a:extLst>
+          </p:cNvPr>
+          <p:cNvPicPr>
+            <a:picLocks noChangeAspect="1"/>
+          </p:cNvPicPr>
+          <p:nvPr/>
+        </p:nvPicPr>
+        <p:blipFill>
+          <a:blip r:embed="rId2"/>
+          <a:stretch>
+            <a:fillRect/>
+          </a:stretch>
+        </p:blipFill>
+        <p:spPr>
+          <a:xfrm>
+            <a:off x="303496" y="2344978"/>
+            <a:ext cx="6668543" cy="560539"/>
+          </a:xfrm>
+          <a:prstGeom prst="rect">
+            <a:avLst/>
+          </a:prstGeom>
+        </p:spPr>
+      </p:pic>
+      <p:pic>
+        <p:nvPicPr>
+          <p:cNvPr id="6" name="Picture 5">
+            <a:extLst>
+              <a:ext uri="{FF2B5EF4-FFF2-40B4-BE49-F238E27FC236}">
+                <a16:creationId xmlns:a16="http://schemas.microsoft.com/office/drawing/2014/main" id="{3B7D2B2F-026C-D10A-9F96-0DDE8B2602A5}"/>
+              </a:ext>
+            </a:extLst>
+          </p:cNvPr>
+          <p:cNvPicPr>
+            <a:picLocks noChangeAspect="1"/>
+          </p:cNvPicPr>
+          <p:nvPr/>
+        </p:nvPicPr>
+        <p:blipFill>
+          <a:blip r:embed="rId3"/>
+          <a:stretch>
+            <a:fillRect/>
+          </a:stretch>
+        </p:blipFill>
+        <p:spPr>
+          <a:xfrm>
+            <a:off x="305452" y="5199279"/>
+            <a:ext cx="4629150" cy="238125"/>
+          </a:xfrm>
+          <a:prstGeom prst="rect">
+            <a:avLst/>
+          </a:prstGeom>
+        </p:spPr>
+      </p:pic>
+      <p:pic>
+        <p:nvPicPr>
+          <p:cNvPr id="8" name="Picture 7" descr="A screen shot of a computer program&#10;&#10;AI-generated content may be incorrect.">
+            <a:extLst>
+              <a:ext uri="{FF2B5EF4-FFF2-40B4-BE49-F238E27FC236}">
+                <a16:creationId xmlns:a16="http://schemas.microsoft.com/office/drawing/2014/main" id="{B2243D8B-8042-445A-C800-92DA70A4F037}"/>
+              </a:ext>
+            </a:extLst>
+          </p:cNvPr>
+          <p:cNvPicPr>
+            <a:picLocks noChangeAspect="1"/>
+          </p:cNvPicPr>
+          <p:nvPr/>
+        </p:nvPicPr>
+        <p:blipFill>
+          <a:blip r:embed="rId4"/>
+          <a:stretch>
+            <a:fillRect/>
+          </a:stretch>
+        </p:blipFill>
+        <p:spPr>
+          <a:xfrm>
+            <a:off x="6623788" y="4537814"/>
+            <a:ext cx="4017463" cy="2072536"/>
+          </a:xfrm>
+          <a:prstGeom prst="rect">
+            <a:avLst/>
+          </a:prstGeom>
+        </p:spPr>
+      </p:pic>
     </p:spTree>
     <p:extLst>
       <p:ext uri="{BB962C8B-B14F-4D97-AF65-F5344CB8AC3E}">
-        <p14:creationId xmlns:p14="http://schemas.microsoft.com/office/powerpoint/2010/main" val="1779949042"/>
+        <p14:creationId xmlns:p14="http://schemas.microsoft.com/office/powerpoint/2010/main" val="1890626250"/>
+      </p:ext>
+    </p:extLst>
+  </p:cSld>
+  <p:clrMapOvr>
+    <a:masterClrMapping/>
+  </p:clrMapOvr>
+</p:sld>
+</file>
+
+<file path=ppt/slides/slide15.xml><?xml version="1.0" encoding="utf-8"?>
+<p:sld xmlns:a="http://schemas.openxmlformats.org/drawingml/2006/main" xmlns:r="http://schemas.openxmlformats.org/officeDocument/2006/relationships" xmlns:p="http://schemas.openxmlformats.org/presentationml/2006/main">
+  <p:cSld>
+    <p:spTree>
+      <p:nvGrpSpPr>
+        <p:cNvPr id="1" name="">
+          <a:extLst>
+            <a:ext uri="{FF2B5EF4-FFF2-40B4-BE49-F238E27FC236}">
+              <a16:creationId xmlns:a16="http://schemas.microsoft.com/office/drawing/2014/main" id="{115C8633-C029-F6F6-D89E-7DD9C2745A0A}"/>
+            </a:ext>
+          </a:extLst>
+        </p:cNvPr>
+        <p:cNvGrpSpPr/>
+        <p:nvPr/>
+      </p:nvGrpSpPr>
+      <p:grpSpPr>
+        <a:xfrm>
+          <a:off x="0" y="0"/>
+          <a:ext cx="0" cy="0"/>
+          <a:chOff x="0" y="0"/>
+          <a:chExt cx="0" cy="0"/>
+        </a:xfrm>
+      </p:grpSpPr>
+      <p:sp>
+        <p:nvSpPr>
+          <p:cNvPr id="2" name="Title 1">
+            <a:extLst>
+              <a:ext uri="{FF2B5EF4-FFF2-40B4-BE49-F238E27FC236}">
+                <a16:creationId xmlns:a16="http://schemas.microsoft.com/office/drawing/2014/main" id="{A1FBBFD0-7369-10F0-97BF-6F6CBEC2CC5F}"/>
+              </a:ext>
+            </a:extLst>
+          </p:cNvPr>
+          <p:cNvSpPr>
+            <a:spLocks noGrp="1"/>
+          </p:cNvSpPr>
+          <p:nvPr>
+            <p:ph type="title"/>
+          </p:nvPr>
+        </p:nvSpPr>
+        <p:spPr/>
+        <p:txBody>
+          <a:bodyPr>
+            <a:normAutofit/>
+          </a:bodyPr>
+          <a:lstStyle/>
+          <a:p>
+            <a:r>
+              <a:rPr lang="en-US" sz="1600"/>
+              <a:t>Test ID: T-SUB-CPLX1</a:t>
+            </a:r>
+            <a:endParaRPr lang="en-US"/>
+          </a:p>
+          <a:p>
+            <a:r>
+              <a:rPr lang="en-US" sz="1600">
+                <a:ea typeface="+mj-lt"/>
+                <a:cs typeface="+mj-lt"/>
+              </a:rPr>
+              <a:t>Statement of unit test: Verify that subtracting two complex numbers returns the correct complex difference.</a:t>
+            </a:r>
+            <a:endParaRPr lang="en-US"/>
+          </a:p>
+          <a:p>
+            <a:r>
+              <a:rPr lang="en-US" sz="1600">
+                <a:ea typeface="+mj-lt"/>
+                <a:cs typeface="+mj-lt"/>
+              </a:rPr>
+              <a:t>Expected results: </a:t>
+            </a:r>
+            <a:r>
+              <a:rPr lang="en-US" sz="1600">
+                <a:latin typeface="Aptos Display"/>
+              </a:rPr>
+              <a:t>2 + j6</a:t>
+            </a:r>
+            <a:endParaRPr lang="en-US"/>
+          </a:p>
+        </p:txBody>
+      </p:sp>
+      <p:sp>
+        <p:nvSpPr>
+          <p:cNvPr id="3" name="Content Placeholder 2">
+            <a:extLst>
+              <a:ext uri="{FF2B5EF4-FFF2-40B4-BE49-F238E27FC236}">
+                <a16:creationId xmlns:a16="http://schemas.microsoft.com/office/drawing/2014/main" id="{20E28885-F490-FCFE-3BB6-FC74D7C7C59B}"/>
+              </a:ext>
+            </a:extLst>
+          </p:cNvPr>
+          <p:cNvSpPr>
+            <a:spLocks noGrp="1"/>
+          </p:cNvSpPr>
+          <p:nvPr>
+            <p:ph idx="1"/>
+          </p:nvPr>
+        </p:nvSpPr>
+        <p:spPr>
+          <a:xfrm>
+            <a:off x="838200" y="1825625"/>
+            <a:ext cx="2841346" cy="4351338"/>
+          </a:xfrm>
+        </p:spPr>
+        <p:txBody>
+          <a:bodyPr>
+            <a:normAutofit/>
+          </a:bodyPr>
+          <a:lstStyle/>
+          <a:p>
+            <a:r>
+              <a:rPr lang="en-US" sz="1100" dirty="0"/>
+              <a:t>Screen capture of unit test code:</a:t>
+            </a:r>
+          </a:p>
+        </p:txBody>
+      </p:sp>
+      <p:sp>
+        <p:nvSpPr>
+          <p:cNvPr id="7" name="Content Placeholder 2">
+            <a:extLst>
+              <a:ext uri="{FF2B5EF4-FFF2-40B4-BE49-F238E27FC236}">
+                <a16:creationId xmlns:a16="http://schemas.microsoft.com/office/drawing/2014/main" id="{3706B4AF-9229-331F-9F0E-E6F6E84DA546}"/>
+              </a:ext>
+            </a:extLst>
+          </p:cNvPr>
+          <p:cNvSpPr txBox="1">
+            <a:spLocks/>
+          </p:cNvSpPr>
+          <p:nvPr/>
+        </p:nvSpPr>
+        <p:spPr>
+          <a:xfrm>
+            <a:off x="7788707" y="1825625"/>
+            <a:ext cx="2841346" cy="4351338"/>
+          </a:xfrm>
+          <a:prstGeom prst="rect">
+            <a:avLst/>
+          </a:prstGeom>
+        </p:spPr>
+        <p:txBody>
+          <a:bodyPr vert="horz" lIns="91440" tIns="45720" rIns="91440" bIns="45720" rtlCol="0" anchor="t">
+            <a:normAutofit/>
+          </a:bodyPr>
+          <a:lstStyle>
+            <a:lvl1pPr marL="228600" indent="-228600" algn="l" defTabSz="914400" rtl="0" eaLnBrk="1" latinLnBrk="0" hangingPunct="1">
+              <a:lnSpc>
+                <a:spcPct val="90000"/>
+              </a:lnSpc>
+              <a:spcBef>
+                <a:spcPts val="1000"/>
+              </a:spcBef>
+              <a:buFont typeface="Arial" panose="020B0604020202020204" pitchFamily="34" charset="0"/>
+              <a:buChar char="•"/>
+              <a:defRPr sz="2800" kern="1200">
+                <a:solidFill>
+                  <a:schemeClr val="tx1"/>
+                </a:solidFill>
+                <a:latin typeface="+mn-lt"/>
+                <a:ea typeface="+mn-ea"/>
+                <a:cs typeface="+mn-cs"/>
+              </a:defRPr>
+            </a:lvl1pPr>
+            <a:lvl2pPr marL="685800" indent="-228600" algn="l" defTabSz="914400" rtl="0" eaLnBrk="1" latinLnBrk="0" hangingPunct="1">
+              <a:lnSpc>
+                <a:spcPct val="90000"/>
+              </a:lnSpc>
+              <a:spcBef>
+                <a:spcPts val="500"/>
+              </a:spcBef>
+              <a:buFont typeface="Arial" panose="020B0604020202020204" pitchFamily="34" charset="0"/>
+              <a:buChar char="•"/>
+              <a:defRPr sz="2400" kern="1200">
+                <a:solidFill>
+                  <a:schemeClr val="tx1"/>
+                </a:solidFill>
+                <a:latin typeface="+mn-lt"/>
+                <a:ea typeface="+mn-ea"/>
+                <a:cs typeface="+mn-cs"/>
+              </a:defRPr>
+            </a:lvl2pPr>
+            <a:lvl3pPr marL="1143000" indent="-228600" algn="l" defTabSz="914400" rtl="0" eaLnBrk="1" latinLnBrk="0" hangingPunct="1">
+              <a:lnSpc>
+                <a:spcPct val="90000"/>
+              </a:lnSpc>
+              <a:spcBef>
+                <a:spcPts val="500"/>
+              </a:spcBef>
+              <a:buFont typeface="Arial" panose="020B0604020202020204" pitchFamily="34" charset="0"/>
+              <a:buChar char="•"/>
+              <a:defRPr sz="2000" kern="1200">
+                <a:solidFill>
+                  <a:schemeClr val="tx1"/>
+                </a:solidFill>
+                <a:latin typeface="+mn-lt"/>
+                <a:ea typeface="+mn-ea"/>
+                <a:cs typeface="+mn-cs"/>
+              </a:defRPr>
+            </a:lvl3pPr>
+            <a:lvl4pPr marL="1600200" indent="-228600" algn="l" defTabSz="914400" rtl="0" eaLnBrk="1" latinLnBrk="0" hangingPunct="1">
+              <a:lnSpc>
+                <a:spcPct val="90000"/>
+              </a:lnSpc>
+              <a:spcBef>
+                <a:spcPts val="500"/>
+              </a:spcBef>
+              <a:buFont typeface="Arial" panose="020B0604020202020204" pitchFamily="34" charset="0"/>
+              <a:buChar char="•"/>
+              <a:defRPr sz="1800" kern="1200">
+                <a:solidFill>
+                  <a:schemeClr val="tx1"/>
+                </a:solidFill>
+                <a:latin typeface="+mn-lt"/>
+                <a:ea typeface="+mn-ea"/>
+                <a:cs typeface="+mn-cs"/>
+              </a:defRPr>
+            </a:lvl4pPr>
+            <a:lvl5pPr marL="2057400" indent="-228600" algn="l" defTabSz="914400" rtl="0" eaLnBrk="1" latinLnBrk="0" hangingPunct="1">
+              <a:lnSpc>
+                <a:spcPct val="90000"/>
+              </a:lnSpc>
+              <a:spcBef>
+                <a:spcPts val="500"/>
+              </a:spcBef>
+              <a:buFont typeface="Arial" panose="020B0604020202020204" pitchFamily="34" charset="0"/>
+              <a:buChar char="•"/>
+              <a:defRPr sz="1800" kern="1200">
+                <a:solidFill>
+                  <a:schemeClr val="tx1"/>
+                </a:solidFill>
+                <a:latin typeface="+mn-lt"/>
+                <a:ea typeface="+mn-ea"/>
+                <a:cs typeface="+mn-cs"/>
+              </a:defRPr>
+            </a:lvl5pPr>
+            <a:lvl6pPr marL="2514600" indent="-228600" algn="l" defTabSz="914400" rtl="0" eaLnBrk="1" latinLnBrk="0" hangingPunct="1">
+              <a:lnSpc>
+                <a:spcPct val="90000"/>
+              </a:lnSpc>
+              <a:spcBef>
+                <a:spcPts val="500"/>
+              </a:spcBef>
+              <a:buFont typeface="Arial" panose="020B0604020202020204" pitchFamily="34" charset="0"/>
+              <a:buChar char="•"/>
+              <a:defRPr sz="1800" kern="1200">
+                <a:solidFill>
+                  <a:schemeClr val="tx1"/>
+                </a:solidFill>
+                <a:latin typeface="+mn-lt"/>
+                <a:ea typeface="+mn-ea"/>
+                <a:cs typeface="+mn-cs"/>
+              </a:defRPr>
+            </a:lvl6pPr>
+            <a:lvl7pPr marL="2971800" indent="-228600" algn="l" defTabSz="914400" rtl="0" eaLnBrk="1" latinLnBrk="0" hangingPunct="1">
+              <a:lnSpc>
+                <a:spcPct val="90000"/>
+              </a:lnSpc>
+              <a:spcBef>
+                <a:spcPts val="500"/>
+              </a:spcBef>
+              <a:buFont typeface="Arial" panose="020B0604020202020204" pitchFamily="34" charset="0"/>
+              <a:buChar char="•"/>
+              <a:defRPr sz="1800" kern="1200">
+                <a:solidFill>
+                  <a:schemeClr val="tx1"/>
+                </a:solidFill>
+                <a:latin typeface="+mn-lt"/>
+                <a:ea typeface="+mn-ea"/>
+                <a:cs typeface="+mn-cs"/>
+              </a:defRPr>
+            </a:lvl7pPr>
+            <a:lvl8pPr marL="3429000" indent="-228600" algn="l" defTabSz="914400" rtl="0" eaLnBrk="1" latinLnBrk="0" hangingPunct="1">
+              <a:lnSpc>
+                <a:spcPct val="90000"/>
+              </a:lnSpc>
+              <a:spcBef>
+                <a:spcPts val="500"/>
+              </a:spcBef>
+              <a:buFont typeface="Arial" panose="020B0604020202020204" pitchFamily="34" charset="0"/>
+              <a:buChar char="•"/>
+              <a:defRPr sz="1800" kern="1200">
+                <a:solidFill>
+                  <a:schemeClr val="tx1"/>
+                </a:solidFill>
+                <a:latin typeface="+mn-lt"/>
+                <a:ea typeface="+mn-ea"/>
+                <a:cs typeface="+mn-cs"/>
+              </a:defRPr>
+            </a:lvl8pPr>
+            <a:lvl9pPr marL="3886200" indent="-228600" algn="l" defTabSz="914400" rtl="0" eaLnBrk="1" latinLnBrk="0" hangingPunct="1">
+              <a:lnSpc>
+                <a:spcPct val="90000"/>
+              </a:lnSpc>
+              <a:spcBef>
+                <a:spcPts val="500"/>
+              </a:spcBef>
+              <a:buFont typeface="Arial" panose="020B0604020202020204" pitchFamily="34" charset="0"/>
+              <a:buChar char="•"/>
+              <a:defRPr sz="1800" kern="1200">
+                <a:solidFill>
+                  <a:schemeClr val="tx1"/>
+                </a:solidFill>
+                <a:latin typeface="+mn-lt"/>
+                <a:ea typeface="+mn-ea"/>
+                <a:cs typeface="+mn-cs"/>
+              </a:defRPr>
+            </a:lvl9pPr>
+          </a:lstStyle>
+          <a:p>
+            <a:r>
+              <a:rPr lang="en-US" sz="1100"/>
+              <a:t>Code changes</a:t>
+            </a:r>
+            <a:br>
+              <a:rPr lang="en-US" sz="1100" dirty="0"/>
+            </a:br>
+            <a:endParaRPr lang="en-US" sz="1100" dirty="0"/>
+          </a:p>
+          <a:p>
+            <a:pPr marL="0" indent="0">
+              <a:buNone/>
+            </a:pPr>
+            <a:r>
+              <a:rPr lang="en-US" sz="1100"/>
+              <a:t>None required. The existing stack.append(a - b) natively supports complex types.</a:t>
+            </a:r>
+            <a:endParaRPr lang="en-US"/>
+          </a:p>
+        </p:txBody>
+      </p:sp>
+      <p:sp>
+        <p:nvSpPr>
+          <p:cNvPr id="10" name="Content Placeholder 2">
+            <a:extLst>
+              <a:ext uri="{FF2B5EF4-FFF2-40B4-BE49-F238E27FC236}">
+                <a16:creationId xmlns:a16="http://schemas.microsoft.com/office/drawing/2014/main" id="{D78241C4-DC74-2921-0BB9-9FC30957F8CF}"/>
+              </a:ext>
+            </a:extLst>
+          </p:cNvPr>
+          <p:cNvSpPr txBox="1">
+            <a:spLocks/>
+          </p:cNvSpPr>
+          <p:nvPr/>
+        </p:nvSpPr>
+        <p:spPr>
+          <a:xfrm>
+            <a:off x="879958" y="4067250"/>
+            <a:ext cx="2841346" cy="1947559"/>
+          </a:xfrm>
+          <a:prstGeom prst="rect">
+            <a:avLst/>
+          </a:prstGeom>
+        </p:spPr>
+        <p:txBody>
+          <a:bodyPr vert="horz" lIns="91440" tIns="45720" rIns="91440" bIns="45720" rtlCol="0">
+            <a:normAutofit/>
+          </a:bodyPr>
+          <a:lstStyle>
+            <a:lvl1pPr marL="228600" indent="-228600" algn="l" defTabSz="914400" rtl="0" eaLnBrk="1" latinLnBrk="0" hangingPunct="1">
+              <a:lnSpc>
+                <a:spcPct val="90000"/>
+              </a:lnSpc>
+              <a:spcBef>
+                <a:spcPts val="1000"/>
+              </a:spcBef>
+              <a:buFont typeface="Arial" panose="020B0604020202020204" pitchFamily="34" charset="0"/>
+              <a:buChar char="•"/>
+              <a:defRPr sz="2800" kern="1200">
+                <a:solidFill>
+                  <a:schemeClr val="tx1"/>
+                </a:solidFill>
+                <a:latin typeface="+mn-lt"/>
+                <a:ea typeface="+mn-ea"/>
+                <a:cs typeface="+mn-cs"/>
+              </a:defRPr>
+            </a:lvl1pPr>
+            <a:lvl2pPr marL="685800" indent="-228600" algn="l" defTabSz="914400" rtl="0" eaLnBrk="1" latinLnBrk="0" hangingPunct="1">
+              <a:lnSpc>
+                <a:spcPct val="90000"/>
+              </a:lnSpc>
+              <a:spcBef>
+                <a:spcPts val="500"/>
+              </a:spcBef>
+              <a:buFont typeface="Arial" panose="020B0604020202020204" pitchFamily="34" charset="0"/>
+              <a:buChar char="•"/>
+              <a:defRPr sz="2400" kern="1200">
+                <a:solidFill>
+                  <a:schemeClr val="tx1"/>
+                </a:solidFill>
+                <a:latin typeface="+mn-lt"/>
+                <a:ea typeface="+mn-ea"/>
+                <a:cs typeface="+mn-cs"/>
+              </a:defRPr>
+            </a:lvl2pPr>
+            <a:lvl3pPr marL="1143000" indent="-228600" algn="l" defTabSz="914400" rtl="0" eaLnBrk="1" latinLnBrk="0" hangingPunct="1">
+              <a:lnSpc>
+                <a:spcPct val="90000"/>
+              </a:lnSpc>
+              <a:spcBef>
+                <a:spcPts val="500"/>
+              </a:spcBef>
+              <a:buFont typeface="Arial" panose="020B0604020202020204" pitchFamily="34" charset="0"/>
+              <a:buChar char="•"/>
+              <a:defRPr sz="2000" kern="1200">
+                <a:solidFill>
+                  <a:schemeClr val="tx1"/>
+                </a:solidFill>
+                <a:latin typeface="+mn-lt"/>
+                <a:ea typeface="+mn-ea"/>
+                <a:cs typeface="+mn-cs"/>
+              </a:defRPr>
+            </a:lvl3pPr>
+            <a:lvl4pPr marL="1600200" indent="-228600" algn="l" defTabSz="914400" rtl="0" eaLnBrk="1" latinLnBrk="0" hangingPunct="1">
+              <a:lnSpc>
+                <a:spcPct val="90000"/>
+              </a:lnSpc>
+              <a:spcBef>
+                <a:spcPts val="500"/>
+              </a:spcBef>
+              <a:buFont typeface="Arial" panose="020B0604020202020204" pitchFamily="34" charset="0"/>
+              <a:buChar char="•"/>
+              <a:defRPr sz="1800" kern="1200">
+                <a:solidFill>
+                  <a:schemeClr val="tx1"/>
+                </a:solidFill>
+                <a:latin typeface="+mn-lt"/>
+                <a:ea typeface="+mn-ea"/>
+                <a:cs typeface="+mn-cs"/>
+              </a:defRPr>
+            </a:lvl4pPr>
+            <a:lvl5pPr marL="2057400" indent="-228600" algn="l" defTabSz="914400" rtl="0" eaLnBrk="1" latinLnBrk="0" hangingPunct="1">
+              <a:lnSpc>
+                <a:spcPct val="90000"/>
+              </a:lnSpc>
+              <a:spcBef>
+                <a:spcPts val="500"/>
+              </a:spcBef>
+              <a:buFont typeface="Arial" panose="020B0604020202020204" pitchFamily="34" charset="0"/>
+              <a:buChar char="•"/>
+              <a:defRPr sz="1800" kern="1200">
+                <a:solidFill>
+                  <a:schemeClr val="tx1"/>
+                </a:solidFill>
+                <a:latin typeface="+mn-lt"/>
+                <a:ea typeface="+mn-ea"/>
+                <a:cs typeface="+mn-cs"/>
+              </a:defRPr>
+            </a:lvl5pPr>
+            <a:lvl6pPr marL="2514600" indent="-228600" algn="l" defTabSz="914400" rtl="0" eaLnBrk="1" latinLnBrk="0" hangingPunct="1">
+              <a:lnSpc>
+                <a:spcPct val="90000"/>
+              </a:lnSpc>
+              <a:spcBef>
+                <a:spcPts val="500"/>
+              </a:spcBef>
+              <a:buFont typeface="Arial" panose="020B0604020202020204" pitchFamily="34" charset="0"/>
+              <a:buChar char="•"/>
+              <a:defRPr sz="1800" kern="1200">
+                <a:solidFill>
+                  <a:schemeClr val="tx1"/>
+                </a:solidFill>
+                <a:latin typeface="+mn-lt"/>
+                <a:ea typeface="+mn-ea"/>
+                <a:cs typeface="+mn-cs"/>
+              </a:defRPr>
+            </a:lvl6pPr>
+            <a:lvl7pPr marL="2971800" indent="-228600" algn="l" defTabSz="914400" rtl="0" eaLnBrk="1" latinLnBrk="0" hangingPunct="1">
+              <a:lnSpc>
+                <a:spcPct val="90000"/>
+              </a:lnSpc>
+              <a:spcBef>
+                <a:spcPts val="500"/>
+              </a:spcBef>
+              <a:buFont typeface="Arial" panose="020B0604020202020204" pitchFamily="34" charset="0"/>
+              <a:buChar char="•"/>
+              <a:defRPr sz="1800" kern="1200">
+                <a:solidFill>
+                  <a:schemeClr val="tx1"/>
+                </a:solidFill>
+                <a:latin typeface="+mn-lt"/>
+                <a:ea typeface="+mn-ea"/>
+                <a:cs typeface="+mn-cs"/>
+              </a:defRPr>
+            </a:lvl7pPr>
+            <a:lvl8pPr marL="3429000" indent="-228600" algn="l" defTabSz="914400" rtl="0" eaLnBrk="1" latinLnBrk="0" hangingPunct="1">
+              <a:lnSpc>
+                <a:spcPct val="90000"/>
+              </a:lnSpc>
+              <a:spcBef>
+                <a:spcPts val="500"/>
+              </a:spcBef>
+              <a:buFont typeface="Arial" panose="020B0604020202020204" pitchFamily="34" charset="0"/>
+              <a:buChar char="•"/>
+              <a:defRPr sz="1800" kern="1200">
+                <a:solidFill>
+                  <a:schemeClr val="tx1"/>
+                </a:solidFill>
+                <a:latin typeface="+mn-lt"/>
+                <a:ea typeface="+mn-ea"/>
+                <a:cs typeface="+mn-cs"/>
+              </a:defRPr>
+            </a:lvl8pPr>
+            <a:lvl9pPr marL="3886200" indent="-228600" algn="l" defTabSz="914400" rtl="0" eaLnBrk="1" latinLnBrk="0" hangingPunct="1">
+              <a:lnSpc>
+                <a:spcPct val="90000"/>
+              </a:lnSpc>
+              <a:spcBef>
+                <a:spcPts val="500"/>
+              </a:spcBef>
+              <a:buFont typeface="Arial" panose="020B0604020202020204" pitchFamily="34" charset="0"/>
+              <a:buChar char="•"/>
+              <a:defRPr sz="1800" kern="1200">
+                <a:solidFill>
+                  <a:schemeClr val="tx1"/>
+                </a:solidFill>
+                <a:latin typeface="+mn-lt"/>
+                <a:ea typeface="+mn-ea"/>
+                <a:cs typeface="+mn-cs"/>
+              </a:defRPr>
+            </a:lvl9pPr>
+          </a:lstStyle>
+          <a:p>
+            <a:r>
+              <a:rPr lang="en-US" sz="1100" dirty="0"/>
+              <a:t>Screen capture demonstrating unit test passing</a:t>
+            </a:r>
+          </a:p>
+        </p:txBody>
+      </p:sp>
+      <p:sp>
+        <p:nvSpPr>
+          <p:cNvPr id="12" name="Content Placeholder 2">
+            <a:extLst>
+              <a:ext uri="{FF2B5EF4-FFF2-40B4-BE49-F238E27FC236}">
+                <a16:creationId xmlns:a16="http://schemas.microsoft.com/office/drawing/2014/main" id="{1B752981-9F46-0D9C-8BAE-02037BB9B37B}"/>
+              </a:ext>
+            </a:extLst>
+          </p:cNvPr>
+          <p:cNvSpPr txBox="1">
+            <a:spLocks/>
+          </p:cNvSpPr>
+          <p:nvPr/>
+        </p:nvSpPr>
+        <p:spPr>
+          <a:xfrm>
+            <a:off x="6417390" y="4067250"/>
+            <a:ext cx="2841346" cy="1947560"/>
+          </a:xfrm>
+          <a:prstGeom prst="rect">
+            <a:avLst/>
+          </a:prstGeom>
+        </p:spPr>
+        <p:txBody>
+          <a:bodyPr vert="horz" lIns="91440" tIns="45720" rIns="91440" bIns="45720" rtlCol="0">
+            <a:normAutofit/>
+          </a:bodyPr>
+          <a:lstStyle>
+            <a:lvl1pPr marL="228600" indent="-228600" algn="l" defTabSz="914400" rtl="0" eaLnBrk="1" latinLnBrk="0" hangingPunct="1">
+              <a:lnSpc>
+                <a:spcPct val="90000"/>
+              </a:lnSpc>
+              <a:spcBef>
+                <a:spcPts val="1000"/>
+              </a:spcBef>
+              <a:buFont typeface="Arial" panose="020B0604020202020204" pitchFamily="34" charset="0"/>
+              <a:buChar char="•"/>
+              <a:defRPr sz="2800" kern="1200">
+                <a:solidFill>
+                  <a:schemeClr val="tx1"/>
+                </a:solidFill>
+                <a:latin typeface="+mn-lt"/>
+                <a:ea typeface="+mn-ea"/>
+                <a:cs typeface="+mn-cs"/>
+              </a:defRPr>
+            </a:lvl1pPr>
+            <a:lvl2pPr marL="685800" indent="-228600" algn="l" defTabSz="914400" rtl="0" eaLnBrk="1" latinLnBrk="0" hangingPunct="1">
+              <a:lnSpc>
+                <a:spcPct val="90000"/>
+              </a:lnSpc>
+              <a:spcBef>
+                <a:spcPts val="500"/>
+              </a:spcBef>
+              <a:buFont typeface="Arial" panose="020B0604020202020204" pitchFamily="34" charset="0"/>
+              <a:buChar char="•"/>
+              <a:defRPr sz="2400" kern="1200">
+                <a:solidFill>
+                  <a:schemeClr val="tx1"/>
+                </a:solidFill>
+                <a:latin typeface="+mn-lt"/>
+                <a:ea typeface="+mn-ea"/>
+                <a:cs typeface="+mn-cs"/>
+              </a:defRPr>
+            </a:lvl2pPr>
+            <a:lvl3pPr marL="1143000" indent="-228600" algn="l" defTabSz="914400" rtl="0" eaLnBrk="1" latinLnBrk="0" hangingPunct="1">
+              <a:lnSpc>
+                <a:spcPct val="90000"/>
+              </a:lnSpc>
+              <a:spcBef>
+                <a:spcPts val="500"/>
+              </a:spcBef>
+              <a:buFont typeface="Arial" panose="020B0604020202020204" pitchFamily="34" charset="0"/>
+              <a:buChar char="•"/>
+              <a:defRPr sz="2000" kern="1200">
+                <a:solidFill>
+                  <a:schemeClr val="tx1"/>
+                </a:solidFill>
+                <a:latin typeface="+mn-lt"/>
+                <a:ea typeface="+mn-ea"/>
+                <a:cs typeface="+mn-cs"/>
+              </a:defRPr>
+            </a:lvl3pPr>
+            <a:lvl4pPr marL="1600200" indent="-228600" algn="l" defTabSz="914400" rtl="0" eaLnBrk="1" latinLnBrk="0" hangingPunct="1">
+              <a:lnSpc>
+                <a:spcPct val="90000"/>
+              </a:lnSpc>
+              <a:spcBef>
+                <a:spcPts val="500"/>
+              </a:spcBef>
+              <a:buFont typeface="Arial" panose="020B0604020202020204" pitchFamily="34" charset="0"/>
+              <a:buChar char="•"/>
+              <a:defRPr sz="1800" kern="1200">
+                <a:solidFill>
+                  <a:schemeClr val="tx1"/>
+                </a:solidFill>
+                <a:latin typeface="+mn-lt"/>
+                <a:ea typeface="+mn-ea"/>
+                <a:cs typeface="+mn-cs"/>
+              </a:defRPr>
+            </a:lvl4pPr>
+            <a:lvl5pPr marL="2057400" indent="-228600" algn="l" defTabSz="914400" rtl="0" eaLnBrk="1" latinLnBrk="0" hangingPunct="1">
+              <a:lnSpc>
+                <a:spcPct val="90000"/>
+              </a:lnSpc>
+              <a:spcBef>
+                <a:spcPts val="500"/>
+              </a:spcBef>
+              <a:buFont typeface="Arial" panose="020B0604020202020204" pitchFamily="34" charset="0"/>
+              <a:buChar char="•"/>
+              <a:defRPr sz="1800" kern="1200">
+                <a:solidFill>
+                  <a:schemeClr val="tx1"/>
+                </a:solidFill>
+                <a:latin typeface="+mn-lt"/>
+                <a:ea typeface="+mn-ea"/>
+                <a:cs typeface="+mn-cs"/>
+              </a:defRPr>
+            </a:lvl5pPr>
+            <a:lvl6pPr marL="2514600" indent="-228600" algn="l" defTabSz="914400" rtl="0" eaLnBrk="1" latinLnBrk="0" hangingPunct="1">
+              <a:lnSpc>
+                <a:spcPct val="90000"/>
+              </a:lnSpc>
+              <a:spcBef>
+                <a:spcPts val="500"/>
+              </a:spcBef>
+              <a:buFont typeface="Arial" panose="020B0604020202020204" pitchFamily="34" charset="0"/>
+              <a:buChar char="•"/>
+              <a:defRPr sz="1800" kern="1200">
+                <a:solidFill>
+                  <a:schemeClr val="tx1"/>
+                </a:solidFill>
+                <a:latin typeface="+mn-lt"/>
+                <a:ea typeface="+mn-ea"/>
+                <a:cs typeface="+mn-cs"/>
+              </a:defRPr>
+            </a:lvl6pPr>
+            <a:lvl7pPr marL="2971800" indent="-228600" algn="l" defTabSz="914400" rtl="0" eaLnBrk="1" latinLnBrk="0" hangingPunct="1">
+              <a:lnSpc>
+                <a:spcPct val="90000"/>
+              </a:lnSpc>
+              <a:spcBef>
+                <a:spcPts val="500"/>
+              </a:spcBef>
+              <a:buFont typeface="Arial" panose="020B0604020202020204" pitchFamily="34" charset="0"/>
+              <a:buChar char="•"/>
+              <a:defRPr sz="1800" kern="1200">
+                <a:solidFill>
+                  <a:schemeClr val="tx1"/>
+                </a:solidFill>
+                <a:latin typeface="+mn-lt"/>
+                <a:ea typeface="+mn-ea"/>
+                <a:cs typeface="+mn-cs"/>
+              </a:defRPr>
+            </a:lvl7pPr>
+            <a:lvl8pPr marL="3429000" indent="-228600" algn="l" defTabSz="914400" rtl="0" eaLnBrk="1" latinLnBrk="0" hangingPunct="1">
+              <a:lnSpc>
+                <a:spcPct val="90000"/>
+              </a:lnSpc>
+              <a:spcBef>
+                <a:spcPts val="500"/>
+              </a:spcBef>
+              <a:buFont typeface="Arial" panose="020B0604020202020204" pitchFamily="34" charset="0"/>
+              <a:buChar char="•"/>
+              <a:defRPr sz="1800" kern="1200">
+                <a:solidFill>
+                  <a:schemeClr val="tx1"/>
+                </a:solidFill>
+                <a:latin typeface="+mn-lt"/>
+                <a:ea typeface="+mn-ea"/>
+                <a:cs typeface="+mn-cs"/>
+              </a:defRPr>
+            </a:lvl8pPr>
+            <a:lvl9pPr marL="3886200" indent="-228600" algn="l" defTabSz="914400" rtl="0" eaLnBrk="1" latinLnBrk="0" hangingPunct="1">
+              <a:lnSpc>
+                <a:spcPct val="90000"/>
+              </a:lnSpc>
+              <a:spcBef>
+                <a:spcPts val="500"/>
+              </a:spcBef>
+              <a:buFont typeface="Arial" panose="020B0604020202020204" pitchFamily="34" charset="0"/>
+              <a:buChar char="•"/>
+              <a:defRPr sz="1800" kern="1200">
+                <a:solidFill>
+                  <a:schemeClr val="tx1"/>
+                </a:solidFill>
+                <a:latin typeface="+mn-lt"/>
+                <a:ea typeface="+mn-ea"/>
+                <a:cs typeface="+mn-cs"/>
+              </a:defRPr>
+            </a:lvl9pPr>
+          </a:lstStyle>
+          <a:p>
+            <a:r>
+              <a:rPr lang="en-US" sz="1100" dirty="0"/>
+              <a:t>Screen capture illustrating all previous unit tests still pass after code changes</a:t>
+            </a:r>
+          </a:p>
+        </p:txBody>
+      </p:sp>
+      <p:pic>
+        <p:nvPicPr>
+          <p:cNvPr id="4" name="Picture 3" descr="A black background with white text&#10;&#10;AI-generated content may be incorrect.">
+            <a:extLst>
+              <a:ext uri="{FF2B5EF4-FFF2-40B4-BE49-F238E27FC236}">
+                <a16:creationId xmlns:a16="http://schemas.microsoft.com/office/drawing/2014/main" id="{05BE7F7D-1FDB-3995-C06F-BB3511E42D09}"/>
+              </a:ext>
+            </a:extLst>
+          </p:cNvPr>
+          <p:cNvPicPr>
+            <a:picLocks noChangeAspect="1"/>
+          </p:cNvPicPr>
+          <p:nvPr/>
+        </p:nvPicPr>
+        <p:blipFill>
+          <a:blip r:embed="rId2"/>
+          <a:stretch>
+            <a:fillRect/>
+          </a:stretch>
+        </p:blipFill>
+        <p:spPr>
+          <a:xfrm>
+            <a:off x="408792" y="2432332"/>
+            <a:ext cx="6207430" cy="469335"/>
+          </a:xfrm>
+          <a:prstGeom prst="rect">
+            <a:avLst/>
+          </a:prstGeom>
+        </p:spPr>
+      </p:pic>
+      <p:pic>
+        <p:nvPicPr>
+          <p:cNvPr id="9" name="Picture 8">
+            <a:extLst>
+              <a:ext uri="{FF2B5EF4-FFF2-40B4-BE49-F238E27FC236}">
+                <a16:creationId xmlns:a16="http://schemas.microsoft.com/office/drawing/2014/main" id="{A905228F-7829-3D6A-85BF-44A87A2F7E11}"/>
+              </a:ext>
+            </a:extLst>
+          </p:cNvPr>
+          <p:cNvPicPr>
+            <a:picLocks noChangeAspect="1"/>
+          </p:cNvPicPr>
+          <p:nvPr/>
+        </p:nvPicPr>
+        <p:blipFill>
+          <a:blip r:embed="rId3"/>
+          <a:stretch>
+            <a:fillRect/>
+          </a:stretch>
+        </p:blipFill>
+        <p:spPr>
+          <a:xfrm>
+            <a:off x="413686" y="5250363"/>
+            <a:ext cx="4600575" cy="323850"/>
+          </a:xfrm>
+          <a:prstGeom prst="rect">
+            <a:avLst/>
+          </a:prstGeom>
+        </p:spPr>
+      </p:pic>
+      <p:pic>
+        <p:nvPicPr>
+          <p:cNvPr id="11" name="Picture 10" descr="A screen shot of a computer program&#10;&#10;AI-generated content may be incorrect.">
+            <a:extLst>
+              <a:ext uri="{FF2B5EF4-FFF2-40B4-BE49-F238E27FC236}">
+                <a16:creationId xmlns:a16="http://schemas.microsoft.com/office/drawing/2014/main" id="{93E9D1FE-4830-EC4C-B3C0-79778C7797EE}"/>
+              </a:ext>
+            </a:extLst>
+          </p:cNvPr>
+          <p:cNvPicPr>
+            <a:picLocks noChangeAspect="1"/>
+          </p:cNvPicPr>
+          <p:nvPr/>
+        </p:nvPicPr>
+        <p:blipFill>
+          <a:blip r:embed="rId4"/>
+          <a:stretch>
+            <a:fillRect/>
+          </a:stretch>
+        </p:blipFill>
+        <p:spPr>
+          <a:xfrm>
+            <a:off x="6618831" y="4598944"/>
+            <a:ext cx="3296695" cy="1960715"/>
+          </a:xfrm>
+          <a:prstGeom prst="rect">
+            <a:avLst/>
+          </a:prstGeom>
+        </p:spPr>
+      </p:pic>
+    </p:spTree>
+    <p:extLst>
+      <p:ext uri="{BB962C8B-B14F-4D97-AF65-F5344CB8AC3E}">
+        <p14:creationId xmlns:p14="http://schemas.microsoft.com/office/powerpoint/2010/main" val="437516197"/>
+      </p:ext>
+    </p:extLst>
+  </p:cSld>
+  <p:clrMapOvr>
+    <a:masterClrMapping/>
+  </p:clrMapOvr>
+</p:sld>
+</file>
+
+<file path=ppt/slides/slide16.xml><?xml version="1.0" encoding="utf-8"?>
+<p:sld xmlns:a="http://schemas.openxmlformats.org/drawingml/2006/main" xmlns:r="http://schemas.openxmlformats.org/officeDocument/2006/relationships" xmlns:p="http://schemas.openxmlformats.org/presentationml/2006/main">
+  <p:cSld>
+    <p:spTree>
+      <p:nvGrpSpPr>
+        <p:cNvPr id="1" name="">
+          <a:extLst>
+            <a:ext uri="{FF2B5EF4-FFF2-40B4-BE49-F238E27FC236}">
+              <a16:creationId xmlns:a16="http://schemas.microsoft.com/office/drawing/2014/main" id="{F40C63AB-4038-5427-6BFD-2676F5953BB2}"/>
+            </a:ext>
+          </a:extLst>
+        </p:cNvPr>
+        <p:cNvGrpSpPr/>
+        <p:nvPr/>
+      </p:nvGrpSpPr>
+      <p:grpSpPr>
+        <a:xfrm>
+          <a:off x="0" y="0"/>
+          <a:ext cx="0" cy="0"/>
+          <a:chOff x="0" y="0"/>
+          <a:chExt cx="0" cy="0"/>
+        </a:xfrm>
+      </p:grpSpPr>
+      <p:sp>
+        <p:nvSpPr>
+          <p:cNvPr id="2" name="Title 1">
+            <a:extLst>
+              <a:ext uri="{FF2B5EF4-FFF2-40B4-BE49-F238E27FC236}">
+                <a16:creationId xmlns:a16="http://schemas.microsoft.com/office/drawing/2014/main" id="{32AEE136-C076-0EB7-1FD5-53F876AA3201}"/>
+              </a:ext>
+            </a:extLst>
+          </p:cNvPr>
+          <p:cNvSpPr>
+            <a:spLocks noGrp="1"/>
+          </p:cNvSpPr>
+          <p:nvPr>
+            <p:ph type="title"/>
+          </p:nvPr>
+        </p:nvSpPr>
+        <p:spPr/>
+        <p:txBody>
+          <a:bodyPr>
+            <a:normAutofit/>
+          </a:bodyPr>
+          <a:lstStyle/>
+          <a:p>
+            <a:r>
+              <a:rPr lang="en-US" sz="1600"/>
+              <a:t>Test ID: T-MUL-CPLX1</a:t>
+            </a:r>
+            <a:endParaRPr lang="en-US"/>
+          </a:p>
+          <a:p>
+            <a:r>
+              <a:rPr lang="en-US" sz="1600">
+                <a:ea typeface="+mj-lt"/>
+                <a:cs typeface="+mj-lt"/>
+              </a:rPr>
+              <a:t>Statement of unit test: Verify that multiplying two complex numbers returns the correct complex product.</a:t>
+            </a:r>
+            <a:endParaRPr lang="en-US"/>
+          </a:p>
+          <a:p>
+            <a:r>
+              <a:rPr lang="en-US" sz="1600">
+                <a:ea typeface="+mj-lt"/>
+                <a:cs typeface="+mj-lt"/>
+              </a:rPr>
+              <a:t>Expected results: </a:t>
+            </a:r>
+            <a:r>
+              <a:rPr lang="en-US" sz="1600">
+                <a:latin typeface="Aptos Display"/>
+              </a:rPr>
+              <a:t>11 + j2</a:t>
+            </a:r>
+            <a:endParaRPr lang="en-US"/>
+          </a:p>
+        </p:txBody>
+      </p:sp>
+      <p:sp>
+        <p:nvSpPr>
+          <p:cNvPr id="3" name="Content Placeholder 2">
+            <a:extLst>
+              <a:ext uri="{FF2B5EF4-FFF2-40B4-BE49-F238E27FC236}">
+                <a16:creationId xmlns:a16="http://schemas.microsoft.com/office/drawing/2014/main" id="{BCFA6DDF-7879-0547-583C-5E68F64315B4}"/>
+              </a:ext>
+            </a:extLst>
+          </p:cNvPr>
+          <p:cNvSpPr>
+            <a:spLocks noGrp="1"/>
+          </p:cNvSpPr>
+          <p:nvPr>
+            <p:ph idx="1"/>
+          </p:nvPr>
+        </p:nvSpPr>
+        <p:spPr>
+          <a:xfrm>
+            <a:off x="838200" y="1825625"/>
+            <a:ext cx="2841346" cy="4351338"/>
+          </a:xfrm>
+        </p:spPr>
+        <p:txBody>
+          <a:bodyPr>
+            <a:normAutofit/>
+          </a:bodyPr>
+          <a:lstStyle/>
+          <a:p>
+            <a:r>
+              <a:rPr lang="en-US" sz="1100" dirty="0"/>
+              <a:t>Screen capture of unit test code:</a:t>
+            </a:r>
+          </a:p>
+        </p:txBody>
+      </p:sp>
+      <p:sp>
+        <p:nvSpPr>
+          <p:cNvPr id="7" name="Content Placeholder 2">
+            <a:extLst>
+              <a:ext uri="{FF2B5EF4-FFF2-40B4-BE49-F238E27FC236}">
+                <a16:creationId xmlns:a16="http://schemas.microsoft.com/office/drawing/2014/main" id="{49E28185-D98C-BA84-1C23-4DB6D0F88F05}"/>
+              </a:ext>
+            </a:extLst>
+          </p:cNvPr>
+          <p:cNvSpPr txBox="1">
+            <a:spLocks/>
+          </p:cNvSpPr>
+          <p:nvPr/>
+        </p:nvSpPr>
+        <p:spPr>
+          <a:xfrm>
+            <a:off x="7788707" y="1825625"/>
+            <a:ext cx="2841346" cy="4351338"/>
+          </a:xfrm>
+          <a:prstGeom prst="rect">
+            <a:avLst/>
+          </a:prstGeom>
+        </p:spPr>
+        <p:txBody>
+          <a:bodyPr vert="horz" lIns="91440" tIns="45720" rIns="91440" bIns="45720" rtlCol="0" anchor="t">
+            <a:normAutofit/>
+          </a:bodyPr>
+          <a:lstStyle>
+            <a:lvl1pPr marL="228600" indent="-228600" algn="l" defTabSz="914400" rtl="0" eaLnBrk="1" latinLnBrk="0" hangingPunct="1">
+              <a:lnSpc>
+                <a:spcPct val="90000"/>
+              </a:lnSpc>
+              <a:spcBef>
+                <a:spcPts val="1000"/>
+              </a:spcBef>
+              <a:buFont typeface="Arial" panose="020B0604020202020204" pitchFamily="34" charset="0"/>
+              <a:buChar char="•"/>
+              <a:defRPr sz="2800" kern="1200">
+                <a:solidFill>
+                  <a:schemeClr val="tx1"/>
+                </a:solidFill>
+                <a:latin typeface="+mn-lt"/>
+                <a:ea typeface="+mn-ea"/>
+                <a:cs typeface="+mn-cs"/>
+              </a:defRPr>
+            </a:lvl1pPr>
+            <a:lvl2pPr marL="685800" indent="-228600" algn="l" defTabSz="914400" rtl="0" eaLnBrk="1" latinLnBrk="0" hangingPunct="1">
+              <a:lnSpc>
+                <a:spcPct val="90000"/>
+              </a:lnSpc>
+              <a:spcBef>
+                <a:spcPts val="500"/>
+              </a:spcBef>
+              <a:buFont typeface="Arial" panose="020B0604020202020204" pitchFamily="34" charset="0"/>
+              <a:buChar char="•"/>
+              <a:defRPr sz="2400" kern="1200">
+                <a:solidFill>
+                  <a:schemeClr val="tx1"/>
+                </a:solidFill>
+                <a:latin typeface="+mn-lt"/>
+                <a:ea typeface="+mn-ea"/>
+                <a:cs typeface="+mn-cs"/>
+              </a:defRPr>
+            </a:lvl2pPr>
+            <a:lvl3pPr marL="1143000" indent="-228600" algn="l" defTabSz="914400" rtl="0" eaLnBrk="1" latinLnBrk="0" hangingPunct="1">
+              <a:lnSpc>
+                <a:spcPct val="90000"/>
+              </a:lnSpc>
+              <a:spcBef>
+                <a:spcPts val="500"/>
+              </a:spcBef>
+              <a:buFont typeface="Arial" panose="020B0604020202020204" pitchFamily="34" charset="0"/>
+              <a:buChar char="•"/>
+              <a:defRPr sz="2000" kern="1200">
+                <a:solidFill>
+                  <a:schemeClr val="tx1"/>
+                </a:solidFill>
+                <a:latin typeface="+mn-lt"/>
+                <a:ea typeface="+mn-ea"/>
+                <a:cs typeface="+mn-cs"/>
+              </a:defRPr>
+            </a:lvl3pPr>
+            <a:lvl4pPr marL="1600200" indent="-228600" algn="l" defTabSz="914400" rtl="0" eaLnBrk="1" latinLnBrk="0" hangingPunct="1">
+              <a:lnSpc>
+                <a:spcPct val="90000"/>
+              </a:lnSpc>
+              <a:spcBef>
+                <a:spcPts val="500"/>
+              </a:spcBef>
+              <a:buFont typeface="Arial" panose="020B0604020202020204" pitchFamily="34" charset="0"/>
+              <a:buChar char="•"/>
+              <a:defRPr sz="1800" kern="1200">
+                <a:solidFill>
+                  <a:schemeClr val="tx1"/>
+                </a:solidFill>
+                <a:latin typeface="+mn-lt"/>
+                <a:ea typeface="+mn-ea"/>
+                <a:cs typeface="+mn-cs"/>
+              </a:defRPr>
+            </a:lvl4pPr>
+            <a:lvl5pPr marL="2057400" indent="-228600" algn="l" defTabSz="914400" rtl="0" eaLnBrk="1" latinLnBrk="0" hangingPunct="1">
+              <a:lnSpc>
+                <a:spcPct val="90000"/>
+              </a:lnSpc>
+              <a:spcBef>
+                <a:spcPts val="500"/>
+              </a:spcBef>
+              <a:buFont typeface="Arial" panose="020B0604020202020204" pitchFamily="34" charset="0"/>
+              <a:buChar char="•"/>
+              <a:defRPr sz="1800" kern="1200">
+                <a:solidFill>
+                  <a:schemeClr val="tx1"/>
+                </a:solidFill>
+                <a:latin typeface="+mn-lt"/>
+                <a:ea typeface="+mn-ea"/>
+                <a:cs typeface="+mn-cs"/>
+              </a:defRPr>
+            </a:lvl5pPr>
+            <a:lvl6pPr marL="2514600" indent="-228600" algn="l" defTabSz="914400" rtl="0" eaLnBrk="1" latinLnBrk="0" hangingPunct="1">
+              <a:lnSpc>
+                <a:spcPct val="90000"/>
+              </a:lnSpc>
+              <a:spcBef>
+                <a:spcPts val="500"/>
+              </a:spcBef>
+              <a:buFont typeface="Arial" panose="020B0604020202020204" pitchFamily="34" charset="0"/>
+              <a:buChar char="•"/>
+              <a:defRPr sz="1800" kern="1200">
+                <a:solidFill>
+                  <a:schemeClr val="tx1"/>
+                </a:solidFill>
+                <a:latin typeface="+mn-lt"/>
+                <a:ea typeface="+mn-ea"/>
+                <a:cs typeface="+mn-cs"/>
+              </a:defRPr>
+            </a:lvl6pPr>
+            <a:lvl7pPr marL="2971800" indent="-228600" algn="l" defTabSz="914400" rtl="0" eaLnBrk="1" latinLnBrk="0" hangingPunct="1">
+              <a:lnSpc>
+                <a:spcPct val="90000"/>
+              </a:lnSpc>
+              <a:spcBef>
+                <a:spcPts val="500"/>
+              </a:spcBef>
+              <a:buFont typeface="Arial" panose="020B0604020202020204" pitchFamily="34" charset="0"/>
+              <a:buChar char="•"/>
+              <a:defRPr sz="1800" kern="1200">
+                <a:solidFill>
+                  <a:schemeClr val="tx1"/>
+                </a:solidFill>
+                <a:latin typeface="+mn-lt"/>
+                <a:ea typeface="+mn-ea"/>
+                <a:cs typeface="+mn-cs"/>
+              </a:defRPr>
+            </a:lvl7pPr>
+            <a:lvl8pPr marL="3429000" indent="-228600" algn="l" defTabSz="914400" rtl="0" eaLnBrk="1" latinLnBrk="0" hangingPunct="1">
+              <a:lnSpc>
+                <a:spcPct val="90000"/>
+              </a:lnSpc>
+              <a:spcBef>
+                <a:spcPts val="500"/>
+              </a:spcBef>
+              <a:buFont typeface="Arial" panose="020B0604020202020204" pitchFamily="34" charset="0"/>
+              <a:buChar char="•"/>
+              <a:defRPr sz="1800" kern="1200">
+                <a:solidFill>
+                  <a:schemeClr val="tx1"/>
+                </a:solidFill>
+                <a:latin typeface="+mn-lt"/>
+                <a:ea typeface="+mn-ea"/>
+                <a:cs typeface="+mn-cs"/>
+              </a:defRPr>
+            </a:lvl8pPr>
+            <a:lvl9pPr marL="3886200" indent="-228600" algn="l" defTabSz="914400" rtl="0" eaLnBrk="1" latinLnBrk="0" hangingPunct="1">
+              <a:lnSpc>
+                <a:spcPct val="90000"/>
+              </a:lnSpc>
+              <a:spcBef>
+                <a:spcPts val="500"/>
+              </a:spcBef>
+              <a:buFont typeface="Arial" panose="020B0604020202020204" pitchFamily="34" charset="0"/>
+              <a:buChar char="•"/>
+              <a:defRPr sz="1800" kern="1200">
+                <a:solidFill>
+                  <a:schemeClr val="tx1"/>
+                </a:solidFill>
+                <a:latin typeface="+mn-lt"/>
+                <a:ea typeface="+mn-ea"/>
+                <a:cs typeface="+mn-cs"/>
+              </a:defRPr>
+            </a:lvl9pPr>
+          </a:lstStyle>
+          <a:p>
+            <a:r>
+              <a:rPr lang="en-US" sz="1100"/>
+              <a:t>Code changes</a:t>
+            </a:r>
+            <a:br>
+              <a:rPr lang="en-US" sz="1100" dirty="0"/>
+            </a:br>
+            <a:endParaRPr lang="en-US" sz="1100" dirty="0"/>
+          </a:p>
+          <a:p>
+            <a:pPr marL="0" indent="0">
+              <a:buNone/>
+            </a:pPr>
+            <a:r>
+              <a:rPr lang="en-US" sz="1100"/>
+              <a:t>None required. Python's a * b handles this natively.</a:t>
+            </a:r>
+            <a:endParaRPr lang="en-US"/>
+          </a:p>
+        </p:txBody>
+      </p:sp>
+      <p:sp>
+        <p:nvSpPr>
+          <p:cNvPr id="10" name="Content Placeholder 2">
+            <a:extLst>
+              <a:ext uri="{FF2B5EF4-FFF2-40B4-BE49-F238E27FC236}">
+                <a16:creationId xmlns:a16="http://schemas.microsoft.com/office/drawing/2014/main" id="{4E9557C6-4DD2-5A5D-31C2-F4A2DB5CD21D}"/>
+              </a:ext>
+            </a:extLst>
+          </p:cNvPr>
+          <p:cNvSpPr txBox="1">
+            <a:spLocks/>
+          </p:cNvSpPr>
+          <p:nvPr/>
+        </p:nvSpPr>
+        <p:spPr>
+          <a:xfrm>
+            <a:off x="879958" y="4067250"/>
+            <a:ext cx="2841346" cy="1947559"/>
+          </a:xfrm>
+          <a:prstGeom prst="rect">
+            <a:avLst/>
+          </a:prstGeom>
+        </p:spPr>
+        <p:txBody>
+          <a:bodyPr vert="horz" lIns="91440" tIns="45720" rIns="91440" bIns="45720" rtlCol="0">
+            <a:normAutofit/>
+          </a:bodyPr>
+          <a:lstStyle>
+            <a:lvl1pPr marL="228600" indent="-228600" algn="l" defTabSz="914400" rtl="0" eaLnBrk="1" latinLnBrk="0" hangingPunct="1">
+              <a:lnSpc>
+                <a:spcPct val="90000"/>
+              </a:lnSpc>
+              <a:spcBef>
+                <a:spcPts val="1000"/>
+              </a:spcBef>
+              <a:buFont typeface="Arial" panose="020B0604020202020204" pitchFamily="34" charset="0"/>
+              <a:buChar char="•"/>
+              <a:defRPr sz="2800" kern="1200">
+                <a:solidFill>
+                  <a:schemeClr val="tx1"/>
+                </a:solidFill>
+                <a:latin typeface="+mn-lt"/>
+                <a:ea typeface="+mn-ea"/>
+                <a:cs typeface="+mn-cs"/>
+              </a:defRPr>
+            </a:lvl1pPr>
+            <a:lvl2pPr marL="685800" indent="-228600" algn="l" defTabSz="914400" rtl="0" eaLnBrk="1" latinLnBrk="0" hangingPunct="1">
+              <a:lnSpc>
+                <a:spcPct val="90000"/>
+              </a:lnSpc>
+              <a:spcBef>
+                <a:spcPts val="500"/>
+              </a:spcBef>
+              <a:buFont typeface="Arial" panose="020B0604020202020204" pitchFamily="34" charset="0"/>
+              <a:buChar char="•"/>
+              <a:defRPr sz="2400" kern="1200">
+                <a:solidFill>
+                  <a:schemeClr val="tx1"/>
+                </a:solidFill>
+                <a:latin typeface="+mn-lt"/>
+                <a:ea typeface="+mn-ea"/>
+                <a:cs typeface="+mn-cs"/>
+              </a:defRPr>
+            </a:lvl2pPr>
+            <a:lvl3pPr marL="1143000" indent="-228600" algn="l" defTabSz="914400" rtl="0" eaLnBrk="1" latinLnBrk="0" hangingPunct="1">
+              <a:lnSpc>
+                <a:spcPct val="90000"/>
+              </a:lnSpc>
+              <a:spcBef>
+                <a:spcPts val="500"/>
+              </a:spcBef>
+              <a:buFont typeface="Arial" panose="020B0604020202020204" pitchFamily="34" charset="0"/>
+              <a:buChar char="•"/>
+              <a:defRPr sz="2000" kern="1200">
+                <a:solidFill>
+                  <a:schemeClr val="tx1"/>
+                </a:solidFill>
+                <a:latin typeface="+mn-lt"/>
+                <a:ea typeface="+mn-ea"/>
+                <a:cs typeface="+mn-cs"/>
+              </a:defRPr>
+            </a:lvl3pPr>
+            <a:lvl4pPr marL="1600200" indent="-228600" algn="l" defTabSz="914400" rtl="0" eaLnBrk="1" latinLnBrk="0" hangingPunct="1">
+              <a:lnSpc>
+                <a:spcPct val="90000"/>
+              </a:lnSpc>
+              <a:spcBef>
+                <a:spcPts val="500"/>
+              </a:spcBef>
+              <a:buFont typeface="Arial" panose="020B0604020202020204" pitchFamily="34" charset="0"/>
+              <a:buChar char="•"/>
+              <a:defRPr sz="1800" kern="1200">
+                <a:solidFill>
+                  <a:schemeClr val="tx1"/>
+                </a:solidFill>
+                <a:latin typeface="+mn-lt"/>
+                <a:ea typeface="+mn-ea"/>
+                <a:cs typeface="+mn-cs"/>
+              </a:defRPr>
+            </a:lvl4pPr>
+            <a:lvl5pPr marL="2057400" indent="-228600" algn="l" defTabSz="914400" rtl="0" eaLnBrk="1" latinLnBrk="0" hangingPunct="1">
+              <a:lnSpc>
+                <a:spcPct val="90000"/>
+              </a:lnSpc>
+              <a:spcBef>
+                <a:spcPts val="500"/>
+              </a:spcBef>
+              <a:buFont typeface="Arial" panose="020B0604020202020204" pitchFamily="34" charset="0"/>
+              <a:buChar char="•"/>
+              <a:defRPr sz="1800" kern="1200">
+                <a:solidFill>
+                  <a:schemeClr val="tx1"/>
+                </a:solidFill>
+                <a:latin typeface="+mn-lt"/>
+                <a:ea typeface="+mn-ea"/>
+                <a:cs typeface="+mn-cs"/>
+              </a:defRPr>
+            </a:lvl5pPr>
+            <a:lvl6pPr marL="2514600" indent="-228600" algn="l" defTabSz="914400" rtl="0" eaLnBrk="1" latinLnBrk="0" hangingPunct="1">
+              <a:lnSpc>
+                <a:spcPct val="90000"/>
+              </a:lnSpc>
+              <a:spcBef>
+                <a:spcPts val="500"/>
+              </a:spcBef>
+              <a:buFont typeface="Arial" panose="020B0604020202020204" pitchFamily="34" charset="0"/>
+              <a:buChar char="•"/>
+              <a:defRPr sz="1800" kern="1200">
+                <a:solidFill>
+                  <a:schemeClr val="tx1"/>
+                </a:solidFill>
+                <a:latin typeface="+mn-lt"/>
+                <a:ea typeface="+mn-ea"/>
+                <a:cs typeface="+mn-cs"/>
+              </a:defRPr>
+            </a:lvl6pPr>
+            <a:lvl7pPr marL="2971800" indent="-228600" algn="l" defTabSz="914400" rtl="0" eaLnBrk="1" latinLnBrk="0" hangingPunct="1">
+              <a:lnSpc>
+                <a:spcPct val="90000"/>
+              </a:lnSpc>
+              <a:spcBef>
+                <a:spcPts val="500"/>
+              </a:spcBef>
+              <a:buFont typeface="Arial" panose="020B0604020202020204" pitchFamily="34" charset="0"/>
+              <a:buChar char="•"/>
+              <a:defRPr sz="1800" kern="1200">
+                <a:solidFill>
+                  <a:schemeClr val="tx1"/>
+                </a:solidFill>
+                <a:latin typeface="+mn-lt"/>
+                <a:ea typeface="+mn-ea"/>
+                <a:cs typeface="+mn-cs"/>
+              </a:defRPr>
+            </a:lvl7pPr>
+            <a:lvl8pPr marL="3429000" indent="-228600" algn="l" defTabSz="914400" rtl="0" eaLnBrk="1" latinLnBrk="0" hangingPunct="1">
+              <a:lnSpc>
+                <a:spcPct val="90000"/>
+              </a:lnSpc>
+              <a:spcBef>
+                <a:spcPts val="500"/>
+              </a:spcBef>
+              <a:buFont typeface="Arial" panose="020B0604020202020204" pitchFamily="34" charset="0"/>
+              <a:buChar char="•"/>
+              <a:defRPr sz="1800" kern="1200">
+                <a:solidFill>
+                  <a:schemeClr val="tx1"/>
+                </a:solidFill>
+                <a:latin typeface="+mn-lt"/>
+                <a:ea typeface="+mn-ea"/>
+                <a:cs typeface="+mn-cs"/>
+              </a:defRPr>
+            </a:lvl8pPr>
+            <a:lvl9pPr marL="3886200" indent="-228600" algn="l" defTabSz="914400" rtl="0" eaLnBrk="1" latinLnBrk="0" hangingPunct="1">
+              <a:lnSpc>
+                <a:spcPct val="90000"/>
+              </a:lnSpc>
+              <a:spcBef>
+                <a:spcPts val="500"/>
+              </a:spcBef>
+              <a:buFont typeface="Arial" panose="020B0604020202020204" pitchFamily="34" charset="0"/>
+              <a:buChar char="•"/>
+              <a:defRPr sz="1800" kern="1200">
+                <a:solidFill>
+                  <a:schemeClr val="tx1"/>
+                </a:solidFill>
+                <a:latin typeface="+mn-lt"/>
+                <a:ea typeface="+mn-ea"/>
+                <a:cs typeface="+mn-cs"/>
+              </a:defRPr>
+            </a:lvl9pPr>
+          </a:lstStyle>
+          <a:p>
+            <a:r>
+              <a:rPr lang="en-US" sz="1100" dirty="0"/>
+              <a:t>Screen capture demonstrating unit test passing</a:t>
+            </a:r>
+          </a:p>
+        </p:txBody>
+      </p:sp>
+      <p:sp>
+        <p:nvSpPr>
+          <p:cNvPr id="12" name="Content Placeholder 2">
+            <a:extLst>
+              <a:ext uri="{FF2B5EF4-FFF2-40B4-BE49-F238E27FC236}">
+                <a16:creationId xmlns:a16="http://schemas.microsoft.com/office/drawing/2014/main" id="{084C3600-C570-F190-6549-65270EC7F68E}"/>
+              </a:ext>
+            </a:extLst>
+          </p:cNvPr>
+          <p:cNvSpPr txBox="1">
+            <a:spLocks/>
+          </p:cNvSpPr>
+          <p:nvPr/>
+        </p:nvSpPr>
+        <p:spPr>
+          <a:xfrm>
+            <a:off x="6417390" y="4067250"/>
+            <a:ext cx="2841346" cy="1947560"/>
+          </a:xfrm>
+          <a:prstGeom prst="rect">
+            <a:avLst/>
+          </a:prstGeom>
+        </p:spPr>
+        <p:txBody>
+          <a:bodyPr vert="horz" lIns="91440" tIns="45720" rIns="91440" bIns="45720" rtlCol="0">
+            <a:normAutofit/>
+          </a:bodyPr>
+          <a:lstStyle>
+            <a:lvl1pPr marL="228600" indent="-228600" algn="l" defTabSz="914400" rtl="0" eaLnBrk="1" latinLnBrk="0" hangingPunct="1">
+              <a:lnSpc>
+                <a:spcPct val="90000"/>
+              </a:lnSpc>
+              <a:spcBef>
+                <a:spcPts val="1000"/>
+              </a:spcBef>
+              <a:buFont typeface="Arial" panose="020B0604020202020204" pitchFamily="34" charset="0"/>
+              <a:buChar char="•"/>
+              <a:defRPr sz="2800" kern="1200">
+                <a:solidFill>
+                  <a:schemeClr val="tx1"/>
+                </a:solidFill>
+                <a:latin typeface="+mn-lt"/>
+                <a:ea typeface="+mn-ea"/>
+                <a:cs typeface="+mn-cs"/>
+              </a:defRPr>
+            </a:lvl1pPr>
+            <a:lvl2pPr marL="685800" indent="-228600" algn="l" defTabSz="914400" rtl="0" eaLnBrk="1" latinLnBrk="0" hangingPunct="1">
+              <a:lnSpc>
+                <a:spcPct val="90000"/>
+              </a:lnSpc>
+              <a:spcBef>
+                <a:spcPts val="500"/>
+              </a:spcBef>
+              <a:buFont typeface="Arial" panose="020B0604020202020204" pitchFamily="34" charset="0"/>
+              <a:buChar char="•"/>
+              <a:defRPr sz="2400" kern="1200">
+                <a:solidFill>
+                  <a:schemeClr val="tx1"/>
+                </a:solidFill>
+                <a:latin typeface="+mn-lt"/>
+                <a:ea typeface="+mn-ea"/>
+                <a:cs typeface="+mn-cs"/>
+              </a:defRPr>
+            </a:lvl2pPr>
+            <a:lvl3pPr marL="1143000" indent="-228600" algn="l" defTabSz="914400" rtl="0" eaLnBrk="1" latinLnBrk="0" hangingPunct="1">
+              <a:lnSpc>
+                <a:spcPct val="90000"/>
+              </a:lnSpc>
+              <a:spcBef>
+                <a:spcPts val="500"/>
+              </a:spcBef>
+              <a:buFont typeface="Arial" panose="020B0604020202020204" pitchFamily="34" charset="0"/>
+              <a:buChar char="•"/>
+              <a:defRPr sz="2000" kern="1200">
+                <a:solidFill>
+                  <a:schemeClr val="tx1"/>
+                </a:solidFill>
+                <a:latin typeface="+mn-lt"/>
+                <a:ea typeface="+mn-ea"/>
+                <a:cs typeface="+mn-cs"/>
+              </a:defRPr>
+            </a:lvl3pPr>
+            <a:lvl4pPr marL="1600200" indent="-228600" algn="l" defTabSz="914400" rtl="0" eaLnBrk="1" latinLnBrk="0" hangingPunct="1">
+              <a:lnSpc>
+                <a:spcPct val="90000"/>
+              </a:lnSpc>
+              <a:spcBef>
+                <a:spcPts val="500"/>
+              </a:spcBef>
+              <a:buFont typeface="Arial" panose="020B0604020202020204" pitchFamily="34" charset="0"/>
+              <a:buChar char="•"/>
+              <a:defRPr sz="1800" kern="1200">
+                <a:solidFill>
+                  <a:schemeClr val="tx1"/>
+                </a:solidFill>
+                <a:latin typeface="+mn-lt"/>
+                <a:ea typeface="+mn-ea"/>
+                <a:cs typeface="+mn-cs"/>
+              </a:defRPr>
+            </a:lvl4pPr>
+            <a:lvl5pPr marL="2057400" indent="-228600" algn="l" defTabSz="914400" rtl="0" eaLnBrk="1" latinLnBrk="0" hangingPunct="1">
+              <a:lnSpc>
+                <a:spcPct val="90000"/>
+              </a:lnSpc>
+              <a:spcBef>
+                <a:spcPts val="500"/>
+              </a:spcBef>
+              <a:buFont typeface="Arial" panose="020B0604020202020204" pitchFamily="34" charset="0"/>
+              <a:buChar char="•"/>
+              <a:defRPr sz="1800" kern="1200">
+                <a:solidFill>
+                  <a:schemeClr val="tx1"/>
+                </a:solidFill>
+                <a:latin typeface="+mn-lt"/>
+                <a:ea typeface="+mn-ea"/>
+                <a:cs typeface="+mn-cs"/>
+              </a:defRPr>
+            </a:lvl5pPr>
+            <a:lvl6pPr marL="2514600" indent="-228600" algn="l" defTabSz="914400" rtl="0" eaLnBrk="1" latinLnBrk="0" hangingPunct="1">
+              <a:lnSpc>
+                <a:spcPct val="90000"/>
+              </a:lnSpc>
+              <a:spcBef>
+                <a:spcPts val="500"/>
+              </a:spcBef>
+              <a:buFont typeface="Arial" panose="020B0604020202020204" pitchFamily="34" charset="0"/>
+              <a:buChar char="•"/>
+              <a:defRPr sz="1800" kern="1200">
+                <a:solidFill>
+                  <a:schemeClr val="tx1"/>
+                </a:solidFill>
+                <a:latin typeface="+mn-lt"/>
+                <a:ea typeface="+mn-ea"/>
+                <a:cs typeface="+mn-cs"/>
+              </a:defRPr>
+            </a:lvl6pPr>
+            <a:lvl7pPr marL="2971800" indent="-228600" algn="l" defTabSz="914400" rtl="0" eaLnBrk="1" latinLnBrk="0" hangingPunct="1">
+              <a:lnSpc>
+                <a:spcPct val="90000"/>
+              </a:lnSpc>
+              <a:spcBef>
+                <a:spcPts val="500"/>
+              </a:spcBef>
+              <a:buFont typeface="Arial" panose="020B0604020202020204" pitchFamily="34" charset="0"/>
+              <a:buChar char="•"/>
+              <a:defRPr sz="1800" kern="1200">
+                <a:solidFill>
+                  <a:schemeClr val="tx1"/>
+                </a:solidFill>
+                <a:latin typeface="+mn-lt"/>
+                <a:ea typeface="+mn-ea"/>
+                <a:cs typeface="+mn-cs"/>
+              </a:defRPr>
+            </a:lvl7pPr>
+            <a:lvl8pPr marL="3429000" indent="-228600" algn="l" defTabSz="914400" rtl="0" eaLnBrk="1" latinLnBrk="0" hangingPunct="1">
+              <a:lnSpc>
+                <a:spcPct val="90000"/>
+              </a:lnSpc>
+              <a:spcBef>
+                <a:spcPts val="500"/>
+              </a:spcBef>
+              <a:buFont typeface="Arial" panose="020B0604020202020204" pitchFamily="34" charset="0"/>
+              <a:buChar char="•"/>
+              <a:defRPr sz="1800" kern="1200">
+                <a:solidFill>
+                  <a:schemeClr val="tx1"/>
+                </a:solidFill>
+                <a:latin typeface="+mn-lt"/>
+                <a:ea typeface="+mn-ea"/>
+                <a:cs typeface="+mn-cs"/>
+              </a:defRPr>
+            </a:lvl8pPr>
+            <a:lvl9pPr marL="3886200" indent="-228600" algn="l" defTabSz="914400" rtl="0" eaLnBrk="1" latinLnBrk="0" hangingPunct="1">
+              <a:lnSpc>
+                <a:spcPct val="90000"/>
+              </a:lnSpc>
+              <a:spcBef>
+                <a:spcPts val="500"/>
+              </a:spcBef>
+              <a:buFont typeface="Arial" panose="020B0604020202020204" pitchFamily="34" charset="0"/>
+              <a:buChar char="•"/>
+              <a:defRPr sz="1800" kern="1200">
+                <a:solidFill>
+                  <a:schemeClr val="tx1"/>
+                </a:solidFill>
+                <a:latin typeface="+mn-lt"/>
+                <a:ea typeface="+mn-ea"/>
+                <a:cs typeface="+mn-cs"/>
+              </a:defRPr>
+            </a:lvl9pPr>
+          </a:lstStyle>
+          <a:p>
+            <a:r>
+              <a:rPr lang="en-US" sz="1100" dirty="0"/>
+              <a:t>Screen capture illustrating all previous unit tests still pass after code changes</a:t>
+            </a:r>
+          </a:p>
+        </p:txBody>
+      </p:sp>
+      <p:pic>
+        <p:nvPicPr>
+          <p:cNvPr id="5" name="Picture 4" descr="A black background with white text&#10;&#10;AI-generated content may be incorrect.">
+            <a:extLst>
+              <a:ext uri="{FF2B5EF4-FFF2-40B4-BE49-F238E27FC236}">
+                <a16:creationId xmlns:a16="http://schemas.microsoft.com/office/drawing/2014/main" id="{D035F27B-8CDC-F4FA-3FC0-99393647FD99}"/>
+              </a:ext>
+            </a:extLst>
+          </p:cNvPr>
+          <p:cNvPicPr>
+            <a:picLocks noChangeAspect="1"/>
+          </p:cNvPicPr>
+          <p:nvPr/>
+        </p:nvPicPr>
+        <p:blipFill>
+          <a:blip r:embed="rId2"/>
+          <a:stretch>
+            <a:fillRect/>
+          </a:stretch>
+        </p:blipFill>
+        <p:spPr>
+          <a:xfrm>
+            <a:off x="118150" y="2300483"/>
+            <a:ext cx="7206249" cy="503390"/>
+          </a:xfrm>
+          <a:prstGeom prst="rect">
+            <a:avLst/>
+          </a:prstGeom>
+        </p:spPr>
+      </p:pic>
+      <p:pic>
+        <p:nvPicPr>
+          <p:cNvPr id="6" name="Picture 5">
+            <a:extLst>
+              <a:ext uri="{FF2B5EF4-FFF2-40B4-BE49-F238E27FC236}">
+                <a16:creationId xmlns:a16="http://schemas.microsoft.com/office/drawing/2014/main" id="{EBC9C7A8-0A37-BBD8-DD13-C61D2D412967}"/>
+              </a:ext>
+            </a:extLst>
+          </p:cNvPr>
+          <p:cNvPicPr>
+            <a:picLocks noChangeAspect="1"/>
+          </p:cNvPicPr>
+          <p:nvPr/>
+        </p:nvPicPr>
+        <p:blipFill>
+          <a:blip r:embed="rId3"/>
+          <a:stretch>
+            <a:fillRect/>
+          </a:stretch>
+        </p:blipFill>
+        <p:spPr>
+          <a:xfrm>
+            <a:off x="392809" y="5407851"/>
+            <a:ext cx="4600575" cy="342900"/>
+          </a:xfrm>
+          <a:prstGeom prst="rect">
+            <a:avLst/>
+          </a:prstGeom>
+        </p:spPr>
+      </p:pic>
+      <p:pic>
+        <p:nvPicPr>
+          <p:cNvPr id="8" name="Picture 7" descr="A screen shot of a computer&#10;&#10;AI-generated content may be incorrect.">
+            <a:extLst>
+              <a:ext uri="{FF2B5EF4-FFF2-40B4-BE49-F238E27FC236}">
+                <a16:creationId xmlns:a16="http://schemas.microsoft.com/office/drawing/2014/main" id="{57E4086E-D30B-0BB2-BF2C-F5DD32F70549}"/>
+              </a:ext>
+            </a:extLst>
+          </p:cNvPr>
+          <p:cNvPicPr>
+            <a:picLocks noChangeAspect="1"/>
+          </p:cNvPicPr>
+          <p:nvPr/>
+        </p:nvPicPr>
+        <p:blipFill>
+          <a:blip r:embed="rId4"/>
+          <a:stretch>
+            <a:fillRect/>
+          </a:stretch>
+        </p:blipFill>
+        <p:spPr>
+          <a:xfrm>
+            <a:off x="6559136" y="4515958"/>
+            <a:ext cx="3332576" cy="2137123"/>
+          </a:xfrm>
+          <a:prstGeom prst="rect">
+            <a:avLst/>
+          </a:prstGeom>
+        </p:spPr>
+      </p:pic>
+    </p:spTree>
+    <p:extLst>
+      <p:ext uri="{BB962C8B-B14F-4D97-AF65-F5344CB8AC3E}">
+        <p14:creationId xmlns:p14="http://schemas.microsoft.com/office/powerpoint/2010/main" val="3973929530"/>
+      </p:ext>
+    </p:extLst>
+  </p:cSld>
+  <p:clrMapOvr>
+    <a:masterClrMapping/>
+  </p:clrMapOvr>
+</p:sld>
+</file>
+
+<file path=ppt/slides/slide17.xml><?xml version="1.0" encoding="utf-8"?>
+<p:sld xmlns:a="http://schemas.openxmlformats.org/drawingml/2006/main" xmlns:r="http://schemas.openxmlformats.org/officeDocument/2006/relationships" xmlns:p="http://schemas.openxmlformats.org/presentationml/2006/main">
+  <p:cSld>
+    <p:spTree>
+      <p:nvGrpSpPr>
+        <p:cNvPr id="1" name="">
+          <a:extLst>
+            <a:ext uri="{FF2B5EF4-FFF2-40B4-BE49-F238E27FC236}">
+              <a16:creationId xmlns:a16="http://schemas.microsoft.com/office/drawing/2014/main" id="{D2027C22-90D3-E6F2-283A-D1D2D7F73C36}"/>
+            </a:ext>
+          </a:extLst>
+        </p:cNvPr>
+        <p:cNvGrpSpPr/>
+        <p:nvPr/>
+      </p:nvGrpSpPr>
+      <p:grpSpPr>
+        <a:xfrm>
+          <a:off x="0" y="0"/>
+          <a:ext cx="0" cy="0"/>
+          <a:chOff x="0" y="0"/>
+          <a:chExt cx="0" cy="0"/>
+        </a:xfrm>
+      </p:grpSpPr>
+      <p:sp>
+        <p:nvSpPr>
+          <p:cNvPr id="2" name="Title 1">
+            <a:extLst>
+              <a:ext uri="{FF2B5EF4-FFF2-40B4-BE49-F238E27FC236}">
+                <a16:creationId xmlns:a16="http://schemas.microsoft.com/office/drawing/2014/main" id="{5DE6B906-D500-3858-6ED4-93A9DC28A142}"/>
+              </a:ext>
+            </a:extLst>
+          </p:cNvPr>
+          <p:cNvSpPr>
+            <a:spLocks noGrp="1"/>
+          </p:cNvSpPr>
+          <p:nvPr>
+            <p:ph type="title"/>
+          </p:nvPr>
+        </p:nvSpPr>
+        <p:spPr/>
+        <p:txBody>
+          <a:bodyPr>
+            <a:normAutofit/>
+          </a:bodyPr>
+          <a:lstStyle/>
+          <a:p>
+            <a:r>
+              <a:rPr lang="en-US" sz="1600"/>
+              <a:t>Test ID: T-DIV-CPLX1</a:t>
+            </a:r>
+            <a:endParaRPr lang="en-US"/>
+          </a:p>
+          <a:p>
+            <a:r>
+              <a:rPr lang="en-US" sz="1600">
+                <a:ea typeface="+mj-lt"/>
+                <a:cs typeface="+mj-lt"/>
+              </a:rPr>
+              <a:t>Statement of unit test: Verify that dividing two complex numbers returns the correct complex quotient.</a:t>
+            </a:r>
+            <a:endParaRPr lang="en-US"/>
+          </a:p>
+          <a:p>
+            <a:r>
+              <a:rPr lang="en-US" sz="1600">
+                <a:ea typeface="+mj-lt"/>
+                <a:cs typeface="+mj-lt"/>
+              </a:rPr>
+              <a:t>Expected results: </a:t>
+            </a:r>
+            <a:r>
+              <a:rPr lang="en-US" sz="1600">
+                <a:latin typeface="Aptos Display"/>
+              </a:rPr>
+              <a:t>3 - j1</a:t>
+            </a:r>
+            <a:endParaRPr lang="en-US"/>
+          </a:p>
+        </p:txBody>
+      </p:sp>
+      <p:sp>
+        <p:nvSpPr>
+          <p:cNvPr id="3" name="Content Placeholder 2">
+            <a:extLst>
+              <a:ext uri="{FF2B5EF4-FFF2-40B4-BE49-F238E27FC236}">
+                <a16:creationId xmlns:a16="http://schemas.microsoft.com/office/drawing/2014/main" id="{06DFA8C5-160D-C3CE-2143-13F6667ABDC9}"/>
+              </a:ext>
+            </a:extLst>
+          </p:cNvPr>
+          <p:cNvSpPr>
+            <a:spLocks noGrp="1"/>
+          </p:cNvSpPr>
+          <p:nvPr>
+            <p:ph idx="1"/>
+          </p:nvPr>
+        </p:nvSpPr>
+        <p:spPr>
+          <a:xfrm>
+            <a:off x="838200" y="1825625"/>
+            <a:ext cx="2841346" cy="4351338"/>
+          </a:xfrm>
+        </p:spPr>
+        <p:txBody>
+          <a:bodyPr>
+            <a:normAutofit/>
+          </a:bodyPr>
+          <a:lstStyle/>
+          <a:p>
+            <a:r>
+              <a:rPr lang="en-US" sz="1100" dirty="0"/>
+              <a:t>Screen capture of unit test code:</a:t>
+            </a:r>
+          </a:p>
+        </p:txBody>
+      </p:sp>
+      <p:sp>
+        <p:nvSpPr>
+          <p:cNvPr id="7" name="Content Placeholder 2">
+            <a:extLst>
+              <a:ext uri="{FF2B5EF4-FFF2-40B4-BE49-F238E27FC236}">
+                <a16:creationId xmlns:a16="http://schemas.microsoft.com/office/drawing/2014/main" id="{673965B4-3800-389A-2B85-58C4F88FE889}"/>
+              </a:ext>
+            </a:extLst>
+          </p:cNvPr>
+          <p:cNvSpPr txBox="1">
+            <a:spLocks/>
+          </p:cNvSpPr>
+          <p:nvPr/>
+        </p:nvSpPr>
+        <p:spPr>
+          <a:xfrm>
+            <a:off x="7788707" y="1825625"/>
+            <a:ext cx="2841346" cy="4351338"/>
+          </a:xfrm>
+          <a:prstGeom prst="rect">
+            <a:avLst/>
+          </a:prstGeom>
+        </p:spPr>
+        <p:txBody>
+          <a:bodyPr vert="horz" lIns="91440" tIns="45720" rIns="91440" bIns="45720" rtlCol="0" anchor="t">
+            <a:normAutofit/>
+          </a:bodyPr>
+          <a:lstStyle>
+            <a:lvl1pPr marL="228600" indent="-228600" algn="l" defTabSz="914400" rtl="0" eaLnBrk="1" latinLnBrk="0" hangingPunct="1">
+              <a:lnSpc>
+                <a:spcPct val="90000"/>
+              </a:lnSpc>
+              <a:spcBef>
+                <a:spcPts val="1000"/>
+              </a:spcBef>
+              <a:buFont typeface="Arial" panose="020B0604020202020204" pitchFamily="34" charset="0"/>
+              <a:buChar char="•"/>
+              <a:defRPr sz="2800" kern="1200">
+                <a:solidFill>
+                  <a:schemeClr val="tx1"/>
+                </a:solidFill>
+                <a:latin typeface="+mn-lt"/>
+                <a:ea typeface="+mn-ea"/>
+                <a:cs typeface="+mn-cs"/>
+              </a:defRPr>
+            </a:lvl1pPr>
+            <a:lvl2pPr marL="685800" indent="-228600" algn="l" defTabSz="914400" rtl="0" eaLnBrk="1" latinLnBrk="0" hangingPunct="1">
+              <a:lnSpc>
+                <a:spcPct val="90000"/>
+              </a:lnSpc>
+              <a:spcBef>
+                <a:spcPts val="500"/>
+              </a:spcBef>
+              <a:buFont typeface="Arial" panose="020B0604020202020204" pitchFamily="34" charset="0"/>
+              <a:buChar char="•"/>
+              <a:defRPr sz="2400" kern="1200">
+                <a:solidFill>
+                  <a:schemeClr val="tx1"/>
+                </a:solidFill>
+                <a:latin typeface="+mn-lt"/>
+                <a:ea typeface="+mn-ea"/>
+                <a:cs typeface="+mn-cs"/>
+              </a:defRPr>
+            </a:lvl2pPr>
+            <a:lvl3pPr marL="1143000" indent="-228600" algn="l" defTabSz="914400" rtl="0" eaLnBrk="1" latinLnBrk="0" hangingPunct="1">
+              <a:lnSpc>
+                <a:spcPct val="90000"/>
+              </a:lnSpc>
+              <a:spcBef>
+                <a:spcPts val="500"/>
+              </a:spcBef>
+              <a:buFont typeface="Arial" panose="020B0604020202020204" pitchFamily="34" charset="0"/>
+              <a:buChar char="•"/>
+              <a:defRPr sz="2000" kern="1200">
+                <a:solidFill>
+                  <a:schemeClr val="tx1"/>
+                </a:solidFill>
+                <a:latin typeface="+mn-lt"/>
+                <a:ea typeface="+mn-ea"/>
+                <a:cs typeface="+mn-cs"/>
+              </a:defRPr>
+            </a:lvl3pPr>
+            <a:lvl4pPr marL="1600200" indent="-228600" algn="l" defTabSz="914400" rtl="0" eaLnBrk="1" latinLnBrk="0" hangingPunct="1">
+              <a:lnSpc>
+                <a:spcPct val="90000"/>
+              </a:lnSpc>
+              <a:spcBef>
+                <a:spcPts val="500"/>
+              </a:spcBef>
+              <a:buFont typeface="Arial" panose="020B0604020202020204" pitchFamily="34" charset="0"/>
+              <a:buChar char="•"/>
+              <a:defRPr sz="1800" kern="1200">
+                <a:solidFill>
+                  <a:schemeClr val="tx1"/>
+                </a:solidFill>
+                <a:latin typeface="+mn-lt"/>
+                <a:ea typeface="+mn-ea"/>
+                <a:cs typeface="+mn-cs"/>
+              </a:defRPr>
+            </a:lvl4pPr>
+            <a:lvl5pPr marL="2057400" indent="-228600" algn="l" defTabSz="914400" rtl="0" eaLnBrk="1" latinLnBrk="0" hangingPunct="1">
+              <a:lnSpc>
+                <a:spcPct val="90000"/>
+              </a:lnSpc>
+              <a:spcBef>
+                <a:spcPts val="500"/>
+              </a:spcBef>
+              <a:buFont typeface="Arial" panose="020B0604020202020204" pitchFamily="34" charset="0"/>
+              <a:buChar char="•"/>
+              <a:defRPr sz="1800" kern="1200">
+                <a:solidFill>
+                  <a:schemeClr val="tx1"/>
+                </a:solidFill>
+                <a:latin typeface="+mn-lt"/>
+                <a:ea typeface="+mn-ea"/>
+                <a:cs typeface="+mn-cs"/>
+              </a:defRPr>
+            </a:lvl5pPr>
+            <a:lvl6pPr marL="2514600" indent="-228600" algn="l" defTabSz="914400" rtl="0" eaLnBrk="1" latinLnBrk="0" hangingPunct="1">
+              <a:lnSpc>
+                <a:spcPct val="90000"/>
+              </a:lnSpc>
+              <a:spcBef>
+                <a:spcPts val="500"/>
+              </a:spcBef>
+              <a:buFont typeface="Arial" panose="020B0604020202020204" pitchFamily="34" charset="0"/>
+              <a:buChar char="•"/>
+              <a:defRPr sz="1800" kern="1200">
+                <a:solidFill>
+                  <a:schemeClr val="tx1"/>
+                </a:solidFill>
+                <a:latin typeface="+mn-lt"/>
+                <a:ea typeface="+mn-ea"/>
+                <a:cs typeface="+mn-cs"/>
+              </a:defRPr>
+            </a:lvl6pPr>
+            <a:lvl7pPr marL="2971800" indent="-228600" algn="l" defTabSz="914400" rtl="0" eaLnBrk="1" latinLnBrk="0" hangingPunct="1">
+              <a:lnSpc>
+                <a:spcPct val="90000"/>
+              </a:lnSpc>
+              <a:spcBef>
+                <a:spcPts val="500"/>
+              </a:spcBef>
+              <a:buFont typeface="Arial" panose="020B0604020202020204" pitchFamily="34" charset="0"/>
+              <a:buChar char="•"/>
+              <a:defRPr sz="1800" kern="1200">
+                <a:solidFill>
+                  <a:schemeClr val="tx1"/>
+                </a:solidFill>
+                <a:latin typeface="+mn-lt"/>
+                <a:ea typeface="+mn-ea"/>
+                <a:cs typeface="+mn-cs"/>
+              </a:defRPr>
+            </a:lvl7pPr>
+            <a:lvl8pPr marL="3429000" indent="-228600" algn="l" defTabSz="914400" rtl="0" eaLnBrk="1" latinLnBrk="0" hangingPunct="1">
+              <a:lnSpc>
+                <a:spcPct val="90000"/>
+              </a:lnSpc>
+              <a:spcBef>
+                <a:spcPts val="500"/>
+              </a:spcBef>
+              <a:buFont typeface="Arial" panose="020B0604020202020204" pitchFamily="34" charset="0"/>
+              <a:buChar char="•"/>
+              <a:defRPr sz="1800" kern="1200">
+                <a:solidFill>
+                  <a:schemeClr val="tx1"/>
+                </a:solidFill>
+                <a:latin typeface="+mn-lt"/>
+                <a:ea typeface="+mn-ea"/>
+                <a:cs typeface="+mn-cs"/>
+              </a:defRPr>
+            </a:lvl8pPr>
+            <a:lvl9pPr marL="3886200" indent="-228600" algn="l" defTabSz="914400" rtl="0" eaLnBrk="1" latinLnBrk="0" hangingPunct="1">
+              <a:lnSpc>
+                <a:spcPct val="90000"/>
+              </a:lnSpc>
+              <a:spcBef>
+                <a:spcPts val="500"/>
+              </a:spcBef>
+              <a:buFont typeface="Arial" panose="020B0604020202020204" pitchFamily="34" charset="0"/>
+              <a:buChar char="•"/>
+              <a:defRPr sz="1800" kern="1200">
+                <a:solidFill>
+                  <a:schemeClr val="tx1"/>
+                </a:solidFill>
+                <a:latin typeface="+mn-lt"/>
+                <a:ea typeface="+mn-ea"/>
+                <a:cs typeface="+mn-cs"/>
+              </a:defRPr>
+            </a:lvl9pPr>
+          </a:lstStyle>
+          <a:p>
+            <a:r>
+              <a:rPr lang="en-US" sz="1100"/>
+              <a:t>Code changes</a:t>
+            </a:r>
+            <a:br>
+              <a:rPr lang="en-US" sz="1100" dirty="0"/>
+            </a:br>
+            <a:endParaRPr lang="en-US" sz="1100" dirty="0"/>
+          </a:p>
+          <a:p>
+            <a:pPr marL="0" indent="0">
+              <a:buNone/>
+            </a:pPr>
+            <a:r>
+              <a:rPr lang="en-US" sz="1100"/>
+              <a:t>None required. Python's a / b handles this natively.</a:t>
+            </a:r>
+            <a:endParaRPr lang="en-US"/>
+          </a:p>
+        </p:txBody>
+      </p:sp>
+      <p:sp>
+        <p:nvSpPr>
+          <p:cNvPr id="10" name="Content Placeholder 2">
+            <a:extLst>
+              <a:ext uri="{FF2B5EF4-FFF2-40B4-BE49-F238E27FC236}">
+                <a16:creationId xmlns:a16="http://schemas.microsoft.com/office/drawing/2014/main" id="{565FAFC8-A81E-FC23-C0EA-8ECCE3B20A0F}"/>
+              </a:ext>
+            </a:extLst>
+          </p:cNvPr>
+          <p:cNvSpPr txBox="1">
+            <a:spLocks/>
+          </p:cNvSpPr>
+          <p:nvPr/>
+        </p:nvSpPr>
+        <p:spPr>
+          <a:xfrm>
+            <a:off x="879958" y="4067250"/>
+            <a:ext cx="2841346" cy="1947559"/>
+          </a:xfrm>
+          <a:prstGeom prst="rect">
+            <a:avLst/>
+          </a:prstGeom>
+        </p:spPr>
+        <p:txBody>
+          <a:bodyPr vert="horz" lIns="91440" tIns="45720" rIns="91440" bIns="45720" rtlCol="0">
+            <a:normAutofit/>
+          </a:bodyPr>
+          <a:lstStyle>
+            <a:lvl1pPr marL="228600" indent="-228600" algn="l" defTabSz="914400" rtl="0" eaLnBrk="1" latinLnBrk="0" hangingPunct="1">
+              <a:lnSpc>
+                <a:spcPct val="90000"/>
+              </a:lnSpc>
+              <a:spcBef>
+                <a:spcPts val="1000"/>
+              </a:spcBef>
+              <a:buFont typeface="Arial" panose="020B0604020202020204" pitchFamily="34" charset="0"/>
+              <a:buChar char="•"/>
+              <a:defRPr sz="2800" kern="1200">
+                <a:solidFill>
+                  <a:schemeClr val="tx1"/>
+                </a:solidFill>
+                <a:latin typeface="+mn-lt"/>
+                <a:ea typeface="+mn-ea"/>
+                <a:cs typeface="+mn-cs"/>
+              </a:defRPr>
+            </a:lvl1pPr>
+            <a:lvl2pPr marL="685800" indent="-228600" algn="l" defTabSz="914400" rtl="0" eaLnBrk="1" latinLnBrk="0" hangingPunct="1">
+              <a:lnSpc>
+                <a:spcPct val="90000"/>
+              </a:lnSpc>
+              <a:spcBef>
+                <a:spcPts val="500"/>
+              </a:spcBef>
+              <a:buFont typeface="Arial" panose="020B0604020202020204" pitchFamily="34" charset="0"/>
+              <a:buChar char="•"/>
+              <a:defRPr sz="2400" kern="1200">
+                <a:solidFill>
+                  <a:schemeClr val="tx1"/>
+                </a:solidFill>
+                <a:latin typeface="+mn-lt"/>
+                <a:ea typeface="+mn-ea"/>
+                <a:cs typeface="+mn-cs"/>
+              </a:defRPr>
+            </a:lvl2pPr>
+            <a:lvl3pPr marL="1143000" indent="-228600" algn="l" defTabSz="914400" rtl="0" eaLnBrk="1" latinLnBrk="0" hangingPunct="1">
+              <a:lnSpc>
+                <a:spcPct val="90000"/>
+              </a:lnSpc>
+              <a:spcBef>
+                <a:spcPts val="500"/>
+              </a:spcBef>
+              <a:buFont typeface="Arial" panose="020B0604020202020204" pitchFamily="34" charset="0"/>
+              <a:buChar char="•"/>
+              <a:defRPr sz="2000" kern="1200">
+                <a:solidFill>
+                  <a:schemeClr val="tx1"/>
+                </a:solidFill>
+                <a:latin typeface="+mn-lt"/>
+                <a:ea typeface="+mn-ea"/>
+                <a:cs typeface="+mn-cs"/>
+              </a:defRPr>
+            </a:lvl3pPr>
+            <a:lvl4pPr marL="1600200" indent="-228600" algn="l" defTabSz="914400" rtl="0" eaLnBrk="1" latinLnBrk="0" hangingPunct="1">
+              <a:lnSpc>
+                <a:spcPct val="90000"/>
+              </a:lnSpc>
+              <a:spcBef>
+                <a:spcPts val="500"/>
+              </a:spcBef>
+              <a:buFont typeface="Arial" panose="020B0604020202020204" pitchFamily="34" charset="0"/>
+              <a:buChar char="•"/>
+              <a:defRPr sz="1800" kern="1200">
+                <a:solidFill>
+                  <a:schemeClr val="tx1"/>
+                </a:solidFill>
+                <a:latin typeface="+mn-lt"/>
+                <a:ea typeface="+mn-ea"/>
+                <a:cs typeface="+mn-cs"/>
+              </a:defRPr>
+            </a:lvl4pPr>
+            <a:lvl5pPr marL="2057400" indent="-228600" algn="l" defTabSz="914400" rtl="0" eaLnBrk="1" latinLnBrk="0" hangingPunct="1">
+              <a:lnSpc>
+                <a:spcPct val="90000"/>
+              </a:lnSpc>
+              <a:spcBef>
+                <a:spcPts val="500"/>
+              </a:spcBef>
+              <a:buFont typeface="Arial" panose="020B0604020202020204" pitchFamily="34" charset="0"/>
+              <a:buChar char="•"/>
+              <a:defRPr sz="1800" kern="1200">
+                <a:solidFill>
+                  <a:schemeClr val="tx1"/>
+                </a:solidFill>
+                <a:latin typeface="+mn-lt"/>
+                <a:ea typeface="+mn-ea"/>
+                <a:cs typeface="+mn-cs"/>
+              </a:defRPr>
+            </a:lvl5pPr>
+            <a:lvl6pPr marL="2514600" indent="-228600" algn="l" defTabSz="914400" rtl="0" eaLnBrk="1" latinLnBrk="0" hangingPunct="1">
+              <a:lnSpc>
+                <a:spcPct val="90000"/>
+              </a:lnSpc>
+              <a:spcBef>
+                <a:spcPts val="500"/>
+              </a:spcBef>
+              <a:buFont typeface="Arial" panose="020B0604020202020204" pitchFamily="34" charset="0"/>
+              <a:buChar char="•"/>
+              <a:defRPr sz="1800" kern="1200">
+                <a:solidFill>
+                  <a:schemeClr val="tx1"/>
+                </a:solidFill>
+                <a:latin typeface="+mn-lt"/>
+                <a:ea typeface="+mn-ea"/>
+                <a:cs typeface="+mn-cs"/>
+              </a:defRPr>
+            </a:lvl6pPr>
+            <a:lvl7pPr marL="2971800" indent="-228600" algn="l" defTabSz="914400" rtl="0" eaLnBrk="1" latinLnBrk="0" hangingPunct="1">
+              <a:lnSpc>
+                <a:spcPct val="90000"/>
+              </a:lnSpc>
+              <a:spcBef>
+                <a:spcPts val="500"/>
+              </a:spcBef>
+              <a:buFont typeface="Arial" panose="020B0604020202020204" pitchFamily="34" charset="0"/>
+              <a:buChar char="•"/>
+              <a:defRPr sz="1800" kern="1200">
+                <a:solidFill>
+                  <a:schemeClr val="tx1"/>
+                </a:solidFill>
+                <a:latin typeface="+mn-lt"/>
+                <a:ea typeface="+mn-ea"/>
+                <a:cs typeface="+mn-cs"/>
+              </a:defRPr>
+            </a:lvl7pPr>
+            <a:lvl8pPr marL="3429000" indent="-228600" algn="l" defTabSz="914400" rtl="0" eaLnBrk="1" latinLnBrk="0" hangingPunct="1">
+              <a:lnSpc>
+                <a:spcPct val="90000"/>
+              </a:lnSpc>
+              <a:spcBef>
+                <a:spcPts val="500"/>
+              </a:spcBef>
+              <a:buFont typeface="Arial" panose="020B0604020202020204" pitchFamily="34" charset="0"/>
+              <a:buChar char="•"/>
+              <a:defRPr sz="1800" kern="1200">
+                <a:solidFill>
+                  <a:schemeClr val="tx1"/>
+                </a:solidFill>
+                <a:latin typeface="+mn-lt"/>
+                <a:ea typeface="+mn-ea"/>
+                <a:cs typeface="+mn-cs"/>
+              </a:defRPr>
+            </a:lvl8pPr>
+            <a:lvl9pPr marL="3886200" indent="-228600" algn="l" defTabSz="914400" rtl="0" eaLnBrk="1" latinLnBrk="0" hangingPunct="1">
+              <a:lnSpc>
+                <a:spcPct val="90000"/>
+              </a:lnSpc>
+              <a:spcBef>
+                <a:spcPts val="500"/>
+              </a:spcBef>
+              <a:buFont typeface="Arial" panose="020B0604020202020204" pitchFamily="34" charset="0"/>
+              <a:buChar char="•"/>
+              <a:defRPr sz="1800" kern="1200">
+                <a:solidFill>
+                  <a:schemeClr val="tx1"/>
+                </a:solidFill>
+                <a:latin typeface="+mn-lt"/>
+                <a:ea typeface="+mn-ea"/>
+                <a:cs typeface="+mn-cs"/>
+              </a:defRPr>
+            </a:lvl9pPr>
+          </a:lstStyle>
+          <a:p>
+            <a:r>
+              <a:rPr lang="en-US" sz="1100" dirty="0"/>
+              <a:t>Screen capture demonstrating unit test passing</a:t>
+            </a:r>
+          </a:p>
+        </p:txBody>
+      </p:sp>
+      <p:sp>
+        <p:nvSpPr>
+          <p:cNvPr id="12" name="Content Placeholder 2">
+            <a:extLst>
+              <a:ext uri="{FF2B5EF4-FFF2-40B4-BE49-F238E27FC236}">
+                <a16:creationId xmlns:a16="http://schemas.microsoft.com/office/drawing/2014/main" id="{4491E744-11A4-59D1-743C-9AFFD58121A2}"/>
+              </a:ext>
+            </a:extLst>
+          </p:cNvPr>
+          <p:cNvSpPr txBox="1">
+            <a:spLocks/>
+          </p:cNvSpPr>
+          <p:nvPr/>
+        </p:nvSpPr>
+        <p:spPr>
+          <a:xfrm>
+            <a:off x="6417390" y="4067250"/>
+            <a:ext cx="2841346" cy="1947560"/>
+          </a:xfrm>
+          <a:prstGeom prst="rect">
+            <a:avLst/>
+          </a:prstGeom>
+        </p:spPr>
+        <p:txBody>
+          <a:bodyPr vert="horz" lIns="91440" tIns="45720" rIns="91440" bIns="45720" rtlCol="0">
+            <a:normAutofit/>
+          </a:bodyPr>
+          <a:lstStyle>
+            <a:lvl1pPr marL="228600" indent="-228600" algn="l" defTabSz="914400" rtl="0" eaLnBrk="1" latinLnBrk="0" hangingPunct="1">
+              <a:lnSpc>
+                <a:spcPct val="90000"/>
+              </a:lnSpc>
+              <a:spcBef>
+                <a:spcPts val="1000"/>
+              </a:spcBef>
+              <a:buFont typeface="Arial" panose="020B0604020202020204" pitchFamily="34" charset="0"/>
+              <a:buChar char="•"/>
+              <a:defRPr sz="2800" kern="1200">
+                <a:solidFill>
+                  <a:schemeClr val="tx1"/>
+                </a:solidFill>
+                <a:latin typeface="+mn-lt"/>
+                <a:ea typeface="+mn-ea"/>
+                <a:cs typeface="+mn-cs"/>
+              </a:defRPr>
+            </a:lvl1pPr>
+            <a:lvl2pPr marL="685800" indent="-228600" algn="l" defTabSz="914400" rtl="0" eaLnBrk="1" latinLnBrk="0" hangingPunct="1">
+              <a:lnSpc>
+                <a:spcPct val="90000"/>
+              </a:lnSpc>
+              <a:spcBef>
+                <a:spcPts val="500"/>
+              </a:spcBef>
+              <a:buFont typeface="Arial" panose="020B0604020202020204" pitchFamily="34" charset="0"/>
+              <a:buChar char="•"/>
+              <a:defRPr sz="2400" kern="1200">
+                <a:solidFill>
+                  <a:schemeClr val="tx1"/>
+                </a:solidFill>
+                <a:latin typeface="+mn-lt"/>
+                <a:ea typeface="+mn-ea"/>
+                <a:cs typeface="+mn-cs"/>
+              </a:defRPr>
+            </a:lvl2pPr>
+            <a:lvl3pPr marL="1143000" indent="-228600" algn="l" defTabSz="914400" rtl="0" eaLnBrk="1" latinLnBrk="0" hangingPunct="1">
+              <a:lnSpc>
+                <a:spcPct val="90000"/>
+              </a:lnSpc>
+              <a:spcBef>
+                <a:spcPts val="500"/>
+              </a:spcBef>
+              <a:buFont typeface="Arial" panose="020B0604020202020204" pitchFamily="34" charset="0"/>
+              <a:buChar char="•"/>
+              <a:defRPr sz="2000" kern="1200">
+                <a:solidFill>
+                  <a:schemeClr val="tx1"/>
+                </a:solidFill>
+                <a:latin typeface="+mn-lt"/>
+                <a:ea typeface="+mn-ea"/>
+                <a:cs typeface="+mn-cs"/>
+              </a:defRPr>
+            </a:lvl3pPr>
+            <a:lvl4pPr marL="1600200" indent="-228600" algn="l" defTabSz="914400" rtl="0" eaLnBrk="1" latinLnBrk="0" hangingPunct="1">
+              <a:lnSpc>
+                <a:spcPct val="90000"/>
+              </a:lnSpc>
+              <a:spcBef>
+                <a:spcPts val="500"/>
+              </a:spcBef>
+              <a:buFont typeface="Arial" panose="020B0604020202020204" pitchFamily="34" charset="0"/>
+              <a:buChar char="•"/>
+              <a:defRPr sz="1800" kern="1200">
+                <a:solidFill>
+                  <a:schemeClr val="tx1"/>
+                </a:solidFill>
+                <a:latin typeface="+mn-lt"/>
+                <a:ea typeface="+mn-ea"/>
+                <a:cs typeface="+mn-cs"/>
+              </a:defRPr>
+            </a:lvl4pPr>
+            <a:lvl5pPr marL="2057400" indent="-228600" algn="l" defTabSz="914400" rtl="0" eaLnBrk="1" latinLnBrk="0" hangingPunct="1">
+              <a:lnSpc>
+                <a:spcPct val="90000"/>
+              </a:lnSpc>
+              <a:spcBef>
+                <a:spcPts val="500"/>
+              </a:spcBef>
+              <a:buFont typeface="Arial" panose="020B0604020202020204" pitchFamily="34" charset="0"/>
+              <a:buChar char="•"/>
+              <a:defRPr sz="1800" kern="1200">
+                <a:solidFill>
+                  <a:schemeClr val="tx1"/>
+                </a:solidFill>
+                <a:latin typeface="+mn-lt"/>
+                <a:ea typeface="+mn-ea"/>
+                <a:cs typeface="+mn-cs"/>
+              </a:defRPr>
+            </a:lvl5pPr>
+            <a:lvl6pPr marL="2514600" indent="-228600" algn="l" defTabSz="914400" rtl="0" eaLnBrk="1" latinLnBrk="0" hangingPunct="1">
+              <a:lnSpc>
+                <a:spcPct val="90000"/>
+              </a:lnSpc>
+              <a:spcBef>
+                <a:spcPts val="500"/>
+              </a:spcBef>
+              <a:buFont typeface="Arial" panose="020B0604020202020204" pitchFamily="34" charset="0"/>
+              <a:buChar char="•"/>
+              <a:defRPr sz="1800" kern="1200">
+                <a:solidFill>
+                  <a:schemeClr val="tx1"/>
+                </a:solidFill>
+                <a:latin typeface="+mn-lt"/>
+                <a:ea typeface="+mn-ea"/>
+                <a:cs typeface="+mn-cs"/>
+              </a:defRPr>
+            </a:lvl6pPr>
+            <a:lvl7pPr marL="2971800" indent="-228600" algn="l" defTabSz="914400" rtl="0" eaLnBrk="1" latinLnBrk="0" hangingPunct="1">
+              <a:lnSpc>
+                <a:spcPct val="90000"/>
+              </a:lnSpc>
+              <a:spcBef>
+                <a:spcPts val="500"/>
+              </a:spcBef>
+              <a:buFont typeface="Arial" panose="020B0604020202020204" pitchFamily="34" charset="0"/>
+              <a:buChar char="•"/>
+              <a:defRPr sz="1800" kern="1200">
+                <a:solidFill>
+                  <a:schemeClr val="tx1"/>
+                </a:solidFill>
+                <a:latin typeface="+mn-lt"/>
+                <a:ea typeface="+mn-ea"/>
+                <a:cs typeface="+mn-cs"/>
+              </a:defRPr>
+            </a:lvl7pPr>
+            <a:lvl8pPr marL="3429000" indent="-228600" algn="l" defTabSz="914400" rtl="0" eaLnBrk="1" latinLnBrk="0" hangingPunct="1">
+              <a:lnSpc>
+                <a:spcPct val="90000"/>
+              </a:lnSpc>
+              <a:spcBef>
+                <a:spcPts val="500"/>
+              </a:spcBef>
+              <a:buFont typeface="Arial" panose="020B0604020202020204" pitchFamily="34" charset="0"/>
+              <a:buChar char="•"/>
+              <a:defRPr sz="1800" kern="1200">
+                <a:solidFill>
+                  <a:schemeClr val="tx1"/>
+                </a:solidFill>
+                <a:latin typeface="+mn-lt"/>
+                <a:ea typeface="+mn-ea"/>
+                <a:cs typeface="+mn-cs"/>
+              </a:defRPr>
+            </a:lvl8pPr>
+            <a:lvl9pPr marL="3886200" indent="-228600" algn="l" defTabSz="914400" rtl="0" eaLnBrk="1" latinLnBrk="0" hangingPunct="1">
+              <a:lnSpc>
+                <a:spcPct val="90000"/>
+              </a:lnSpc>
+              <a:spcBef>
+                <a:spcPts val="500"/>
+              </a:spcBef>
+              <a:buFont typeface="Arial" panose="020B0604020202020204" pitchFamily="34" charset="0"/>
+              <a:buChar char="•"/>
+              <a:defRPr sz="1800" kern="1200">
+                <a:solidFill>
+                  <a:schemeClr val="tx1"/>
+                </a:solidFill>
+                <a:latin typeface="+mn-lt"/>
+                <a:ea typeface="+mn-ea"/>
+                <a:cs typeface="+mn-cs"/>
+              </a:defRPr>
+            </a:lvl9pPr>
+          </a:lstStyle>
+          <a:p>
+            <a:r>
+              <a:rPr lang="en-US" sz="1100" dirty="0"/>
+              <a:t>Screen capture illustrating all previous unit tests still pass after code changes</a:t>
+            </a:r>
+          </a:p>
+        </p:txBody>
+      </p:sp>
+      <p:pic>
+        <p:nvPicPr>
+          <p:cNvPr id="4" name="Picture 3" descr="A black background with orange and green text&#10;&#10;AI-generated content may be incorrect.">
+            <a:extLst>
+              <a:ext uri="{FF2B5EF4-FFF2-40B4-BE49-F238E27FC236}">
+                <a16:creationId xmlns:a16="http://schemas.microsoft.com/office/drawing/2014/main" id="{A9BBB3E9-9E8D-9A3D-4C99-32A0E5A30D0B}"/>
+              </a:ext>
+            </a:extLst>
+          </p:cNvPr>
+          <p:cNvPicPr>
+            <a:picLocks noChangeAspect="1"/>
+          </p:cNvPicPr>
+          <p:nvPr/>
+        </p:nvPicPr>
+        <p:blipFill>
+          <a:blip r:embed="rId2"/>
+          <a:stretch>
+            <a:fillRect/>
+          </a:stretch>
+        </p:blipFill>
+        <p:spPr>
+          <a:xfrm>
+            <a:off x="522505" y="2250118"/>
+            <a:ext cx="5364141" cy="364038"/>
+          </a:xfrm>
+          <a:prstGeom prst="rect">
+            <a:avLst/>
+          </a:prstGeom>
+        </p:spPr>
+      </p:pic>
+      <p:pic>
+        <p:nvPicPr>
+          <p:cNvPr id="9" name="Picture 8">
+            <a:extLst>
+              <a:ext uri="{FF2B5EF4-FFF2-40B4-BE49-F238E27FC236}">
+                <a16:creationId xmlns:a16="http://schemas.microsoft.com/office/drawing/2014/main" id="{A58EA05A-6CDF-919B-3B04-15EDC9A6C9EF}"/>
+              </a:ext>
+            </a:extLst>
+          </p:cNvPr>
+          <p:cNvPicPr>
+            <a:picLocks noChangeAspect="1"/>
+          </p:cNvPicPr>
+          <p:nvPr/>
+        </p:nvPicPr>
+        <p:blipFill>
+          <a:blip r:embed="rId3"/>
+          <a:stretch>
+            <a:fillRect/>
+          </a:stretch>
+        </p:blipFill>
+        <p:spPr>
+          <a:xfrm>
+            <a:off x="883412" y="5300728"/>
+            <a:ext cx="4600575" cy="285750"/>
+          </a:xfrm>
+          <a:prstGeom prst="rect">
+            <a:avLst/>
+          </a:prstGeom>
+        </p:spPr>
+      </p:pic>
+      <p:pic>
+        <p:nvPicPr>
+          <p:cNvPr id="11" name="Picture 10" descr="A screen shot of a computer program&#10;&#10;AI-generated content may be incorrect.">
+            <a:extLst>
+              <a:ext uri="{FF2B5EF4-FFF2-40B4-BE49-F238E27FC236}">
+                <a16:creationId xmlns:a16="http://schemas.microsoft.com/office/drawing/2014/main" id="{0B67FB8F-9F8E-3A1B-3E67-24A3C3A337E8}"/>
+              </a:ext>
+            </a:extLst>
+          </p:cNvPr>
+          <p:cNvPicPr>
+            <a:picLocks noChangeAspect="1"/>
+          </p:cNvPicPr>
+          <p:nvPr/>
+        </p:nvPicPr>
+        <p:blipFill>
+          <a:blip r:embed="rId4"/>
+          <a:stretch>
+            <a:fillRect/>
+          </a:stretch>
+        </p:blipFill>
+        <p:spPr>
+          <a:xfrm>
+            <a:off x="6630377" y="4501084"/>
+            <a:ext cx="3106586" cy="2156434"/>
+          </a:xfrm>
+          <a:prstGeom prst="rect">
+            <a:avLst/>
+          </a:prstGeom>
+        </p:spPr>
+      </p:pic>
+    </p:spTree>
+    <p:extLst>
+      <p:ext uri="{BB962C8B-B14F-4D97-AF65-F5344CB8AC3E}">
+        <p14:creationId xmlns:p14="http://schemas.microsoft.com/office/powerpoint/2010/main" val="1690619921"/>
+      </p:ext>
+    </p:extLst>
+  </p:cSld>
+  <p:clrMapOvr>
+    <a:masterClrMapping/>
+  </p:clrMapOvr>
+</p:sld>
+</file>
+
+<file path=ppt/slides/slide18.xml><?xml version="1.0" encoding="utf-8"?>
+<p:sld xmlns:a="http://schemas.openxmlformats.org/drawingml/2006/main" xmlns:r="http://schemas.openxmlformats.org/officeDocument/2006/relationships" xmlns:p="http://schemas.openxmlformats.org/presentationml/2006/main">
+  <p:cSld>
+    <p:spTree>
+      <p:nvGrpSpPr>
+        <p:cNvPr id="1" name="">
+          <a:extLst>
+            <a:ext uri="{FF2B5EF4-FFF2-40B4-BE49-F238E27FC236}">
+              <a16:creationId xmlns:a16="http://schemas.microsoft.com/office/drawing/2014/main" id="{62CC3278-6793-7012-03CA-B3A647F6F1E8}"/>
+            </a:ext>
+          </a:extLst>
+        </p:cNvPr>
+        <p:cNvGrpSpPr/>
+        <p:nvPr/>
+      </p:nvGrpSpPr>
+      <p:grpSpPr>
+        <a:xfrm>
+          <a:off x="0" y="0"/>
+          <a:ext cx="0" cy="0"/>
+          <a:chOff x="0" y="0"/>
+          <a:chExt cx="0" cy="0"/>
+        </a:xfrm>
+      </p:grpSpPr>
+      <p:sp>
+        <p:nvSpPr>
+          <p:cNvPr id="2" name="Title 1">
+            <a:extLst>
+              <a:ext uri="{FF2B5EF4-FFF2-40B4-BE49-F238E27FC236}">
+                <a16:creationId xmlns:a16="http://schemas.microsoft.com/office/drawing/2014/main" id="{268F1E77-93D9-30C0-7CB5-4A4C5581F499}"/>
+              </a:ext>
+            </a:extLst>
+          </p:cNvPr>
+          <p:cNvSpPr>
+            <a:spLocks noGrp="1"/>
+          </p:cNvSpPr>
+          <p:nvPr>
+            <p:ph type="title"/>
+          </p:nvPr>
+        </p:nvSpPr>
+        <p:spPr/>
+        <p:txBody>
+          <a:bodyPr>
+            <a:normAutofit/>
+          </a:bodyPr>
+          <a:lstStyle/>
+          <a:p>
+            <a:r>
+              <a:rPr lang="en-US" sz="1600"/>
+              <a:t>Test ID: T-DIV-ERR2</a:t>
+            </a:r>
+            <a:endParaRPr lang="en-US"/>
+          </a:p>
+          <a:p>
+            <a:r>
+              <a:rPr lang="en-US" sz="1600">
+                <a:ea typeface="+mj-lt"/>
+                <a:cs typeface="+mj-lt"/>
+              </a:rPr>
+              <a:t>Statement of unit test: Verify that dividing a complex number by zero produces a division-by-zero error.</a:t>
+            </a:r>
+            <a:endParaRPr lang="en-US"/>
+          </a:p>
+          <a:p>
+            <a:r>
+              <a:rPr lang="en-US" sz="1600">
+                <a:ea typeface="+mj-lt"/>
+                <a:cs typeface="+mj-lt"/>
+              </a:rPr>
+              <a:t>Expected results: </a:t>
+            </a:r>
+            <a:r>
+              <a:rPr lang="en-US" sz="1600">
+                <a:latin typeface="Aptos Display"/>
+              </a:rPr>
+              <a:t>Error: division by zero</a:t>
+            </a:r>
+            <a:endParaRPr lang="en-US"/>
+          </a:p>
+        </p:txBody>
+      </p:sp>
+      <p:sp>
+        <p:nvSpPr>
+          <p:cNvPr id="3" name="Content Placeholder 2">
+            <a:extLst>
+              <a:ext uri="{FF2B5EF4-FFF2-40B4-BE49-F238E27FC236}">
+                <a16:creationId xmlns:a16="http://schemas.microsoft.com/office/drawing/2014/main" id="{85F26FAB-7F9B-4409-1D18-15C959FCF3F2}"/>
+              </a:ext>
+            </a:extLst>
+          </p:cNvPr>
+          <p:cNvSpPr>
+            <a:spLocks noGrp="1"/>
+          </p:cNvSpPr>
+          <p:nvPr>
+            <p:ph idx="1"/>
+          </p:nvPr>
+        </p:nvSpPr>
+        <p:spPr>
+          <a:xfrm>
+            <a:off x="838200" y="1825625"/>
+            <a:ext cx="2841346" cy="4351338"/>
+          </a:xfrm>
+        </p:spPr>
+        <p:txBody>
+          <a:bodyPr>
+            <a:normAutofit/>
+          </a:bodyPr>
+          <a:lstStyle/>
+          <a:p>
+            <a:r>
+              <a:rPr lang="en-US" sz="1100" dirty="0"/>
+              <a:t>Screen capture of unit test code:</a:t>
+            </a:r>
+          </a:p>
+        </p:txBody>
+      </p:sp>
+      <p:sp>
+        <p:nvSpPr>
+          <p:cNvPr id="7" name="Content Placeholder 2">
+            <a:extLst>
+              <a:ext uri="{FF2B5EF4-FFF2-40B4-BE49-F238E27FC236}">
+                <a16:creationId xmlns:a16="http://schemas.microsoft.com/office/drawing/2014/main" id="{2ECE9DC1-3207-EB2F-77E5-7BC03AB9CE14}"/>
+              </a:ext>
+            </a:extLst>
+          </p:cNvPr>
+          <p:cNvSpPr txBox="1">
+            <a:spLocks/>
+          </p:cNvSpPr>
+          <p:nvPr/>
+        </p:nvSpPr>
+        <p:spPr>
+          <a:xfrm>
+            <a:off x="7788707" y="1825625"/>
+            <a:ext cx="2841346" cy="4351338"/>
+          </a:xfrm>
+          <a:prstGeom prst="rect">
+            <a:avLst/>
+          </a:prstGeom>
+        </p:spPr>
+        <p:txBody>
+          <a:bodyPr vert="horz" lIns="91440" tIns="45720" rIns="91440" bIns="45720" rtlCol="0" anchor="t">
+            <a:normAutofit/>
+          </a:bodyPr>
+          <a:lstStyle>
+            <a:lvl1pPr marL="228600" indent="-228600" algn="l" defTabSz="914400" rtl="0" eaLnBrk="1" latinLnBrk="0" hangingPunct="1">
+              <a:lnSpc>
+                <a:spcPct val="90000"/>
+              </a:lnSpc>
+              <a:spcBef>
+                <a:spcPts val="1000"/>
+              </a:spcBef>
+              <a:buFont typeface="Arial" panose="020B0604020202020204" pitchFamily="34" charset="0"/>
+              <a:buChar char="•"/>
+              <a:defRPr sz="2800" kern="1200">
+                <a:solidFill>
+                  <a:schemeClr val="tx1"/>
+                </a:solidFill>
+                <a:latin typeface="+mn-lt"/>
+                <a:ea typeface="+mn-ea"/>
+                <a:cs typeface="+mn-cs"/>
+              </a:defRPr>
+            </a:lvl1pPr>
+            <a:lvl2pPr marL="685800" indent="-228600" algn="l" defTabSz="914400" rtl="0" eaLnBrk="1" latinLnBrk="0" hangingPunct="1">
+              <a:lnSpc>
+                <a:spcPct val="90000"/>
+              </a:lnSpc>
+              <a:spcBef>
+                <a:spcPts val="500"/>
+              </a:spcBef>
+              <a:buFont typeface="Arial" panose="020B0604020202020204" pitchFamily="34" charset="0"/>
+              <a:buChar char="•"/>
+              <a:defRPr sz="2400" kern="1200">
+                <a:solidFill>
+                  <a:schemeClr val="tx1"/>
+                </a:solidFill>
+                <a:latin typeface="+mn-lt"/>
+                <a:ea typeface="+mn-ea"/>
+                <a:cs typeface="+mn-cs"/>
+              </a:defRPr>
+            </a:lvl2pPr>
+            <a:lvl3pPr marL="1143000" indent="-228600" algn="l" defTabSz="914400" rtl="0" eaLnBrk="1" latinLnBrk="0" hangingPunct="1">
+              <a:lnSpc>
+                <a:spcPct val="90000"/>
+              </a:lnSpc>
+              <a:spcBef>
+                <a:spcPts val="500"/>
+              </a:spcBef>
+              <a:buFont typeface="Arial" panose="020B0604020202020204" pitchFamily="34" charset="0"/>
+              <a:buChar char="•"/>
+              <a:defRPr sz="2000" kern="1200">
+                <a:solidFill>
+                  <a:schemeClr val="tx1"/>
+                </a:solidFill>
+                <a:latin typeface="+mn-lt"/>
+                <a:ea typeface="+mn-ea"/>
+                <a:cs typeface="+mn-cs"/>
+              </a:defRPr>
+            </a:lvl3pPr>
+            <a:lvl4pPr marL="1600200" indent="-228600" algn="l" defTabSz="914400" rtl="0" eaLnBrk="1" latinLnBrk="0" hangingPunct="1">
+              <a:lnSpc>
+                <a:spcPct val="90000"/>
+              </a:lnSpc>
+              <a:spcBef>
+                <a:spcPts val="500"/>
+              </a:spcBef>
+              <a:buFont typeface="Arial" panose="020B0604020202020204" pitchFamily="34" charset="0"/>
+              <a:buChar char="•"/>
+              <a:defRPr sz="1800" kern="1200">
+                <a:solidFill>
+                  <a:schemeClr val="tx1"/>
+                </a:solidFill>
+                <a:latin typeface="+mn-lt"/>
+                <a:ea typeface="+mn-ea"/>
+                <a:cs typeface="+mn-cs"/>
+              </a:defRPr>
+            </a:lvl4pPr>
+            <a:lvl5pPr marL="2057400" indent="-228600" algn="l" defTabSz="914400" rtl="0" eaLnBrk="1" latinLnBrk="0" hangingPunct="1">
+              <a:lnSpc>
+                <a:spcPct val="90000"/>
+              </a:lnSpc>
+              <a:spcBef>
+                <a:spcPts val="500"/>
+              </a:spcBef>
+              <a:buFont typeface="Arial" panose="020B0604020202020204" pitchFamily="34" charset="0"/>
+              <a:buChar char="•"/>
+              <a:defRPr sz="1800" kern="1200">
+                <a:solidFill>
+                  <a:schemeClr val="tx1"/>
+                </a:solidFill>
+                <a:latin typeface="+mn-lt"/>
+                <a:ea typeface="+mn-ea"/>
+                <a:cs typeface="+mn-cs"/>
+              </a:defRPr>
+            </a:lvl5pPr>
+            <a:lvl6pPr marL="2514600" indent="-228600" algn="l" defTabSz="914400" rtl="0" eaLnBrk="1" latinLnBrk="0" hangingPunct="1">
+              <a:lnSpc>
+                <a:spcPct val="90000"/>
+              </a:lnSpc>
+              <a:spcBef>
+                <a:spcPts val="500"/>
+              </a:spcBef>
+              <a:buFont typeface="Arial" panose="020B0604020202020204" pitchFamily="34" charset="0"/>
+              <a:buChar char="•"/>
+              <a:defRPr sz="1800" kern="1200">
+                <a:solidFill>
+                  <a:schemeClr val="tx1"/>
+                </a:solidFill>
+                <a:latin typeface="+mn-lt"/>
+                <a:ea typeface="+mn-ea"/>
+                <a:cs typeface="+mn-cs"/>
+              </a:defRPr>
+            </a:lvl6pPr>
+            <a:lvl7pPr marL="2971800" indent="-228600" algn="l" defTabSz="914400" rtl="0" eaLnBrk="1" latinLnBrk="0" hangingPunct="1">
+              <a:lnSpc>
+                <a:spcPct val="90000"/>
+              </a:lnSpc>
+              <a:spcBef>
+                <a:spcPts val="500"/>
+              </a:spcBef>
+              <a:buFont typeface="Arial" panose="020B0604020202020204" pitchFamily="34" charset="0"/>
+              <a:buChar char="•"/>
+              <a:defRPr sz="1800" kern="1200">
+                <a:solidFill>
+                  <a:schemeClr val="tx1"/>
+                </a:solidFill>
+                <a:latin typeface="+mn-lt"/>
+                <a:ea typeface="+mn-ea"/>
+                <a:cs typeface="+mn-cs"/>
+              </a:defRPr>
+            </a:lvl7pPr>
+            <a:lvl8pPr marL="3429000" indent="-228600" algn="l" defTabSz="914400" rtl="0" eaLnBrk="1" latinLnBrk="0" hangingPunct="1">
+              <a:lnSpc>
+                <a:spcPct val="90000"/>
+              </a:lnSpc>
+              <a:spcBef>
+                <a:spcPts val="500"/>
+              </a:spcBef>
+              <a:buFont typeface="Arial" panose="020B0604020202020204" pitchFamily="34" charset="0"/>
+              <a:buChar char="•"/>
+              <a:defRPr sz="1800" kern="1200">
+                <a:solidFill>
+                  <a:schemeClr val="tx1"/>
+                </a:solidFill>
+                <a:latin typeface="+mn-lt"/>
+                <a:ea typeface="+mn-ea"/>
+                <a:cs typeface="+mn-cs"/>
+              </a:defRPr>
+            </a:lvl8pPr>
+            <a:lvl9pPr marL="3886200" indent="-228600" algn="l" defTabSz="914400" rtl="0" eaLnBrk="1" latinLnBrk="0" hangingPunct="1">
+              <a:lnSpc>
+                <a:spcPct val="90000"/>
+              </a:lnSpc>
+              <a:spcBef>
+                <a:spcPts val="500"/>
+              </a:spcBef>
+              <a:buFont typeface="Arial" panose="020B0604020202020204" pitchFamily="34" charset="0"/>
+              <a:buChar char="•"/>
+              <a:defRPr sz="1800" kern="1200">
+                <a:solidFill>
+                  <a:schemeClr val="tx1"/>
+                </a:solidFill>
+                <a:latin typeface="+mn-lt"/>
+                <a:ea typeface="+mn-ea"/>
+                <a:cs typeface="+mn-cs"/>
+              </a:defRPr>
+            </a:lvl9pPr>
+          </a:lstStyle>
+          <a:p>
+            <a:r>
+              <a:rPr lang="en-US" sz="1100"/>
+              <a:t>Code changes</a:t>
+            </a:r>
+            <a:br>
+              <a:rPr lang="en-US" sz="1100" dirty="0"/>
+            </a:br>
+            <a:endParaRPr lang="en-US" sz="1100" dirty="0"/>
+          </a:p>
+          <a:p>
+            <a:pPr marL="0" indent="0">
+              <a:buNone/>
+            </a:pPr>
+            <a:r>
+              <a:rPr lang="en-US" sz="1100" dirty="0"/>
+              <a:t>None required. The existing check if b == 0: works because Python evaluates 0+0j == 0 </a:t>
+            </a:r>
+            <a:r>
+              <a:rPr lang="en-US" sz="1100"/>
+              <a:t>as True.</a:t>
+            </a:r>
+            <a:endParaRPr lang="en-US"/>
+          </a:p>
+        </p:txBody>
+      </p:sp>
+      <p:sp>
+        <p:nvSpPr>
+          <p:cNvPr id="10" name="Content Placeholder 2">
+            <a:extLst>
+              <a:ext uri="{FF2B5EF4-FFF2-40B4-BE49-F238E27FC236}">
+                <a16:creationId xmlns:a16="http://schemas.microsoft.com/office/drawing/2014/main" id="{E8CB83DD-B24C-3618-7236-B063EE7C2372}"/>
+              </a:ext>
+            </a:extLst>
+          </p:cNvPr>
+          <p:cNvSpPr txBox="1">
+            <a:spLocks/>
+          </p:cNvSpPr>
+          <p:nvPr/>
+        </p:nvSpPr>
+        <p:spPr>
+          <a:xfrm>
+            <a:off x="879958" y="4067250"/>
+            <a:ext cx="2841346" cy="1947559"/>
+          </a:xfrm>
+          <a:prstGeom prst="rect">
+            <a:avLst/>
+          </a:prstGeom>
+        </p:spPr>
+        <p:txBody>
+          <a:bodyPr vert="horz" lIns="91440" tIns="45720" rIns="91440" bIns="45720" rtlCol="0">
+            <a:normAutofit/>
+          </a:bodyPr>
+          <a:lstStyle>
+            <a:lvl1pPr marL="228600" indent="-228600" algn="l" defTabSz="914400" rtl="0" eaLnBrk="1" latinLnBrk="0" hangingPunct="1">
+              <a:lnSpc>
+                <a:spcPct val="90000"/>
+              </a:lnSpc>
+              <a:spcBef>
+                <a:spcPts val="1000"/>
+              </a:spcBef>
+              <a:buFont typeface="Arial" panose="020B0604020202020204" pitchFamily="34" charset="0"/>
+              <a:buChar char="•"/>
+              <a:defRPr sz="2800" kern="1200">
+                <a:solidFill>
+                  <a:schemeClr val="tx1"/>
+                </a:solidFill>
+                <a:latin typeface="+mn-lt"/>
+                <a:ea typeface="+mn-ea"/>
+                <a:cs typeface="+mn-cs"/>
+              </a:defRPr>
+            </a:lvl1pPr>
+            <a:lvl2pPr marL="685800" indent="-228600" algn="l" defTabSz="914400" rtl="0" eaLnBrk="1" latinLnBrk="0" hangingPunct="1">
+              <a:lnSpc>
+                <a:spcPct val="90000"/>
+              </a:lnSpc>
+              <a:spcBef>
+                <a:spcPts val="500"/>
+              </a:spcBef>
+              <a:buFont typeface="Arial" panose="020B0604020202020204" pitchFamily="34" charset="0"/>
+              <a:buChar char="•"/>
+              <a:defRPr sz="2400" kern="1200">
+                <a:solidFill>
+                  <a:schemeClr val="tx1"/>
+                </a:solidFill>
+                <a:latin typeface="+mn-lt"/>
+                <a:ea typeface="+mn-ea"/>
+                <a:cs typeface="+mn-cs"/>
+              </a:defRPr>
+            </a:lvl2pPr>
+            <a:lvl3pPr marL="1143000" indent="-228600" algn="l" defTabSz="914400" rtl="0" eaLnBrk="1" latinLnBrk="0" hangingPunct="1">
+              <a:lnSpc>
+                <a:spcPct val="90000"/>
+              </a:lnSpc>
+              <a:spcBef>
+                <a:spcPts val="500"/>
+              </a:spcBef>
+              <a:buFont typeface="Arial" panose="020B0604020202020204" pitchFamily="34" charset="0"/>
+              <a:buChar char="•"/>
+              <a:defRPr sz="2000" kern="1200">
+                <a:solidFill>
+                  <a:schemeClr val="tx1"/>
+                </a:solidFill>
+                <a:latin typeface="+mn-lt"/>
+                <a:ea typeface="+mn-ea"/>
+                <a:cs typeface="+mn-cs"/>
+              </a:defRPr>
+            </a:lvl3pPr>
+            <a:lvl4pPr marL="1600200" indent="-228600" algn="l" defTabSz="914400" rtl="0" eaLnBrk="1" latinLnBrk="0" hangingPunct="1">
+              <a:lnSpc>
+                <a:spcPct val="90000"/>
+              </a:lnSpc>
+              <a:spcBef>
+                <a:spcPts val="500"/>
+              </a:spcBef>
+              <a:buFont typeface="Arial" panose="020B0604020202020204" pitchFamily="34" charset="0"/>
+              <a:buChar char="•"/>
+              <a:defRPr sz="1800" kern="1200">
+                <a:solidFill>
+                  <a:schemeClr val="tx1"/>
+                </a:solidFill>
+                <a:latin typeface="+mn-lt"/>
+                <a:ea typeface="+mn-ea"/>
+                <a:cs typeface="+mn-cs"/>
+              </a:defRPr>
+            </a:lvl4pPr>
+            <a:lvl5pPr marL="2057400" indent="-228600" algn="l" defTabSz="914400" rtl="0" eaLnBrk="1" latinLnBrk="0" hangingPunct="1">
+              <a:lnSpc>
+                <a:spcPct val="90000"/>
+              </a:lnSpc>
+              <a:spcBef>
+                <a:spcPts val="500"/>
+              </a:spcBef>
+              <a:buFont typeface="Arial" panose="020B0604020202020204" pitchFamily="34" charset="0"/>
+              <a:buChar char="•"/>
+              <a:defRPr sz="1800" kern="1200">
+                <a:solidFill>
+                  <a:schemeClr val="tx1"/>
+                </a:solidFill>
+                <a:latin typeface="+mn-lt"/>
+                <a:ea typeface="+mn-ea"/>
+                <a:cs typeface="+mn-cs"/>
+              </a:defRPr>
+            </a:lvl5pPr>
+            <a:lvl6pPr marL="2514600" indent="-228600" algn="l" defTabSz="914400" rtl="0" eaLnBrk="1" latinLnBrk="0" hangingPunct="1">
+              <a:lnSpc>
+                <a:spcPct val="90000"/>
+              </a:lnSpc>
+              <a:spcBef>
+                <a:spcPts val="500"/>
+              </a:spcBef>
+              <a:buFont typeface="Arial" panose="020B0604020202020204" pitchFamily="34" charset="0"/>
+              <a:buChar char="•"/>
+              <a:defRPr sz="1800" kern="1200">
+                <a:solidFill>
+                  <a:schemeClr val="tx1"/>
+                </a:solidFill>
+                <a:latin typeface="+mn-lt"/>
+                <a:ea typeface="+mn-ea"/>
+                <a:cs typeface="+mn-cs"/>
+              </a:defRPr>
+            </a:lvl6pPr>
+            <a:lvl7pPr marL="2971800" indent="-228600" algn="l" defTabSz="914400" rtl="0" eaLnBrk="1" latinLnBrk="0" hangingPunct="1">
+              <a:lnSpc>
+                <a:spcPct val="90000"/>
+              </a:lnSpc>
+              <a:spcBef>
+                <a:spcPts val="500"/>
+              </a:spcBef>
+              <a:buFont typeface="Arial" panose="020B0604020202020204" pitchFamily="34" charset="0"/>
+              <a:buChar char="•"/>
+              <a:defRPr sz="1800" kern="1200">
+                <a:solidFill>
+                  <a:schemeClr val="tx1"/>
+                </a:solidFill>
+                <a:latin typeface="+mn-lt"/>
+                <a:ea typeface="+mn-ea"/>
+                <a:cs typeface="+mn-cs"/>
+              </a:defRPr>
+            </a:lvl7pPr>
+            <a:lvl8pPr marL="3429000" indent="-228600" algn="l" defTabSz="914400" rtl="0" eaLnBrk="1" latinLnBrk="0" hangingPunct="1">
+              <a:lnSpc>
+                <a:spcPct val="90000"/>
+              </a:lnSpc>
+              <a:spcBef>
+                <a:spcPts val="500"/>
+              </a:spcBef>
+              <a:buFont typeface="Arial" panose="020B0604020202020204" pitchFamily="34" charset="0"/>
+              <a:buChar char="•"/>
+              <a:defRPr sz="1800" kern="1200">
+                <a:solidFill>
+                  <a:schemeClr val="tx1"/>
+                </a:solidFill>
+                <a:latin typeface="+mn-lt"/>
+                <a:ea typeface="+mn-ea"/>
+                <a:cs typeface="+mn-cs"/>
+              </a:defRPr>
+            </a:lvl8pPr>
+            <a:lvl9pPr marL="3886200" indent="-228600" algn="l" defTabSz="914400" rtl="0" eaLnBrk="1" latinLnBrk="0" hangingPunct="1">
+              <a:lnSpc>
+                <a:spcPct val="90000"/>
+              </a:lnSpc>
+              <a:spcBef>
+                <a:spcPts val="500"/>
+              </a:spcBef>
+              <a:buFont typeface="Arial" panose="020B0604020202020204" pitchFamily="34" charset="0"/>
+              <a:buChar char="•"/>
+              <a:defRPr sz="1800" kern="1200">
+                <a:solidFill>
+                  <a:schemeClr val="tx1"/>
+                </a:solidFill>
+                <a:latin typeface="+mn-lt"/>
+                <a:ea typeface="+mn-ea"/>
+                <a:cs typeface="+mn-cs"/>
+              </a:defRPr>
+            </a:lvl9pPr>
+          </a:lstStyle>
+          <a:p>
+            <a:r>
+              <a:rPr lang="en-US" sz="1100" dirty="0"/>
+              <a:t>Screen capture demonstrating unit test passing</a:t>
+            </a:r>
+          </a:p>
+        </p:txBody>
+      </p:sp>
+      <p:sp>
+        <p:nvSpPr>
+          <p:cNvPr id="12" name="Content Placeholder 2">
+            <a:extLst>
+              <a:ext uri="{FF2B5EF4-FFF2-40B4-BE49-F238E27FC236}">
+                <a16:creationId xmlns:a16="http://schemas.microsoft.com/office/drawing/2014/main" id="{E40BC966-C358-4642-CFD8-813B113266B8}"/>
+              </a:ext>
+            </a:extLst>
+          </p:cNvPr>
+          <p:cNvSpPr txBox="1">
+            <a:spLocks/>
+          </p:cNvSpPr>
+          <p:nvPr/>
+        </p:nvSpPr>
+        <p:spPr>
+          <a:xfrm>
+            <a:off x="6417390" y="4067250"/>
+            <a:ext cx="2841346" cy="1947560"/>
+          </a:xfrm>
+          <a:prstGeom prst="rect">
+            <a:avLst/>
+          </a:prstGeom>
+        </p:spPr>
+        <p:txBody>
+          <a:bodyPr vert="horz" lIns="91440" tIns="45720" rIns="91440" bIns="45720" rtlCol="0">
+            <a:normAutofit/>
+          </a:bodyPr>
+          <a:lstStyle>
+            <a:lvl1pPr marL="228600" indent="-228600" algn="l" defTabSz="914400" rtl="0" eaLnBrk="1" latinLnBrk="0" hangingPunct="1">
+              <a:lnSpc>
+                <a:spcPct val="90000"/>
+              </a:lnSpc>
+              <a:spcBef>
+                <a:spcPts val="1000"/>
+              </a:spcBef>
+              <a:buFont typeface="Arial" panose="020B0604020202020204" pitchFamily="34" charset="0"/>
+              <a:buChar char="•"/>
+              <a:defRPr sz="2800" kern="1200">
+                <a:solidFill>
+                  <a:schemeClr val="tx1"/>
+                </a:solidFill>
+                <a:latin typeface="+mn-lt"/>
+                <a:ea typeface="+mn-ea"/>
+                <a:cs typeface="+mn-cs"/>
+              </a:defRPr>
+            </a:lvl1pPr>
+            <a:lvl2pPr marL="685800" indent="-228600" algn="l" defTabSz="914400" rtl="0" eaLnBrk="1" latinLnBrk="0" hangingPunct="1">
+              <a:lnSpc>
+                <a:spcPct val="90000"/>
+              </a:lnSpc>
+              <a:spcBef>
+                <a:spcPts val="500"/>
+              </a:spcBef>
+              <a:buFont typeface="Arial" panose="020B0604020202020204" pitchFamily="34" charset="0"/>
+              <a:buChar char="•"/>
+              <a:defRPr sz="2400" kern="1200">
+                <a:solidFill>
+                  <a:schemeClr val="tx1"/>
+                </a:solidFill>
+                <a:latin typeface="+mn-lt"/>
+                <a:ea typeface="+mn-ea"/>
+                <a:cs typeface="+mn-cs"/>
+              </a:defRPr>
+            </a:lvl2pPr>
+            <a:lvl3pPr marL="1143000" indent="-228600" algn="l" defTabSz="914400" rtl="0" eaLnBrk="1" latinLnBrk="0" hangingPunct="1">
+              <a:lnSpc>
+                <a:spcPct val="90000"/>
+              </a:lnSpc>
+              <a:spcBef>
+                <a:spcPts val="500"/>
+              </a:spcBef>
+              <a:buFont typeface="Arial" panose="020B0604020202020204" pitchFamily="34" charset="0"/>
+              <a:buChar char="•"/>
+              <a:defRPr sz="2000" kern="1200">
+                <a:solidFill>
+                  <a:schemeClr val="tx1"/>
+                </a:solidFill>
+                <a:latin typeface="+mn-lt"/>
+                <a:ea typeface="+mn-ea"/>
+                <a:cs typeface="+mn-cs"/>
+              </a:defRPr>
+            </a:lvl3pPr>
+            <a:lvl4pPr marL="1600200" indent="-228600" algn="l" defTabSz="914400" rtl="0" eaLnBrk="1" latinLnBrk="0" hangingPunct="1">
+              <a:lnSpc>
+                <a:spcPct val="90000"/>
+              </a:lnSpc>
+              <a:spcBef>
+                <a:spcPts val="500"/>
+              </a:spcBef>
+              <a:buFont typeface="Arial" panose="020B0604020202020204" pitchFamily="34" charset="0"/>
+              <a:buChar char="•"/>
+              <a:defRPr sz="1800" kern="1200">
+                <a:solidFill>
+                  <a:schemeClr val="tx1"/>
+                </a:solidFill>
+                <a:latin typeface="+mn-lt"/>
+                <a:ea typeface="+mn-ea"/>
+                <a:cs typeface="+mn-cs"/>
+              </a:defRPr>
+            </a:lvl4pPr>
+            <a:lvl5pPr marL="2057400" indent="-228600" algn="l" defTabSz="914400" rtl="0" eaLnBrk="1" latinLnBrk="0" hangingPunct="1">
+              <a:lnSpc>
+                <a:spcPct val="90000"/>
+              </a:lnSpc>
+              <a:spcBef>
+                <a:spcPts val="500"/>
+              </a:spcBef>
+              <a:buFont typeface="Arial" panose="020B0604020202020204" pitchFamily="34" charset="0"/>
+              <a:buChar char="•"/>
+              <a:defRPr sz="1800" kern="1200">
+                <a:solidFill>
+                  <a:schemeClr val="tx1"/>
+                </a:solidFill>
+                <a:latin typeface="+mn-lt"/>
+                <a:ea typeface="+mn-ea"/>
+                <a:cs typeface="+mn-cs"/>
+              </a:defRPr>
+            </a:lvl5pPr>
+            <a:lvl6pPr marL="2514600" indent="-228600" algn="l" defTabSz="914400" rtl="0" eaLnBrk="1" latinLnBrk="0" hangingPunct="1">
+              <a:lnSpc>
+                <a:spcPct val="90000"/>
+              </a:lnSpc>
+              <a:spcBef>
+                <a:spcPts val="500"/>
+              </a:spcBef>
+              <a:buFont typeface="Arial" panose="020B0604020202020204" pitchFamily="34" charset="0"/>
+              <a:buChar char="•"/>
+              <a:defRPr sz="1800" kern="1200">
+                <a:solidFill>
+                  <a:schemeClr val="tx1"/>
+                </a:solidFill>
+                <a:latin typeface="+mn-lt"/>
+                <a:ea typeface="+mn-ea"/>
+                <a:cs typeface="+mn-cs"/>
+              </a:defRPr>
+            </a:lvl6pPr>
+            <a:lvl7pPr marL="2971800" indent="-228600" algn="l" defTabSz="914400" rtl="0" eaLnBrk="1" latinLnBrk="0" hangingPunct="1">
+              <a:lnSpc>
+                <a:spcPct val="90000"/>
+              </a:lnSpc>
+              <a:spcBef>
+                <a:spcPts val="500"/>
+              </a:spcBef>
+              <a:buFont typeface="Arial" panose="020B0604020202020204" pitchFamily="34" charset="0"/>
+              <a:buChar char="•"/>
+              <a:defRPr sz="1800" kern="1200">
+                <a:solidFill>
+                  <a:schemeClr val="tx1"/>
+                </a:solidFill>
+                <a:latin typeface="+mn-lt"/>
+                <a:ea typeface="+mn-ea"/>
+                <a:cs typeface="+mn-cs"/>
+              </a:defRPr>
+            </a:lvl7pPr>
+            <a:lvl8pPr marL="3429000" indent="-228600" algn="l" defTabSz="914400" rtl="0" eaLnBrk="1" latinLnBrk="0" hangingPunct="1">
+              <a:lnSpc>
+                <a:spcPct val="90000"/>
+              </a:lnSpc>
+              <a:spcBef>
+                <a:spcPts val="500"/>
+              </a:spcBef>
+              <a:buFont typeface="Arial" panose="020B0604020202020204" pitchFamily="34" charset="0"/>
+              <a:buChar char="•"/>
+              <a:defRPr sz="1800" kern="1200">
+                <a:solidFill>
+                  <a:schemeClr val="tx1"/>
+                </a:solidFill>
+                <a:latin typeface="+mn-lt"/>
+                <a:ea typeface="+mn-ea"/>
+                <a:cs typeface="+mn-cs"/>
+              </a:defRPr>
+            </a:lvl8pPr>
+            <a:lvl9pPr marL="3886200" indent="-228600" algn="l" defTabSz="914400" rtl="0" eaLnBrk="1" latinLnBrk="0" hangingPunct="1">
+              <a:lnSpc>
+                <a:spcPct val="90000"/>
+              </a:lnSpc>
+              <a:spcBef>
+                <a:spcPts val="500"/>
+              </a:spcBef>
+              <a:buFont typeface="Arial" panose="020B0604020202020204" pitchFamily="34" charset="0"/>
+              <a:buChar char="•"/>
+              <a:defRPr sz="1800" kern="1200">
+                <a:solidFill>
+                  <a:schemeClr val="tx1"/>
+                </a:solidFill>
+                <a:latin typeface="+mn-lt"/>
+                <a:ea typeface="+mn-ea"/>
+                <a:cs typeface="+mn-cs"/>
+              </a:defRPr>
+            </a:lvl9pPr>
+          </a:lstStyle>
+          <a:p>
+            <a:r>
+              <a:rPr lang="en-US" sz="1100" dirty="0"/>
+              <a:t>Screen capture illustrating all previous unit tests still pass after code changes</a:t>
+            </a:r>
+          </a:p>
+        </p:txBody>
+      </p:sp>
+      <p:pic>
+        <p:nvPicPr>
+          <p:cNvPr id="5" name="Picture 4" descr="A black background with green and orange text&#10;&#10;AI-generated content may be incorrect.">
+            <a:extLst>
+              <a:ext uri="{FF2B5EF4-FFF2-40B4-BE49-F238E27FC236}">
+                <a16:creationId xmlns:a16="http://schemas.microsoft.com/office/drawing/2014/main" id="{1ED78507-E926-F1A7-A0CE-B60E754824E3}"/>
+              </a:ext>
+            </a:extLst>
+          </p:cNvPr>
+          <p:cNvPicPr>
+            <a:picLocks noChangeAspect="1"/>
+          </p:cNvPicPr>
+          <p:nvPr/>
+        </p:nvPicPr>
+        <p:blipFill>
+          <a:blip r:embed="rId2"/>
+          <a:stretch>
+            <a:fillRect/>
+          </a:stretch>
+        </p:blipFill>
+        <p:spPr>
+          <a:xfrm>
+            <a:off x="169100" y="2358350"/>
+            <a:ext cx="7041716" cy="450285"/>
+          </a:xfrm>
+          <a:prstGeom prst="rect">
+            <a:avLst/>
+          </a:prstGeom>
+        </p:spPr>
+      </p:pic>
+      <p:pic>
+        <p:nvPicPr>
+          <p:cNvPr id="6" name="Picture 5">
+            <a:extLst>
+              <a:ext uri="{FF2B5EF4-FFF2-40B4-BE49-F238E27FC236}">
+                <a16:creationId xmlns:a16="http://schemas.microsoft.com/office/drawing/2014/main" id="{2CFD6D0C-7010-6D05-C1DF-E06899087E56}"/>
+              </a:ext>
+            </a:extLst>
+          </p:cNvPr>
+          <p:cNvPicPr>
+            <a:picLocks noChangeAspect="1"/>
+          </p:cNvPicPr>
+          <p:nvPr/>
+        </p:nvPicPr>
+        <p:blipFill>
+          <a:blip r:embed="rId3"/>
+          <a:stretch>
+            <a:fillRect/>
+          </a:stretch>
+        </p:blipFill>
+        <p:spPr>
+          <a:xfrm>
+            <a:off x="439585" y="5325454"/>
+            <a:ext cx="5467350" cy="257175"/>
+          </a:xfrm>
+          <a:prstGeom prst="rect">
+            <a:avLst/>
+          </a:prstGeom>
+        </p:spPr>
+      </p:pic>
+      <p:pic>
+        <p:nvPicPr>
+          <p:cNvPr id="8" name="Picture 7" descr="A screen shot of a computer&#10;&#10;AI-generated content may be incorrect.">
+            <a:extLst>
+              <a:ext uri="{FF2B5EF4-FFF2-40B4-BE49-F238E27FC236}">
+                <a16:creationId xmlns:a16="http://schemas.microsoft.com/office/drawing/2014/main" id="{BA08A8F2-3B2A-E5EF-6C9C-A89AABF9BD25}"/>
+              </a:ext>
+            </a:extLst>
+          </p:cNvPr>
+          <p:cNvPicPr>
+            <a:picLocks noChangeAspect="1"/>
+          </p:cNvPicPr>
+          <p:nvPr/>
+        </p:nvPicPr>
+        <p:blipFill>
+          <a:blip r:embed="rId4"/>
+          <a:stretch>
+            <a:fillRect/>
+          </a:stretch>
+        </p:blipFill>
+        <p:spPr>
+          <a:xfrm>
+            <a:off x="6650342" y="4404725"/>
+            <a:ext cx="3275426" cy="2359591"/>
+          </a:xfrm>
+          <a:prstGeom prst="rect">
+            <a:avLst/>
+          </a:prstGeom>
+        </p:spPr>
+      </p:pic>
+    </p:spTree>
+    <p:extLst>
+      <p:ext uri="{BB962C8B-B14F-4D97-AF65-F5344CB8AC3E}">
+        <p14:creationId xmlns:p14="http://schemas.microsoft.com/office/powerpoint/2010/main" val="3498982458"/>
+      </p:ext>
+    </p:extLst>
+  </p:cSld>
+  <p:clrMapOvr>
+    <a:masterClrMapping/>
+  </p:clrMapOvr>
+</p:sld>
+</file>
+
+<file path=ppt/slides/slide19.xml><?xml version="1.0" encoding="utf-8"?>
+<p:sld xmlns:a="http://schemas.openxmlformats.org/drawingml/2006/main" xmlns:r="http://schemas.openxmlformats.org/officeDocument/2006/relationships" xmlns:p="http://schemas.openxmlformats.org/presentationml/2006/main">
+  <p:cSld>
+    <p:spTree>
+      <p:nvGrpSpPr>
+        <p:cNvPr id="1" name="">
+          <a:extLst>
+            <a:ext uri="{FF2B5EF4-FFF2-40B4-BE49-F238E27FC236}">
+              <a16:creationId xmlns:a16="http://schemas.microsoft.com/office/drawing/2014/main" id="{A2E15C87-723D-0FAF-014B-74BF4AA61BB6}"/>
+            </a:ext>
+          </a:extLst>
+        </p:cNvPr>
+        <p:cNvGrpSpPr/>
+        <p:nvPr/>
+      </p:nvGrpSpPr>
+      <p:grpSpPr>
+        <a:xfrm>
+          <a:off x="0" y="0"/>
+          <a:ext cx="0" cy="0"/>
+          <a:chOff x="0" y="0"/>
+          <a:chExt cx="0" cy="0"/>
+        </a:xfrm>
+      </p:grpSpPr>
+      <p:sp>
+        <p:nvSpPr>
+          <p:cNvPr id="2" name="Title 1">
+            <a:extLst>
+              <a:ext uri="{FF2B5EF4-FFF2-40B4-BE49-F238E27FC236}">
+                <a16:creationId xmlns:a16="http://schemas.microsoft.com/office/drawing/2014/main" id="{9DCD3D19-12F4-4B5B-0D48-F61529C72A4B}"/>
+              </a:ext>
+            </a:extLst>
+          </p:cNvPr>
+          <p:cNvSpPr>
+            <a:spLocks noGrp="1"/>
+          </p:cNvSpPr>
+          <p:nvPr>
+            <p:ph type="title"/>
+          </p:nvPr>
+        </p:nvSpPr>
+        <p:spPr/>
+        <p:txBody>
+          <a:bodyPr>
+            <a:normAutofit/>
+          </a:bodyPr>
+          <a:lstStyle/>
+          <a:p>
+            <a:r>
+              <a:rPr lang="en-US" sz="1600"/>
+              <a:t>Test ID: T-DEL-REAL1</a:t>
+            </a:r>
+            <a:endParaRPr lang="en-US"/>
+          </a:p>
+          <a:p>
+            <a:r>
+              <a:rPr lang="en-US" sz="1600"/>
+              <a:t>Statement of unit test: Verify that deleting from the stack removes the top real item without printing it.</a:t>
+            </a:r>
+            <a:endParaRPr lang="en-US"/>
+          </a:p>
+          <a:p>
+            <a:r>
+              <a:rPr lang="en-US" sz="1600"/>
+              <a:t>Expected results: 1 + j0</a:t>
+            </a:r>
+            <a:endParaRPr lang="en-US"/>
+          </a:p>
+        </p:txBody>
+      </p:sp>
+      <p:sp>
+        <p:nvSpPr>
+          <p:cNvPr id="3" name="Content Placeholder 2">
+            <a:extLst>
+              <a:ext uri="{FF2B5EF4-FFF2-40B4-BE49-F238E27FC236}">
+                <a16:creationId xmlns:a16="http://schemas.microsoft.com/office/drawing/2014/main" id="{BC630175-DDA7-E834-C4D4-4CCE8A84ACE3}"/>
+              </a:ext>
+            </a:extLst>
+          </p:cNvPr>
+          <p:cNvSpPr>
+            <a:spLocks noGrp="1"/>
+          </p:cNvSpPr>
+          <p:nvPr>
+            <p:ph idx="1"/>
+          </p:nvPr>
+        </p:nvSpPr>
+        <p:spPr>
+          <a:xfrm>
+            <a:off x="838200" y="1825625"/>
+            <a:ext cx="2841346" cy="4351338"/>
+          </a:xfrm>
+        </p:spPr>
+        <p:txBody>
+          <a:bodyPr>
+            <a:normAutofit/>
+          </a:bodyPr>
+          <a:lstStyle/>
+          <a:p>
+            <a:r>
+              <a:rPr lang="en-US" sz="1100" dirty="0"/>
+              <a:t>Screen capture of unit test code:</a:t>
+            </a:r>
+          </a:p>
+        </p:txBody>
+      </p:sp>
+      <p:sp>
+        <p:nvSpPr>
+          <p:cNvPr id="4" name="Content Placeholder 2">
+            <a:extLst>
+              <a:ext uri="{FF2B5EF4-FFF2-40B4-BE49-F238E27FC236}">
+                <a16:creationId xmlns:a16="http://schemas.microsoft.com/office/drawing/2014/main" id="{D84276C1-C042-B9BD-C20B-5104B10C84D0}"/>
+              </a:ext>
+            </a:extLst>
+          </p:cNvPr>
+          <p:cNvSpPr txBox="1">
+            <a:spLocks/>
+          </p:cNvSpPr>
+          <p:nvPr/>
+        </p:nvSpPr>
+        <p:spPr>
+          <a:xfrm>
+            <a:off x="4993579" y="1825625"/>
+            <a:ext cx="2841346" cy="4351338"/>
+          </a:xfrm>
+          <a:prstGeom prst="rect">
+            <a:avLst/>
+          </a:prstGeom>
+        </p:spPr>
+        <p:txBody>
+          <a:bodyPr vert="horz" lIns="91440" tIns="45720" rIns="91440" bIns="45720" rtlCol="0">
+            <a:normAutofit/>
+          </a:bodyPr>
+          <a:lstStyle>
+            <a:lvl1pPr marL="228600" indent="-228600" algn="l" defTabSz="914400" rtl="0" eaLnBrk="1" latinLnBrk="0" hangingPunct="1">
+              <a:lnSpc>
+                <a:spcPct val="90000"/>
+              </a:lnSpc>
+              <a:spcBef>
+                <a:spcPts val="1000"/>
+              </a:spcBef>
+              <a:buFont typeface="Arial" panose="020B0604020202020204" pitchFamily="34" charset="0"/>
+              <a:buChar char="•"/>
+              <a:defRPr sz="2800" kern="1200">
+                <a:solidFill>
+                  <a:schemeClr val="tx1"/>
+                </a:solidFill>
+                <a:latin typeface="+mn-lt"/>
+                <a:ea typeface="+mn-ea"/>
+                <a:cs typeface="+mn-cs"/>
+              </a:defRPr>
+            </a:lvl1pPr>
+            <a:lvl2pPr marL="685800" indent="-228600" algn="l" defTabSz="914400" rtl="0" eaLnBrk="1" latinLnBrk="0" hangingPunct="1">
+              <a:lnSpc>
+                <a:spcPct val="90000"/>
+              </a:lnSpc>
+              <a:spcBef>
+                <a:spcPts val="500"/>
+              </a:spcBef>
+              <a:buFont typeface="Arial" panose="020B0604020202020204" pitchFamily="34" charset="0"/>
+              <a:buChar char="•"/>
+              <a:defRPr sz="2400" kern="1200">
+                <a:solidFill>
+                  <a:schemeClr val="tx1"/>
+                </a:solidFill>
+                <a:latin typeface="+mn-lt"/>
+                <a:ea typeface="+mn-ea"/>
+                <a:cs typeface="+mn-cs"/>
+              </a:defRPr>
+            </a:lvl2pPr>
+            <a:lvl3pPr marL="1143000" indent="-228600" algn="l" defTabSz="914400" rtl="0" eaLnBrk="1" latinLnBrk="0" hangingPunct="1">
+              <a:lnSpc>
+                <a:spcPct val="90000"/>
+              </a:lnSpc>
+              <a:spcBef>
+                <a:spcPts val="500"/>
+              </a:spcBef>
+              <a:buFont typeface="Arial" panose="020B0604020202020204" pitchFamily="34" charset="0"/>
+              <a:buChar char="•"/>
+              <a:defRPr sz="2000" kern="1200">
+                <a:solidFill>
+                  <a:schemeClr val="tx1"/>
+                </a:solidFill>
+                <a:latin typeface="+mn-lt"/>
+                <a:ea typeface="+mn-ea"/>
+                <a:cs typeface="+mn-cs"/>
+              </a:defRPr>
+            </a:lvl3pPr>
+            <a:lvl4pPr marL="1600200" indent="-228600" algn="l" defTabSz="914400" rtl="0" eaLnBrk="1" latinLnBrk="0" hangingPunct="1">
+              <a:lnSpc>
+                <a:spcPct val="90000"/>
+              </a:lnSpc>
+              <a:spcBef>
+                <a:spcPts val="500"/>
+              </a:spcBef>
+              <a:buFont typeface="Arial" panose="020B0604020202020204" pitchFamily="34" charset="0"/>
+              <a:buChar char="•"/>
+              <a:defRPr sz="1800" kern="1200">
+                <a:solidFill>
+                  <a:schemeClr val="tx1"/>
+                </a:solidFill>
+                <a:latin typeface="+mn-lt"/>
+                <a:ea typeface="+mn-ea"/>
+                <a:cs typeface="+mn-cs"/>
+              </a:defRPr>
+            </a:lvl4pPr>
+            <a:lvl5pPr marL="2057400" indent="-228600" algn="l" defTabSz="914400" rtl="0" eaLnBrk="1" latinLnBrk="0" hangingPunct="1">
+              <a:lnSpc>
+                <a:spcPct val="90000"/>
+              </a:lnSpc>
+              <a:spcBef>
+                <a:spcPts val="500"/>
+              </a:spcBef>
+              <a:buFont typeface="Arial" panose="020B0604020202020204" pitchFamily="34" charset="0"/>
+              <a:buChar char="•"/>
+              <a:defRPr sz="1800" kern="1200">
+                <a:solidFill>
+                  <a:schemeClr val="tx1"/>
+                </a:solidFill>
+                <a:latin typeface="+mn-lt"/>
+                <a:ea typeface="+mn-ea"/>
+                <a:cs typeface="+mn-cs"/>
+              </a:defRPr>
+            </a:lvl5pPr>
+            <a:lvl6pPr marL="2514600" indent="-228600" algn="l" defTabSz="914400" rtl="0" eaLnBrk="1" latinLnBrk="0" hangingPunct="1">
+              <a:lnSpc>
+                <a:spcPct val="90000"/>
+              </a:lnSpc>
+              <a:spcBef>
+                <a:spcPts val="500"/>
+              </a:spcBef>
+              <a:buFont typeface="Arial" panose="020B0604020202020204" pitchFamily="34" charset="0"/>
+              <a:buChar char="•"/>
+              <a:defRPr sz="1800" kern="1200">
+                <a:solidFill>
+                  <a:schemeClr val="tx1"/>
+                </a:solidFill>
+                <a:latin typeface="+mn-lt"/>
+                <a:ea typeface="+mn-ea"/>
+                <a:cs typeface="+mn-cs"/>
+              </a:defRPr>
+            </a:lvl6pPr>
+            <a:lvl7pPr marL="2971800" indent="-228600" algn="l" defTabSz="914400" rtl="0" eaLnBrk="1" latinLnBrk="0" hangingPunct="1">
+              <a:lnSpc>
+                <a:spcPct val="90000"/>
+              </a:lnSpc>
+              <a:spcBef>
+                <a:spcPts val="500"/>
+              </a:spcBef>
+              <a:buFont typeface="Arial" panose="020B0604020202020204" pitchFamily="34" charset="0"/>
+              <a:buChar char="•"/>
+              <a:defRPr sz="1800" kern="1200">
+                <a:solidFill>
+                  <a:schemeClr val="tx1"/>
+                </a:solidFill>
+                <a:latin typeface="+mn-lt"/>
+                <a:ea typeface="+mn-ea"/>
+                <a:cs typeface="+mn-cs"/>
+              </a:defRPr>
+            </a:lvl7pPr>
+            <a:lvl8pPr marL="3429000" indent="-228600" algn="l" defTabSz="914400" rtl="0" eaLnBrk="1" latinLnBrk="0" hangingPunct="1">
+              <a:lnSpc>
+                <a:spcPct val="90000"/>
+              </a:lnSpc>
+              <a:spcBef>
+                <a:spcPts val="500"/>
+              </a:spcBef>
+              <a:buFont typeface="Arial" panose="020B0604020202020204" pitchFamily="34" charset="0"/>
+              <a:buChar char="•"/>
+              <a:defRPr sz="1800" kern="1200">
+                <a:solidFill>
+                  <a:schemeClr val="tx1"/>
+                </a:solidFill>
+                <a:latin typeface="+mn-lt"/>
+                <a:ea typeface="+mn-ea"/>
+                <a:cs typeface="+mn-cs"/>
+              </a:defRPr>
+            </a:lvl8pPr>
+            <a:lvl9pPr marL="3886200" indent="-228600" algn="l" defTabSz="914400" rtl="0" eaLnBrk="1" latinLnBrk="0" hangingPunct="1">
+              <a:lnSpc>
+                <a:spcPct val="90000"/>
+              </a:lnSpc>
+              <a:spcBef>
+                <a:spcPts val="500"/>
+              </a:spcBef>
+              <a:buFont typeface="Arial" panose="020B0604020202020204" pitchFamily="34" charset="0"/>
+              <a:buChar char="•"/>
+              <a:defRPr sz="1800" kern="1200">
+                <a:solidFill>
+                  <a:schemeClr val="tx1"/>
+                </a:solidFill>
+                <a:latin typeface="+mn-lt"/>
+                <a:ea typeface="+mn-ea"/>
+                <a:cs typeface="+mn-cs"/>
+              </a:defRPr>
+            </a:lvl9pPr>
+          </a:lstStyle>
+          <a:p>
+            <a:r>
+              <a:rPr lang="en-US" sz="1100" dirty="0"/>
+              <a:t>Screen capture demonstrating unit test failing:</a:t>
+            </a:r>
+          </a:p>
+        </p:txBody>
+      </p:sp>
+      <p:sp>
+        <p:nvSpPr>
+          <p:cNvPr id="7" name="Content Placeholder 2">
+            <a:extLst>
+              <a:ext uri="{FF2B5EF4-FFF2-40B4-BE49-F238E27FC236}">
+                <a16:creationId xmlns:a16="http://schemas.microsoft.com/office/drawing/2014/main" id="{8979667E-CBD0-9E5D-7CC8-73113A673F2B}"/>
+              </a:ext>
+            </a:extLst>
+          </p:cNvPr>
+          <p:cNvSpPr txBox="1">
+            <a:spLocks/>
+          </p:cNvSpPr>
+          <p:nvPr/>
+        </p:nvSpPr>
+        <p:spPr>
+          <a:xfrm>
+            <a:off x="8874296" y="1825625"/>
+            <a:ext cx="2841346" cy="4351338"/>
+          </a:xfrm>
+          <a:prstGeom prst="rect">
+            <a:avLst/>
+          </a:prstGeom>
+        </p:spPr>
+        <p:txBody>
+          <a:bodyPr vert="horz" lIns="91440" tIns="45720" rIns="91440" bIns="45720" rtlCol="0">
+            <a:normAutofit/>
+          </a:bodyPr>
+          <a:lstStyle>
+            <a:lvl1pPr marL="228600" indent="-228600" algn="l" defTabSz="914400" rtl="0" eaLnBrk="1" latinLnBrk="0" hangingPunct="1">
+              <a:lnSpc>
+                <a:spcPct val="90000"/>
+              </a:lnSpc>
+              <a:spcBef>
+                <a:spcPts val="1000"/>
+              </a:spcBef>
+              <a:buFont typeface="Arial" panose="020B0604020202020204" pitchFamily="34" charset="0"/>
+              <a:buChar char="•"/>
+              <a:defRPr sz="2800" kern="1200">
+                <a:solidFill>
+                  <a:schemeClr val="tx1"/>
+                </a:solidFill>
+                <a:latin typeface="+mn-lt"/>
+                <a:ea typeface="+mn-ea"/>
+                <a:cs typeface="+mn-cs"/>
+              </a:defRPr>
+            </a:lvl1pPr>
+            <a:lvl2pPr marL="685800" indent="-228600" algn="l" defTabSz="914400" rtl="0" eaLnBrk="1" latinLnBrk="0" hangingPunct="1">
+              <a:lnSpc>
+                <a:spcPct val="90000"/>
+              </a:lnSpc>
+              <a:spcBef>
+                <a:spcPts val="500"/>
+              </a:spcBef>
+              <a:buFont typeface="Arial" panose="020B0604020202020204" pitchFamily="34" charset="0"/>
+              <a:buChar char="•"/>
+              <a:defRPr sz="2400" kern="1200">
+                <a:solidFill>
+                  <a:schemeClr val="tx1"/>
+                </a:solidFill>
+                <a:latin typeface="+mn-lt"/>
+                <a:ea typeface="+mn-ea"/>
+                <a:cs typeface="+mn-cs"/>
+              </a:defRPr>
+            </a:lvl2pPr>
+            <a:lvl3pPr marL="1143000" indent="-228600" algn="l" defTabSz="914400" rtl="0" eaLnBrk="1" latinLnBrk="0" hangingPunct="1">
+              <a:lnSpc>
+                <a:spcPct val="90000"/>
+              </a:lnSpc>
+              <a:spcBef>
+                <a:spcPts val="500"/>
+              </a:spcBef>
+              <a:buFont typeface="Arial" panose="020B0604020202020204" pitchFamily="34" charset="0"/>
+              <a:buChar char="•"/>
+              <a:defRPr sz="2000" kern="1200">
+                <a:solidFill>
+                  <a:schemeClr val="tx1"/>
+                </a:solidFill>
+                <a:latin typeface="+mn-lt"/>
+                <a:ea typeface="+mn-ea"/>
+                <a:cs typeface="+mn-cs"/>
+              </a:defRPr>
+            </a:lvl3pPr>
+            <a:lvl4pPr marL="1600200" indent="-228600" algn="l" defTabSz="914400" rtl="0" eaLnBrk="1" latinLnBrk="0" hangingPunct="1">
+              <a:lnSpc>
+                <a:spcPct val="90000"/>
+              </a:lnSpc>
+              <a:spcBef>
+                <a:spcPts val="500"/>
+              </a:spcBef>
+              <a:buFont typeface="Arial" panose="020B0604020202020204" pitchFamily="34" charset="0"/>
+              <a:buChar char="•"/>
+              <a:defRPr sz="1800" kern="1200">
+                <a:solidFill>
+                  <a:schemeClr val="tx1"/>
+                </a:solidFill>
+                <a:latin typeface="+mn-lt"/>
+                <a:ea typeface="+mn-ea"/>
+                <a:cs typeface="+mn-cs"/>
+              </a:defRPr>
+            </a:lvl4pPr>
+            <a:lvl5pPr marL="2057400" indent="-228600" algn="l" defTabSz="914400" rtl="0" eaLnBrk="1" latinLnBrk="0" hangingPunct="1">
+              <a:lnSpc>
+                <a:spcPct val="90000"/>
+              </a:lnSpc>
+              <a:spcBef>
+                <a:spcPts val="500"/>
+              </a:spcBef>
+              <a:buFont typeface="Arial" panose="020B0604020202020204" pitchFamily="34" charset="0"/>
+              <a:buChar char="•"/>
+              <a:defRPr sz="1800" kern="1200">
+                <a:solidFill>
+                  <a:schemeClr val="tx1"/>
+                </a:solidFill>
+                <a:latin typeface="+mn-lt"/>
+                <a:ea typeface="+mn-ea"/>
+                <a:cs typeface="+mn-cs"/>
+              </a:defRPr>
+            </a:lvl5pPr>
+            <a:lvl6pPr marL="2514600" indent="-228600" algn="l" defTabSz="914400" rtl="0" eaLnBrk="1" latinLnBrk="0" hangingPunct="1">
+              <a:lnSpc>
+                <a:spcPct val="90000"/>
+              </a:lnSpc>
+              <a:spcBef>
+                <a:spcPts val="500"/>
+              </a:spcBef>
+              <a:buFont typeface="Arial" panose="020B0604020202020204" pitchFamily="34" charset="0"/>
+              <a:buChar char="•"/>
+              <a:defRPr sz="1800" kern="1200">
+                <a:solidFill>
+                  <a:schemeClr val="tx1"/>
+                </a:solidFill>
+                <a:latin typeface="+mn-lt"/>
+                <a:ea typeface="+mn-ea"/>
+                <a:cs typeface="+mn-cs"/>
+              </a:defRPr>
+            </a:lvl6pPr>
+            <a:lvl7pPr marL="2971800" indent="-228600" algn="l" defTabSz="914400" rtl="0" eaLnBrk="1" latinLnBrk="0" hangingPunct="1">
+              <a:lnSpc>
+                <a:spcPct val="90000"/>
+              </a:lnSpc>
+              <a:spcBef>
+                <a:spcPts val="500"/>
+              </a:spcBef>
+              <a:buFont typeface="Arial" panose="020B0604020202020204" pitchFamily="34" charset="0"/>
+              <a:buChar char="•"/>
+              <a:defRPr sz="1800" kern="1200">
+                <a:solidFill>
+                  <a:schemeClr val="tx1"/>
+                </a:solidFill>
+                <a:latin typeface="+mn-lt"/>
+                <a:ea typeface="+mn-ea"/>
+                <a:cs typeface="+mn-cs"/>
+              </a:defRPr>
+            </a:lvl7pPr>
+            <a:lvl8pPr marL="3429000" indent="-228600" algn="l" defTabSz="914400" rtl="0" eaLnBrk="1" latinLnBrk="0" hangingPunct="1">
+              <a:lnSpc>
+                <a:spcPct val="90000"/>
+              </a:lnSpc>
+              <a:spcBef>
+                <a:spcPts val="500"/>
+              </a:spcBef>
+              <a:buFont typeface="Arial" panose="020B0604020202020204" pitchFamily="34" charset="0"/>
+              <a:buChar char="•"/>
+              <a:defRPr sz="1800" kern="1200">
+                <a:solidFill>
+                  <a:schemeClr val="tx1"/>
+                </a:solidFill>
+                <a:latin typeface="+mn-lt"/>
+                <a:ea typeface="+mn-ea"/>
+                <a:cs typeface="+mn-cs"/>
+              </a:defRPr>
+            </a:lvl8pPr>
+            <a:lvl9pPr marL="3886200" indent="-228600" algn="l" defTabSz="914400" rtl="0" eaLnBrk="1" latinLnBrk="0" hangingPunct="1">
+              <a:lnSpc>
+                <a:spcPct val="90000"/>
+              </a:lnSpc>
+              <a:spcBef>
+                <a:spcPts val="500"/>
+              </a:spcBef>
+              <a:buFont typeface="Arial" panose="020B0604020202020204" pitchFamily="34" charset="0"/>
+              <a:buChar char="•"/>
+              <a:defRPr sz="1800" kern="1200">
+                <a:solidFill>
+                  <a:schemeClr val="tx1"/>
+                </a:solidFill>
+                <a:latin typeface="+mn-lt"/>
+                <a:ea typeface="+mn-ea"/>
+                <a:cs typeface="+mn-cs"/>
+              </a:defRPr>
+            </a:lvl9pPr>
+          </a:lstStyle>
+          <a:p>
+            <a:r>
+              <a:rPr lang="en-US" sz="1100" dirty="0"/>
+              <a:t>Screen capture of code changes highlighted</a:t>
+            </a:r>
+          </a:p>
+        </p:txBody>
+      </p:sp>
+      <p:sp>
+        <p:nvSpPr>
+          <p:cNvPr id="10" name="Content Placeholder 2">
+            <a:extLst>
+              <a:ext uri="{FF2B5EF4-FFF2-40B4-BE49-F238E27FC236}">
+                <a16:creationId xmlns:a16="http://schemas.microsoft.com/office/drawing/2014/main" id="{016311DB-36C9-4632-8477-E04E1889D250}"/>
+              </a:ext>
+            </a:extLst>
+          </p:cNvPr>
+          <p:cNvSpPr txBox="1">
+            <a:spLocks/>
+          </p:cNvSpPr>
+          <p:nvPr/>
+        </p:nvSpPr>
+        <p:spPr>
+          <a:xfrm>
+            <a:off x="879958" y="4067250"/>
+            <a:ext cx="2841346" cy="1947559"/>
+          </a:xfrm>
+          <a:prstGeom prst="rect">
+            <a:avLst/>
+          </a:prstGeom>
+        </p:spPr>
+        <p:txBody>
+          <a:bodyPr vert="horz" lIns="91440" tIns="45720" rIns="91440" bIns="45720" rtlCol="0">
+            <a:normAutofit/>
+          </a:bodyPr>
+          <a:lstStyle>
+            <a:lvl1pPr marL="228600" indent="-228600" algn="l" defTabSz="914400" rtl="0" eaLnBrk="1" latinLnBrk="0" hangingPunct="1">
+              <a:lnSpc>
+                <a:spcPct val="90000"/>
+              </a:lnSpc>
+              <a:spcBef>
+                <a:spcPts val="1000"/>
+              </a:spcBef>
+              <a:buFont typeface="Arial" panose="020B0604020202020204" pitchFamily="34" charset="0"/>
+              <a:buChar char="•"/>
+              <a:defRPr sz="2800" kern="1200">
+                <a:solidFill>
+                  <a:schemeClr val="tx1"/>
+                </a:solidFill>
+                <a:latin typeface="+mn-lt"/>
+                <a:ea typeface="+mn-ea"/>
+                <a:cs typeface="+mn-cs"/>
+              </a:defRPr>
+            </a:lvl1pPr>
+            <a:lvl2pPr marL="685800" indent="-228600" algn="l" defTabSz="914400" rtl="0" eaLnBrk="1" latinLnBrk="0" hangingPunct="1">
+              <a:lnSpc>
+                <a:spcPct val="90000"/>
+              </a:lnSpc>
+              <a:spcBef>
+                <a:spcPts val="500"/>
+              </a:spcBef>
+              <a:buFont typeface="Arial" panose="020B0604020202020204" pitchFamily="34" charset="0"/>
+              <a:buChar char="•"/>
+              <a:defRPr sz="2400" kern="1200">
+                <a:solidFill>
+                  <a:schemeClr val="tx1"/>
+                </a:solidFill>
+                <a:latin typeface="+mn-lt"/>
+                <a:ea typeface="+mn-ea"/>
+                <a:cs typeface="+mn-cs"/>
+              </a:defRPr>
+            </a:lvl2pPr>
+            <a:lvl3pPr marL="1143000" indent="-228600" algn="l" defTabSz="914400" rtl="0" eaLnBrk="1" latinLnBrk="0" hangingPunct="1">
+              <a:lnSpc>
+                <a:spcPct val="90000"/>
+              </a:lnSpc>
+              <a:spcBef>
+                <a:spcPts val="500"/>
+              </a:spcBef>
+              <a:buFont typeface="Arial" panose="020B0604020202020204" pitchFamily="34" charset="0"/>
+              <a:buChar char="•"/>
+              <a:defRPr sz="2000" kern="1200">
+                <a:solidFill>
+                  <a:schemeClr val="tx1"/>
+                </a:solidFill>
+                <a:latin typeface="+mn-lt"/>
+                <a:ea typeface="+mn-ea"/>
+                <a:cs typeface="+mn-cs"/>
+              </a:defRPr>
+            </a:lvl3pPr>
+            <a:lvl4pPr marL="1600200" indent="-228600" algn="l" defTabSz="914400" rtl="0" eaLnBrk="1" latinLnBrk="0" hangingPunct="1">
+              <a:lnSpc>
+                <a:spcPct val="90000"/>
+              </a:lnSpc>
+              <a:spcBef>
+                <a:spcPts val="500"/>
+              </a:spcBef>
+              <a:buFont typeface="Arial" panose="020B0604020202020204" pitchFamily="34" charset="0"/>
+              <a:buChar char="•"/>
+              <a:defRPr sz="1800" kern="1200">
+                <a:solidFill>
+                  <a:schemeClr val="tx1"/>
+                </a:solidFill>
+                <a:latin typeface="+mn-lt"/>
+                <a:ea typeface="+mn-ea"/>
+                <a:cs typeface="+mn-cs"/>
+              </a:defRPr>
+            </a:lvl4pPr>
+            <a:lvl5pPr marL="2057400" indent="-228600" algn="l" defTabSz="914400" rtl="0" eaLnBrk="1" latinLnBrk="0" hangingPunct="1">
+              <a:lnSpc>
+                <a:spcPct val="90000"/>
+              </a:lnSpc>
+              <a:spcBef>
+                <a:spcPts val="500"/>
+              </a:spcBef>
+              <a:buFont typeface="Arial" panose="020B0604020202020204" pitchFamily="34" charset="0"/>
+              <a:buChar char="•"/>
+              <a:defRPr sz="1800" kern="1200">
+                <a:solidFill>
+                  <a:schemeClr val="tx1"/>
+                </a:solidFill>
+                <a:latin typeface="+mn-lt"/>
+                <a:ea typeface="+mn-ea"/>
+                <a:cs typeface="+mn-cs"/>
+              </a:defRPr>
+            </a:lvl5pPr>
+            <a:lvl6pPr marL="2514600" indent="-228600" algn="l" defTabSz="914400" rtl="0" eaLnBrk="1" latinLnBrk="0" hangingPunct="1">
+              <a:lnSpc>
+                <a:spcPct val="90000"/>
+              </a:lnSpc>
+              <a:spcBef>
+                <a:spcPts val="500"/>
+              </a:spcBef>
+              <a:buFont typeface="Arial" panose="020B0604020202020204" pitchFamily="34" charset="0"/>
+              <a:buChar char="•"/>
+              <a:defRPr sz="1800" kern="1200">
+                <a:solidFill>
+                  <a:schemeClr val="tx1"/>
+                </a:solidFill>
+                <a:latin typeface="+mn-lt"/>
+                <a:ea typeface="+mn-ea"/>
+                <a:cs typeface="+mn-cs"/>
+              </a:defRPr>
+            </a:lvl6pPr>
+            <a:lvl7pPr marL="2971800" indent="-228600" algn="l" defTabSz="914400" rtl="0" eaLnBrk="1" latinLnBrk="0" hangingPunct="1">
+              <a:lnSpc>
+                <a:spcPct val="90000"/>
+              </a:lnSpc>
+              <a:spcBef>
+                <a:spcPts val="500"/>
+              </a:spcBef>
+              <a:buFont typeface="Arial" panose="020B0604020202020204" pitchFamily="34" charset="0"/>
+              <a:buChar char="•"/>
+              <a:defRPr sz="1800" kern="1200">
+                <a:solidFill>
+                  <a:schemeClr val="tx1"/>
+                </a:solidFill>
+                <a:latin typeface="+mn-lt"/>
+                <a:ea typeface="+mn-ea"/>
+                <a:cs typeface="+mn-cs"/>
+              </a:defRPr>
+            </a:lvl7pPr>
+            <a:lvl8pPr marL="3429000" indent="-228600" algn="l" defTabSz="914400" rtl="0" eaLnBrk="1" latinLnBrk="0" hangingPunct="1">
+              <a:lnSpc>
+                <a:spcPct val="90000"/>
+              </a:lnSpc>
+              <a:spcBef>
+                <a:spcPts val="500"/>
+              </a:spcBef>
+              <a:buFont typeface="Arial" panose="020B0604020202020204" pitchFamily="34" charset="0"/>
+              <a:buChar char="•"/>
+              <a:defRPr sz="1800" kern="1200">
+                <a:solidFill>
+                  <a:schemeClr val="tx1"/>
+                </a:solidFill>
+                <a:latin typeface="+mn-lt"/>
+                <a:ea typeface="+mn-ea"/>
+                <a:cs typeface="+mn-cs"/>
+              </a:defRPr>
+            </a:lvl8pPr>
+            <a:lvl9pPr marL="3886200" indent="-228600" algn="l" defTabSz="914400" rtl="0" eaLnBrk="1" latinLnBrk="0" hangingPunct="1">
+              <a:lnSpc>
+                <a:spcPct val="90000"/>
+              </a:lnSpc>
+              <a:spcBef>
+                <a:spcPts val="500"/>
+              </a:spcBef>
+              <a:buFont typeface="Arial" panose="020B0604020202020204" pitchFamily="34" charset="0"/>
+              <a:buChar char="•"/>
+              <a:defRPr sz="1800" kern="1200">
+                <a:solidFill>
+                  <a:schemeClr val="tx1"/>
+                </a:solidFill>
+                <a:latin typeface="+mn-lt"/>
+                <a:ea typeface="+mn-ea"/>
+                <a:cs typeface="+mn-cs"/>
+              </a:defRPr>
+            </a:lvl9pPr>
+          </a:lstStyle>
+          <a:p>
+            <a:r>
+              <a:rPr lang="en-US" sz="1100" dirty="0"/>
+              <a:t>Screen capture demonstrating unit test passing</a:t>
+            </a:r>
+          </a:p>
+        </p:txBody>
+      </p:sp>
+      <p:sp>
+        <p:nvSpPr>
+          <p:cNvPr id="12" name="Content Placeholder 2">
+            <a:extLst>
+              <a:ext uri="{FF2B5EF4-FFF2-40B4-BE49-F238E27FC236}">
+                <a16:creationId xmlns:a16="http://schemas.microsoft.com/office/drawing/2014/main" id="{B5D90434-98A5-DC6D-3A66-C4CE7E1CDA8E}"/>
+              </a:ext>
+            </a:extLst>
+          </p:cNvPr>
+          <p:cNvSpPr txBox="1">
+            <a:spLocks/>
+          </p:cNvSpPr>
+          <p:nvPr/>
+        </p:nvSpPr>
+        <p:spPr>
+          <a:xfrm>
+            <a:off x="6417390" y="4067250"/>
+            <a:ext cx="2841346" cy="1947560"/>
+          </a:xfrm>
+          <a:prstGeom prst="rect">
+            <a:avLst/>
+          </a:prstGeom>
+        </p:spPr>
+        <p:txBody>
+          <a:bodyPr vert="horz" lIns="91440" tIns="45720" rIns="91440" bIns="45720" rtlCol="0">
+            <a:normAutofit/>
+          </a:bodyPr>
+          <a:lstStyle>
+            <a:lvl1pPr marL="228600" indent="-228600" algn="l" defTabSz="914400" rtl="0" eaLnBrk="1" latinLnBrk="0" hangingPunct="1">
+              <a:lnSpc>
+                <a:spcPct val="90000"/>
+              </a:lnSpc>
+              <a:spcBef>
+                <a:spcPts val="1000"/>
+              </a:spcBef>
+              <a:buFont typeface="Arial" panose="020B0604020202020204" pitchFamily="34" charset="0"/>
+              <a:buChar char="•"/>
+              <a:defRPr sz="2800" kern="1200">
+                <a:solidFill>
+                  <a:schemeClr val="tx1"/>
+                </a:solidFill>
+                <a:latin typeface="+mn-lt"/>
+                <a:ea typeface="+mn-ea"/>
+                <a:cs typeface="+mn-cs"/>
+              </a:defRPr>
+            </a:lvl1pPr>
+            <a:lvl2pPr marL="685800" indent="-228600" algn="l" defTabSz="914400" rtl="0" eaLnBrk="1" latinLnBrk="0" hangingPunct="1">
+              <a:lnSpc>
+                <a:spcPct val="90000"/>
+              </a:lnSpc>
+              <a:spcBef>
+                <a:spcPts val="500"/>
+              </a:spcBef>
+              <a:buFont typeface="Arial" panose="020B0604020202020204" pitchFamily="34" charset="0"/>
+              <a:buChar char="•"/>
+              <a:defRPr sz="2400" kern="1200">
+                <a:solidFill>
+                  <a:schemeClr val="tx1"/>
+                </a:solidFill>
+                <a:latin typeface="+mn-lt"/>
+                <a:ea typeface="+mn-ea"/>
+                <a:cs typeface="+mn-cs"/>
+              </a:defRPr>
+            </a:lvl2pPr>
+            <a:lvl3pPr marL="1143000" indent="-228600" algn="l" defTabSz="914400" rtl="0" eaLnBrk="1" latinLnBrk="0" hangingPunct="1">
+              <a:lnSpc>
+                <a:spcPct val="90000"/>
+              </a:lnSpc>
+              <a:spcBef>
+                <a:spcPts val="500"/>
+              </a:spcBef>
+              <a:buFont typeface="Arial" panose="020B0604020202020204" pitchFamily="34" charset="0"/>
+              <a:buChar char="•"/>
+              <a:defRPr sz="2000" kern="1200">
+                <a:solidFill>
+                  <a:schemeClr val="tx1"/>
+                </a:solidFill>
+                <a:latin typeface="+mn-lt"/>
+                <a:ea typeface="+mn-ea"/>
+                <a:cs typeface="+mn-cs"/>
+              </a:defRPr>
+            </a:lvl3pPr>
+            <a:lvl4pPr marL="1600200" indent="-228600" algn="l" defTabSz="914400" rtl="0" eaLnBrk="1" latinLnBrk="0" hangingPunct="1">
+              <a:lnSpc>
+                <a:spcPct val="90000"/>
+              </a:lnSpc>
+              <a:spcBef>
+                <a:spcPts val="500"/>
+              </a:spcBef>
+              <a:buFont typeface="Arial" panose="020B0604020202020204" pitchFamily="34" charset="0"/>
+              <a:buChar char="•"/>
+              <a:defRPr sz="1800" kern="1200">
+                <a:solidFill>
+                  <a:schemeClr val="tx1"/>
+                </a:solidFill>
+                <a:latin typeface="+mn-lt"/>
+                <a:ea typeface="+mn-ea"/>
+                <a:cs typeface="+mn-cs"/>
+              </a:defRPr>
+            </a:lvl4pPr>
+            <a:lvl5pPr marL="2057400" indent="-228600" algn="l" defTabSz="914400" rtl="0" eaLnBrk="1" latinLnBrk="0" hangingPunct="1">
+              <a:lnSpc>
+                <a:spcPct val="90000"/>
+              </a:lnSpc>
+              <a:spcBef>
+                <a:spcPts val="500"/>
+              </a:spcBef>
+              <a:buFont typeface="Arial" panose="020B0604020202020204" pitchFamily="34" charset="0"/>
+              <a:buChar char="•"/>
+              <a:defRPr sz="1800" kern="1200">
+                <a:solidFill>
+                  <a:schemeClr val="tx1"/>
+                </a:solidFill>
+                <a:latin typeface="+mn-lt"/>
+                <a:ea typeface="+mn-ea"/>
+                <a:cs typeface="+mn-cs"/>
+              </a:defRPr>
+            </a:lvl5pPr>
+            <a:lvl6pPr marL="2514600" indent="-228600" algn="l" defTabSz="914400" rtl="0" eaLnBrk="1" latinLnBrk="0" hangingPunct="1">
+              <a:lnSpc>
+                <a:spcPct val="90000"/>
+              </a:lnSpc>
+              <a:spcBef>
+                <a:spcPts val="500"/>
+              </a:spcBef>
+              <a:buFont typeface="Arial" panose="020B0604020202020204" pitchFamily="34" charset="0"/>
+              <a:buChar char="•"/>
+              <a:defRPr sz="1800" kern="1200">
+                <a:solidFill>
+                  <a:schemeClr val="tx1"/>
+                </a:solidFill>
+                <a:latin typeface="+mn-lt"/>
+                <a:ea typeface="+mn-ea"/>
+                <a:cs typeface="+mn-cs"/>
+              </a:defRPr>
+            </a:lvl6pPr>
+            <a:lvl7pPr marL="2971800" indent="-228600" algn="l" defTabSz="914400" rtl="0" eaLnBrk="1" latinLnBrk="0" hangingPunct="1">
+              <a:lnSpc>
+                <a:spcPct val="90000"/>
+              </a:lnSpc>
+              <a:spcBef>
+                <a:spcPts val="500"/>
+              </a:spcBef>
+              <a:buFont typeface="Arial" panose="020B0604020202020204" pitchFamily="34" charset="0"/>
+              <a:buChar char="•"/>
+              <a:defRPr sz="1800" kern="1200">
+                <a:solidFill>
+                  <a:schemeClr val="tx1"/>
+                </a:solidFill>
+                <a:latin typeface="+mn-lt"/>
+                <a:ea typeface="+mn-ea"/>
+                <a:cs typeface="+mn-cs"/>
+              </a:defRPr>
+            </a:lvl7pPr>
+            <a:lvl8pPr marL="3429000" indent="-228600" algn="l" defTabSz="914400" rtl="0" eaLnBrk="1" latinLnBrk="0" hangingPunct="1">
+              <a:lnSpc>
+                <a:spcPct val="90000"/>
+              </a:lnSpc>
+              <a:spcBef>
+                <a:spcPts val="500"/>
+              </a:spcBef>
+              <a:buFont typeface="Arial" panose="020B0604020202020204" pitchFamily="34" charset="0"/>
+              <a:buChar char="•"/>
+              <a:defRPr sz="1800" kern="1200">
+                <a:solidFill>
+                  <a:schemeClr val="tx1"/>
+                </a:solidFill>
+                <a:latin typeface="+mn-lt"/>
+                <a:ea typeface="+mn-ea"/>
+                <a:cs typeface="+mn-cs"/>
+              </a:defRPr>
+            </a:lvl8pPr>
+            <a:lvl9pPr marL="3886200" indent="-228600" algn="l" defTabSz="914400" rtl="0" eaLnBrk="1" latinLnBrk="0" hangingPunct="1">
+              <a:lnSpc>
+                <a:spcPct val="90000"/>
+              </a:lnSpc>
+              <a:spcBef>
+                <a:spcPts val="500"/>
+              </a:spcBef>
+              <a:buFont typeface="Arial" panose="020B0604020202020204" pitchFamily="34" charset="0"/>
+              <a:buChar char="•"/>
+              <a:defRPr sz="1800" kern="1200">
+                <a:solidFill>
+                  <a:schemeClr val="tx1"/>
+                </a:solidFill>
+                <a:latin typeface="+mn-lt"/>
+                <a:ea typeface="+mn-ea"/>
+                <a:cs typeface="+mn-cs"/>
+              </a:defRPr>
+            </a:lvl9pPr>
+          </a:lstStyle>
+          <a:p>
+            <a:r>
+              <a:rPr lang="en-US" sz="1100" dirty="0"/>
+              <a:t>Screen capture illustrating all previous unit tests still pass after code changes</a:t>
+            </a:r>
+          </a:p>
+        </p:txBody>
+      </p:sp>
+      <p:pic>
+        <p:nvPicPr>
+          <p:cNvPr id="5" name="Picture 4" descr="A black background with green and white text&#10;&#10;AI-generated content may be incorrect.">
+            <a:extLst>
+              <a:ext uri="{FF2B5EF4-FFF2-40B4-BE49-F238E27FC236}">
+                <a16:creationId xmlns:a16="http://schemas.microsoft.com/office/drawing/2014/main" id="{B4EABB57-06DE-5F58-C451-8CA8B1C23B28}"/>
+              </a:ext>
+            </a:extLst>
+          </p:cNvPr>
+          <p:cNvPicPr>
+            <a:picLocks noChangeAspect="1"/>
+          </p:cNvPicPr>
+          <p:nvPr/>
+        </p:nvPicPr>
+        <p:blipFill>
+          <a:blip r:embed="rId2"/>
+          <a:stretch>
+            <a:fillRect/>
+          </a:stretch>
+        </p:blipFill>
+        <p:spPr>
+          <a:xfrm>
+            <a:off x="190173" y="2627920"/>
+            <a:ext cx="4066394" cy="266049"/>
+          </a:xfrm>
+          <a:prstGeom prst="rect">
+            <a:avLst/>
+          </a:prstGeom>
+        </p:spPr>
+      </p:pic>
+      <p:pic>
+        <p:nvPicPr>
+          <p:cNvPr id="6" name="Picture 5" descr="A computer screen shot of a program&#10;&#10;AI-generated content may be incorrect.">
+            <a:extLst>
+              <a:ext uri="{FF2B5EF4-FFF2-40B4-BE49-F238E27FC236}">
+                <a16:creationId xmlns:a16="http://schemas.microsoft.com/office/drawing/2014/main" id="{3C9FFE90-7E6D-D367-9984-C8B3BE280A66}"/>
+              </a:ext>
+            </a:extLst>
+          </p:cNvPr>
+          <p:cNvPicPr>
+            <a:picLocks noChangeAspect="1"/>
+          </p:cNvPicPr>
+          <p:nvPr/>
+        </p:nvPicPr>
+        <p:blipFill>
+          <a:blip r:embed="rId3"/>
+          <a:stretch>
+            <a:fillRect/>
+          </a:stretch>
+        </p:blipFill>
+        <p:spPr>
+          <a:xfrm>
+            <a:off x="4385087" y="2171113"/>
+            <a:ext cx="3797606" cy="1607639"/>
+          </a:xfrm>
+          <a:prstGeom prst="rect">
+            <a:avLst/>
+          </a:prstGeom>
+        </p:spPr>
+      </p:pic>
+      <p:pic>
+        <p:nvPicPr>
+          <p:cNvPr id="8" name="Picture 7" descr="A screenshot of a computer&#10;&#10;AI-generated content may be incorrect.">
+            <a:extLst>
+              <a:ext uri="{FF2B5EF4-FFF2-40B4-BE49-F238E27FC236}">
+                <a16:creationId xmlns:a16="http://schemas.microsoft.com/office/drawing/2014/main" id="{482A12F5-F2BD-0F02-BD59-7798E3AC6427}"/>
+              </a:ext>
+            </a:extLst>
+          </p:cNvPr>
+          <p:cNvPicPr>
+            <a:picLocks noChangeAspect="1"/>
+          </p:cNvPicPr>
+          <p:nvPr/>
+        </p:nvPicPr>
+        <p:blipFill>
+          <a:blip r:embed="rId4"/>
+          <a:stretch>
+            <a:fillRect/>
+          </a:stretch>
+        </p:blipFill>
+        <p:spPr>
+          <a:xfrm>
+            <a:off x="8178973" y="2629486"/>
+            <a:ext cx="4017725" cy="513438"/>
+          </a:xfrm>
+          <a:prstGeom prst="rect">
+            <a:avLst/>
+          </a:prstGeom>
+        </p:spPr>
+      </p:pic>
+      <p:pic>
+        <p:nvPicPr>
+          <p:cNvPr id="9" name="Picture 8">
+            <a:extLst>
+              <a:ext uri="{FF2B5EF4-FFF2-40B4-BE49-F238E27FC236}">
+                <a16:creationId xmlns:a16="http://schemas.microsoft.com/office/drawing/2014/main" id="{86CBB201-60F1-1739-E94F-F9A933029A30}"/>
+              </a:ext>
+            </a:extLst>
+          </p:cNvPr>
+          <p:cNvPicPr>
+            <a:picLocks noChangeAspect="1"/>
+          </p:cNvPicPr>
+          <p:nvPr/>
+        </p:nvPicPr>
+        <p:blipFill>
+          <a:blip r:embed="rId5"/>
+          <a:stretch>
+            <a:fillRect/>
+          </a:stretch>
+        </p:blipFill>
+        <p:spPr>
+          <a:xfrm>
+            <a:off x="426276" y="5149829"/>
+            <a:ext cx="4972050" cy="295275"/>
+          </a:xfrm>
+          <a:prstGeom prst="rect">
+            <a:avLst/>
+          </a:prstGeom>
+        </p:spPr>
+      </p:pic>
+      <p:pic>
+        <p:nvPicPr>
+          <p:cNvPr id="11" name="Picture 10" descr="A screen shot of a computer program&#10;&#10;AI-generated content may be incorrect.">
+            <a:extLst>
+              <a:ext uri="{FF2B5EF4-FFF2-40B4-BE49-F238E27FC236}">
+                <a16:creationId xmlns:a16="http://schemas.microsoft.com/office/drawing/2014/main" id="{614E26D1-CDDB-2491-D405-6F56E0081F50}"/>
+              </a:ext>
+            </a:extLst>
+          </p:cNvPr>
+          <p:cNvPicPr>
+            <a:picLocks noChangeAspect="1"/>
+          </p:cNvPicPr>
+          <p:nvPr/>
+        </p:nvPicPr>
+        <p:blipFill>
+          <a:blip r:embed="rId6"/>
+          <a:stretch>
+            <a:fillRect/>
+          </a:stretch>
+        </p:blipFill>
+        <p:spPr>
+          <a:xfrm>
+            <a:off x="6423242" y="4407074"/>
+            <a:ext cx="2967625" cy="2323579"/>
+          </a:xfrm>
+          <a:prstGeom prst="rect">
+            <a:avLst/>
+          </a:prstGeom>
+        </p:spPr>
+      </p:pic>
+    </p:spTree>
+    <p:extLst>
+      <p:ext uri="{BB962C8B-B14F-4D97-AF65-F5344CB8AC3E}">
+        <p14:creationId xmlns:p14="http://schemas.microsoft.com/office/powerpoint/2010/main" val="3141777541"/>
       </p:ext>
     </p:extLst>
   </p:cSld>
@@ -6665,6 +13980,1897 @@
     <p:extLst>
       <p:ext uri="{BB962C8B-B14F-4D97-AF65-F5344CB8AC3E}">
         <p14:creationId xmlns:p14="http://schemas.microsoft.com/office/powerpoint/2010/main" val="2644094128"/>
+      </p:ext>
+    </p:extLst>
+  </p:cSld>
+  <p:clrMapOvr>
+    <a:masterClrMapping/>
+  </p:clrMapOvr>
+</p:sld>
+</file>
+
+<file path=ppt/slides/slide20.xml><?xml version="1.0" encoding="utf-8"?>
+<p:sld xmlns:a="http://schemas.openxmlformats.org/drawingml/2006/main" xmlns:r="http://schemas.openxmlformats.org/officeDocument/2006/relationships" xmlns:p="http://schemas.openxmlformats.org/presentationml/2006/main">
+  <p:cSld>
+    <p:spTree>
+      <p:nvGrpSpPr>
+        <p:cNvPr id="1" name="">
+          <a:extLst>
+            <a:ext uri="{FF2B5EF4-FFF2-40B4-BE49-F238E27FC236}">
+              <a16:creationId xmlns:a16="http://schemas.microsoft.com/office/drawing/2014/main" id="{B21B0C4F-435E-2844-375C-920AB69C673A}"/>
+            </a:ext>
+          </a:extLst>
+        </p:cNvPr>
+        <p:cNvGrpSpPr/>
+        <p:nvPr/>
+      </p:nvGrpSpPr>
+      <p:grpSpPr>
+        <a:xfrm>
+          <a:off x="0" y="0"/>
+          <a:ext cx="0" cy="0"/>
+          <a:chOff x="0" y="0"/>
+          <a:chExt cx="0" cy="0"/>
+        </a:xfrm>
+      </p:grpSpPr>
+      <p:sp>
+        <p:nvSpPr>
+          <p:cNvPr id="2" name="Title 1">
+            <a:extLst>
+              <a:ext uri="{FF2B5EF4-FFF2-40B4-BE49-F238E27FC236}">
+                <a16:creationId xmlns:a16="http://schemas.microsoft.com/office/drawing/2014/main" id="{7A4F43F1-CA4E-D1AC-E307-CF6DFF4A4A22}"/>
+              </a:ext>
+            </a:extLst>
+          </p:cNvPr>
+          <p:cNvSpPr>
+            <a:spLocks noGrp="1"/>
+          </p:cNvSpPr>
+          <p:nvPr>
+            <p:ph type="title"/>
+          </p:nvPr>
+        </p:nvSpPr>
+        <p:spPr/>
+        <p:txBody>
+          <a:bodyPr>
+            <a:normAutofit/>
+          </a:bodyPr>
+          <a:lstStyle/>
+          <a:p>
+            <a:r>
+              <a:rPr lang="en-US" sz="1600"/>
+              <a:t>Test ID: T-DEL-CPLX1</a:t>
+            </a:r>
+            <a:endParaRPr lang="en-US"/>
+          </a:p>
+          <a:p>
+            <a:r>
+              <a:rPr lang="en-US" sz="1600">
+                <a:ea typeface="+mj-lt"/>
+                <a:cs typeface="+mj-lt"/>
+              </a:rPr>
+              <a:t>Statement of unit test: Verify that deleting from a stack with complex numbers removes the top complex item.</a:t>
+            </a:r>
+            <a:endParaRPr lang="en-US"/>
+          </a:p>
+          <a:p>
+            <a:r>
+              <a:rPr lang="en-US" sz="1600">
+                <a:ea typeface="+mj-lt"/>
+                <a:cs typeface="+mj-lt"/>
+              </a:rPr>
+              <a:t>Expected results: </a:t>
+            </a:r>
+            <a:r>
+              <a:rPr lang="en-US" sz="1600">
+                <a:latin typeface="Aptos Display"/>
+              </a:rPr>
+              <a:t>1 + j1</a:t>
+            </a:r>
+            <a:endParaRPr lang="en-US"/>
+          </a:p>
+        </p:txBody>
+      </p:sp>
+      <p:sp>
+        <p:nvSpPr>
+          <p:cNvPr id="3" name="Content Placeholder 2">
+            <a:extLst>
+              <a:ext uri="{FF2B5EF4-FFF2-40B4-BE49-F238E27FC236}">
+                <a16:creationId xmlns:a16="http://schemas.microsoft.com/office/drawing/2014/main" id="{AA6D1F0E-CEB7-F872-603D-C2A2C2C30599}"/>
+              </a:ext>
+            </a:extLst>
+          </p:cNvPr>
+          <p:cNvSpPr>
+            <a:spLocks noGrp="1"/>
+          </p:cNvSpPr>
+          <p:nvPr>
+            <p:ph idx="1"/>
+          </p:nvPr>
+        </p:nvSpPr>
+        <p:spPr>
+          <a:xfrm>
+            <a:off x="838200" y="1825625"/>
+            <a:ext cx="2841346" cy="4351338"/>
+          </a:xfrm>
+        </p:spPr>
+        <p:txBody>
+          <a:bodyPr>
+            <a:normAutofit/>
+          </a:bodyPr>
+          <a:lstStyle/>
+          <a:p>
+            <a:r>
+              <a:rPr lang="en-US" sz="1100" dirty="0"/>
+              <a:t>Screen capture of unit test code:</a:t>
+            </a:r>
+          </a:p>
+        </p:txBody>
+      </p:sp>
+      <p:sp>
+        <p:nvSpPr>
+          <p:cNvPr id="7" name="Content Placeholder 2">
+            <a:extLst>
+              <a:ext uri="{FF2B5EF4-FFF2-40B4-BE49-F238E27FC236}">
+                <a16:creationId xmlns:a16="http://schemas.microsoft.com/office/drawing/2014/main" id="{06F694AE-DB39-3019-AC20-3BD296588080}"/>
+              </a:ext>
+            </a:extLst>
+          </p:cNvPr>
+          <p:cNvSpPr txBox="1">
+            <a:spLocks/>
+          </p:cNvSpPr>
+          <p:nvPr/>
+        </p:nvSpPr>
+        <p:spPr>
+          <a:xfrm>
+            <a:off x="7788707" y="1825625"/>
+            <a:ext cx="2841346" cy="4351338"/>
+          </a:xfrm>
+          <a:prstGeom prst="rect">
+            <a:avLst/>
+          </a:prstGeom>
+        </p:spPr>
+        <p:txBody>
+          <a:bodyPr vert="horz" lIns="91440" tIns="45720" rIns="91440" bIns="45720" rtlCol="0" anchor="t">
+            <a:normAutofit/>
+          </a:bodyPr>
+          <a:lstStyle>
+            <a:lvl1pPr marL="228600" indent="-228600" algn="l" defTabSz="914400" rtl="0" eaLnBrk="1" latinLnBrk="0" hangingPunct="1">
+              <a:lnSpc>
+                <a:spcPct val="90000"/>
+              </a:lnSpc>
+              <a:spcBef>
+                <a:spcPts val="1000"/>
+              </a:spcBef>
+              <a:buFont typeface="Arial" panose="020B0604020202020204" pitchFamily="34" charset="0"/>
+              <a:buChar char="•"/>
+              <a:defRPr sz="2800" kern="1200">
+                <a:solidFill>
+                  <a:schemeClr val="tx1"/>
+                </a:solidFill>
+                <a:latin typeface="+mn-lt"/>
+                <a:ea typeface="+mn-ea"/>
+                <a:cs typeface="+mn-cs"/>
+              </a:defRPr>
+            </a:lvl1pPr>
+            <a:lvl2pPr marL="685800" indent="-228600" algn="l" defTabSz="914400" rtl="0" eaLnBrk="1" latinLnBrk="0" hangingPunct="1">
+              <a:lnSpc>
+                <a:spcPct val="90000"/>
+              </a:lnSpc>
+              <a:spcBef>
+                <a:spcPts val="500"/>
+              </a:spcBef>
+              <a:buFont typeface="Arial" panose="020B0604020202020204" pitchFamily="34" charset="0"/>
+              <a:buChar char="•"/>
+              <a:defRPr sz="2400" kern="1200">
+                <a:solidFill>
+                  <a:schemeClr val="tx1"/>
+                </a:solidFill>
+                <a:latin typeface="+mn-lt"/>
+                <a:ea typeface="+mn-ea"/>
+                <a:cs typeface="+mn-cs"/>
+              </a:defRPr>
+            </a:lvl2pPr>
+            <a:lvl3pPr marL="1143000" indent="-228600" algn="l" defTabSz="914400" rtl="0" eaLnBrk="1" latinLnBrk="0" hangingPunct="1">
+              <a:lnSpc>
+                <a:spcPct val="90000"/>
+              </a:lnSpc>
+              <a:spcBef>
+                <a:spcPts val="500"/>
+              </a:spcBef>
+              <a:buFont typeface="Arial" panose="020B0604020202020204" pitchFamily="34" charset="0"/>
+              <a:buChar char="•"/>
+              <a:defRPr sz="2000" kern="1200">
+                <a:solidFill>
+                  <a:schemeClr val="tx1"/>
+                </a:solidFill>
+                <a:latin typeface="+mn-lt"/>
+                <a:ea typeface="+mn-ea"/>
+                <a:cs typeface="+mn-cs"/>
+              </a:defRPr>
+            </a:lvl3pPr>
+            <a:lvl4pPr marL="1600200" indent="-228600" algn="l" defTabSz="914400" rtl="0" eaLnBrk="1" latinLnBrk="0" hangingPunct="1">
+              <a:lnSpc>
+                <a:spcPct val="90000"/>
+              </a:lnSpc>
+              <a:spcBef>
+                <a:spcPts val="500"/>
+              </a:spcBef>
+              <a:buFont typeface="Arial" panose="020B0604020202020204" pitchFamily="34" charset="0"/>
+              <a:buChar char="•"/>
+              <a:defRPr sz="1800" kern="1200">
+                <a:solidFill>
+                  <a:schemeClr val="tx1"/>
+                </a:solidFill>
+                <a:latin typeface="+mn-lt"/>
+                <a:ea typeface="+mn-ea"/>
+                <a:cs typeface="+mn-cs"/>
+              </a:defRPr>
+            </a:lvl4pPr>
+            <a:lvl5pPr marL="2057400" indent="-228600" algn="l" defTabSz="914400" rtl="0" eaLnBrk="1" latinLnBrk="0" hangingPunct="1">
+              <a:lnSpc>
+                <a:spcPct val="90000"/>
+              </a:lnSpc>
+              <a:spcBef>
+                <a:spcPts val="500"/>
+              </a:spcBef>
+              <a:buFont typeface="Arial" panose="020B0604020202020204" pitchFamily="34" charset="0"/>
+              <a:buChar char="•"/>
+              <a:defRPr sz="1800" kern="1200">
+                <a:solidFill>
+                  <a:schemeClr val="tx1"/>
+                </a:solidFill>
+                <a:latin typeface="+mn-lt"/>
+                <a:ea typeface="+mn-ea"/>
+                <a:cs typeface="+mn-cs"/>
+              </a:defRPr>
+            </a:lvl5pPr>
+            <a:lvl6pPr marL="2514600" indent="-228600" algn="l" defTabSz="914400" rtl="0" eaLnBrk="1" latinLnBrk="0" hangingPunct="1">
+              <a:lnSpc>
+                <a:spcPct val="90000"/>
+              </a:lnSpc>
+              <a:spcBef>
+                <a:spcPts val="500"/>
+              </a:spcBef>
+              <a:buFont typeface="Arial" panose="020B0604020202020204" pitchFamily="34" charset="0"/>
+              <a:buChar char="•"/>
+              <a:defRPr sz="1800" kern="1200">
+                <a:solidFill>
+                  <a:schemeClr val="tx1"/>
+                </a:solidFill>
+                <a:latin typeface="+mn-lt"/>
+                <a:ea typeface="+mn-ea"/>
+                <a:cs typeface="+mn-cs"/>
+              </a:defRPr>
+            </a:lvl6pPr>
+            <a:lvl7pPr marL="2971800" indent="-228600" algn="l" defTabSz="914400" rtl="0" eaLnBrk="1" latinLnBrk="0" hangingPunct="1">
+              <a:lnSpc>
+                <a:spcPct val="90000"/>
+              </a:lnSpc>
+              <a:spcBef>
+                <a:spcPts val="500"/>
+              </a:spcBef>
+              <a:buFont typeface="Arial" panose="020B0604020202020204" pitchFamily="34" charset="0"/>
+              <a:buChar char="•"/>
+              <a:defRPr sz="1800" kern="1200">
+                <a:solidFill>
+                  <a:schemeClr val="tx1"/>
+                </a:solidFill>
+                <a:latin typeface="+mn-lt"/>
+                <a:ea typeface="+mn-ea"/>
+                <a:cs typeface="+mn-cs"/>
+              </a:defRPr>
+            </a:lvl7pPr>
+            <a:lvl8pPr marL="3429000" indent="-228600" algn="l" defTabSz="914400" rtl="0" eaLnBrk="1" latinLnBrk="0" hangingPunct="1">
+              <a:lnSpc>
+                <a:spcPct val="90000"/>
+              </a:lnSpc>
+              <a:spcBef>
+                <a:spcPts val="500"/>
+              </a:spcBef>
+              <a:buFont typeface="Arial" panose="020B0604020202020204" pitchFamily="34" charset="0"/>
+              <a:buChar char="•"/>
+              <a:defRPr sz="1800" kern="1200">
+                <a:solidFill>
+                  <a:schemeClr val="tx1"/>
+                </a:solidFill>
+                <a:latin typeface="+mn-lt"/>
+                <a:ea typeface="+mn-ea"/>
+                <a:cs typeface="+mn-cs"/>
+              </a:defRPr>
+            </a:lvl8pPr>
+            <a:lvl9pPr marL="3886200" indent="-228600" algn="l" defTabSz="914400" rtl="0" eaLnBrk="1" latinLnBrk="0" hangingPunct="1">
+              <a:lnSpc>
+                <a:spcPct val="90000"/>
+              </a:lnSpc>
+              <a:spcBef>
+                <a:spcPts val="500"/>
+              </a:spcBef>
+              <a:buFont typeface="Arial" panose="020B0604020202020204" pitchFamily="34" charset="0"/>
+              <a:buChar char="•"/>
+              <a:defRPr sz="1800" kern="1200">
+                <a:solidFill>
+                  <a:schemeClr val="tx1"/>
+                </a:solidFill>
+                <a:latin typeface="+mn-lt"/>
+                <a:ea typeface="+mn-ea"/>
+                <a:cs typeface="+mn-cs"/>
+              </a:defRPr>
+            </a:lvl9pPr>
+          </a:lstStyle>
+          <a:p>
+            <a:r>
+              <a:rPr lang="en-US" sz="1100"/>
+              <a:t>Code changes</a:t>
+            </a:r>
+            <a:br>
+              <a:rPr lang="en-US" sz="1100" dirty="0"/>
+            </a:br>
+            <a:endParaRPr lang="en-US" sz="1100" dirty="0"/>
+          </a:p>
+          <a:p>
+            <a:pPr marL="0" indent="0">
+              <a:buNone/>
+            </a:pPr>
+            <a:r>
+              <a:rPr lang="en-US" sz="1100"/>
+              <a:t>None required. stack.pop() naturally removes the top item regardless of whether it is a float or a complex number.</a:t>
+            </a:r>
+            <a:endParaRPr lang="en-US"/>
+          </a:p>
+        </p:txBody>
+      </p:sp>
+      <p:sp>
+        <p:nvSpPr>
+          <p:cNvPr id="10" name="Content Placeholder 2">
+            <a:extLst>
+              <a:ext uri="{FF2B5EF4-FFF2-40B4-BE49-F238E27FC236}">
+                <a16:creationId xmlns:a16="http://schemas.microsoft.com/office/drawing/2014/main" id="{B5B38C58-B266-155B-E020-8839F3D27865}"/>
+              </a:ext>
+            </a:extLst>
+          </p:cNvPr>
+          <p:cNvSpPr txBox="1">
+            <a:spLocks/>
+          </p:cNvSpPr>
+          <p:nvPr/>
+        </p:nvSpPr>
+        <p:spPr>
+          <a:xfrm>
+            <a:off x="879958" y="4067250"/>
+            <a:ext cx="2841346" cy="1947559"/>
+          </a:xfrm>
+          <a:prstGeom prst="rect">
+            <a:avLst/>
+          </a:prstGeom>
+        </p:spPr>
+        <p:txBody>
+          <a:bodyPr vert="horz" lIns="91440" tIns="45720" rIns="91440" bIns="45720" rtlCol="0">
+            <a:normAutofit/>
+          </a:bodyPr>
+          <a:lstStyle>
+            <a:lvl1pPr marL="228600" indent="-228600" algn="l" defTabSz="914400" rtl="0" eaLnBrk="1" latinLnBrk="0" hangingPunct="1">
+              <a:lnSpc>
+                <a:spcPct val="90000"/>
+              </a:lnSpc>
+              <a:spcBef>
+                <a:spcPts val="1000"/>
+              </a:spcBef>
+              <a:buFont typeface="Arial" panose="020B0604020202020204" pitchFamily="34" charset="0"/>
+              <a:buChar char="•"/>
+              <a:defRPr sz="2800" kern="1200">
+                <a:solidFill>
+                  <a:schemeClr val="tx1"/>
+                </a:solidFill>
+                <a:latin typeface="+mn-lt"/>
+                <a:ea typeface="+mn-ea"/>
+                <a:cs typeface="+mn-cs"/>
+              </a:defRPr>
+            </a:lvl1pPr>
+            <a:lvl2pPr marL="685800" indent="-228600" algn="l" defTabSz="914400" rtl="0" eaLnBrk="1" latinLnBrk="0" hangingPunct="1">
+              <a:lnSpc>
+                <a:spcPct val="90000"/>
+              </a:lnSpc>
+              <a:spcBef>
+                <a:spcPts val="500"/>
+              </a:spcBef>
+              <a:buFont typeface="Arial" panose="020B0604020202020204" pitchFamily="34" charset="0"/>
+              <a:buChar char="•"/>
+              <a:defRPr sz="2400" kern="1200">
+                <a:solidFill>
+                  <a:schemeClr val="tx1"/>
+                </a:solidFill>
+                <a:latin typeface="+mn-lt"/>
+                <a:ea typeface="+mn-ea"/>
+                <a:cs typeface="+mn-cs"/>
+              </a:defRPr>
+            </a:lvl2pPr>
+            <a:lvl3pPr marL="1143000" indent="-228600" algn="l" defTabSz="914400" rtl="0" eaLnBrk="1" latinLnBrk="0" hangingPunct="1">
+              <a:lnSpc>
+                <a:spcPct val="90000"/>
+              </a:lnSpc>
+              <a:spcBef>
+                <a:spcPts val="500"/>
+              </a:spcBef>
+              <a:buFont typeface="Arial" panose="020B0604020202020204" pitchFamily="34" charset="0"/>
+              <a:buChar char="•"/>
+              <a:defRPr sz="2000" kern="1200">
+                <a:solidFill>
+                  <a:schemeClr val="tx1"/>
+                </a:solidFill>
+                <a:latin typeface="+mn-lt"/>
+                <a:ea typeface="+mn-ea"/>
+                <a:cs typeface="+mn-cs"/>
+              </a:defRPr>
+            </a:lvl3pPr>
+            <a:lvl4pPr marL="1600200" indent="-228600" algn="l" defTabSz="914400" rtl="0" eaLnBrk="1" latinLnBrk="0" hangingPunct="1">
+              <a:lnSpc>
+                <a:spcPct val="90000"/>
+              </a:lnSpc>
+              <a:spcBef>
+                <a:spcPts val="500"/>
+              </a:spcBef>
+              <a:buFont typeface="Arial" panose="020B0604020202020204" pitchFamily="34" charset="0"/>
+              <a:buChar char="•"/>
+              <a:defRPr sz="1800" kern="1200">
+                <a:solidFill>
+                  <a:schemeClr val="tx1"/>
+                </a:solidFill>
+                <a:latin typeface="+mn-lt"/>
+                <a:ea typeface="+mn-ea"/>
+                <a:cs typeface="+mn-cs"/>
+              </a:defRPr>
+            </a:lvl4pPr>
+            <a:lvl5pPr marL="2057400" indent="-228600" algn="l" defTabSz="914400" rtl="0" eaLnBrk="1" latinLnBrk="0" hangingPunct="1">
+              <a:lnSpc>
+                <a:spcPct val="90000"/>
+              </a:lnSpc>
+              <a:spcBef>
+                <a:spcPts val="500"/>
+              </a:spcBef>
+              <a:buFont typeface="Arial" panose="020B0604020202020204" pitchFamily="34" charset="0"/>
+              <a:buChar char="•"/>
+              <a:defRPr sz="1800" kern="1200">
+                <a:solidFill>
+                  <a:schemeClr val="tx1"/>
+                </a:solidFill>
+                <a:latin typeface="+mn-lt"/>
+                <a:ea typeface="+mn-ea"/>
+                <a:cs typeface="+mn-cs"/>
+              </a:defRPr>
+            </a:lvl5pPr>
+            <a:lvl6pPr marL="2514600" indent="-228600" algn="l" defTabSz="914400" rtl="0" eaLnBrk="1" latinLnBrk="0" hangingPunct="1">
+              <a:lnSpc>
+                <a:spcPct val="90000"/>
+              </a:lnSpc>
+              <a:spcBef>
+                <a:spcPts val="500"/>
+              </a:spcBef>
+              <a:buFont typeface="Arial" panose="020B0604020202020204" pitchFamily="34" charset="0"/>
+              <a:buChar char="•"/>
+              <a:defRPr sz="1800" kern="1200">
+                <a:solidFill>
+                  <a:schemeClr val="tx1"/>
+                </a:solidFill>
+                <a:latin typeface="+mn-lt"/>
+                <a:ea typeface="+mn-ea"/>
+                <a:cs typeface="+mn-cs"/>
+              </a:defRPr>
+            </a:lvl6pPr>
+            <a:lvl7pPr marL="2971800" indent="-228600" algn="l" defTabSz="914400" rtl="0" eaLnBrk="1" latinLnBrk="0" hangingPunct="1">
+              <a:lnSpc>
+                <a:spcPct val="90000"/>
+              </a:lnSpc>
+              <a:spcBef>
+                <a:spcPts val="500"/>
+              </a:spcBef>
+              <a:buFont typeface="Arial" panose="020B0604020202020204" pitchFamily="34" charset="0"/>
+              <a:buChar char="•"/>
+              <a:defRPr sz="1800" kern="1200">
+                <a:solidFill>
+                  <a:schemeClr val="tx1"/>
+                </a:solidFill>
+                <a:latin typeface="+mn-lt"/>
+                <a:ea typeface="+mn-ea"/>
+                <a:cs typeface="+mn-cs"/>
+              </a:defRPr>
+            </a:lvl7pPr>
+            <a:lvl8pPr marL="3429000" indent="-228600" algn="l" defTabSz="914400" rtl="0" eaLnBrk="1" latinLnBrk="0" hangingPunct="1">
+              <a:lnSpc>
+                <a:spcPct val="90000"/>
+              </a:lnSpc>
+              <a:spcBef>
+                <a:spcPts val="500"/>
+              </a:spcBef>
+              <a:buFont typeface="Arial" panose="020B0604020202020204" pitchFamily="34" charset="0"/>
+              <a:buChar char="•"/>
+              <a:defRPr sz="1800" kern="1200">
+                <a:solidFill>
+                  <a:schemeClr val="tx1"/>
+                </a:solidFill>
+                <a:latin typeface="+mn-lt"/>
+                <a:ea typeface="+mn-ea"/>
+                <a:cs typeface="+mn-cs"/>
+              </a:defRPr>
+            </a:lvl8pPr>
+            <a:lvl9pPr marL="3886200" indent="-228600" algn="l" defTabSz="914400" rtl="0" eaLnBrk="1" latinLnBrk="0" hangingPunct="1">
+              <a:lnSpc>
+                <a:spcPct val="90000"/>
+              </a:lnSpc>
+              <a:spcBef>
+                <a:spcPts val="500"/>
+              </a:spcBef>
+              <a:buFont typeface="Arial" panose="020B0604020202020204" pitchFamily="34" charset="0"/>
+              <a:buChar char="•"/>
+              <a:defRPr sz="1800" kern="1200">
+                <a:solidFill>
+                  <a:schemeClr val="tx1"/>
+                </a:solidFill>
+                <a:latin typeface="+mn-lt"/>
+                <a:ea typeface="+mn-ea"/>
+                <a:cs typeface="+mn-cs"/>
+              </a:defRPr>
+            </a:lvl9pPr>
+          </a:lstStyle>
+          <a:p>
+            <a:r>
+              <a:rPr lang="en-US" sz="1100" dirty="0"/>
+              <a:t>Screen capture demonstrating unit test passing</a:t>
+            </a:r>
+          </a:p>
+        </p:txBody>
+      </p:sp>
+      <p:sp>
+        <p:nvSpPr>
+          <p:cNvPr id="12" name="Content Placeholder 2">
+            <a:extLst>
+              <a:ext uri="{FF2B5EF4-FFF2-40B4-BE49-F238E27FC236}">
+                <a16:creationId xmlns:a16="http://schemas.microsoft.com/office/drawing/2014/main" id="{35127E98-A563-ED6A-279E-27006CC0FC3D}"/>
+              </a:ext>
+            </a:extLst>
+          </p:cNvPr>
+          <p:cNvSpPr txBox="1">
+            <a:spLocks/>
+          </p:cNvSpPr>
+          <p:nvPr/>
+        </p:nvSpPr>
+        <p:spPr>
+          <a:xfrm>
+            <a:off x="6417390" y="4067250"/>
+            <a:ext cx="2841346" cy="1947560"/>
+          </a:xfrm>
+          <a:prstGeom prst="rect">
+            <a:avLst/>
+          </a:prstGeom>
+        </p:spPr>
+        <p:txBody>
+          <a:bodyPr vert="horz" lIns="91440" tIns="45720" rIns="91440" bIns="45720" rtlCol="0">
+            <a:normAutofit/>
+          </a:bodyPr>
+          <a:lstStyle>
+            <a:lvl1pPr marL="228600" indent="-228600" algn="l" defTabSz="914400" rtl="0" eaLnBrk="1" latinLnBrk="0" hangingPunct="1">
+              <a:lnSpc>
+                <a:spcPct val="90000"/>
+              </a:lnSpc>
+              <a:spcBef>
+                <a:spcPts val="1000"/>
+              </a:spcBef>
+              <a:buFont typeface="Arial" panose="020B0604020202020204" pitchFamily="34" charset="0"/>
+              <a:buChar char="•"/>
+              <a:defRPr sz="2800" kern="1200">
+                <a:solidFill>
+                  <a:schemeClr val="tx1"/>
+                </a:solidFill>
+                <a:latin typeface="+mn-lt"/>
+                <a:ea typeface="+mn-ea"/>
+                <a:cs typeface="+mn-cs"/>
+              </a:defRPr>
+            </a:lvl1pPr>
+            <a:lvl2pPr marL="685800" indent="-228600" algn="l" defTabSz="914400" rtl="0" eaLnBrk="1" latinLnBrk="0" hangingPunct="1">
+              <a:lnSpc>
+                <a:spcPct val="90000"/>
+              </a:lnSpc>
+              <a:spcBef>
+                <a:spcPts val="500"/>
+              </a:spcBef>
+              <a:buFont typeface="Arial" panose="020B0604020202020204" pitchFamily="34" charset="0"/>
+              <a:buChar char="•"/>
+              <a:defRPr sz="2400" kern="1200">
+                <a:solidFill>
+                  <a:schemeClr val="tx1"/>
+                </a:solidFill>
+                <a:latin typeface="+mn-lt"/>
+                <a:ea typeface="+mn-ea"/>
+                <a:cs typeface="+mn-cs"/>
+              </a:defRPr>
+            </a:lvl2pPr>
+            <a:lvl3pPr marL="1143000" indent="-228600" algn="l" defTabSz="914400" rtl="0" eaLnBrk="1" latinLnBrk="0" hangingPunct="1">
+              <a:lnSpc>
+                <a:spcPct val="90000"/>
+              </a:lnSpc>
+              <a:spcBef>
+                <a:spcPts val="500"/>
+              </a:spcBef>
+              <a:buFont typeface="Arial" panose="020B0604020202020204" pitchFamily="34" charset="0"/>
+              <a:buChar char="•"/>
+              <a:defRPr sz="2000" kern="1200">
+                <a:solidFill>
+                  <a:schemeClr val="tx1"/>
+                </a:solidFill>
+                <a:latin typeface="+mn-lt"/>
+                <a:ea typeface="+mn-ea"/>
+                <a:cs typeface="+mn-cs"/>
+              </a:defRPr>
+            </a:lvl3pPr>
+            <a:lvl4pPr marL="1600200" indent="-228600" algn="l" defTabSz="914400" rtl="0" eaLnBrk="1" latinLnBrk="0" hangingPunct="1">
+              <a:lnSpc>
+                <a:spcPct val="90000"/>
+              </a:lnSpc>
+              <a:spcBef>
+                <a:spcPts val="500"/>
+              </a:spcBef>
+              <a:buFont typeface="Arial" panose="020B0604020202020204" pitchFamily="34" charset="0"/>
+              <a:buChar char="•"/>
+              <a:defRPr sz="1800" kern="1200">
+                <a:solidFill>
+                  <a:schemeClr val="tx1"/>
+                </a:solidFill>
+                <a:latin typeface="+mn-lt"/>
+                <a:ea typeface="+mn-ea"/>
+                <a:cs typeface="+mn-cs"/>
+              </a:defRPr>
+            </a:lvl4pPr>
+            <a:lvl5pPr marL="2057400" indent="-228600" algn="l" defTabSz="914400" rtl="0" eaLnBrk="1" latinLnBrk="0" hangingPunct="1">
+              <a:lnSpc>
+                <a:spcPct val="90000"/>
+              </a:lnSpc>
+              <a:spcBef>
+                <a:spcPts val="500"/>
+              </a:spcBef>
+              <a:buFont typeface="Arial" panose="020B0604020202020204" pitchFamily="34" charset="0"/>
+              <a:buChar char="•"/>
+              <a:defRPr sz="1800" kern="1200">
+                <a:solidFill>
+                  <a:schemeClr val="tx1"/>
+                </a:solidFill>
+                <a:latin typeface="+mn-lt"/>
+                <a:ea typeface="+mn-ea"/>
+                <a:cs typeface="+mn-cs"/>
+              </a:defRPr>
+            </a:lvl5pPr>
+            <a:lvl6pPr marL="2514600" indent="-228600" algn="l" defTabSz="914400" rtl="0" eaLnBrk="1" latinLnBrk="0" hangingPunct="1">
+              <a:lnSpc>
+                <a:spcPct val="90000"/>
+              </a:lnSpc>
+              <a:spcBef>
+                <a:spcPts val="500"/>
+              </a:spcBef>
+              <a:buFont typeface="Arial" panose="020B0604020202020204" pitchFamily="34" charset="0"/>
+              <a:buChar char="•"/>
+              <a:defRPr sz="1800" kern="1200">
+                <a:solidFill>
+                  <a:schemeClr val="tx1"/>
+                </a:solidFill>
+                <a:latin typeface="+mn-lt"/>
+                <a:ea typeface="+mn-ea"/>
+                <a:cs typeface="+mn-cs"/>
+              </a:defRPr>
+            </a:lvl6pPr>
+            <a:lvl7pPr marL="2971800" indent="-228600" algn="l" defTabSz="914400" rtl="0" eaLnBrk="1" latinLnBrk="0" hangingPunct="1">
+              <a:lnSpc>
+                <a:spcPct val="90000"/>
+              </a:lnSpc>
+              <a:spcBef>
+                <a:spcPts val="500"/>
+              </a:spcBef>
+              <a:buFont typeface="Arial" panose="020B0604020202020204" pitchFamily="34" charset="0"/>
+              <a:buChar char="•"/>
+              <a:defRPr sz="1800" kern="1200">
+                <a:solidFill>
+                  <a:schemeClr val="tx1"/>
+                </a:solidFill>
+                <a:latin typeface="+mn-lt"/>
+                <a:ea typeface="+mn-ea"/>
+                <a:cs typeface="+mn-cs"/>
+              </a:defRPr>
+            </a:lvl7pPr>
+            <a:lvl8pPr marL="3429000" indent="-228600" algn="l" defTabSz="914400" rtl="0" eaLnBrk="1" latinLnBrk="0" hangingPunct="1">
+              <a:lnSpc>
+                <a:spcPct val="90000"/>
+              </a:lnSpc>
+              <a:spcBef>
+                <a:spcPts val="500"/>
+              </a:spcBef>
+              <a:buFont typeface="Arial" panose="020B0604020202020204" pitchFamily="34" charset="0"/>
+              <a:buChar char="•"/>
+              <a:defRPr sz="1800" kern="1200">
+                <a:solidFill>
+                  <a:schemeClr val="tx1"/>
+                </a:solidFill>
+                <a:latin typeface="+mn-lt"/>
+                <a:ea typeface="+mn-ea"/>
+                <a:cs typeface="+mn-cs"/>
+              </a:defRPr>
+            </a:lvl8pPr>
+            <a:lvl9pPr marL="3886200" indent="-228600" algn="l" defTabSz="914400" rtl="0" eaLnBrk="1" latinLnBrk="0" hangingPunct="1">
+              <a:lnSpc>
+                <a:spcPct val="90000"/>
+              </a:lnSpc>
+              <a:spcBef>
+                <a:spcPts val="500"/>
+              </a:spcBef>
+              <a:buFont typeface="Arial" panose="020B0604020202020204" pitchFamily="34" charset="0"/>
+              <a:buChar char="•"/>
+              <a:defRPr sz="1800" kern="1200">
+                <a:solidFill>
+                  <a:schemeClr val="tx1"/>
+                </a:solidFill>
+                <a:latin typeface="+mn-lt"/>
+                <a:ea typeface="+mn-ea"/>
+                <a:cs typeface="+mn-cs"/>
+              </a:defRPr>
+            </a:lvl9pPr>
+          </a:lstStyle>
+          <a:p>
+            <a:r>
+              <a:rPr lang="en-US" sz="1100" dirty="0"/>
+              <a:t>Screen capture illustrating all previous unit tests still pass after code changes</a:t>
+            </a:r>
+          </a:p>
+        </p:txBody>
+      </p:sp>
+      <p:pic>
+        <p:nvPicPr>
+          <p:cNvPr id="4" name="Picture 3" descr="A black background with green and white text&#10;&#10;AI-generated content may be incorrect.">
+            <a:extLst>
+              <a:ext uri="{FF2B5EF4-FFF2-40B4-BE49-F238E27FC236}">
+                <a16:creationId xmlns:a16="http://schemas.microsoft.com/office/drawing/2014/main" id="{6957B528-EE3D-0AFA-A577-BE8BEDF5A330}"/>
+              </a:ext>
+            </a:extLst>
+          </p:cNvPr>
+          <p:cNvPicPr>
+            <a:picLocks noChangeAspect="1"/>
+          </p:cNvPicPr>
+          <p:nvPr/>
+        </p:nvPicPr>
+        <p:blipFill>
+          <a:blip r:embed="rId2"/>
+          <a:stretch>
+            <a:fillRect/>
+          </a:stretch>
+        </p:blipFill>
+        <p:spPr>
+          <a:xfrm>
+            <a:off x="159512" y="2408715"/>
+            <a:ext cx="6747745" cy="443500"/>
+          </a:xfrm>
+          <a:prstGeom prst="rect">
+            <a:avLst/>
+          </a:prstGeom>
+        </p:spPr>
+      </p:pic>
+      <p:pic>
+        <p:nvPicPr>
+          <p:cNvPr id="9" name="Picture 8">
+            <a:extLst>
+              <a:ext uri="{FF2B5EF4-FFF2-40B4-BE49-F238E27FC236}">
+                <a16:creationId xmlns:a16="http://schemas.microsoft.com/office/drawing/2014/main" id="{12CFEFF9-08DC-CC86-DF02-0FE786C97599}"/>
+              </a:ext>
+            </a:extLst>
+          </p:cNvPr>
+          <p:cNvPicPr>
+            <a:picLocks noChangeAspect="1"/>
+          </p:cNvPicPr>
+          <p:nvPr/>
+        </p:nvPicPr>
+        <p:blipFill>
+          <a:blip r:embed="rId3"/>
+          <a:stretch>
+            <a:fillRect/>
+          </a:stretch>
+        </p:blipFill>
+        <p:spPr>
+          <a:xfrm>
+            <a:off x="372063" y="5450714"/>
+            <a:ext cx="5038725" cy="257175"/>
+          </a:xfrm>
+          <a:prstGeom prst="rect">
+            <a:avLst/>
+          </a:prstGeom>
+        </p:spPr>
+      </p:pic>
+      <p:pic>
+        <p:nvPicPr>
+          <p:cNvPr id="11" name="Picture 10" descr="A screen shot of a computer program&#10;&#10;AI-generated content may be incorrect.">
+            <a:extLst>
+              <a:ext uri="{FF2B5EF4-FFF2-40B4-BE49-F238E27FC236}">
+                <a16:creationId xmlns:a16="http://schemas.microsoft.com/office/drawing/2014/main" id="{CD3C0766-7149-2C88-CD62-1F01A46A3454}"/>
+              </a:ext>
+            </a:extLst>
+          </p:cNvPr>
+          <p:cNvPicPr>
+            <a:picLocks noChangeAspect="1"/>
+          </p:cNvPicPr>
+          <p:nvPr/>
+        </p:nvPicPr>
+        <p:blipFill>
+          <a:blip r:embed="rId4"/>
+          <a:stretch>
+            <a:fillRect/>
+          </a:stretch>
+        </p:blipFill>
+        <p:spPr>
+          <a:xfrm>
+            <a:off x="6584775" y="4501345"/>
+            <a:ext cx="2853324" cy="2354241"/>
+          </a:xfrm>
+          <a:prstGeom prst="rect">
+            <a:avLst/>
+          </a:prstGeom>
+        </p:spPr>
+      </p:pic>
+    </p:spTree>
+    <p:extLst>
+      <p:ext uri="{BB962C8B-B14F-4D97-AF65-F5344CB8AC3E}">
+        <p14:creationId xmlns:p14="http://schemas.microsoft.com/office/powerpoint/2010/main" val="3302336429"/>
+      </p:ext>
+    </p:extLst>
+  </p:cSld>
+  <p:clrMapOvr>
+    <a:masterClrMapping/>
+  </p:clrMapOvr>
+</p:sld>
+</file>
+
+<file path=ppt/slides/slide21.xml><?xml version="1.0" encoding="utf-8"?>
+<p:sld xmlns:a="http://schemas.openxmlformats.org/drawingml/2006/main" xmlns:r="http://schemas.openxmlformats.org/officeDocument/2006/relationships" xmlns:p="http://schemas.openxmlformats.org/presentationml/2006/main">
+  <p:cSld>
+    <p:spTree>
+      <p:nvGrpSpPr>
+        <p:cNvPr id="1" name="">
+          <a:extLst>
+            <a:ext uri="{FF2B5EF4-FFF2-40B4-BE49-F238E27FC236}">
+              <a16:creationId xmlns:a16="http://schemas.microsoft.com/office/drawing/2014/main" id="{4CE073C1-FB5D-0D6C-A5E2-0F18A718539D}"/>
+            </a:ext>
+          </a:extLst>
+        </p:cNvPr>
+        <p:cNvGrpSpPr/>
+        <p:nvPr/>
+      </p:nvGrpSpPr>
+      <p:grpSpPr>
+        <a:xfrm>
+          <a:off x="0" y="0"/>
+          <a:ext cx="0" cy="0"/>
+          <a:chOff x="0" y="0"/>
+          <a:chExt cx="0" cy="0"/>
+        </a:xfrm>
+      </p:grpSpPr>
+      <p:sp>
+        <p:nvSpPr>
+          <p:cNvPr id="2" name="Title 1">
+            <a:extLst>
+              <a:ext uri="{FF2B5EF4-FFF2-40B4-BE49-F238E27FC236}">
+                <a16:creationId xmlns:a16="http://schemas.microsoft.com/office/drawing/2014/main" id="{1922E51A-7458-45F0-7F01-B984926D57B7}"/>
+              </a:ext>
+            </a:extLst>
+          </p:cNvPr>
+          <p:cNvSpPr>
+            <a:spLocks noGrp="1"/>
+          </p:cNvSpPr>
+          <p:nvPr>
+            <p:ph type="title"/>
+          </p:nvPr>
+        </p:nvSpPr>
+        <p:spPr/>
+        <p:txBody>
+          <a:bodyPr>
+            <a:normAutofit/>
+          </a:bodyPr>
+          <a:lstStyle/>
+          <a:p>
+            <a:r>
+              <a:rPr lang="en-US" sz="1600"/>
+              <a:t>Test ID: T-DEL-ERR1</a:t>
+            </a:r>
+            <a:endParaRPr lang="en-US"/>
+          </a:p>
+          <a:p>
+            <a:r>
+              <a:rPr lang="en-US" sz="1600"/>
+              <a:t>Statement of unit test: Verify that calling delete on an empty stack returns a stack underflow error.</a:t>
+            </a:r>
+            <a:endParaRPr lang="en-US"/>
+          </a:p>
+          <a:p>
+            <a:r>
+              <a:rPr lang="en-US" sz="1600"/>
+              <a:t>Expected results: Error: stack underflow</a:t>
+            </a:r>
+            <a:endParaRPr lang="en-US"/>
+          </a:p>
+        </p:txBody>
+      </p:sp>
+      <p:sp>
+        <p:nvSpPr>
+          <p:cNvPr id="3" name="Content Placeholder 2">
+            <a:extLst>
+              <a:ext uri="{FF2B5EF4-FFF2-40B4-BE49-F238E27FC236}">
+                <a16:creationId xmlns:a16="http://schemas.microsoft.com/office/drawing/2014/main" id="{E61ED1FE-015C-52D4-1332-B9663C624302}"/>
+              </a:ext>
+            </a:extLst>
+          </p:cNvPr>
+          <p:cNvSpPr>
+            <a:spLocks noGrp="1"/>
+          </p:cNvSpPr>
+          <p:nvPr>
+            <p:ph idx="1"/>
+          </p:nvPr>
+        </p:nvSpPr>
+        <p:spPr>
+          <a:xfrm>
+            <a:off x="838200" y="1825625"/>
+            <a:ext cx="2841346" cy="4351338"/>
+          </a:xfrm>
+        </p:spPr>
+        <p:txBody>
+          <a:bodyPr>
+            <a:normAutofit/>
+          </a:bodyPr>
+          <a:lstStyle/>
+          <a:p>
+            <a:r>
+              <a:rPr lang="en-US" sz="1100" dirty="0"/>
+              <a:t>Screen capture of unit test code:</a:t>
+            </a:r>
+          </a:p>
+        </p:txBody>
+      </p:sp>
+      <p:sp>
+        <p:nvSpPr>
+          <p:cNvPr id="4" name="Content Placeholder 2">
+            <a:extLst>
+              <a:ext uri="{FF2B5EF4-FFF2-40B4-BE49-F238E27FC236}">
+                <a16:creationId xmlns:a16="http://schemas.microsoft.com/office/drawing/2014/main" id="{F6341F89-3DA2-C87E-801B-E7EDA200A8BB}"/>
+              </a:ext>
+            </a:extLst>
+          </p:cNvPr>
+          <p:cNvSpPr txBox="1">
+            <a:spLocks/>
+          </p:cNvSpPr>
+          <p:nvPr/>
+        </p:nvSpPr>
+        <p:spPr>
+          <a:xfrm>
+            <a:off x="4993579" y="1825625"/>
+            <a:ext cx="2841346" cy="4351338"/>
+          </a:xfrm>
+          <a:prstGeom prst="rect">
+            <a:avLst/>
+          </a:prstGeom>
+        </p:spPr>
+        <p:txBody>
+          <a:bodyPr vert="horz" lIns="91440" tIns="45720" rIns="91440" bIns="45720" rtlCol="0">
+            <a:normAutofit/>
+          </a:bodyPr>
+          <a:lstStyle>
+            <a:lvl1pPr marL="228600" indent="-228600" algn="l" defTabSz="914400" rtl="0" eaLnBrk="1" latinLnBrk="0" hangingPunct="1">
+              <a:lnSpc>
+                <a:spcPct val="90000"/>
+              </a:lnSpc>
+              <a:spcBef>
+                <a:spcPts val="1000"/>
+              </a:spcBef>
+              <a:buFont typeface="Arial" panose="020B0604020202020204" pitchFamily="34" charset="0"/>
+              <a:buChar char="•"/>
+              <a:defRPr sz="2800" kern="1200">
+                <a:solidFill>
+                  <a:schemeClr val="tx1"/>
+                </a:solidFill>
+                <a:latin typeface="+mn-lt"/>
+                <a:ea typeface="+mn-ea"/>
+                <a:cs typeface="+mn-cs"/>
+              </a:defRPr>
+            </a:lvl1pPr>
+            <a:lvl2pPr marL="685800" indent="-228600" algn="l" defTabSz="914400" rtl="0" eaLnBrk="1" latinLnBrk="0" hangingPunct="1">
+              <a:lnSpc>
+                <a:spcPct val="90000"/>
+              </a:lnSpc>
+              <a:spcBef>
+                <a:spcPts val="500"/>
+              </a:spcBef>
+              <a:buFont typeface="Arial" panose="020B0604020202020204" pitchFamily="34" charset="0"/>
+              <a:buChar char="•"/>
+              <a:defRPr sz="2400" kern="1200">
+                <a:solidFill>
+                  <a:schemeClr val="tx1"/>
+                </a:solidFill>
+                <a:latin typeface="+mn-lt"/>
+                <a:ea typeface="+mn-ea"/>
+                <a:cs typeface="+mn-cs"/>
+              </a:defRPr>
+            </a:lvl2pPr>
+            <a:lvl3pPr marL="1143000" indent="-228600" algn="l" defTabSz="914400" rtl="0" eaLnBrk="1" latinLnBrk="0" hangingPunct="1">
+              <a:lnSpc>
+                <a:spcPct val="90000"/>
+              </a:lnSpc>
+              <a:spcBef>
+                <a:spcPts val="500"/>
+              </a:spcBef>
+              <a:buFont typeface="Arial" panose="020B0604020202020204" pitchFamily="34" charset="0"/>
+              <a:buChar char="•"/>
+              <a:defRPr sz="2000" kern="1200">
+                <a:solidFill>
+                  <a:schemeClr val="tx1"/>
+                </a:solidFill>
+                <a:latin typeface="+mn-lt"/>
+                <a:ea typeface="+mn-ea"/>
+                <a:cs typeface="+mn-cs"/>
+              </a:defRPr>
+            </a:lvl3pPr>
+            <a:lvl4pPr marL="1600200" indent="-228600" algn="l" defTabSz="914400" rtl="0" eaLnBrk="1" latinLnBrk="0" hangingPunct="1">
+              <a:lnSpc>
+                <a:spcPct val="90000"/>
+              </a:lnSpc>
+              <a:spcBef>
+                <a:spcPts val="500"/>
+              </a:spcBef>
+              <a:buFont typeface="Arial" panose="020B0604020202020204" pitchFamily="34" charset="0"/>
+              <a:buChar char="•"/>
+              <a:defRPr sz="1800" kern="1200">
+                <a:solidFill>
+                  <a:schemeClr val="tx1"/>
+                </a:solidFill>
+                <a:latin typeface="+mn-lt"/>
+                <a:ea typeface="+mn-ea"/>
+                <a:cs typeface="+mn-cs"/>
+              </a:defRPr>
+            </a:lvl4pPr>
+            <a:lvl5pPr marL="2057400" indent="-228600" algn="l" defTabSz="914400" rtl="0" eaLnBrk="1" latinLnBrk="0" hangingPunct="1">
+              <a:lnSpc>
+                <a:spcPct val="90000"/>
+              </a:lnSpc>
+              <a:spcBef>
+                <a:spcPts val="500"/>
+              </a:spcBef>
+              <a:buFont typeface="Arial" panose="020B0604020202020204" pitchFamily="34" charset="0"/>
+              <a:buChar char="•"/>
+              <a:defRPr sz="1800" kern="1200">
+                <a:solidFill>
+                  <a:schemeClr val="tx1"/>
+                </a:solidFill>
+                <a:latin typeface="+mn-lt"/>
+                <a:ea typeface="+mn-ea"/>
+                <a:cs typeface="+mn-cs"/>
+              </a:defRPr>
+            </a:lvl5pPr>
+            <a:lvl6pPr marL="2514600" indent="-228600" algn="l" defTabSz="914400" rtl="0" eaLnBrk="1" latinLnBrk="0" hangingPunct="1">
+              <a:lnSpc>
+                <a:spcPct val="90000"/>
+              </a:lnSpc>
+              <a:spcBef>
+                <a:spcPts val="500"/>
+              </a:spcBef>
+              <a:buFont typeface="Arial" panose="020B0604020202020204" pitchFamily="34" charset="0"/>
+              <a:buChar char="•"/>
+              <a:defRPr sz="1800" kern="1200">
+                <a:solidFill>
+                  <a:schemeClr val="tx1"/>
+                </a:solidFill>
+                <a:latin typeface="+mn-lt"/>
+                <a:ea typeface="+mn-ea"/>
+                <a:cs typeface="+mn-cs"/>
+              </a:defRPr>
+            </a:lvl6pPr>
+            <a:lvl7pPr marL="2971800" indent="-228600" algn="l" defTabSz="914400" rtl="0" eaLnBrk="1" latinLnBrk="0" hangingPunct="1">
+              <a:lnSpc>
+                <a:spcPct val="90000"/>
+              </a:lnSpc>
+              <a:spcBef>
+                <a:spcPts val="500"/>
+              </a:spcBef>
+              <a:buFont typeface="Arial" panose="020B0604020202020204" pitchFamily="34" charset="0"/>
+              <a:buChar char="•"/>
+              <a:defRPr sz="1800" kern="1200">
+                <a:solidFill>
+                  <a:schemeClr val="tx1"/>
+                </a:solidFill>
+                <a:latin typeface="+mn-lt"/>
+                <a:ea typeface="+mn-ea"/>
+                <a:cs typeface="+mn-cs"/>
+              </a:defRPr>
+            </a:lvl7pPr>
+            <a:lvl8pPr marL="3429000" indent="-228600" algn="l" defTabSz="914400" rtl="0" eaLnBrk="1" latinLnBrk="0" hangingPunct="1">
+              <a:lnSpc>
+                <a:spcPct val="90000"/>
+              </a:lnSpc>
+              <a:spcBef>
+                <a:spcPts val="500"/>
+              </a:spcBef>
+              <a:buFont typeface="Arial" panose="020B0604020202020204" pitchFamily="34" charset="0"/>
+              <a:buChar char="•"/>
+              <a:defRPr sz="1800" kern="1200">
+                <a:solidFill>
+                  <a:schemeClr val="tx1"/>
+                </a:solidFill>
+                <a:latin typeface="+mn-lt"/>
+                <a:ea typeface="+mn-ea"/>
+                <a:cs typeface="+mn-cs"/>
+              </a:defRPr>
+            </a:lvl8pPr>
+            <a:lvl9pPr marL="3886200" indent="-228600" algn="l" defTabSz="914400" rtl="0" eaLnBrk="1" latinLnBrk="0" hangingPunct="1">
+              <a:lnSpc>
+                <a:spcPct val="90000"/>
+              </a:lnSpc>
+              <a:spcBef>
+                <a:spcPts val="500"/>
+              </a:spcBef>
+              <a:buFont typeface="Arial" panose="020B0604020202020204" pitchFamily="34" charset="0"/>
+              <a:buChar char="•"/>
+              <a:defRPr sz="1800" kern="1200">
+                <a:solidFill>
+                  <a:schemeClr val="tx1"/>
+                </a:solidFill>
+                <a:latin typeface="+mn-lt"/>
+                <a:ea typeface="+mn-ea"/>
+                <a:cs typeface="+mn-cs"/>
+              </a:defRPr>
+            </a:lvl9pPr>
+          </a:lstStyle>
+          <a:p>
+            <a:r>
+              <a:rPr lang="en-US" sz="1100" dirty="0"/>
+              <a:t>Screen capture demonstrating unit test failing:</a:t>
+            </a:r>
+          </a:p>
+        </p:txBody>
+      </p:sp>
+      <p:sp>
+        <p:nvSpPr>
+          <p:cNvPr id="7" name="Content Placeholder 2">
+            <a:extLst>
+              <a:ext uri="{FF2B5EF4-FFF2-40B4-BE49-F238E27FC236}">
+                <a16:creationId xmlns:a16="http://schemas.microsoft.com/office/drawing/2014/main" id="{30EC0798-2CF0-AD46-9AE6-64976F6CA347}"/>
+              </a:ext>
+            </a:extLst>
+          </p:cNvPr>
+          <p:cNvSpPr txBox="1">
+            <a:spLocks/>
+          </p:cNvSpPr>
+          <p:nvPr/>
+        </p:nvSpPr>
+        <p:spPr>
+          <a:xfrm>
+            <a:off x="8874296" y="1825625"/>
+            <a:ext cx="2841346" cy="4351338"/>
+          </a:xfrm>
+          <a:prstGeom prst="rect">
+            <a:avLst/>
+          </a:prstGeom>
+        </p:spPr>
+        <p:txBody>
+          <a:bodyPr vert="horz" lIns="91440" tIns="45720" rIns="91440" bIns="45720" rtlCol="0">
+            <a:normAutofit/>
+          </a:bodyPr>
+          <a:lstStyle>
+            <a:lvl1pPr marL="228600" indent="-228600" algn="l" defTabSz="914400" rtl="0" eaLnBrk="1" latinLnBrk="0" hangingPunct="1">
+              <a:lnSpc>
+                <a:spcPct val="90000"/>
+              </a:lnSpc>
+              <a:spcBef>
+                <a:spcPts val="1000"/>
+              </a:spcBef>
+              <a:buFont typeface="Arial" panose="020B0604020202020204" pitchFamily="34" charset="0"/>
+              <a:buChar char="•"/>
+              <a:defRPr sz="2800" kern="1200">
+                <a:solidFill>
+                  <a:schemeClr val="tx1"/>
+                </a:solidFill>
+                <a:latin typeface="+mn-lt"/>
+                <a:ea typeface="+mn-ea"/>
+                <a:cs typeface="+mn-cs"/>
+              </a:defRPr>
+            </a:lvl1pPr>
+            <a:lvl2pPr marL="685800" indent="-228600" algn="l" defTabSz="914400" rtl="0" eaLnBrk="1" latinLnBrk="0" hangingPunct="1">
+              <a:lnSpc>
+                <a:spcPct val="90000"/>
+              </a:lnSpc>
+              <a:spcBef>
+                <a:spcPts val="500"/>
+              </a:spcBef>
+              <a:buFont typeface="Arial" panose="020B0604020202020204" pitchFamily="34" charset="0"/>
+              <a:buChar char="•"/>
+              <a:defRPr sz="2400" kern="1200">
+                <a:solidFill>
+                  <a:schemeClr val="tx1"/>
+                </a:solidFill>
+                <a:latin typeface="+mn-lt"/>
+                <a:ea typeface="+mn-ea"/>
+                <a:cs typeface="+mn-cs"/>
+              </a:defRPr>
+            </a:lvl2pPr>
+            <a:lvl3pPr marL="1143000" indent="-228600" algn="l" defTabSz="914400" rtl="0" eaLnBrk="1" latinLnBrk="0" hangingPunct="1">
+              <a:lnSpc>
+                <a:spcPct val="90000"/>
+              </a:lnSpc>
+              <a:spcBef>
+                <a:spcPts val="500"/>
+              </a:spcBef>
+              <a:buFont typeface="Arial" panose="020B0604020202020204" pitchFamily="34" charset="0"/>
+              <a:buChar char="•"/>
+              <a:defRPr sz="2000" kern="1200">
+                <a:solidFill>
+                  <a:schemeClr val="tx1"/>
+                </a:solidFill>
+                <a:latin typeface="+mn-lt"/>
+                <a:ea typeface="+mn-ea"/>
+                <a:cs typeface="+mn-cs"/>
+              </a:defRPr>
+            </a:lvl3pPr>
+            <a:lvl4pPr marL="1600200" indent="-228600" algn="l" defTabSz="914400" rtl="0" eaLnBrk="1" latinLnBrk="0" hangingPunct="1">
+              <a:lnSpc>
+                <a:spcPct val="90000"/>
+              </a:lnSpc>
+              <a:spcBef>
+                <a:spcPts val="500"/>
+              </a:spcBef>
+              <a:buFont typeface="Arial" panose="020B0604020202020204" pitchFamily="34" charset="0"/>
+              <a:buChar char="•"/>
+              <a:defRPr sz="1800" kern="1200">
+                <a:solidFill>
+                  <a:schemeClr val="tx1"/>
+                </a:solidFill>
+                <a:latin typeface="+mn-lt"/>
+                <a:ea typeface="+mn-ea"/>
+                <a:cs typeface="+mn-cs"/>
+              </a:defRPr>
+            </a:lvl4pPr>
+            <a:lvl5pPr marL="2057400" indent="-228600" algn="l" defTabSz="914400" rtl="0" eaLnBrk="1" latinLnBrk="0" hangingPunct="1">
+              <a:lnSpc>
+                <a:spcPct val="90000"/>
+              </a:lnSpc>
+              <a:spcBef>
+                <a:spcPts val="500"/>
+              </a:spcBef>
+              <a:buFont typeface="Arial" panose="020B0604020202020204" pitchFamily="34" charset="0"/>
+              <a:buChar char="•"/>
+              <a:defRPr sz="1800" kern="1200">
+                <a:solidFill>
+                  <a:schemeClr val="tx1"/>
+                </a:solidFill>
+                <a:latin typeface="+mn-lt"/>
+                <a:ea typeface="+mn-ea"/>
+                <a:cs typeface="+mn-cs"/>
+              </a:defRPr>
+            </a:lvl5pPr>
+            <a:lvl6pPr marL="2514600" indent="-228600" algn="l" defTabSz="914400" rtl="0" eaLnBrk="1" latinLnBrk="0" hangingPunct="1">
+              <a:lnSpc>
+                <a:spcPct val="90000"/>
+              </a:lnSpc>
+              <a:spcBef>
+                <a:spcPts val="500"/>
+              </a:spcBef>
+              <a:buFont typeface="Arial" panose="020B0604020202020204" pitchFamily="34" charset="0"/>
+              <a:buChar char="•"/>
+              <a:defRPr sz="1800" kern="1200">
+                <a:solidFill>
+                  <a:schemeClr val="tx1"/>
+                </a:solidFill>
+                <a:latin typeface="+mn-lt"/>
+                <a:ea typeface="+mn-ea"/>
+                <a:cs typeface="+mn-cs"/>
+              </a:defRPr>
+            </a:lvl6pPr>
+            <a:lvl7pPr marL="2971800" indent="-228600" algn="l" defTabSz="914400" rtl="0" eaLnBrk="1" latinLnBrk="0" hangingPunct="1">
+              <a:lnSpc>
+                <a:spcPct val="90000"/>
+              </a:lnSpc>
+              <a:spcBef>
+                <a:spcPts val="500"/>
+              </a:spcBef>
+              <a:buFont typeface="Arial" panose="020B0604020202020204" pitchFamily="34" charset="0"/>
+              <a:buChar char="•"/>
+              <a:defRPr sz="1800" kern="1200">
+                <a:solidFill>
+                  <a:schemeClr val="tx1"/>
+                </a:solidFill>
+                <a:latin typeface="+mn-lt"/>
+                <a:ea typeface="+mn-ea"/>
+                <a:cs typeface="+mn-cs"/>
+              </a:defRPr>
+            </a:lvl7pPr>
+            <a:lvl8pPr marL="3429000" indent="-228600" algn="l" defTabSz="914400" rtl="0" eaLnBrk="1" latinLnBrk="0" hangingPunct="1">
+              <a:lnSpc>
+                <a:spcPct val="90000"/>
+              </a:lnSpc>
+              <a:spcBef>
+                <a:spcPts val="500"/>
+              </a:spcBef>
+              <a:buFont typeface="Arial" panose="020B0604020202020204" pitchFamily="34" charset="0"/>
+              <a:buChar char="•"/>
+              <a:defRPr sz="1800" kern="1200">
+                <a:solidFill>
+                  <a:schemeClr val="tx1"/>
+                </a:solidFill>
+                <a:latin typeface="+mn-lt"/>
+                <a:ea typeface="+mn-ea"/>
+                <a:cs typeface="+mn-cs"/>
+              </a:defRPr>
+            </a:lvl8pPr>
+            <a:lvl9pPr marL="3886200" indent="-228600" algn="l" defTabSz="914400" rtl="0" eaLnBrk="1" latinLnBrk="0" hangingPunct="1">
+              <a:lnSpc>
+                <a:spcPct val="90000"/>
+              </a:lnSpc>
+              <a:spcBef>
+                <a:spcPts val="500"/>
+              </a:spcBef>
+              <a:buFont typeface="Arial" panose="020B0604020202020204" pitchFamily="34" charset="0"/>
+              <a:buChar char="•"/>
+              <a:defRPr sz="1800" kern="1200">
+                <a:solidFill>
+                  <a:schemeClr val="tx1"/>
+                </a:solidFill>
+                <a:latin typeface="+mn-lt"/>
+                <a:ea typeface="+mn-ea"/>
+                <a:cs typeface="+mn-cs"/>
+              </a:defRPr>
+            </a:lvl9pPr>
+          </a:lstStyle>
+          <a:p>
+            <a:r>
+              <a:rPr lang="en-US" sz="1100" dirty="0"/>
+              <a:t>Screen capture of code changes highlighted</a:t>
+            </a:r>
+          </a:p>
+        </p:txBody>
+      </p:sp>
+      <p:sp>
+        <p:nvSpPr>
+          <p:cNvPr id="10" name="Content Placeholder 2">
+            <a:extLst>
+              <a:ext uri="{FF2B5EF4-FFF2-40B4-BE49-F238E27FC236}">
+                <a16:creationId xmlns:a16="http://schemas.microsoft.com/office/drawing/2014/main" id="{FFB85BA5-1306-6069-D202-0CACA56B6337}"/>
+              </a:ext>
+            </a:extLst>
+          </p:cNvPr>
+          <p:cNvSpPr txBox="1">
+            <a:spLocks/>
+          </p:cNvSpPr>
+          <p:nvPr/>
+        </p:nvSpPr>
+        <p:spPr>
+          <a:xfrm>
+            <a:off x="879958" y="4067250"/>
+            <a:ext cx="2841346" cy="1947559"/>
+          </a:xfrm>
+          <a:prstGeom prst="rect">
+            <a:avLst/>
+          </a:prstGeom>
+        </p:spPr>
+        <p:txBody>
+          <a:bodyPr vert="horz" lIns="91440" tIns="45720" rIns="91440" bIns="45720" rtlCol="0">
+            <a:normAutofit/>
+          </a:bodyPr>
+          <a:lstStyle>
+            <a:lvl1pPr marL="228600" indent="-228600" algn="l" defTabSz="914400" rtl="0" eaLnBrk="1" latinLnBrk="0" hangingPunct="1">
+              <a:lnSpc>
+                <a:spcPct val="90000"/>
+              </a:lnSpc>
+              <a:spcBef>
+                <a:spcPts val="1000"/>
+              </a:spcBef>
+              <a:buFont typeface="Arial" panose="020B0604020202020204" pitchFamily="34" charset="0"/>
+              <a:buChar char="•"/>
+              <a:defRPr sz="2800" kern="1200">
+                <a:solidFill>
+                  <a:schemeClr val="tx1"/>
+                </a:solidFill>
+                <a:latin typeface="+mn-lt"/>
+                <a:ea typeface="+mn-ea"/>
+                <a:cs typeface="+mn-cs"/>
+              </a:defRPr>
+            </a:lvl1pPr>
+            <a:lvl2pPr marL="685800" indent="-228600" algn="l" defTabSz="914400" rtl="0" eaLnBrk="1" latinLnBrk="0" hangingPunct="1">
+              <a:lnSpc>
+                <a:spcPct val="90000"/>
+              </a:lnSpc>
+              <a:spcBef>
+                <a:spcPts val="500"/>
+              </a:spcBef>
+              <a:buFont typeface="Arial" panose="020B0604020202020204" pitchFamily="34" charset="0"/>
+              <a:buChar char="•"/>
+              <a:defRPr sz="2400" kern="1200">
+                <a:solidFill>
+                  <a:schemeClr val="tx1"/>
+                </a:solidFill>
+                <a:latin typeface="+mn-lt"/>
+                <a:ea typeface="+mn-ea"/>
+                <a:cs typeface="+mn-cs"/>
+              </a:defRPr>
+            </a:lvl2pPr>
+            <a:lvl3pPr marL="1143000" indent="-228600" algn="l" defTabSz="914400" rtl="0" eaLnBrk="1" latinLnBrk="0" hangingPunct="1">
+              <a:lnSpc>
+                <a:spcPct val="90000"/>
+              </a:lnSpc>
+              <a:spcBef>
+                <a:spcPts val="500"/>
+              </a:spcBef>
+              <a:buFont typeface="Arial" panose="020B0604020202020204" pitchFamily="34" charset="0"/>
+              <a:buChar char="•"/>
+              <a:defRPr sz="2000" kern="1200">
+                <a:solidFill>
+                  <a:schemeClr val="tx1"/>
+                </a:solidFill>
+                <a:latin typeface="+mn-lt"/>
+                <a:ea typeface="+mn-ea"/>
+                <a:cs typeface="+mn-cs"/>
+              </a:defRPr>
+            </a:lvl3pPr>
+            <a:lvl4pPr marL="1600200" indent="-228600" algn="l" defTabSz="914400" rtl="0" eaLnBrk="1" latinLnBrk="0" hangingPunct="1">
+              <a:lnSpc>
+                <a:spcPct val="90000"/>
+              </a:lnSpc>
+              <a:spcBef>
+                <a:spcPts val="500"/>
+              </a:spcBef>
+              <a:buFont typeface="Arial" panose="020B0604020202020204" pitchFamily="34" charset="0"/>
+              <a:buChar char="•"/>
+              <a:defRPr sz="1800" kern="1200">
+                <a:solidFill>
+                  <a:schemeClr val="tx1"/>
+                </a:solidFill>
+                <a:latin typeface="+mn-lt"/>
+                <a:ea typeface="+mn-ea"/>
+                <a:cs typeface="+mn-cs"/>
+              </a:defRPr>
+            </a:lvl4pPr>
+            <a:lvl5pPr marL="2057400" indent="-228600" algn="l" defTabSz="914400" rtl="0" eaLnBrk="1" latinLnBrk="0" hangingPunct="1">
+              <a:lnSpc>
+                <a:spcPct val="90000"/>
+              </a:lnSpc>
+              <a:spcBef>
+                <a:spcPts val="500"/>
+              </a:spcBef>
+              <a:buFont typeface="Arial" panose="020B0604020202020204" pitchFamily="34" charset="0"/>
+              <a:buChar char="•"/>
+              <a:defRPr sz="1800" kern="1200">
+                <a:solidFill>
+                  <a:schemeClr val="tx1"/>
+                </a:solidFill>
+                <a:latin typeface="+mn-lt"/>
+                <a:ea typeface="+mn-ea"/>
+                <a:cs typeface="+mn-cs"/>
+              </a:defRPr>
+            </a:lvl5pPr>
+            <a:lvl6pPr marL="2514600" indent="-228600" algn="l" defTabSz="914400" rtl="0" eaLnBrk="1" latinLnBrk="0" hangingPunct="1">
+              <a:lnSpc>
+                <a:spcPct val="90000"/>
+              </a:lnSpc>
+              <a:spcBef>
+                <a:spcPts val="500"/>
+              </a:spcBef>
+              <a:buFont typeface="Arial" panose="020B0604020202020204" pitchFamily="34" charset="0"/>
+              <a:buChar char="•"/>
+              <a:defRPr sz="1800" kern="1200">
+                <a:solidFill>
+                  <a:schemeClr val="tx1"/>
+                </a:solidFill>
+                <a:latin typeface="+mn-lt"/>
+                <a:ea typeface="+mn-ea"/>
+                <a:cs typeface="+mn-cs"/>
+              </a:defRPr>
+            </a:lvl6pPr>
+            <a:lvl7pPr marL="2971800" indent="-228600" algn="l" defTabSz="914400" rtl="0" eaLnBrk="1" latinLnBrk="0" hangingPunct="1">
+              <a:lnSpc>
+                <a:spcPct val="90000"/>
+              </a:lnSpc>
+              <a:spcBef>
+                <a:spcPts val="500"/>
+              </a:spcBef>
+              <a:buFont typeface="Arial" panose="020B0604020202020204" pitchFamily="34" charset="0"/>
+              <a:buChar char="•"/>
+              <a:defRPr sz="1800" kern="1200">
+                <a:solidFill>
+                  <a:schemeClr val="tx1"/>
+                </a:solidFill>
+                <a:latin typeface="+mn-lt"/>
+                <a:ea typeface="+mn-ea"/>
+                <a:cs typeface="+mn-cs"/>
+              </a:defRPr>
+            </a:lvl7pPr>
+            <a:lvl8pPr marL="3429000" indent="-228600" algn="l" defTabSz="914400" rtl="0" eaLnBrk="1" latinLnBrk="0" hangingPunct="1">
+              <a:lnSpc>
+                <a:spcPct val="90000"/>
+              </a:lnSpc>
+              <a:spcBef>
+                <a:spcPts val="500"/>
+              </a:spcBef>
+              <a:buFont typeface="Arial" panose="020B0604020202020204" pitchFamily="34" charset="0"/>
+              <a:buChar char="•"/>
+              <a:defRPr sz="1800" kern="1200">
+                <a:solidFill>
+                  <a:schemeClr val="tx1"/>
+                </a:solidFill>
+                <a:latin typeface="+mn-lt"/>
+                <a:ea typeface="+mn-ea"/>
+                <a:cs typeface="+mn-cs"/>
+              </a:defRPr>
+            </a:lvl8pPr>
+            <a:lvl9pPr marL="3886200" indent="-228600" algn="l" defTabSz="914400" rtl="0" eaLnBrk="1" latinLnBrk="0" hangingPunct="1">
+              <a:lnSpc>
+                <a:spcPct val="90000"/>
+              </a:lnSpc>
+              <a:spcBef>
+                <a:spcPts val="500"/>
+              </a:spcBef>
+              <a:buFont typeface="Arial" panose="020B0604020202020204" pitchFamily="34" charset="0"/>
+              <a:buChar char="•"/>
+              <a:defRPr sz="1800" kern="1200">
+                <a:solidFill>
+                  <a:schemeClr val="tx1"/>
+                </a:solidFill>
+                <a:latin typeface="+mn-lt"/>
+                <a:ea typeface="+mn-ea"/>
+                <a:cs typeface="+mn-cs"/>
+              </a:defRPr>
+            </a:lvl9pPr>
+          </a:lstStyle>
+          <a:p>
+            <a:r>
+              <a:rPr lang="en-US" sz="1100" dirty="0"/>
+              <a:t>Screen capture demonstrating unit test passing</a:t>
+            </a:r>
+          </a:p>
+        </p:txBody>
+      </p:sp>
+      <p:sp>
+        <p:nvSpPr>
+          <p:cNvPr id="12" name="Content Placeholder 2">
+            <a:extLst>
+              <a:ext uri="{FF2B5EF4-FFF2-40B4-BE49-F238E27FC236}">
+                <a16:creationId xmlns:a16="http://schemas.microsoft.com/office/drawing/2014/main" id="{E5216403-E5FF-D666-FA86-29FE7850C05A}"/>
+              </a:ext>
+            </a:extLst>
+          </p:cNvPr>
+          <p:cNvSpPr txBox="1">
+            <a:spLocks/>
+          </p:cNvSpPr>
+          <p:nvPr/>
+        </p:nvSpPr>
+        <p:spPr>
+          <a:xfrm>
+            <a:off x="6417390" y="4067250"/>
+            <a:ext cx="2841346" cy="1947560"/>
+          </a:xfrm>
+          <a:prstGeom prst="rect">
+            <a:avLst/>
+          </a:prstGeom>
+        </p:spPr>
+        <p:txBody>
+          <a:bodyPr vert="horz" lIns="91440" tIns="45720" rIns="91440" bIns="45720" rtlCol="0">
+            <a:normAutofit/>
+          </a:bodyPr>
+          <a:lstStyle>
+            <a:lvl1pPr marL="228600" indent="-228600" algn="l" defTabSz="914400" rtl="0" eaLnBrk="1" latinLnBrk="0" hangingPunct="1">
+              <a:lnSpc>
+                <a:spcPct val="90000"/>
+              </a:lnSpc>
+              <a:spcBef>
+                <a:spcPts val="1000"/>
+              </a:spcBef>
+              <a:buFont typeface="Arial" panose="020B0604020202020204" pitchFamily="34" charset="0"/>
+              <a:buChar char="•"/>
+              <a:defRPr sz="2800" kern="1200">
+                <a:solidFill>
+                  <a:schemeClr val="tx1"/>
+                </a:solidFill>
+                <a:latin typeface="+mn-lt"/>
+                <a:ea typeface="+mn-ea"/>
+                <a:cs typeface="+mn-cs"/>
+              </a:defRPr>
+            </a:lvl1pPr>
+            <a:lvl2pPr marL="685800" indent="-228600" algn="l" defTabSz="914400" rtl="0" eaLnBrk="1" latinLnBrk="0" hangingPunct="1">
+              <a:lnSpc>
+                <a:spcPct val="90000"/>
+              </a:lnSpc>
+              <a:spcBef>
+                <a:spcPts val="500"/>
+              </a:spcBef>
+              <a:buFont typeface="Arial" panose="020B0604020202020204" pitchFamily="34" charset="0"/>
+              <a:buChar char="•"/>
+              <a:defRPr sz="2400" kern="1200">
+                <a:solidFill>
+                  <a:schemeClr val="tx1"/>
+                </a:solidFill>
+                <a:latin typeface="+mn-lt"/>
+                <a:ea typeface="+mn-ea"/>
+                <a:cs typeface="+mn-cs"/>
+              </a:defRPr>
+            </a:lvl2pPr>
+            <a:lvl3pPr marL="1143000" indent="-228600" algn="l" defTabSz="914400" rtl="0" eaLnBrk="1" latinLnBrk="0" hangingPunct="1">
+              <a:lnSpc>
+                <a:spcPct val="90000"/>
+              </a:lnSpc>
+              <a:spcBef>
+                <a:spcPts val="500"/>
+              </a:spcBef>
+              <a:buFont typeface="Arial" panose="020B0604020202020204" pitchFamily="34" charset="0"/>
+              <a:buChar char="•"/>
+              <a:defRPr sz="2000" kern="1200">
+                <a:solidFill>
+                  <a:schemeClr val="tx1"/>
+                </a:solidFill>
+                <a:latin typeface="+mn-lt"/>
+                <a:ea typeface="+mn-ea"/>
+                <a:cs typeface="+mn-cs"/>
+              </a:defRPr>
+            </a:lvl3pPr>
+            <a:lvl4pPr marL="1600200" indent="-228600" algn="l" defTabSz="914400" rtl="0" eaLnBrk="1" latinLnBrk="0" hangingPunct="1">
+              <a:lnSpc>
+                <a:spcPct val="90000"/>
+              </a:lnSpc>
+              <a:spcBef>
+                <a:spcPts val="500"/>
+              </a:spcBef>
+              <a:buFont typeface="Arial" panose="020B0604020202020204" pitchFamily="34" charset="0"/>
+              <a:buChar char="•"/>
+              <a:defRPr sz="1800" kern="1200">
+                <a:solidFill>
+                  <a:schemeClr val="tx1"/>
+                </a:solidFill>
+                <a:latin typeface="+mn-lt"/>
+                <a:ea typeface="+mn-ea"/>
+                <a:cs typeface="+mn-cs"/>
+              </a:defRPr>
+            </a:lvl4pPr>
+            <a:lvl5pPr marL="2057400" indent="-228600" algn="l" defTabSz="914400" rtl="0" eaLnBrk="1" latinLnBrk="0" hangingPunct="1">
+              <a:lnSpc>
+                <a:spcPct val="90000"/>
+              </a:lnSpc>
+              <a:spcBef>
+                <a:spcPts val="500"/>
+              </a:spcBef>
+              <a:buFont typeface="Arial" panose="020B0604020202020204" pitchFamily="34" charset="0"/>
+              <a:buChar char="•"/>
+              <a:defRPr sz="1800" kern="1200">
+                <a:solidFill>
+                  <a:schemeClr val="tx1"/>
+                </a:solidFill>
+                <a:latin typeface="+mn-lt"/>
+                <a:ea typeface="+mn-ea"/>
+                <a:cs typeface="+mn-cs"/>
+              </a:defRPr>
+            </a:lvl5pPr>
+            <a:lvl6pPr marL="2514600" indent="-228600" algn="l" defTabSz="914400" rtl="0" eaLnBrk="1" latinLnBrk="0" hangingPunct="1">
+              <a:lnSpc>
+                <a:spcPct val="90000"/>
+              </a:lnSpc>
+              <a:spcBef>
+                <a:spcPts val="500"/>
+              </a:spcBef>
+              <a:buFont typeface="Arial" panose="020B0604020202020204" pitchFamily="34" charset="0"/>
+              <a:buChar char="•"/>
+              <a:defRPr sz="1800" kern="1200">
+                <a:solidFill>
+                  <a:schemeClr val="tx1"/>
+                </a:solidFill>
+                <a:latin typeface="+mn-lt"/>
+                <a:ea typeface="+mn-ea"/>
+                <a:cs typeface="+mn-cs"/>
+              </a:defRPr>
+            </a:lvl6pPr>
+            <a:lvl7pPr marL="2971800" indent="-228600" algn="l" defTabSz="914400" rtl="0" eaLnBrk="1" latinLnBrk="0" hangingPunct="1">
+              <a:lnSpc>
+                <a:spcPct val="90000"/>
+              </a:lnSpc>
+              <a:spcBef>
+                <a:spcPts val="500"/>
+              </a:spcBef>
+              <a:buFont typeface="Arial" panose="020B0604020202020204" pitchFamily="34" charset="0"/>
+              <a:buChar char="•"/>
+              <a:defRPr sz="1800" kern="1200">
+                <a:solidFill>
+                  <a:schemeClr val="tx1"/>
+                </a:solidFill>
+                <a:latin typeface="+mn-lt"/>
+                <a:ea typeface="+mn-ea"/>
+                <a:cs typeface="+mn-cs"/>
+              </a:defRPr>
+            </a:lvl7pPr>
+            <a:lvl8pPr marL="3429000" indent="-228600" algn="l" defTabSz="914400" rtl="0" eaLnBrk="1" latinLnBrk="0" hangingPunct="1">
+              <a:lnSpc>
+                <a:spcPct val="90000"/>
+              </a:lnSpc>
+              <a:spcBef>
+                <a:spcPts val="500"/>
+              </a:spcBef>
+              <a:buFont typeface="Arial" panose="020B0604020202020204" pitchFamily="34" charset="0"/>
+              <a:buChar char="•"/>
+              <a:defRPr sz="1800" kern="1200">
+                <a:solidFill>
+                  <a:schemeClr val="tx1"/>
+                </a:solidFill>
+                <a:latin typeface="+mn-lt"/>
+                <a:ea typeface="+mn-ea"/>
+                <a:cs typeface="+mn-cs"/>
+              </a:defRPr>
+            </a:lvl8pPr>
+            <a:lvl9pPr marL="3886200" indent="-228600" algn="l" defTabSz="914400" rtl="0" eaLnBrk="1" latinLnBrk="0" hangingPunct="1">
+              <a:lnSpc>
+                <a:spcPct val="90000"/>
+              </a:lnSpc>
+              <a:spcBef>
+                <a:spcPts val="500"/>
+              </a:spcBef>
+              <a:buFont typeface="Arial" panose="020B0604020202020204" pitchFamily="34" charset="0"/>
+              <a:buChar char="•"/>
+              <a:defRPr sz="1800" kern="1200">
+                <a:solidFill>
+                  <a:schemeClr val="tx1"/>
+                </a:solidFill>
+                <a:latin typeface="+mn-lt"/>
+                <a:ea typeface="+mn-ea"/>
+                <a:cs typeface="+mn-cs"/>
+              </a:defRPr>
+            </a:lvl9pPr>
+          </a:lstStyle>
+          <a:p>
+            <a:r>
+              <a:rPr lang="en-US" sz="1100" dirty="0"/>
+              <a:t>Screen capture illustrating all previous unit tests still pass after code changes</a:t>
+            </a:r>
+          </a:p>
+        </p:txBody>
+      </p:sp>
+      <p:pic>
+        <p:nvPicPr>
+          <p:cNvPr id="13" name="Picture 12">
+            <a:extLst>
+              <a:ext uri="{FF2B5EF4-FFF2-40B4-BE49-F238E27FC236}">
+                <a16:creationId xmlns:a16="http://schemas.microsoft.com/office/drawing/2014/main" id="{8969CCB2-4605-3F63-480D-451BC5411A6A}"/>
+              </a:ext>
+            </a:extLst>
+          </p:cNvPr>
+          <p:cNvPicPr>
+            <a:picLocks noChangeAspect="1"/>
+          </p:cNvPicPr>
+          <p:nvPr/>
+        </p:nvPicPr>
+        <p:blipFill>
+          <a:blip r:embed="rId2"/>
+          <a:stretch>
+            <a:fillRect/>
+          </a:stretch>
+        </p:blipFill>
+        <p:spPr>
+          <a:xfrm>
+            <a:off x="128522" y="2630661"/>
+            <a:ext cx="3928738" cy="438020"/>
+          </a:xfrm>
+          <a:prstGeom prst="rect">
+            <a:avLst/>
+          </a:prstGeom>
+        </p:spPr>
+      </p:pic>
+      <p:pic>
+        <p:nvPicPr>
+          <p:cNvPr id="14" name="Picture 13" descr="A computer screen shot of a program code&#10;&#10;AI-generated content may be incorrect.">
+            <a:extLst>
+              <a:ext uri="{FF2B5EF4-FFF2-40B4-BE49-F238E27FC236}">
+                <a16:creationId xmlns:a16="http://schemas.microsoft.com/office/drawing/2014/main" id="{711071B3-17E5-75B2-29D9-C58C0E273681}"/>
+              </a:ext>
+            </a:extLst>
+          </p:cNvPr>
+          <p:cNvPicPr>
+            <a:picLocks noChangeAspect="1"/>
+          </p:cNvPicPr>
+          <p:nvPr/>
+        </p:nvPicPr>
+        <p:blipFill>
+          <a:blip r:embed="rId3"/>
+          <a:stretch>
+            <a:fillRect/>
+          </a:stretch>
+        </p:blipFill>
+        <p:spPr>
+          <a:xfrm>
+            <a:off x="4068349" y="2418958"/>
+            <a:ext cx="4034425" cy="1592111"/>
+          </a:xfrm>
+          <a:prstGeom prst="rect">
+            <a:avLst/>
+          </a:prstGeom>
+        </p:spPr>
+      </p:pic>
+      <p:pic>
+        <p:nvPicPr>
+          <p:cNvPr id="15" name="Picture 14" descr="A screen shot of a video game&#10;&#10;AI-generated content may be incorrect.">
+            <a:extLst>
+              <a:ext uri="{FF2B5EF4-FFF2-40B4-BE49-F238E27FC236}">
+                <a16:creationId xmlns:a16="http://schemas.microsoft.com/office/drawing/2014/main" id="{3C9A44C8-7E17-ED83-D7BF-E9177AEAAE79}"/>
+              </a:ext>
+            </a:extLst>
+          </p:cNvPr>
+          <p:cNvPicPr>
+            <a:picLocks noChangeAspect="1"/>
+          </p:cNvPicPr>
+          <p:nvPr/>
+        </p:nvPicPr>
+        <p:blipFill>
+          <a:blip r:embed="rId4"/>
+          <a:stretch>
+            <a:fillRect/>
+          </a:stretch>
+        </p:blipFill>
+        <p:spPr>
+          <a:xfrm>
+            <a:off x="8164490" y="2664651"/>
+            <a:ext cx="4015377" cy="537054"/>
+          </a:xfrm>
+          <a:prstGeom prst="rect">
+            <a:avLst/>
+          </a:prstGeom>
+        </p:spPr>
+      </p:pic>
+      <p:pic>
+        <p:nvPicPr>
+          <p:cNvPr id="16" name="Picture 15">
+            <a:extLst>
+              <a:ext uri="{FF2B5EF4-FFF2-40B4-BE49-F238E27FC236}">
+                <a16:creationId xmlns:a16="http://schemas.microsoft.com/office/drawing/2014/main" id="{8974D582-B5B7-5C33-56FA-D15D7231FA0D}"/>
+              </a:ext>
+            </a:extLst>
+          </p:cNvPr>
+          <p:cNvPicPr>
+            <a:picLocks noChangeAspect="1"/>
+          </p:cNvPicPr>
+          <p:nvPr/>
+        </p:nvPicPr>
+        <p:blipFill>
+          <a:blip r:embed="rId5"/>
+          <a:stretch>
+            <a:fillRect/>
+          </a:stretch>
+        </p:blipFill>
+        <p:spPr>
+          <a:xfrm>
+            <a:off x="328612" y="5310253"/>
+            <a:ext cx="5438775" cy="266700"/>
+          </a:xfrm>
+          <a:prstGeom prst="rect">
+            <a:avLst/>
+          </a:prstGeom>
+        </p:spPr>
+      </p:pic>
+      <p:pic>
+        <p:nvPicPr>
+          <p:cNvPr id="17" name="Picture 16" descr="A screen shot of a computer program&#10;&#10;AI-generated content may be incorrect.">
+            <a:extLst>
+              <a:ext uri="{FF2B5EF4-FFF2-40B4-BE49-F238E27FC236}">
+                <a16:creationId xmlns:a16="http://schemas.microsoft.com/office/drawing/2014/main" id="{20132945-2D4B-38EE-2CDC-5A5085A6CC1A}"/>
+              </a:ext>
+            </a:extLst>
+          </p:cNvPr>
+          <p:cNvPicPr>
+            <a:picLocks noChangeAspect="1"/>
+          </p:cNvPicPr>
+          <p:nvPr/>
+        </p:nvPicPr>
+        <p:blipFill>
+          <a:blip r:embed="rId6"/>
+          <a:stretch>
+            <a:fillRect/>
+          </a:stretch>
+        </p:blipFill>
+        <p:spPr>
+          <a:xfrm>
+            <a:off x="6587712" y="4446023"/>
+            <a:ext cx="2670002" cy="2350066"/>
+          </a:xfrm>
+          <a:prstGeom prst="rect">
+            <a:avLst/>
+          </a:prstGeom>
+        </p:spPr>
+      </p:pic>
+    </p:spTree>
+    <p:extLst>
+      <p:ext uri="{BB962C8B-B14F-4D97-AF65-F5344CB8AC3E}">
+        <p14:creationId xmlns:p14="http://schemas.microsoft.com/office/powerpoint/2010/main" val="2192452985"/>
       </p:ext>
     </p:extLst>
   </p:cSld>
@@ -14421,23 +23627,6 @@
 </file>
 
 <file path=customXml/item1.xml><?xml version="1.0" encoding="utf-8"?>
-<p:properties xmlns:p="http://schemas.microsoft.com/office/2006/metadata/properties" xmlns:xsi="http://www.w3.org/2001/XMLSchema-instance" xmlns:pc="http://schemas.microsoft.com/office/infopath/2007/PartnerControls">
-  <documentManagement>
-    <_activity xmlns="c6131e55-4a54-4895-b07c-8d9f3ac10b32" xsi:nil="true"/>
-  </documentManagement>
-</p:properties>
-</file>
-
-<file path=customXml/item2.xml><?xml version="1.0" encoding="utf-8"?>
-<?mso-contentType ?>
-<FormTemplates xmlns="http://schemas.microsoft.com/sharepoint/v3/contenttype/forms">
-  <Display>DocumentLibraryForm</Display>
-  <Edit>DocumentLibraryForm</Edit>
-  <New>DocumentLibraryForm</New>
-</FormTemplates>
-</file>
-
-<file path=customXml/item3.xml><?xml version="1.0" encoding="utf-8"?>
 <ct:contentTypeSchema xmlns:ct="http://schemas.microsoft.com/office/2006/metadata/contentType" xmlns:ma="http://schemas.microsoft.com/office/2006/metadata/properties/metaAttributes" ct:_="" ma:_="" ma:contentTypeName="Document" ma:contentTypeID="0x010100190A04FE8FC10844A6F7D9CA5BA60BD8" ma:contentTypeVersion="9" ma:contentTypeDescription="Create a new document." ma:contentTypeScope="" ma:versionID="eaf6df075222235727ce710bd357b586">
   <xsd:schema xmlns:xsd="http://www.w3.org/2001/XMLSchema" xmlns:xs="http://www.w3.org/2001/XMLSchema" xmlns:p="http://schemas.microsoft.com/office/2006/metadata/properties" xmlns:ns3="c6131e55-4a54-4895-b07c-8d9f3ac10b32" targetNamespace="http://schemas.microsoft.com/office/2006/metadata/properties" ma:root="true" ma:fieldsID="e9eb41af6dbb7f22ff708596a319a6bc" ns3:_="">
     <xsd:import namespace="c6131e55-4a54-4895-b07c-8d9f3ac10b32"/>
@@ -14613,31 +23802,24 @@
 </ct:contentTypeSchema>
 </file>
 
-<file path=customXml/itemProps1.xml><?xml version="1.0" encoding="utf-8"?>
-<ds:datastoreItem xmlns:ds="http://schemas.openxmlformats.org/officeDocument/2006/customXml" ds:itemID="{623D0083-F0B6-4A1E-B478-BAA1278739AE}">
-  <ds:schemaRefs>
-    <ds:schemaRef ds:uri="http://schemas.microsoft.com/office/2006/documentManagement/types"/>
-    <ds:schemaRef ds:uri="http://schemas.openxmlformats.org/package/2006/metadata/core-properties"/>
-    <ds:schemaRef ds:uri="http://schemas.microsoft.com/office/2006/metadata/properties"/>
-    <ds:schemaRef ds:uri="http://www.w3.org/XML/1998/namespace"/>
-    <ds:schemaRef ds:uri="http://purl.org/dc/terms/"/>
-    <ds:schemaRef ds:uri="c6131e55-4a54-4895-b07c-8d9f3ac10b32"/>
-    <ds:schemaRef ds:uri="http://purl.org/dc/elements/1.1/"/>
-    <ds:schemaRef ds:uri="http://schemas.microsoft.com/office/infopath/2007/PartnerControls"/>
-    <ds:schemaRef ds:uri="http://purl.org/dc/dcmitype/"/>
-  </ds:schemaRefs>
-</ds:datastoreItem>
+<file path=customXml/item2.xml><?xml version="1.0" encoding="utf-8"?>
+<p:properties xmlns:p="http://schemas.microsoft.com/office/2006/metadata/properties" xmlns:xsi="http://www.w3.org/2001/XMLSchema-instance" xmlns:pc="http://schemas.microsoft.com/office/infopath/2007/PartnerControls">
+  <documentManagement>
+    <_activity xmlns="c6131e55-4a54-4895-b07c-8d9f3ac10b32" xsi:nil="true"/>
+  </documentManagement>
+</p:properties>
 </file>
 
-<file path=customXml/itemProps2.xml><?xml version="1.0" encoding="utf-8"?>
-<ds:datastoreItem xmlns:ds="http://schemas.openxmlformats.org/officeDocument/2006/customXml" ds:itemID="{1EEBBC9E-535F-4EDB-B3EC-58C626FFDDC7}">
-  <ds:schemaRefs>
-    <ds:schemaRef ds:uri="http://schemas.microsoft.com/sharepoint/v3/contenttype/forms"/>
-  </ds:schemaRefs>
-</ds:datastoreItem>
+<file path=customXml/item3.xml><?xml version="1.0" encoding="utf-8"?>
+<?mso-contentType ?>
+<FormTemplates xmlns="http://schemas.microsoft.com/sharepoint/v3/contenttype/forms">
+  <Display>DocumentLibraryForm</Display>
+  <Edit>DocumentLibraryForm</Edit>
+  <New>DocumentLibraryForm</New>
+</FormTemplates>
 </file>
 
-<file path=customXml/itemProps3.xml><?xml version="1.0" encoding="utf-8"?>
+<file path=customXml/itemProps1.xml><?xml version="1.0" encoding="utf-8"?>
 <ds:datastoreItem xmlns:ds="http://schemas.openxmlformats.org/officeDocument/2006/customXml" ds:itemID="{299D53C1-9495-4F8D-B9DC-745B01E9E747}">
   <ds:schemaRefs>
     <ds:schemaRef ds:uri="http://schemas.microsoft.com/office/2006/metadata/contentType"/>
@@ -14653,4 +23835,28 @@
     <ds:schemaRef ds:uri="http://schemas.microsoft.com/internal/obd"/>
   </ds:schemaRefs>
 </ds:datastoreItem>
+</file>
+
+<file path=customXml/itemProps2.xml><?xml version="1.0" encoding="utf-8"?>
+<ds:datastoreItem xmlns:ds="http://schemas.openxmlformats.org/officeDocument/2006/customXml" ds:itemID="{623D0083-F0B6-4A1E-B478-BAA1278739AE}">
+  <ds:schemaRefs>
+    <ds:schemaRef ds:uri="http://schemas.microsoft.com/office/infopath/2007/PartnerControls"/>
+    <ds:schemaRef ds:uri="http://schemas.microsoft.com/office/2006/documentManagement/types"/>
+    <ds:schemaRef ds:uri="http://purl.org/dc/terms/"/>
+    <ds:schemaRef ds:uri="http://purl.org/dc/elements/1.1/"/>
+    <ds:schemaRef ds:uri="http://www.w3.org/XML/1998/namespace"/>
+    <ds:schemaRef ds:uri="http://purl.org/dc/dcmitype/"/>
+    <ds:schemaRef ds:uri="http://schemas.openxmlformats.org/package/2006/metadata/core-properties"/>
+    <ds:schemaRef ds:uri="c6131e55-4a54-4895-b07c-8d9f3ac10b32"/>
+    <ds:schemaRef ds:uri="http://schemas.microsoft.com/office/2006/metadata/properties"/>
+  </ds:schemaRefs>
+</ds:datastoreItem>
+</file>
+
+<file path=customXml/itemProps3.xml><?xml version="1.0" encoding="utf-8"?>
+<ds:datastoreItem xmlns:ds="http://schemas.openxmlformats.org/officeDocument/2006/customXml" ds:itemID="{1EEBBC9E-535F-4EDB-B3EC-58C626FFDDC7}">
+  <ds:schemaRefs>
+    <ds:schemaRef ds:uri="http://schemas.microsoft.com/sharepoint/v3/contenttype/forms"/>
+  </ds:schemaRefs>
+</ds:datastoreItem>
 </file>